--- a/a7/packages/A7 Unit 3 - Exponents and Scientific Notation/Lessons/3.09/A7 3.09 Writing Small Numbers in Scientific Notation - Slides.pptx
+++ b/a7/packages/A7 Unit 3 - Exponents and Scientific Notation/Lessons/3.09/A7 3.09 Writing Small Numbers in Scientific Notation - Slides.pptx
@@ -3129,7 +3129,7 @@
         </p:nvSpPr>
         <p:spPr>
           <a:xfrm>
-            <a:off x="777240" y="1691640"/>
+            <a:off x="777240" y="2148840"/>
             <a:ext cx="10607040" cy="347472"/>
           </a:xfrm>
           <a:prstGeom prst="rect">
@@ -3164,7 +3164,7 @@
         </p:nvSpPr>
         <p:spPr>
           <a:xfrm>
-            <a:off x="777240" y="2048256"/>
+            <a:off x="777240" y="2505456"/>
             <a:ext cx="10607040" cy="1005840"/>
           </a:xfrm>
           <a:prstGeom prst="rect">
@@ -3199,7 +3199,7 @@
         </p:nvCxnSpPr>
         <p:spPr>
           <a:xfrm>
-            <a:off x="3291840" y="3255264"/>
+            <a:off x="3291840" y="3712464"/>
             <a:ext cx="5577840" cy="0"/>
           </a:xfrm>
           <a:prstGeom prst="line">
@@ -3234,7 +3234,7 @@
         </p:nvCxnSpPr>
         <p:spPr>
           <a:xfrm>
-            <a:off x="3291840" y="3337560"/>
+            <a:off x="3291840" y="3794760"/>
             <a:ext cx="5577840" cy="0"/>
           </a:xfrm>
           <a:prstGeom prst="line">
@@ -3269,7 +3269,7 @@
         </p:nvSpPr>
         <p:spPr>
           <a:xfrm>
-            <a:off x="777240" y="3502152"/>
+            <a:off x="777240" y="3959352"/>
             <a:ext cx="10607040" cy="310896"/>
           </a:xfrm>
           <a:prstGeom prst="rect">
@@ -3304,7 +3304,7 @@
         </p:nvSpPr>
         <p:spPr>
           <a:xfrm>
-            <a:off x="777240" y="3840480"/>
+            <a:off x="777240" y="4297680"/>
             <a:ext cx="10607040" cy="731520"/>
           </a:xfrm>
           <a:prstGeom prst="rect">
@@ -3327,129 +3327,13 @@
                 <a:latin typeface="Century Schoolbook"/>
               </a:rPr>
               <a:t>I can write very small numbers in scientific notation, read them back, and find how many times larger or smaller one number is than another.</a:t>
-            </a:r>
-          </a:p>
-        </p:txBody>
-      </p:sp>
-      <p:sp>
-        <p:nvSpPr>
-          <p:cNvPr id="8" name="Rectangle 7"/>
-          <p:cNvSpPr/>
-          <p:nvPr/>
-        </p:nvSpPr>
-        <p:spPr>
-          <a:xfrm>
-            <a:off x="2377440" y="4736592"/>
-            <a:ext cx="7406640" cy="1051560"/>
-          </a:xfrm>
-          <a:prstGeom prst="rect">
-            <a:avLst/>
-          </a:prstGeom>
-          <a:solidFill>
-            <a:srgbClr val="F2F2F0"/>
-          </a:solidFill>
-          <a:ln w="9525">
-            <a:solidFill>
-              <a:srgbClr val="BFBFBF"/>
-            </a:solidFill>
-          </a:ln>
-          <a:effectLst/>
-        </p:spPr>
-        <p:style>
-          <a:lnRef idx="1">
-            <a:schemeClr val="accent1"/>
-          </a:lnRef>
-          <a:fillRef idx="3">
-            <a:schemeClr val="accent1"/>
-          </a:fillRef>
-          <a:effectRef idx="2">
-            <a:schemeClr val="accent1"/>
-          </a:effectRef>
-          <a:fontRef idx="minor">
-            <a:schemeClr val="lt1"/>
-          </a:fontRef>
-        </p:style>
-        <p:txBody>
-          <a:bodyPr rtlCol="0" anchor="ctr"/>
-          <a:lstStyle/>
-          <a:p>
-            <a:pPr algn="ctr"/>
-          </a:p>
-        </p:txBody>
-      </p:sp>
-      <p:sp>
-        <p:nvSpPr>
-          <p:cNvPr id="9" name="TextBox 8"/>
-          <p:cNvSpPr txBox="1"/>
-          <p:nvPr/>
-        </p:nvSpPr>
-        <p:spPr>
-          <a:xfrm>
-            <a:off x="2606040" y="4892040"/>
-            <a:ext cx="6949440" cy="365760"/>
-          </a:xfrm>
-          <a:prstGeom prst="rect">
-            <a:avLst/>
-          </a:prstGeom>
-          <a:noFill/>
-        </p:spPr>
-        <p:txBody>
-          <a:bodyPr wrap="square" lIns="45720" rIns="45720" tIns="18288" bIns="18288" anchor="t">
-            <a:spAutoFit/>
-          </a:bodyPr>
-          <a:lstStyle/>
-          <a:p>
-            <a:pPr algn="ctr"/>
-            <a:r>
-              <a:rPr sz="1700" b="0" i="1">
-                <a:solidFill>
-                  <a:srgbClr val="6B6B6B"/>
-                </a:solidFill>
-                <a:latin typeface="Century Schoolbook"/>
-              </a:rPr>
-              <a:t>Yesterday the exponents on the 10 were positive.</a:t>
-            </a:r>
-          </a:p>
-        </p:txBody>
-      </p:sp>
-      <p:sp>
-        <p:nvSpPr>
-          <p:cNvPr id="10" name="TextBox 9"/>
-          <p:cNvSpPr txBox="1"/>
-          <p:nvPr/>
-        </p:nvSpPr>
-        <p:spPr>
-          <a:xfrm>
-            <a:off x="2606040" y="5276088"/>
-            <a:ext cx="6949440" cy="365760"/>
-          </a:xfrm>
-          <a:prstGeom prst="rect">
-            <a:avLst/>
-          </a:prstGeom>
-          <a:noFill/>
-        </p:spPr>
-        <p:txBody>
-          <a:bodyPr wrap="square" lIns="45720" rIns="45720" tIns="18288" bIns="18288" anchor="t">
-            <a:spAutoFit/>
-          </a:bodyPr>
-          <a:lstStyle/>
-          <a:p>
-            <a:pPr algn="ctr"/>
-            <a:r>
-              <a:rPr sz="1700" b="1" i="0">
-                <a:solidFill>
-                  <a:srgbClr val="1A1A1A"/>
-                </a:solidFill>
-                <a:latin typeface="Century Schoolbook"/>
-              </a:rPr>
-              <a:t>Today they are negative — and the numbers get very small.</a:t>
             </a:r>
           </a:p>
         </p:txBody>
       </p:sp>
       <p:cxnSp>
         <p:nvCxnSpPr>
-          <p:cNvPr id="11" name="Connector 10"/>
+          <p:cNvPr id="8" name="Connector 7"/>
           <p:cNvCxnSpPr/>
           <p:nvPr/>
         </p:nvCxnSpPr>
@@ -3484,7 +3368,7 @@
       </p:cxnSp>
       <p:sp>
         <p:nvSpPr>
-          <p:cNvPr id="12" name="TextBox 11"/>
+          <p:cNvPr id="9" name="TextBox 8"/>
           <p:cNvSpPr txBox="1"/>
           <p:nvPr/>
         </p:nvSpPr>
@@ -3519,7 +3403,7 @@
       </p:sp>
       <p:sp>
         <p:nvSpPr>
-          <p:cNvPr id="13" name="TextBox 12"/>
+          <p:cNvPr id="10" name="TextBox 9"/>
           <p:cNvSpPr txBox="1"/>
           <p:nvPr/>
         </p:nvSpPr>
@@ -3675,44 +3559,9 @@
           </a:fontRef>
         </p:style>
       </p:cxnSp>
-      <p:sp>
-        <p:nvSpPr>
-          <p:cNvPr id="5" name="TextBox 4"/>
-          <p:cNvSpPr txBox="1"/>
-          <p:nvPr/>
-        </p:nvSpPr>
-        <p:spPr>
-          <a:xfrm>
-            <a:off x="777240" y="1261872"/>
-            <a:ext cx="10607040" cy="310896"/>
-          </a:xfrm>
-          <a:prstGeom prst="rect">
-            <a:avLst/>
-          </a:prstGeom>
-          <a:noFill/>
-        </p:spPr>
-        <p:txBody>
-          <a:bodyPr wrap="square" lIns="45720" rIns="45720" tIns="18288" bIns="18288" anchor="t">
-            <a:spAutoFit/>
-          </a:bodyPr>
-          <a:lstStyle/>
-          <a:p>
-            <a:pPr algn="l"/>
-            <a:r>
-              <a:rPr sz="1700" b="0" i="1">
-                <a:solidFill>
-                  <a:srgbClr val="6B6B6B"/>
-                </a:solidFill>
-                <a:latin typeface="Century Schoolbook"/>
-              </a:rPr>
-              <a:t>Answer.</a:t>
-            </a:r>
-          </a:p>
-        </p:txBody>
-      </p:sp>
       <p:cxnSp>
         <p:nvCxnSpPr>
-          <p:cNvPr id="6" name="Connector 5"/>
+          <p:cNvPr id="5" name="Connector 4"/>
           <p:cNvCxnSpPr/>
           <p:nvPr/>
         </p:nvCxnSpPr>
@@ -3747,7 +3596,7 @@
       </p:cxnSp>
       <p:sp>
         <p:nvSpPr>
-          <p:cNvPr id="7" name="TextBox 6"/>
+          <p:cNvPr id="6" name="TextBox 5"/>
           <p:cNvSpPr txBox="1"/>
           <p:nvPr/>
         </p:nvSpPr>
@@ -3782,7 +3631,7 @@
       </p:sp>
       <p:sp>
         <p:nvSpPr>
-          <p:cNvPr id="8" name="TextBox 7"/>
+          <p:cNvPr id="7" name="TextBox 6"/>
           <p:cNvSpPr txBox="1"/>
           <p:nvPr/>
         </p:nvSpPr>
@@ -3817,7 +3666,7 @@
       </p:sp>
       <p:sp>
         <p:nvSpPr>
-          <p:cNvPr id="9" name="TextBox 8"/>
+          <p:cNvPr id="8" name="TextBox 7"/>
           <p:cNvSpPr txBox="1"/>
           <p:nvPr/>
         </p:nvSpPr>
@@ -3852,7 +3701,7 @@
       </p:sp>
       <p:sp>
         <p:nvSpPr>
-          <p:cNvPr id="10" name="TextBox 9"/>
+          <p:cNvPr id="9" name="TextBox 8"/>
           <p:cNvSpPr txBox="1"/>
           <p:nvPr/>
         </p:nvSpPr>
@@ -3887,42 +3736,7 @@
       </p:sp>
       <p:sp>
         <p:nvSpPr>
-          <p:cNvPr id="11" name="TextBox 10"/>
-          <p:cNvSpPr txBox="1"/>
-          <p:nvPr/>
-        </p:nvSpPr>
-        <p:spPr>
-          <a:xfrm>
-            <a:off x="777240" y="3272756"/>
-            <a:ext cx="10607040" cy="429370"/>
-          </a:xfrm>
-          <a:prstGeom prst="rect">
-            <a:avLst/>
-          </a:prstGeom>
-          <a:noFill/>
-        </p:spPr>
-        <p:txBody>
-          <a:bodyPr wrap="square" lIns="45720" rIns="45720" tIns="18288" bIns="18288" anchor="t">
-            <a:spAutoFit/>
-          </a:bodyPr>
-          <a:lstStyle/>
-          <a:p>
-            <a:pPr algn="ctr"/>
-            <a:r>
-              <a:rPr sz="2400" b="0" i="0">
-                <a:solidFill>
-                  <a:srgbClr val="6B6B6B"/>
-                </a:solidFill>
-                <a:latin typeface="Century Schoolbook"/>
-              </a:rPr>
-              <a:t>0.00067 — the 6 is in the ten-thousandths place</a:t>
-            </a:r>
-          </a:p>
-        </p:txBody>
-      </p:sp>
-      <p:sp>
-        <p:nvSpPr>
-          <p:cNvPr id="12" name="TextBox 11"/>
+          <p:cNvPr id="10" name="TextBox 9"/>
           <p:cNvSpPr txBox="1"/>
           <p:nvPr/>
         </p:nvSpPr>
@@ -4087,44 +3901,9 @@
           </a:fontRef>
         </p:style>
       </p:cxnSp>
-      <p:sp>
-        <p:nvSpPr>
-          <p:cNvPr id="5" name="TextBox 4"/>
-          <p:cNvSpPr txBox="1"/>
-          <p:nvPr/>
-        </p:nvSpPr>
-        <p:spPr>
-          <a:xfrm>
-            <a:off x="777240" y="1261872"/>
-            <a:ext cx="10607040" cy="310896"/>
-          </a:xfrm>
-          <a:prstGeom prst="rect">
-            <a:avLst/>
-          </a:prstGeom>
-          <a:noFill/>
-        </p:spPr>
-        <p:txBody>
-          <a:bodyPr wrap="square" lIns="45720" rIns="45720" tIns="18288" bIns="18288" anchor="t">
-            <a:spAutoFit/>
-          </a:bodyPr>
-          <a:lstStyle/>
-          <a:p>
-            <a:pPr algn="l"/>
-            <a:r>
-              <a:rPr sz="1700" b="0" i="1">
-                <a:solidFill>
-                  <a:srgbClr val="6B6B6B"/>
-                </a:solidFill>
-                <a:latin typeface="Century Schoolbook"/>
-              </a:rPr>
-              <a:t>How many times larger?</a:t>
-            </a:r>
-          </a:p>
-        </p:txBody>
-      </p:sp>
       <p:cxnSp>
         <p:nvCxnSpPr>
-          <p:cNvPr id="6" name="Connector 5"/>
+          <p:cNvPr id="5" name="Connector 4"/>
           <p:cNvCxnSpPr/>
           <p:nvPr/>
         </p:nvCxnSpPr>
@@ -4159,7 +3938,7 @@
       </p:cxnSp>
       <p:sp>
         <p:nvSpPr>
-          <p:cNvPr id="7" name="TextBox 6"/>
+          <p:cNvPr id="6" name="TextBox 5"/>
           <p:cNvSpPr txBox="1"/>
           <p:nvPr/>
         </p:nvSpPr>
@@ -4194,7 +3973,7 @@
       </p:sp>
       <p:sp>
         <p:nvSpPr>
-          <p:cNvPr id="8" name="TextBox 7"/>
+          <p:cNvPr id="7" name="TextBox 6"/>
           <p:cNvSpPr txBox="1"/>
           <p:nvPr/>
         </p:nvSpPr>
@@ -4229,7 +4008,7 @@
       </p:sp>
       <p:sp>
         <p:nvSpPr>
-          <p:cNvPr id="9" name="TextBox 8"/>
+          <p:cNvPr id="8" name="TextBox 7"/>
           <p:cNvSpPr txBox="1"/>
           <p:nvPr/>
         </p:nvSpPr>
@@ -4264,7 +4043,7 @@
       </p:sp>
       <p:pic>
         <p:nvPicPr>
-          <p:cNvPr id="10" name="Picture 9" descr="ee4e609945ec82be.png"/>
+          <p:cNvPr id="9" name="Picture 8" descr="ee4e609945ec82be.png"/>
           <p:cNvPicPr>
             <a:picLocks noChangeAspect="1"/>
           </p:cNvPicPr>
@@ -4288,7 +4067,7 @@
       </p:pic>
       <p:sp>
         <p:nvSpPr>
-          <p:cNvPr id="11" name="TextBox 10"/>
+          <p:cNvPr id="10" name="TextBox 9"/>
           <p:cNvSpPr txBox="1"/>
           <p:nvPr/>
         </p:nvSpPr>
@@ -4323,7 +4102,7 @@
       </p:sp>
       <p:pic>
         <p:nvPicPr>
-          <p:cNvPr id="12" name="Picture 11" descr="dee1eef8fb06ad76.png"/>
+          <p:cNvPr id="11" name="Picture 10" descr="dee1eef8fb06ad76.png"/>
           <p:cNvPicPr>
             <a:picLocks noChangeAspect="1"/>
           </p:cNvPicPr>
@@ -4347,7 +4126,7 @@
       </p:pic>
       <p:sp>
         <p:nvSpPr>
-          <p:cNvPr id="13" name="TextBox 12"/>
+          <p:cNvPr id="12" name="TextBox 11"/>
           <p:cNvSpPr txBox="1"/>
           <p:nvPr/>
         </p:nvSpPr>
@@ -4503,44 +4282,9 @@
           </a:fontRef>
         </p:style>
       </p:cxnSp>
-      <p:sp>
-        <p:nvSpPr>
-          <p:cNvPr id="5" name="TextBox 4"/>
-          <p:cNvSpPr txBox="1"/>
-          <p:nvPr/>
-        </p:nvSpPr>
-        <p:spPr>
-          <a:xfrm>
-            <a:off x="777240" y="1261872"/>
-            <a:ext cx="10607040" cy="310896"/>
-          </a:xfrm>
-          <a:prstGeom prst="rect">
-            <a:avLst/>
-          </a:prstGeom>
-          <a:noFill/>
-        </p:spPr>
-        <p:txBody>
-          <a:bodyPr wrap="square" lIns="45720" rIns="45720" tIns="18288" bIns="18288" anchor="t">
-            <a:spAutoFit/>
-          </a:bodyPr>
-          <a:lstStyle/>
-          <a:p>
-            <a:pPr algn="l"/>
-            <a:r>
-              <a:rPr sz="1700" b="0" i="1">
-                <a:solidFill>
-                  <a:srgbClr val="6B6B6B"/>
-                </a:solidFill>
-                <a:latin typeface="Century Schoolbook"/>
-              </a:rPr>
-              <a:t>Worked.</a:t>
-            </a:r>
-          </a:p>
-        </p:txBody>
-      </p:sp>
       <p:cxnSp>
         <p:nvCxnSpPr>
-          <p:cNvPr id="6" name="Connector 5"/>
+          <p:cNvPr id="5" name="Connector 4"/>
           <p:cNvCxnSpPr/>
           <p:nvPr/>
         </p:nvCxnSpPr>
@@ -4575,7 +4319,7 @@
       </p:cxnSp>
       <p:sp>
         <p:nvSpPr>
-          <p:cNvPr id="7" name="TextBox 6"/>
+          <p:cNvPr id="6" name="TextBox 5"/>
           <p:cNvSpPr txBox="1"/>
           <p:nvPr/>
         </p:nvSpPr>
@@ -4610,7 +4354,7 @@
       </p:sp>
       <p:sp>
         <p:nvSpPr>
-          <p:cNvPr id="8" name="TextBox 7"/>
+          <p:cNvPr id="7" name="TextBox 6"/>
           <p:cNvSpPr txBox="1"/>
           <p:nvPr/>
         </p:nvSpPr>
@@ -4645,7 +4389,7 @@
       </p:sp>
       <p:pic>
         <p:nvPicPr>
-          <p:cNvPr id="9" name="Picture 8" descr="59c7818cbaac33bd.png"/>
+          <p:cNvPr id="8" name="Picture 7" descr="59c7818cbaac33bd.png"/>
           <p:cNvPicPr>
             <a:picLocks noChangeAspect="1"/>
           </p:cNvPicPr>
@@ -4667,44 +4411,9 @@
           </a:prstGeom>
         </p:spPr>
       </p:pic>
-      <p:sp>
-        <p:nvSpPr>
-          <p:cNvPr id="10" name="TextBox 9"/>
-          <p:cNvSpPr txBox="1"/>
-          <p:nvPr/>
-        </p:nvSpPr>
-        <p:spPr>
-          <a:xfrm>
-            <a:off x="3438144" y="2034540"/>
-            <a:ext cx="6400800" cy="502920"/>
-          </a:xfrm>
-          <a:prstGeom prst="rect">
-            <a:avLst/>
-          </a:prstGeom>
-          <a:noFill/>
-        </p:spPr>
-        <p:txBody>
-          <a:bodyPr wrap="square" lIns="45720" rIns="45720" tIns="18288" bIns="18288" anchor="ctr">
-            <a:spAutoFit/>
-          </a:bodyPr>
-          <a:lstStyle/>
-          <a:p>
-            <a:pPr algn="l"/>
-            <a:r>
-              <a:rPr sz="2100" b="0" i="1">
-                <a:solidFill>
-                  <a:srgbClr val="6B6B6B"/>
-                </a:solidFill>
-                <a:latin typeface="Century Schoolbook"/>
-              </a:rPr>
-              <a:t>coefficients</a:t>
-            </a:r>
-          </a:p>
-        </p:txBody>
-      </p:sp>
       <p:pic>
         <p:nvPicPr>
-          <p:cNvPr id="11" name="Picture 10" descr="6b497f46afc4e7f7.png"/>
+          <p:cNvPr id="9" name="Picture 8" descr="6b497f46afc4e7f7.png"/>
           <p:cNvPicPr>
             <a:picLocks noChangeAspect="1"/>
           </p:cNvPicPr>
@@ -4726,44 +4435,9 @@
           </a:prstGeom>
         </p:spPr>
       </p:pic>
-      <p:sp>
-        <p:nvSpPr>
-          <p:cNvPr id="12" name="TextBox 11"/>
-          <p:cNvSpPr txBox="1"/>
-          <p:nvPr/>
-        </p:nvSpPr>
-        <p:spPr>
-          <a:xfrm>
-            <a:off x="6007608" y="3057144"/>
-            <a:ext cx="5376671" cy="502920"/>
-          </a:xfrm>
-          <a:prstGeom prst="rect">
-            <a:avLst/>
-          </a:prstGeom>
-          <a:noFill/>
-        </p:spPr>
-        <p:txBody>
-          <a:bodyPr wrap="square" lIns="45720" rIns="45720" tIns="18288" bIns="18288" anchor="ctr">
-            <a:spAutoFit/>
-          </a:bodyPr>
-          <a:lstStyle/>
-          <a:p>
-            <a:pPr algn="l"/>
-            <a:r>
-              <a:rPr sz="2100" b="0" i="1">
-                <a:solidFill>
-                  <a:srgbClr val="6B6B6B"/>
-                </a:solidFill>
-                <a:latin typeface="Century Schoolbook"/>
-              </a:rPr>
-              <a:t>powers of 10: −4 − (−7) = 3</a:t>
-            </a:r>
-          </a:p>
-        </p:txBody>
-      </p:sp>
       <p:pic>
         <p:nvPicPr>
-          <p:cNvPr id="13" name="Picture 12" descr="60571d6036a338ff.png"/>
+          <p:cNvPr id="10" name="Picture 9" descr="60571d6036a338ff.png"/>
           <p:cNvPicPr>
             <a:picLocks noChangeAspect="1"/>
           </p:cNvPicPr>
@@ -4787,42 +4461,7 @@
       </p:pic>
       <p:sp>
         <p:nvSpPr>
-          <p:cNvPr id="14" name="TextBox 13"/>
-          <p:cNvSpPr txBox="1"/>
-          <p:nvPr/>
-        </p:nvSpPr>
-        <p:spPr>
-          <a:xfrm>
-            <a:off x="4736592" y="3936492"/>
-            <a:ext cx="6400800" cy="502920"/>
-          </a:xfrm>
-          <a:prstGeom prst="rect">
-            <a:avLst/>
-          </a:prstGeom>
-          <a:noFill/>
-        </p:spPr>
-        <p:txBody>
-          <a:bodyPr wrap="square" lIns="45720" rIns="45720" tIns="18288" bIns="18288" anchor="ctr">
-            <a:spAutoFit/>
-          </a:bodyPr>
-          <a:lstStyle/>
-          <a:p>
-            <a:pPr algn="l"/>
-            <a:r>
-              <a:rPr sz="2100" b="0" i="1">
-                <a:solidFill>
-                  <a:srgbClr val="6B6B6B"/>
-                </a:solidFill>
-                <a:latin typeface="Century Schoolbook"/>
-              </a:rPr>
-              <a:t>multiply the two results</a:t>
-            </a:r>
-          </a:p>
-        </p:txBody>
-      </p:sp>
-      <p:sp>
-        <p:nvSpPr>
-          <p:cNvPr id="15" name="TextBox 14"/>
+          <p:cNvPr id="11" name="TextBox 10"/>
           <p:cNvSpPr txBox="1"/>
           <p:nvPr/>
         </p:nvSpPr>
@@ -4978,44 +4617,9 @@
           </a:fontRef>
         </p:style>
       </p:cxnSp>
-      <p:sp>
-        <p:nvSpPr>
-          <p:cNvPr id="5" name="TextBox 4"/>
-          <p:cNvSpPr txBox="1"/>
-          <p:nvPr/>
-        </p:nvSpPr>
-        <p:spPr>
-          <a:xfrm>
-            <a:off x="777240" y="1261872"/>
-            <a:ext cx="10607040" cy="310896"/>
-          </a:xfrm>
-          <a:prstGeom prst="rect">
-            <a:avLst/>
-          </a:prstGeom>
-          <a:noFill/>
-        </p:spPr>
-        <p:txBody>
-          <a:bodyPr wrap="square" lIns="45720" rIns="45720" tIns="18288" bIns="18288" anchor="t">
-            <a:spAutoFit/>
-          </a:bodyPr>
-          <a:lstStyle/>
-          <a:p>
-            <a:pPr algn="l"/>
-            <a:r>
-              <a:rPr sz="1700" b="0" i="1">
-                <a:solidFill>
-                  <a:srgbClr val="6B6B6B"/>
-                </a:solidFill>
-                <a:latin typeface="Century Schoolbook"/>
-              </a:rPr>
-              <a:t>Same steps, your numbers. Boards up when done.</a:t>
-            </a:r>
-          </a:p>
-        </p:txBody>
-      </p:sp>
       <p:cxnSp>
         <p:nvCxnSpPr>
-          <p:cNvPr id="6" name="Connector 5"/>
+          <p:cNvPr id="5" name="Connector 4"/>
           <p:cNvCxnSpPr/>
           <p:nvPr/>
         </p:nvCxnSpPr>
@@ -5050,7 +4654,7 @@
       </p:cxnSp>
       <p:sp>
         <p:nvSpPr>
-          <p:cNvPr id="7" name="TextBox 6"/>
+          <p:cNvPr id="6" name="TextBox 5"/>
           <p:cNvSpPr txBox="1"/>
           <p:nvPr/>
         </p:nvSpPr>
@@ -5085,7 +4689,7 @@
       </p:sp>
       <p:sp>
         <p:nvSpPr>
-          <p:cNvPr id="8" name="TextBox 7"/>
+          <p:cNvPr id="7" name="TextBox 6"/>
           <p:cNvSpPr txBox="1"/>
           <p:nvPr/>
         </p:nvSpPr>
@@ -5120,7 +4724,7 @@
       </p:sp>
       <p:sp>
         <p:nvSpPr>
-          <p:cNvPr id="9" name="TextBox 8"/>
+          <p:cNvPr id="8" name="TextBox 7"/>
           <p:cNvSpPr txBox="1"/>
           <p:nvPr/>
         </p:nvSpPr>
@@ -5155,7 +4759,7 @@
       </p:sp>
       <p:pic>
         <p:nvPicPr>
-          <p:cNvPr id="10" name="Picture 9" descr="496ffc9a205d258d.png"/>
+          <p:cNvPr id="9" name="Picture 8" descr="496ffc9a205d258d.png"/>
           <p:cNvPicPr>
             <a:picLocks noChangeAspect="1"/>
           </p:cNvPicPr>
@@ -5179,7 +4783,7 @@
       </p:pic>
       <p:sp>
         <p:nvSpPr>
-          <p:cNvPr id="11" name="TextBox 10"/>
+          <p:cNvPr id="10" name="TextBox 9"/>
           <p:cNvSpPr txBox="1"/>
           <p:nvPr/>
         </p:nvSpPr>
@@ -5214,7 +4818,7 @@
       </p:sp>
       <p:pic>
         <p:nvPicPr>
-          <p:cNvPr id="12" name="Picture 11" descr="a82e6bba98260e6a.png"/>
+          <p:cNvPr id="11" name="Picture 10" descr="a82e6bba98260e6a.png"/>
           <p:cNvPicPr>
             <a:picLocks noChangeAspect="1"/>
           </p:cNvPicPr>
@@ -5238,7 +4842,7 @@
       </p:pic>
       <p:sp>
         <p:nvSpPr>
-          <p:cNvPr id="13" name="TextBox 12"/>
+          <p:cNvPr id="12" name="TextBox 11"/>
           <p:cNvSpPr txBox="1"/>
           <p:nvPr/>
         </p:nvSpPr>
@@ -5394,44 +4998,9 @@
           </a:fontRef>
         </p:style>
       </p:cxnSp>
-      <p:sp>
-        <p:nvSpPr>
-          <p:cNvPr id="5" name="TextBox 4"/>
-          <p:cNvSpPr txBox="1"/>
-          <p:nvPr/>
-        </p:nvSpPr>
-        <p:spPr>
-          <a:xfrm>
-            <a:off x="777240" y="1261872"/>
-            <a:ext cx="10607040" cy="310896"/>
-          </a:xfrm>
-          <a:prstGeom prst="rect">
-            <a:avLst/>
-          </a:prstGeom>
-          <a:noFill/>
-        </p:spPr>
-        <p:txBody>
-          <a:bodyPr wrap="square" lIns="45720" rIns="45720" tIns="18288" bIns="18288" anchor="t">
-            <a:spAutoFit/>
-          </a:bodyPr>
-          <a:lstStyle/>
-          <a:p>
-            <a:pPr algn="l"/>
-            <a:r>
-              <a:rPr sz="1700" b="0" i="1">
-                <a:solidFill>
-                  <a:srgbClr val="6B6B6B"/>
-                </a:solidFill>
-                <a:latin typeface="Century Schoolbook"/>
-              </a:rPr>
-              <a:t>Answer.</a:t>
-            </a:r>
-          </a:p>
-        </p:txBody>
-      </p:sp>
       <p:cxnSp>
         <p:nvCxnSpPr>
-          <p:cNvPr id="6" name="Connector 5"/>
+          <p:cNvPr id="5" name="Connector 4"/>
           <p:cNvCxnSpPr/>
           <p:nvPr/>
         </p:nvCxnSpPr>
@@ -5466,7 +5035,7 @@
       </p:cxnSp>
       <p:sp>
         <p:nvSpPr>
-          <p:cNvPr id="7" name="TextBox 6"/>
+          <p:cNvPr id="6" name="TextBox 5"/>
           <p:cNvSpPr txBox="1"/>
           <p:nvPr/>
         </p:nvSpPr>
@@ -5501,7 +5070,7 @@
       </p:sp>
       <p:sp>
         <p:nvSpPr>
-          <p:cNvPr id="8" name="TextBox 7"/>
+          <p:cNvPr id="7" name="TextBox 6"/>
           <p:cNvSpPr txBox="1"/>
           <p:nvPr/>
         </p:nvSpPr>
@@ -5536,7 +5105,7 @@
       </p:sp>
       <p:sp>
         <p:nvSpPr>
-          <p:cNvPr id="9" name="TextBox 8"/>
+          <p:cNvPr id="8" name="TextBox 7"/>
           <p:cNvSpPr txBox="1"/>
           <p:nvPr/>
         </p:nvSpPr>
@@ -5571,7 +5140,7 @@
       </p:sp>
       <p:pic>
         <p:nvPicPr>
-          <p:cNvPr id="10" name="Picture 9" descr="2496b86a47380327.png"/>
+          <p:cNvPr id="9" name="Picture 8" descr="2496b86a47380327.png"/>
           <p:cNvPicPr>
             <a:picLocks noChangeAspect="1"/>
           </p:cNvPicPr>
@@ -5595,7 +5164,7 @@
       </p:pic>
       <p:sp>
         <p:nvSpPr>
-          <p:cNvPr id="11" name="TextBox 10"/>
+          <p:cNvPr id="10" name="TextBox 9"/>
           <p:cNvSpPr txBox="1"/>
           <p:nvPr/>
         </p:nvSpPr>
@@ -5630,7 +5199,7 @@
       </p:sp>
       <p:pic>
         <p:nvPicPr>
-          <p:cNvPr id="12" name="Picture 11" descr="8ceadc8177621752.png"/>
+          <p:cNvPr id="11" name="Picture 10" descr="8ceadc8177621752.png"/>
           <p:cNvPicPr>
             <a:picLocks noChangeAspect="1"/>
           </p:cNvPicPr>
@@ -5654,7 +5223,7 @@
       </p:pic>
       <p:sp>
         <p:nvSpPr>
-          <p:cNvPr id="13" name="TextBox 12"/>
+          <p:cNvPr id="12" name="TextBox 11"/>
           <p:cNvSpPr txBox="1"/>
           <p:nvPr/>
         </p:nvSpPr>
@@ -5689,51 +5258,7 @@
       </p:sp>
       <p:sp>
         <p:nvSpPr>
-          <p:cNvPr id="14" name="TextBox 13"/>
-          <p:cNvSpPr txBox="1"/>
-          <p:nvPr/>
-        </p:nvSpPr>
-        <p:spPr>
-          <a:xfrm>
-            <a:off x="777240" y="2950464"/>
-            <a:ext cx="10607040" cy="429370"/>
-          </a:xfrm>
-          <a:prstGeom prst="rect">
-            <a:avLst/>
-          </a:prstGeom>
-          <a:noFill/>
-        </p:spPr>
-        <p:txBody>
-          <a:bodyPr wrap="square" lIns="45720" rIns="45720" tIns="18288" bIns="18288" anchor="t">
-            <a:spAutoFit/>
-          </a:bodyPr>
-          <a:lstStyle/>
-          <a:p>
-            <a:pPr algn="ctr"/>
-            <a:r>
-              <a:rPr sz="2400" b="0" i="0">
-                <a:solidFill>
-                  <a:srgbClr val="6B6B6B"/>
-                </a:solidFill>
-                <a:latin typeface="Century Schoolbook"/>
-              </a:rPr>
-              <a:t>2 × 10</a:t>
-            </a:r>
-            <a:r>
-              <a:rPr sz="2400" b="0" i="0" baseline="30000">
-                <a:solidFill>
-                  <a:srgbClr val="6B6B6B"/>
-                </a:solidFill>
-                <a:latin typeface="Century Schoolbook"/>
-              </a:rPr>
-              <a:t>5</a:t>
-            </a:r>
-          </a:p>
-        </p:txBody>
-      </p:sp>
-      <p:sp>
-        <p:nvSpPr>
-          <p:cNvPr id="15" name="TextBox 14"/>
+          <p:cNvPr id="13" name="TextBox 12"/>
           <p:cNvSpPr txBox="1"/>
           <p:nvPr/>
         </p:nvSpPr>
@@ -5889,44 +5414,9 @@
           </a:fontRef>
         </p:style>
       </p:cxnSp>
-      <p:sp>
-        <p:nvSpPr>
-          <p:cNvPr id="5" name="TextBox 4"/>
-          <p:cNvSpPr txBox="1"/>
-          <p:nvPr/>
-        </p:nvSpPr>
-        <p:spPr>
-          <a:xfrm>
-            <a:off x="777240" y="1261872"/>
-            <a:ext cx="10607040" cy="310896"/>
-          </a:xfrm>
-          <a:prstGeom prst="rect">
-            <a:avLst/>
-          </a:prstGeom>
-          <a:noFill/>
-        </p:spPr>
-        <p:txBody>
-          <a:bodyPr wrap="square" lIns="45720" rIns="45720" tIns="18288" bIns="18288" anchor="t">
-            <a:spAutoFit/>
-          </a:bodyPr>
-          <a:lstStyle/>
-          <a:p>
-            <a:pPr algn="l"/>
-            <a:r>
-              <a:rPr sz="1700" b="0" i="1">
-                <a:solidFill>
-                  <a:srgbClr val="6B6B6B"/>
-                </a:solidFill>
-                <a:latin typeface="Century Schoolbook"/>
-              </a:rPr>
-              <a:t>Boards up on three.</a:t>
-            </a:r>
-          </a:p>
-        </p:txBody>
-      </p:sp>
       <p:cxnSp>
         <p:nvCxnSpPr>
-          <p:cNvPr id="6" name="Connector 5"/>
+          <p:cNvPr id="5" name="Connector 4"/>
           <p:cNvCxnSpPr/>
           <p:nvPr/>
         </p:nvCxnSpPr>
@@ -5961,7 +5451,7 @@
       </p:cxnSp>
       <p:sp>
         <p:nvSpPr>
-          <p:cNvPr id="7" name="TextBox 6"/>
+          <p:cNvPr id="6" name="TextBox 5"/>
           <p:cNvSpPr txBox="1"/>
           <p:nvPr/>
         </p:nvSpPr>
@@ -5996,7 +5486,7 @@
       </p:sp>
       <p:sp>
         <p:nvSpPr>
-          <p:cNvPr id="8" name="TextBox 7"/>
+          <p:cNvPr id="7" name="TextBox 6"/>
           <p:cNvSpPr txBox="1"/>
           <p:nvPr/>
         </p:nvSpPr>
@@ -6031,7 +5521,7 @@
       </p:sp>
       <p:pic>
         <p:nvPicPr>
-          <p:cNvPr id="9" name="Picture 8" descr="1f36aa11b2dfcf42.png"/>
+          <p:cNvPr id="8" name="Picture 7" descr="1f36aa11b2dfcf42.png"/>
           <p:cNvPicPr>
             <a:picLocks noChangeAspect="1"/>
           </p:cNvPicPr>
@@ -6055,7 +5545,7 @@
       </p:pic>
       <p:sp>
         <p:nvSpPr>
-          <p:cNvPr id="10" name="TextBox 9"/>
+          <p:cNvPr id="9" name="TextBox 8"/>
           <p:cNvSpPr txBox="1"/>
           <p:nvPr/>
         </p:nvSpPr>
@@ -6084,41 +5574,6 @@
                 <a:latin typeface="Century Schoolbook"/>
               </a:rPr>
               <a:t>Answer it.</a:t>
-            </a:r>
-          </a:p>
-        </p:txBody>
-      </p:sp>
-      <p:sp>
-        <p:nvSpPr>
-          <p:cNvPr id="11" name="TextBox 10"/>
-          <p:cNvSpPr txBox="1"/>
-          <p:nvPr/>
-        </p:nvSpPr>
-        <p:spPr>
-          <a:xfrm>
-            <a:off x="777240" y="4828032"/>
-            <a:ext cx="10607040" cy="365760"/>
-          </a:xfrm>
-          <a:prstGeom prst="rect">
-            <a:avLst/>
-          </a:prstGeom>
-          <a:noFill/>
-        </p:spPr>
-        <p:txBody>
-          <a:bodyPr wrap="square" lIns="45720" rIns="45720" tIns="18288" bIns="18288" anchor="t">
-            <a:spAutoFit/>
-          </a:bodyPr>
-          <a:lstStyle/>
-          <a:p>
-            <a:pPr algn="ctr"/>
-            <a:r>
-              <a:rPr sz="1900" b="0" i="1">
-                <a:solidFill>
-                  <a:srgbClr val="6B6B6B"/>
-                </a:solidFill>
-                <a:latin typeface="Century Schoolbook"/>
-              </a:rPr>
-              <a:t>Write it as a decimal.</a:t>
             </a:r>
           </a:p>
         </p:txBody>
@@ -6246,44 +5701,9 @@
           </a:fontRef>
         </p:style>
       </p:cxnSp>
-      <p:sp>
-        <p:nvSpPr>
-          <p:cNvPr id="5" name="TextBox 4"/>
-          <p:cNvSpPr txBox="1"/>
-          <p:nvPr/>
-        </p:nvSpPr>
-        <p:spPr>
-          <a:xfrm>
-            <a:off x="777240" y="1261872"/>
-            <a:ext cx="10607040" cy="310896"/>
-          </a:xfrm>
-          <a:prstGeom prst="rect">
-            <a:avLst/>
-          </a:prstGeom>
-          <a:noFill/>
-        </p:spPr>
-        <p:txBody>
-          <a:bodyPr wrap="square" lIns="45720" rIns="45720" tIns="18288" bIns="18288" anchor="t">
-            <a:spAutoFit/>
-          </a:bodyPr>
-          <a:lstStyle/>
-          <a:p>
-            <a:pPr algn="l"/>
-            <a:r>
-              <a:rPr sz="1700" b="0" i="1">
-                <a:solidFill>
-                  <a:srgbClr val="6B6B6B"/>
-                </a:solidFill>
-                <a:latin typeface="Century Schoolbook"/>
-              </a:rPr>
-              <a:t>Answer.</a:t>
-            </a:r>
-          </a:p>
-        </p:txBody>
-      </p:sp>
       <p:cxnSp>
         <p:nvCxnSpPr>
-          <p:cNvPr id="6" name="Connector 5"/>
+          <p:cNvPr id="5" name="Connector 4"/>
           <p:cNvCxnSpPr/>
           <p:nvPr/>
         </p:nvCxnSpPr>
@@ -6318,7 +5738,7 @@
       </p:cxnSp>
       <p:sp>
         <p:nvSpPr>
-          <p:cNvPr id="7" name="TextBox 6"/>
+          <p:cNvPr id="6" name="TextBox 5"/>
           <p:cNvSpPr txBox="1"/>
           <p:nvPr/>
         </p:nvSpPr>
@@ -6353,7 +5773,7 @@
       </p:sp>
       <p:sp>
         <p:nvSpPr>
-          <p:cNvPr id="8" name="TextBox 7"/>
+          <p:cNvPr id="7" name="TextBox 6"/>
           <p:cNvSpPr txBox="1"/>
           <p:nvPr/>
         </p:nvSpPr>
@@ -6388,7 +5808,7 @@
       </p:sp>
       <p:pic>
         <p:nvPicPr>
-          <p:cNvPr id="9" name="Picture 8" descr="043ff5c9055650f5.png"/>
+          <p:cNvPr id="8" name="Picture 7" descr="043ff5c9055650f5.png"/>
           <p:cNvPicPr>
             <a:picLocks noChangeAspect="1"/>
           </p:cNvPicPr>
@@ -6412,42 +5832,7 @@
       </p:pic>
       <p:sp>
         <p:nvSpPr>
-          <p:cNvPr id="10" name="TextBox 9"/>
-          <p:cNvSpPr txBox="1"/>
-          <p:nvPr/>
-        </p:nvSpPr>
-        <p:spPr>
-          <a:xfrm>
-            <a:off x="1828800" y="2804160"/>
-            <a:ext cx="8503920" cy="548640"/>
-          </a:xfrm>
-          <a:prstGeom prst="rect">
-            <a:avLst/>
-          </a:prstGeom>
-          <a:noFill/>
-        </p:spPr>
-        <p:txBody>
-          <a:bodyPr wrap="square" lIns="45720" rIns="45720" tIns="18288" bIns="18288" anchor="t">
-            <a:spAutoFit/>
-          </a:bodyPr>
-          <a:lstStyle/>
-          <a:p>
-            <a:pPr algn="ctr"/>
-            <a:r>
-              <a:rPr sz="2400" b="0" i="0">
-                <a:solidFill>
-                  <a:srgbClr val="6B6B6B"/>
-                </a:solidFill>
-                <a:latin typeface="Century Schoolbook"/>
-              </a:rPr>
-              <a:t>a 1 in the fourth decimal place</a:t>
-            </a:r>
-          </a:p>
-        </p:txBody>
-      </p:sp>
-      <p:sp>
-        <p:nvSpPr>
-          <p:cNvPr id="11" name="TextBox 10"/>
+          <p:cNvPr id="9" name="TextBox 8"/>
           <p:cNvSpPr txBox="1"/>
           <p:nvPr/>
         </p:nvSpPr>
@@ -6603,44 +5988,9 @@
           </a:fontRef>
         </p:style>
       </p:cxnSp>
-      <p:sp>
-        <p:nvSpPr>
-          <p:cNvPr id="5" name="TextBox 4"/>
-          <p:cNvSpPr txBox="1"/>
-          <p:nvPr/>
-        </p:nvSpPr>
-        <p:spPr>
-          <a:xfrm>
-            <a:off x="777240" y="1261872"/>
-            <a:ext cx="10607040" cy="310896"/>
-          </a:xfrm>
-          <a:prstGeom prst="rect">
-            <a:avLst/>
-          </a:prstGeom>
-          <a:noFill/>
-        </p:spPr>
-        <p:txBody>
-          <a:bodyPr wrap="square" lIns="45720" rIns="45720" tIns="18288" bIns="18288" anchor="t">
-            <a:spAutoFit/>
-          </a:bodyPr>
-          <a:lstStyle/>
-          <a:p>
-            <a:pPr algn="l"/>
-            <a:r>
-              <a:rPr sz="1700" b="0" i="1">
-                <a:solidFill>
-                  <a:srgbClr val="6B6B6B"/>
-                </a:solidFill>
-                <a:latin typeface="Century Schoolbook"/>
-              </a:rPr>
-              <a:t>Boards up on three.</a:t>
-            </a:r>
-          </a:p>
-        </p:txBody>
-      </p:sp>
       <p:cxnSp>
         <p:nvCxnSpPr>
-          <p:cNvPr id="6" name="Connector 5"/>
+          <p:cNvPr id="5" name="Connector 4"/>
           <p:cNvCxnSpPr/>
           <p:nvPr/>
         </p:nvCxnSpPr>
@@ -6675,7 +6025,7 @@
       </p:cxnSp>
       <p:sp>
         <p:nvSpPr>
-          <p:cNvPr id="7" name="TextBox 6"/>
+          <p:cNvPr id="6" name="TextBox 5"/>
           <p:cNvSpPr txBox="1"/>
           <p:nvPr/>
         </p:nvSpPr>
@@ -6710,7 +6060,7 @@
       </p:sp>
       <p:sp>
         <p:nvSpPr>
-          <p:cNvPr id="8" name="TextBox 7"/>
+          <p:cNvPr id="7" name="TextBox 6"/>
           <p:cNvSpPr txBox="1"/>
           <p:nvPr/>
         </p:nvSpPr>
@@ -6745,7 +6095,7 @@
       </p:sp>
       <p:sp>
         <p:nvSpPr>
-          <p:cNvPr id="9" name="TextBox 8"/>
+          <p:cNvPr id="8" name="TextBox 7"/>
           <p:cNvSpPr txBox="1"/>
           <p:nvPr/>
         </p:nvSpPr>
@@ -6780,7 +6130,7 @@
       </p:sp>
       <p:sp>
         <p:nvSpPr>
-          <p:cNvPr id="10" name="TextBox 9"/>
+          <p:cNvPr id="9" name="TextBox 8"/>
           <p:cNvSpPr txBox="1"/>
           <p:nvPr/>
         </p:nvSpPr>
@@ -6809,41 +6159,6 @@
                 <a:latin typeface="Century Schoolbook"/>
               </a:rPr>
               <a:t>Answer it.</a:t>
-            </a:r>
-          </a:p>
-        </p:txBody>
-      </p:sp>
-      <p:sp>
-        <p:nvSpPr>
-          <p:cNvPr id="11" name="TextBox 10"/>
-          <p:cNvSpPr txBox="1"/>
-          <p:nvPr/>
-        </p:nvSpPr>
-        <p:spPr>
-          <a:xfrm>
-            <a:off x="777240" y="4828032"/>
-            <a:ext cx="10607040" cy="365760"/>
-          </a:xfrm>
-          <a:prstGeom prst="rect">
-            <a:avLst/>
-          </a:prstGeom>
-          <a:noFill/>
-        </p:spPr>
-        <p:txBody>
-          <a:bodyPr wrap="square" lIns="45720" rIns="45720" tIns="18288" bIns="18288" anchor="t">
-            <a:spAutoFit/>
-          </a:bodyPr>
-          <a:lstStyle/>
-          <a:p>
-            <a:pPr algn="ctr"/>
-            <a:r>
-              <a:rPr sz="1900" b="0" i="1">
-                <a:solidFill>
-                  <a:srgbClr val="6B6B6B"/>
-                </a:solidFill>
-                <a:latin typeface="Century Schoolbook"/>
-              </a:rPr>
-              <a:t>Which place is the 3 in?</a:t>
             </a:r>
           </a:p>
         </p:txBody>
@@ -6971,44 +6286,9 @@
           </a:fontRef>
         </p:style>
       </p:cxnSp>
-      <p:sp>
-        <p:nvSpPr>
-          <p:cNvPr id="5" name="TextBox 4"/>
-          <p:cNvSpPr txBox="1"/>
-          <p:nvPr/>
-        </p:nvSpPr>
-        <p:spPr>
-          <a:xfrm>
-            <a:off x="777240" y="1261872"/>
-            <a:ext cx="10607040" cy="310896"/>
-          </a:xfrm>
-          <a:prstGeom prst="rect">
-            <a:avLst/>
-          </a:prstGeom>
-          <a:noFill/>
-        </p:spPr>
-        <p:txBody>
-          <a:bodyPr wrap="square" lIns="45720" rIns="45720" tIns="18288" bIns="18288" anchor="t">
-            <a:spAutoFit/>
-          </a:bodyPr>
-          <a:lstStyle/>
-          <a:p>
-            <a:pPr algn="l"/>
-            <a:r>
-              <a:rPr sz="1700" b="0" i="1">
-                <a:solidFill>
-                  <a:srgbClr val="6B6B6B"/>
-                </a:solidFill>
-                <a:latin typeface="Century Schoolbook"/>
-              </a:rPr>
-              <a:t>Answer.</a:t>
-            </a:r>
-          </a:p>
-        </p:txBody>
-      </p:sp>
       <p:cxnSp>
         <p:nvCxnSpPr>
-          <p:cNvPr id="6" name="Connector 5"/>
+          <p:cNvPr id="5" name="Connector 4"/>
           <p:cNvCxnSpPr/>
           <p:nvPr/>
         </p:nvCxnSpPr>
@@ -7043,7 +6323,7 @@
       </p:cxnSp>
       <p:sp>
         <p:nvSpPr>
-          <p:cNvPr id="7" name="TextBox 6"/>
+          <p:cNvPr id="6" name="TextBox 5"/>
           <p:cNvSpPr txBox="1"/>
           <p:nvPr/>
         </p:nvSpPr>
@@ -7078,7 +6358,7 @@
       </p:sp>
       <p:sp>
         <p:nvSpPr>
-          <p:cNvPr id="8" name="TextBox 7"/>
+          <p:cNvPr id="7" name="TextBox 6"/>
           <p:cNvSpPr txBox="1"/>
           <p:nvPr/>
         </p:nvSpPr>
@@ -7113,7 +6393,7 @@
       </p:sp>
       <p:sp>
         <p:nvSpPr>
-          <p:cNvPr id="9" name="TextBox 8"/>
+          <p:cNvPr id="8" name="TextBox 7"/>
           <p:cNvSpPr txBox="1"/>
           <p:nvPr/>
         </p:nvSpPr>
@@ -7148,42 +6428,7 @@
       </p:sp>
       <p:sp>
         <p:nvSpPr>
-          <p:cNvPr id="10" name="TextBox 9"/>
-          <p:cNvSpPr txBox="1"/>
-          <p:nvPr/>
-        </p:nvSpPr>
-        <p:spPr>
-          <a:xfrm>
-            <a:off x="1828800" y="2723719"/>
-            <a:ext cx="8503920" cy="548640"/>
-          </a:xfrm>
-          <a:prstGeom prst="rect">
-            <a:avLst/>
-          </a:prstGeom>
-          <a:noFill/>
-        </p:spPr>
-        <p:txBody>
-          <a:bodyPr wrap="square" lIns="45720" rIns="45720" tIns="18288" bIns="18288" anchor="t">
-            <a:spAutoFit/>
-          </a:bodyPr>
-          <a:lstStyle/>
-          <a:p>
-            <a:pPr algn="ctr"/>
-            <a:r>
-              <a:rPr sz="2400" b="0" i="0">
-                <a:solidFill>
-                  <a:srgbClr val="6B6B6B"/>
-                </a:solidFill>
-                <a:latin typeface="Century Schoolbook"/>
-              </a:rPr>
-              <a:t>3 thousandths</a:t>
-            </a:r>
-          </a:p>
-        </p:txBody>
-      </p:sp>
-      <p:sp>
-        <p:nvSpPr>
-          <p:cNvPr id="11" name="TextBox 10"/>
+          <p:cNvPr id="9" name="TextBox 8"/>
           <p:cNvSpPr txBox="1"/>
           <p:nvPr/>
         </p:nvSpPr>
@@ -7348,44 +6593,9 @@
           </a:fontRef>
         </p:style>
       </p:cxnSp>
-      <p:sp>
-        <p:nvSpPr>
-          <p:cNvPr id="5" name="TextBox 4"/>
-          <p:cNvSpPr txBox="1"/>
-          <p:nvPr/>
-        </p:nvSpPr>
-        <p:spPr>
-          <a:xfrm>
-            <a:off x="777240" y="1261872"/>
-            <a:ext cx="10607040" cy="310896"/>
-          </a:xfrm>
-          <a:prstGeom prst="rect">
-            <a:avLst/>
-          </a:prstGeom>
-          <a:noFill/>
-        </p:spPr>
-        <p:txBody>
-          <a:bodyPr wrap="square" lIns="45720" rIns="45720" tIns="18288" bIns="18288" anchor="t">
-            <a:spAutoFit/>
-          </a:bodyPr>
-          <a:lstStyle/>
-          <a:p>
-            <a:pPr algn="l"/>
-            <a:r>
-              <a:rPr sz="1700" b="0" i="1">
-                <a:solidFill>
-                  <a:srgbClr val="6B6B6B"/>
-                </a:solidFill>
-                <a:latin typeface="Century Schoolbook"/>
-              </a:rPr>
-              <a:t>Boards up on three.</a:t>
-            </a:r>
-          </a:p>
-        </p:txBody>
-      </p:sp>
       <p:cxnSp>
         <p:nvCxnSpPr>
-          <p:cNvPr id="6" name="Connector 5"/>
+          <p:cNvPr id="5" name="Connector 4"/>
           <p:cNvCxnSpPr/>
           <p:nvPr/>
         </p:nvCxnSpPr>
@@ -7420,7 +6630,7 @@
       </p:cxnSp>
       <p:sp>
         <p:nvSpPr>
-          <p:cNvPr id="7" name="TextBox 6"/>
+          <p:cNvPr id="6" name="TextBox 5"/>
           <p:cNvSpPr txBox="1"/>
           <p:nvPr/>
         </p:nvSpPr>
@@ -7455,7 +6665,7 @@
       </p:sp>
       <p:sp>
         <p:nvSpPr>
-          <p:cNvPr id="8" name="TextBox 7"/>
+          <p:cNvPr id="7" name="TextBox 6"/>
           <p:cNvSpPr txBox="1"/>
           <p:nvPr/>
         </p:nvSpPr>
@@ -7490,7 +6700,7 @@
       </p:sp>
       <p:sp>
         <p:nvSpPr>
-          <p:cNvPr id="9" name="TextBox 8"/>
+          <p:cNvPr id="8" name="TextBox 7"/>
           <p:cNvSpPr txBox="1"/>
           <p:nvPr/>
         </p:nvSpPr>
@@ -7525,7 +6735,7 @@
       </p:sp>
       <p:pic>
         <p:nvPicPr>
-          <p:cNvPr id="10" name="Picture 9" descr="f7e39139daee107c.png"/>
+          <p:cNvPr id="9" name="Picture 8" descr="f7e39139daee107c.png"/>
           <p:cNvPicPr>
             <a:picLocks noChangeAspect="1"/>
           </p:cNvPicPr>
@@ -7549,7 +6759,7 @@
       </p:pic>
       <p:sp>
         <p:nvSpPr>
-          <p:cNvPr id="11" name="TextBox 10"/>
+          <p:cNvPr id="10" name="TextBox 9"/>
           <p:cNvSpPr txBox="1"/>
           <p:nvPr/>
         </p:nvSpPr>
@@ -7584,7 +6794,7 @@
       </p:sp>
       <p:sp>
         <p:nvSpPr>
-          <p:cNvPr id="12" name="TextBox 11"/>
+          <p:cNvPr id="11" name="TextBox 10"/>
           <p:cNvSpPr txBox="1"/>
           <p:nvPr/>
         </p:nvSpPr>
@@ -7613,41 +6823,6 @@
                 <a:latin typeface="Century Schoolbook"/>
               </a:rPr>
               <a:t>Answer it.</a:t>
-            </a:r>
-          </a:p>
-        </p:txBody>
-      </p:sp>
-      <p:sp>
-        <p:nvSpPr>
-          <p:cNvPr id="13" name="TextBox 12"/>
-          <p:cNvSpPr txBox="1"/>
-          <p:nvPr/>
-        </p:nvSpPr>
-        <p:spPr>
-          <a:xfrm>
-            <a:off x="777240" y="4828032"/>
-            <a:ext cx="10607040" cy="365760"/>
-          </a:xfrm>
-          <a:prstGeom prst="rect">
-            <a:avLst/>
-          </a:prstGeom>
-          <a:noFill/>
-        </p:spPr>
-        <p:txBody>
-          <a:bodyPr wrap="square" lIns="45720" rIns="45720" tIns="18288" bIns="18288" anchor="t">
-            <a:spAutoFit/>
-          </a:bodyPr>
-          <a:lstStyle/>
-          <a:p>
-            <a:pPr algn="ctr"/>
-            <a:r>
-              <a:rPr sz="1900" b="0" i="1">
-                <a:solidFill>
-                  <a:srgbClr val="6B6B6B"/>
-                </a:solidFill>
-                <a:latin typeface="Century Schoolbook"/>
-              </a:rPr>
-              <a:t>Move the point four places left.</a:t>
             </a:r>
           </a:p>
         </p:txBody>
@@ -7775,44 +6950,9 @@
           </a:fontRef>
         </p:style>
       </p:cxnSp>
-      <p:sp>
-        <p:nvSpPr>
-          <p:cNvPr id="5" name="TextBox 4"/>
-          <p:cNvSpPr txBox="1"/>
-          <p:nvPr/>
-        </p:nvSpPr>
-        <p:spPr>
-          <a:xfrm>
-            <a:off x="777240" y="1261872"/>
-            <a:ext cx="10607040" cy="310896"/>
-          </a:xfrm>
-          <a:prstGeom prst="rect">
-            <a:avLst/>
-          </a:prstGeom>
-          <a:noFill/>
-        </p:spPr>
-        <p:txBody>
-          <a:bodyPr wrap="square" lIns="45720" rIns="45720" tIns="18288" bIns="18288" anchor="t">
-            <a:spAutoFit/>
-          </a:bodyPr>
-          <a:lstStyle/>
-          <a:p>
-            <a:pPr algn="l"/>
-            <a:r>
-              <a:rPr sz="1700" b="0" i="1">
-                <a:solidFill>
-                  <a:srgbClr val="6B6B6B"/>
-                </a:solidFill>
-                <a:latin typeface="Century Schoolbook"/>
-              </a:rPr>
-              <a:t>On your own. Four minutes. No notes.</a:t>
-            </a:r>
-          </a:p>
-        </p:txBody>
-      </p:sp>
       <p:cxnSp>
         <p:nvCxnSpPr>
-          <p:cNvPr id="6" name="Connector 5"/>
+          <p:cNvPr id="5" name="Connector 4"/>
           <p:cNvCxnSpPr/>
           <p:nvPr/>
         </p:nvCxnSpPr>
@@ -7847,7 +6987,7 @@
       </p:cxnSp>
       <p:sp>
         <p:nvSpPr>
-          <p:cNvPr id="7" name="TextBox 6"/>
+          <p:cNvPr id="6" name="TextBox 5"/>
           <p:cNvSpPr txBox="1"/>
           <p:nvPr/>
         </p:nvSpPr>
@@ -7882,7 +7022,7 @@
       </p:sp>
       <p:sp>
         <p:nvSpPr>
-          <p:cNvPr id="8" name="TextBox 7"/>
+          <p:cNvPr id="7" name="TextBox 6"/>
           <p:cNvSpPr txBox="1"/>
           <p:nvPr/>
         </p:nvSpPr>
@@ -7917,13 +7057,13 @@
       </p:sp>
       <p:sp>
         <p:nvSpPr>
-          <p:cNvPr id="9" name="TextBox 8"/>
-          <p:cNvSpPr txBox="1"/>
-          <p:nvPr/>
-        </p:nvSpPr>
-        <p:spPr>
-          <a:xfrm>
-            <a:off x="1874519" y="1760220"/>
+          <p:cNvPr id="8" name="TextBox 7"/>
+          <p:cNvSpPr txBox="1"/>
+          <p:nvPr/>
+        </p:nvSpPr>
+        <p:spPr>
+          <a:xfrm>
+            <a:off x="1874519" y="1440180"/>
             <a:ext cx="6249754" cy="457200"/>
           </a:xfrm>
           <a:prstGeom prst="rect">
@@ -7952,13 +7092,13 @@
       </p:sp>
       <p:sp>
         <p:nvSpPr>
-          <p:cNvPr id="10" name="TextBox 9"/>
-          <p:cNvSpPr txBox="1"/>
-          <p:nvPr/>
-        </p:nvSpPr>
-        <p:spPr>
-          <a:xfrm>
-            <a:off x="1874519" y="2372868"/>
+          <p:cNvPr id="9" name="TextBox 8"/>
+          <p:cNvSpPr txBox="1"/>
+          <p:nvPr/>
+        </p:nvSpPr>
+        <p:spPr>
+          <a:xfrm>
+            <a:off x="1874519" y="2052828"/>
             <a:ext cx="1700544" cy="457200"/>
           </a:xfrm>
           <a:prstGeom prst="rect">
@@ -7987,7 +7127,7 @@
       </p:sp>
       <p:pic>
         <p:nvPicPr>
-          <p:cNvPr id="11" name="Picture 10" descr="fc19434018fde666.png"/>
+          <p:cNvPr id="10" name="Picture 9" descr="fc19434018fde666.png"/>
           <p:cNvPicPr>
             <a:picLocks noChangeAspect="1"/>
           </p:cNvPicPr>
@@ -8001,7 +7141,7 @@
         </p:blipFill>
         <p:spPr>
           <a:xfrm>
-            <a:off x="3437904" y="2461260"/>
+            <a:off x="3437904" y="2141220"/>
             <a:ext cx="557784" cy="280416"/>
           </a:xfrm>
           <a:prstGeom prst="rect">
@@ -8011,13 +7151,13 @@
       </p:pic>
       <p:sp>
         <p:nvSpPr>
-          <p:cNvPr id="12" name="TextBox 11"/>
-          <p:cNvSpPr txBox="1"/>
-          <p:nvPr/>
-        </p:nvSpPr>
-        <p:spPr>
-          <a:xfrm>
-            <a:off x="3995688" y="2372868"/>
+          <p:cNvPr id="11" name="TextBox 10"/>
+          <p:cNvSpPr txBox="1"/>
+          <p:nvPr/>
+        </p:nvSpPr>
+        <p:spPr>
+          <a:xfrm>
+            <a:off x="3995688" y="2052828"/>
             <a:ext cx="2239077" cy="457200"/>
           </a:xfrm>
           <a:prstGeom prst="rect">
@@ -8046,13 +7186,13 @@
       </p:sp>
       <p:sp>
         <p:nvSpPr>
-          <p:cNvPr id="13" name="TextBox 12"/>
-          <p:cNvSpPr txBox="1"/>
-          <p:nvPr/>
-        </p:nvSpPr>
-        <p:spPr>
-          <a:xfrm>
-            <a:off x="1874519" y="2985516"/>
+          <p:cNvPr id="12" name="TextBox 11"/>
+          <p:cNvSpPr txBox="1"/>
+          <p:nvPr/>
+        </p:nvSpPr>
+        <p:spPr>
+          <a:xfrm>
+            <a:off x="1874519" y="2665476"/>
             <a:ext cx="726811" cy="457200"/>
           </a:xfrm>
           <a:prstGeom prst="rect">
@@ -8081,7 +7221,7 @@
       </p:sp>
       <p:pic>
         <p:nvPicPr>
-          <p:cNvPr id="14" name="Picture 13" descr="c7ed55c1b2138954.png"/>
+          <p:cNvPr id="13" name="Picture 12" descr="c7ed55c1b2138954.png"/>
           <p:cNvPicPr>
             <a:picLocks noChangeAspect="1"/>
           </p:cNvPicPr>
@@ -8095,7 +7235,7 @@
         </p:blipFill>
         <p:spPr>
           <a:xfrm>
-            <a:off x="2464171" y="3009900"/>
+            <a:off x="2464171" y="2689860"/>
             <a:ext cx="688848" cy="408432"/>
           </a:xfrm>
           <a:prstGeom prst="rect">
@@ -8105,13 +7245,13 @@
       </p:pic>
       <p:sp>
         <p:nvSpPr>
-          <p:cNvPr id="15" name="TextBox 14"/>
-          <p:cNvSpPr txBox="1"/>
-          <p:nvPr/>
-        </p:nvSpPr>
-        <p:spPr>
-          <a:xfrm>
-            <a:off x="3153019" y="2985516"/>
+          <p:cNvPr id="14" name="TextBox 13"/>
+          <p:cNvSpPr txBox="1"/>
+          <p:nvPr/>
+        </p:nvSpPr>
+        <p:spPr>
+          <a:xfrm>
+            <a:off x="3153019" y="2665476"/>
             <a:ext cx="5819653" cy="457200"/>
           </a:xfrm>
           <a:prstGeom prst="rect">
@@ -8140,13 +7280,13 @@
       </p:sp>
       <p:sp>
         <p:nvSpPr>
-          <p:cNvPr id="16" name="TextBox 15"/>
-          <p:cNvSpPr txBox="1"/>
-          <p:nvPr/>
-        </p:nvSpPr>
-        <p:spPr>
-          <a:xfrm>
-            <a:off x="1874519" y="3598164"/>
+          <p:cNvPr id="15" name="TextBox 14"/>
+          <p:cNvSpPr txBox="1"/>
+          <p:nvPr/>
+        </p:nvSpPr>
+        <p:spPr>
+          <a:xfrm>
+            <a:off x="1874519" y="3278124"/>
             <a:ext cx="4504058" cy="457200"/>
           </a:xfrm>
           <a:prstGeom prst="rect">
@@ -8296,44 +7436,9 @@
           </a:fontRef>
         </p:style>
       </p:cxnSp>
-      <p:sp>
-        <p:nvSpPr>
-          <p:cNvPr id="5" name="TextBox 4"/>
-          <p:cNvSpPr txBox="1"/>
-          <p:nvPr/>
-        </p:nvSpPr>
-        <p:spPr>
-          <a:xfrm>
-            <a:off x="777240" y="1261872"/>
-            <a:ext cx="10607040" cy="310896"/>
-          </a:xfrm>
-          <a:prstGeom prst="rect">
-            <a:avLst/>
-          </a:prstGeom>
-          <a:noFill/>
-        </p:spPr>
-        <p:txBody>
-          <a:bodyPr wrap="square" lIns="45720" rIns="45720" tIns="18288" bIns="18288" anchor="t">
-            <a:spAutoFit/>
-          </a:bodyPr>
-          <a:lstStyle/>
-          <a:p>
-            <a:pPr algn="l"/>
-            <a:r>
-              <a:rPr sz="1700" b="0" i="1">
-                <a:solidFill>
-                  <a:srgbClr val="6B6B6B"/>
-                </a:solidFill>
-                <a:latin typeface="Century Schoolbook"/>
-              </a:rPr>
-              <a:t>Answer.</a:t>
-            </a:r>
-          </a:p>
-        </p:txBody>
-      </p:sp>
       <p:cxnSp>
         <p:nvCxnSpPr>
-          <p:cNvPr id="6" name="Connector 5"/>
+          <p:cNvPr id="5" name="Connector 4"/>
           <p:cNvCxnSpPr/>
           <p:nvPr/>
         </p:nvCxnSpPr>
@@ -8368,7 +7473,7 @@
       </p:cxnSp>
       <p:sp>
         <p:nvSpPr>
-          <p:cNvPr id="7" name="TextBox 6"/>
+          <p:cNvPr id="6" name="TextBox 5"/>
           <p:cNvSpPr txBox="1"/>
           <p:nvPr/>
         </p:nvSpPr>
@@ -8403,7 +7508,7 @@
       </p:sp>
       <p:sp>
         <p:nvSpPr>
-          <p:cNvPr id="8" name="TextBox 7"/>
+          <p:cNvPr id="7" name="TextBox 6"/>
           <p:cNvSpPr txBox="1"/>
           <p:nvPr/>
         </p:nvSpPr>
@@ -8438,7 +7543,7 @@
       </p:sp>
       <p:sp>
         <p:nvSpPr>
-          <p:cNvPr id="9" name="TextBox 8"/>
+          <p:cNvPr id="8" name="TextBox 7"/>
           <p:cNvSpPr txBox="1"/>
           <p:nvPr/>
         </p:nvSpPr>
@@ -8473,7 +7578,7 @@
       </p:sp>
       <p:pic>
         <p:nvPicPr>
-          <p:cNvPr id="10" name="Picture 9" descr="533d0b83fdac28f7.png"/>
+          <p:cNvPr id="9" name="Picture 8" descr="533d0b83fdac28f7.png"/>
           <p:cNvPicPr>
             <a:picLocks noChangeAspect="1"/>
           </p:cNvPicPr>
@@ -8497,7 +7602,7 @@
       </p:pic>
       <p:sp>
         <p:nvSpPr>
-          <p:cNvPr id="11" name="TextBox 10"/>
+          <p:cNvPr id="10" name="TextBox 9"/>
           <p:cNvSpPr txBox="1"/>
           <p:nvPr/>
         </p:nvSpPr>
@@ -8532,42 +7637,7 @@
       </p:sp>
       <p:sp>
         <p:nvSpPr>
-          <p:cNvPr id="12" name="TextBox 11"/>
-          <p:cNvSpPr txBox="1"/>
-          <p:nvPr/>
-        </p:nvSpPr>
-        <p:spPr>
-          <a:xfrm>
-            <a:off x="1828800" y="2834639"/>
-            <a:ext cx="8503920" cy="548640"/>
-          </a:xfrm>
-          <a:prstGeom prst="rect">
-            <a:avLst/>
-          </a:prstGeom>
-          <a:noFill/>
-        </p:spPr>
-        <p:txBody>
-          <a:bodyPr wrap="square" lIns="45720" rIns="45720" tIns="18288" bIns="18288" anchor="t">
-            <a:spAutoFit/>
-          </a:bodyPr>
-          <a:lstStyle/>
-          <a:p>
-            <a:pPr algn="ctr"/>
-            <a:r>
-              <a:rPr sz="2400" b="0" i="0">
-                <a:solidFill>
-                  <a:srgbClr val="6B6B6B"/>
-                </a:solidFill>
-                <a:latin typeface="Century Schoolbook"/>
-              </a:rPr>
-              <a:t>the 2 lands in the ten-thousandths place</a:t>
-            </a:r>
-          </a:p>
-        </p:txBody>
-      </p:sp>
-      <p:sp>
-        <p:nvSpPr>
-          <p:cNvPr id="13" name="TextBox 12"/>
+          <p:cNvPr id="11" name="TextBox 10"/>
           <p:cNvSpPr txBox="1"/>
           <p:nvPr/>
         </p:nvSpPr>
@@ -8723,44 +7793,9 @@
           </a:fontRef>
         </p:style>
       </p:cxnSp>
-      <p:sp>
-        <p:nvSpPr>
-          <p:cNvPr id="5" name="TextBox 4"/>
-          <p:cNvSpPr txBox="1"/>
-          <p:nvPr/>
-        </p:nvSpPr>
-        <p:spPr>
-          <a:xfrm>
-            <a:off x="777240" y="1261872"/>
-            <a:ext cx="10607040" cy="310896"/>
-          </a:xfrm>
-          <a:prstGeom prst="rect">
-            <a:avLst/>
-          </a:prstGeom>
-          <a:noFill/>
-        </p:spPr>
-        <p:txBody>
-          <a:bodyPr wrap="square" lIns="45720" rIns="45720" tIns="18288" bIns="18288" anchor="t">
-            <a:spAutoFit/>
-          </a:bodyPr>
-          <a:lstStyle/>
-          <a:p>
-            <a:pPr algn="l"/>
-            <a:r>
-              <a:rPr sz="1700" b="0" i="1">
-                <a:solidFill>
-                  <a:srgbClr val="6B6B6B"/>
-                </a:solidFill>
-                <a:latin typeface="Century Schoolbook"/>
-              </a:rPr>
-              <a:t>Boards up on three.</a:t>
-            </a:r>
-          </a:p>
-        </p:txBody>
-      </p:sp>
       <p:cxnSp>
         <p:nvCxnSpPr>
-          <p:cNvPr id="6" name="Connector 5"/>
+          <p:cNvPr id="5" name="Connector 4"/>
           <p:cNvCxnSpPr/>
           <p:nvPr/>
         </p:nvCxnSpPr>
@@ -8795,7 +7830,7 @@
       </p:cxnSp>
       <p:sp>
         <p:nvSpPr>
-          <p:cNvPr id="7" name="TextBox 6"/>
+          <p:cNvPr id="6" name="TextBox 5"/>
           <p:cNvSpPr txBox="1"/>
           <p:nvPr/>
         </p:nvSpPr>
@@ -8830,7 +7865,7 @@
       </p:sp>
       <p:sp>
         <p:nvSpPr>
-          <p:cNvPr id="8" name="TextBox 7"/>
+          <p:cNvPr id="7" name="TextBox 6"/>
           <p:cNvSpPr txBox="1"/>
           <p:nvPr/>
         </p:nvSpPr>
@@ -8865,7 +7900,7 @@
       </p:sp>
       <p:sp>
         <p:nvSpPr>
-          <p:cNvPr id="9" name="TextBox 8"/>
+          <p:cNvPr id="8" name="TextBox 7"/>
           <p:cNvSpPr txBox="1"/>
           <p:nvPr/>
         </p:nvSpPr>
@@ -8900,7 +7935,7 @@
       </p:sp>
       <p:sp>
         <p:nvSpPr>
-          <p:cNvPr id="10" name="TextBox 9"/>
+          <p:cNvPr id="9" name="TextBox 8"/>
           <p:cNvSpPr txBox="1"/>
           <p:nvPr/>
         </p:nvSpPr>
@@ -8935,7 +7970,7 @@
       </p:sp>
       <p:sp>
         <p:nvSpPr>
-          <p:cNvPr id="11" name="TextBox 10"/>
+          <p:cNvPr id="10" name="TextBox 9"/>
           <p:cNvSpPr txBox="1"/>
           <p:nvPr/>
         </p:nvSpPr>
@@ -8970,7 +8005,7 @@
       </p:sp>
       <p:sp>
         <p:nvSpPr>
-          <p:cNvPr id="12" name="TextBox 11"/>
+          <p:cNvPr id="11" name="TextBox 10"/>
           <p:cNvSpPr txBox="1"/>
           <p:nvPr/>
         </p:nvSpPr>
@@ -9126,44 +8161,9 @@
           </a:fontRef>
         </p:style>
       </p:cxnSp>
-      <p:sp>
-        <p:nvSpPr>
-          <p:cNvPr id="5" name="TextBox 4"/>
-          <p:cNvSpPr txBox="1"/>
-          <p:nvPr/>
-        </p:nvSpPr>
-        <p:spPr>
-          <a:xfrm>
-            <a:off x="777240" y="1261872"/>
-            <a:ext cx="10607040" cy="310896"/>
-          </a:xfrm>
-          <a:prstGeom prst="rect">
-            <a:avLst/>
-          </a:prstGeom>
-          <a:noFill/>
-        </p:spPr>
-        <p:txBody>
-          <a:bodyPr wrap="square" lIns="45720" rIns="45720" tIns="18288" bIns="18288" anchor="t">
-            <a:spAutoFit/>
-          </a:bodyPr>
-          <a:lstStyle/>
-          <a:p>
-            <a:pPr algn="l"/>
-            <a:r>
-              <a:rPr sz="1700" b="0" i="1">
-                <a:solidFill>
-                  <a:srgbClr val="6B6B6B"/>
-                </a:solidFill>
-                <a:latin typeface="Century Schoolbook"/>
-              </a:rPr>
-              <a:t>Answer.</a:t>
-            </a:r>
-          </a:p>
-        </p:txBody>
-      </p:sp>
       <p:cxnSp>
         <p:nvCxnSpPr>
-          <p:cNvPr id="6" name="Connector 5"/>
+          <p:cNvPr id="5" name="Connector 4"/>
           <p:cNvCxnSpPr/>
           <p:nvPr/>
         </p:nvCxnSpPr>
@@ -9198,7 +8198,7 @@
       </p:cxnSp>
       <p:sp>
         <p:nvSpPr>
-          <p:cNvPr id="7" name="TextBox 6"/>
+          <p:cNvPr id="6" name="TextBox 5"/>
           <p:cNvSpPr txBox="1"/>
           <p:nvPr/>
         </p:nvSpPr>
@@ -9233,7 +8233,7 @@
       </p:sp>
       <p:sp>
         <p:nvSpPr>
-          <p:cNvPr id="8" name="TextBox 7"/>
+          <p:cNvPr id="7" name="TextBox 6"/>
           <p:cNvSpPr txBox="1"/>
           <p:nvPr/>
         </p:nvSpPr>
@@ -9268,7 +8268,7 @@
       </p:sp>
       <p:sp>
         <p:nvSpPr>
-          <p:cNvPr id="9" name="TextBox 8"/>
+          <p:cNvPr id="8" name="TextBox 7"/>
           <p:cNvSpPr txBox="1"/>
           <p:nvPr/>
         </p:nvSpPr>
@@ -9303,7 +8303,7 @@
       </p:sp>
       <p:sp>
         <p:nvSpPr>
-          <p:cNvPr id="10" name="TextBox 9"/>
+          <p:cNvPr id="9" name="TextBox 8"/>
           <p:cNvSpPr txBox="1"/>
           <p:nvPr/>
         </p:nvSpPr>
@@ -9338,7 +8338,7 @@
       </p:sp>
       <p:sp>
         <p:nvSpPr>
-          <p:cNvPr id="11" name="TextBox 10"/>
+          <p:cNvPr id="10" name="TextBox 9"/>
           <p:cNvSpPr txBox="1"/>
           <p:nvPr/>
         </p:nvSpPr>
@@ -9373,42 +8373,7 @@
       </p:sp>
       <p:sp>
         <p:nvSpPr>
-          <p:cNvPr id="12" name="TextBox 11"/>
-          <p:cNvSpPr txBox="1"/>
-          <p:nvPr/>
-        </p:nvSpPr>
-        <p:spPr>
-          <a:xfrm>
-            <a:off x="1828800" y="3583255"/>
-            <a:ext cx="8503920" cy="548640"/>
-          </a:xfrm>
-          <a:prstGeom prst="rect">
-            <a:avLst/>
-          </a:prstGeom>
-          <a:noFill/>
-        </p:spPr>
-        <p:txBody>
-          <a:bodyPr wrap="square" lIns="45720" rIns="45720" tIns="18288" bIns="18288" anchor="t">
-            <a:spAutoFit/>
-          </a:bodyPr>
-          <a:lstStyle/>
-          <a:p>
-            <a:pPr algn="ctr"/>
-            <a:r>
-              <a:rPr sz="2400" b="0" i="0">
-                <a:solidFill>
-                  <a:srgbClr val="6B6B6B"/>
-                </a:solidFill>
-                <a:latin typeface="Century Schoolbook"/>
-              </a:rPr>
-              <a:t>the 9 is in the hundred-thousandths place</a:t>
-            </a:r>
-          </a:p>
-        </p:txBody>
-      </p:sp>
-      <p:sp>
-        <p:nvSpPr>
-          <p:cNvPr id="13" name="TextBox 12"/>
+          <p:cNvPr id="11" name="TextBox 10"/>
           <p:cNvSpPr txBox="1"/>
           <p:nvPr/>
         </p:nvSpPr>
@@ -9573,44 +8538,9 @@
           </a:fontRef>
         </p:style>
       </p:cxnSp>
-      <p:sp>
-        <p:nvSpPr>
-          <p:cNvPr id="5" name="TextBox 4"/>
-          <p:cNvSpPr txBox="1"/>
-          <p:nvPr/>
-        </p:nvSpPr>
-        <p:spPr>
-          <a:xfrm>
-            <a:off x="777240" y="1261872"/>
-            <a:ext cx="10607040" cy="310896"/>
-          </a:xfrm>
-          <a:prstGeom prst="rect">
-            <a:avLst/>
-          </a:prstGeom>
-          <a:noFill/>
-        </p:spPr>
-        <p:txBody>
-          <a:bodyPr wrap="square" lIns="45720" rIns="45720" tIns="18288" bIns="18288" anchor="t">
-            <a:spAutoFit/>
-          </a:bodyPr>
-          <a:lstStyle/>
-          <a:p>
-            <a:pPr algn="l"/>
-            <a:r>
-              <a:rPr sz="1700" b="0" i="1">
-                <a:solidFill>
-                  <a:srgbClr val="6B6B6B"/>
-                </a:solidFill>
-                <a:latin typeface="Century Schoolbook"/>
-              </a:rPr>
-              <a:t>Boards up on three.</a:t>
-            </a:r>
-          </a:p>
-        </p:txBody>
-      </p:sp>
       <p:cxnSp>
         <p:nvCxnSpPr>
-          <p:cNvPr id="6" name="Connector 5"/>
+          <p:cNvPr id="5" name="Connector 4"/>
           <p:cNvCxnSpPr/>
           <p:nvPr/>
         </p:nvCxnSpPr>
@@ -9645,7 +8575,7 @@
       </p:cxnSp>
       <p:sp>
         <p:nvSpPr>
-          <p:cNvPr id="7" name="TextBox 6"/>
+          <p:cNvPr id="6" name="TextBox 5"/>
           <p:cNvSpPr txBox="1"/>
           <p:nvPr/>
         </p:nvSpPr>
@@ -9680,7 +8610,7 @@
       </p:sp>
       <p:sp>
         <p:nvSpPr>
-          <p:cNvPr id="8" name="TextBox 7"/>
+          <p:cNvPr id="7" name="TextBox 6"/>
           <p:cNvSpPr txBox="1"/>
           <p:nvPr/>
         </p:nvSpPr>
@@ -9715,7 +8645,7 @@
       </p:sp>
       <p:sp>
         <p:nvSpPr>
-          <p:cNvPr id="9" name="TextBox 8"/>
+          <p:cNvPr id="8" name="TextBox 7"/>
           <p:cNvSpPr txBox="1"/>
           <p:nvPr/>
         </p:nvSpPr>
@@ -9750,7 +8680,7 @@
       </p:sp>
       <p:sp>
         <p:nvSpPr>
-          <p:cNvPr id="10" name="TextBox 9"/>
+          <p:cNvPr id="9" name="TextBox 8"/>
           <p:cNvSpPr txBox="1"/>
           <p:nvPr/>
         </p:nvSpPr>
@@ -9803,7 +8733,7 @@
       </p:sp>
       <p:sp>
         <p:nvSpPr>
-          <p:cNvPr id="11" name="TextBox 10"/>
+          <p:cNvPr id="10" name="TextBox 9"/>
           <p:cNvSpPr txBox="1"/>
           <p:nvPr/>
         </p:nvSpPr>
@@ -9856,7 +8786,7 @@
       </p:sp>
       <p:sp>
         <p:nvSpPr>
-          <p:cNvPr id="12" name="TextBox 11"/>
+          <p:cNvPr id="11" name="TextBox 10"/>
           <p:cNvSpPr txBox="1"/>
           <p:nvPr/>
         </p:nvSpPr>
@@ -9909,7 +8839,7 @@
       </p:sp>
       <p:sp>
         <p:nvSpPr>
-          <p:cNvPr id="13" name="TextBox 12"/>
+          <p:cNvPr id="12" name="TextBox 11"/>
           <p:cNvSpPr txBox="1"/>
           <p:nvPr/>
         </p:nvSpPr>
@@ -9962,7 +8892,7 @@
       </p:sp>
       <p:sp>
         <p:nvSpPr>
-          <p:cNvPr id="14" name="TextBox 13"/>
+          <p:cNvPr id="13" name="TextBox 12"/>
           <p:cNvSpPr txBox="1"/>
           <p:nvPr/>
         </p:nvSpPr>
@@ -10118,44 +9048,9 @@
           </a:fontRef>
         </p:style>
       </p:cxnSp>
-      <p:sp>
-        <p:nvSpPr>
-          <p:cNvPr id="5" name="TextBox 4"/>
-          <p:cNvSpPr txBox="1"/>
-          <p:nvPr/>
-        </p:nvSpPr>
-        <p:spPr>
-          <a:xfrm>
-            <a:off x="777240" y="1261872"/>
-            <a:ext cx="10607040" cy="310896"/>
-          </a:xfrm>
-          <a:prstGeom prst="rect">
-            <a:avLst/>
-          </a:prstGeom>
-          <a:noFill/>
-        </p:spPr>
-        <p:txBody>
-          <a:bodyPr wrap="square" lIns="45720" rIns="45720" tIns="18288" bIns="18288" anchor="t">
-            <a:spAutoFit/>
-          </a:bodyPr>
-          <a:lstStyle/>
-          <a:p>
-            <a:pPr algn="l"/>
-            <a:r>
-              <a:rPr sz="1700" b="0" i="1">
-                <a:solidFill>
-                  <a:srgbClr val="6B6B6B"/>
-                </a:solidFill>
-                <a:latin typeface="Century Schoolbook"/>
-              </a:rPr>
-              <a:t>Answer.</a:t>
-            </a:r>
-          </a:p>
-        </p:txBody>
-      </p:sp>
       <p:cxnSp>
         <p:nvCxnSpPr>
-          <p:cNvPr id="6" name="Connector 5"/>
+          <p:cNvPr id="5" name="Connector 4"/>
           <p:cNvCxnSpPr/>
           <p:nvPr/>
         </p:nvCxnSpPr>
@@ -10190,7 +9085,7 @@
       </p:cxnSp>
       <p:sp>
         <p:nvSpPr>
-          <p:cNvPr id="7" name="TextBox 6"/>
+          <p:cNvPr id="6" name="TextBox 5"/>
           <p:cNvSpPr txBox="1"/>
           <p:nvPr/>
         </p:nvSpPr>
@@ -10225,7 +9120,7 @@
       </p:sp>
       <p:sp>
         <p:nvSpPr>
-          <p:cNvPr id="8" name="TextBox 7"/>
+          <p:cNvPr id="7" name="TextBox 6"/>
           <p:cNvSpPr txBox="1"/>
           <p:nvPr/>
         </p:nvSpPr>
@@ -10260,7 +9155,7 @@
       </p:sp>
       <p:sp>
         <p:nvSpPr>
-          <p:cNvPr id="9" name="TextBox 8"/>
+          <p:cNvPr id="8" name="TextBox 7"/>
           <p:cNvSpPr txBox="1"/>
           <p:nvPr/>
         </p:nvSpPr>
@@ -10295,7 +9190,7 @@
       </p:sp>
       <p:sp>
         <p:nvSpPr>
-          <p:cNvPr id="10" name="TextBox 9"/>
+          <p:cNvPr id="9" name="TextBox 8"/>
           <p:cNvSpPr txBox="1"/>
           <p:nvPr/>
         </p:nvSpPr>
@@ -10348,7 +9243,7 @@
       </p:sp>
       <p:sp>
         <p:nvSpPr>
-          <p:cNvPr id="11" name="TextBox 10"/>
+          <p:cNvPr id="10" name="TextBox 9"/>
           <p:cNvSpPr txBox="1"/>
           <p:nvPr/>
         </p:nvSpPr>
@@ -10401,7 +9296,7 @@
       </p:sp>
       <p:sp>
         <p:nvSpPr>
-          <p:cNvPr id="12" name="TextBox 11"/>
+          <p:cNvPr id="11" name="TextBox 10"/>
           <p:cNvSpPr txBox="1"/>
           <p:nvPr/>
         </p:nvSpPr>
@@ -10454,7 +9349,7 @@
       </p:sp>
       <p:sp>
         <p:nvSpPr>
-          <p:cNvPr id="13" name="TextBox 12"/>
+          <p:cNvPr id="12" name="TextBox 11"/>
           <p:cNvSpPr txBox="1"/>
           <p:nvPr/>
         </p:nvSpPr>
@@ -10507,7 +9402,7 @@
       </p:sp>
       <p:sp>
         <p:nvSpPr>
-          <p:cNvPr id="14" name="TextBox 13"/>
+          <p:cNvPr id="13" name="TextBox 12"/>
           <p:cNvSpPr txBox="1"/>
           <p:nvPr/>
         </p:nvSpPr>
@@ -10672,44 +9567,9 @@
           </a:fontRef>
         </p:style>
       </p:cxnSp>
-      <p:sp>
-        <p:nvSpPr>
-          <p:cNvPr id="5" name="TextBox 4"/>
-          <p:cNvSpPr txBox="1"/>
-          <p:nvPr/>
-        </p:nvSpPr>
-        <p:spPr>
-          <a:xfrm>
-            <a:off x="777240" y="1261872"/>
-            <a:ext cx="10607040" cy="310896"/>
-          </a:xfrm>
-          <a:prstGeom prst="rect">
-            <a:avLst/>
-          </a:prstGeom>
-          <a:noFill/>
-        </p:spPr>
-        <p:txBody>
-          <a:bodyPr wrap="square" lIns="45720" rIns="45720" tIns="18288" bIns="18288" anchor="t">
-            <a:spAutoFit/>
-          </a:bodyPr>
-          <a:lstStyle/>
-          <a:p>
-            <a:pPr algn="l"/>
-            <a:r>
-              <a:rPr sz="1700" b="0" i="1">
-                <a:solidFill>
-                  <a:srgbClr val="6B6B6B"/>
-                </a:solidFill>
-                <a:latin typeface="Century Schoolbook"/>
-              </a:rPr>
-              <a:t>Boards up on three.</a:t>
-            </a:r>
-          </a:p>
-        </p:txBody>
-      </p:sp>
       <p:cxnSp>
         <p:nvCxnSpPr>
-          <p:cNvPr id="6" name="Connector 5"/>
+          <p:cNvPr id="5" name="Connector 4"/>
           <p:cNvCxnSpPr/>
           <p:nvPr/>
         </p:nvCxnSpPr>
@@ -10744,7 +9604,7 @@
       </p:cxnSp>
       <p:sp>
         <p:nvSpPr>
-          <p:cNvPr id="7" name="TextBox 6"/>
+          <p:cNvPr id="6" name="TextBox 5"/>
           <p:cNvSpPr txBox="1"/>
           <p:nvPr/>
         </p:nvSpPr>
@@ -10779,7 +9639,7 @@
       </p:sp>
       <p:sp>
         <p:nvSpPr>
-          <p:cNvPr id="8" name="TextBox 7"/>
+          <p:cNvPr id="7" name="TextBox 6"/>
           <p:cNvSpPr txBox="1"/>
           <p:nvPr/>
         </p:nvSpPr>
@@ -10814,7 +9674,7 @@
       </p:sp>
       <p:sp>
         <p:nvSpPr>
-          <p:cNvPr id="9" name="TextBox 8"/>
+          <p:cNvPr id="8" name="TextBox 7"/>
           <p:cNvSpPr txBox="1"/>
           <p:nvPr/>
         </p:nvSpPr>
@@ -10849,7 +9709,7 @@
       </p:sp>
       <p:pic>
         <p:nvPicPr>
-          <p:cNvPr id="10" name="Picture 9" descr="6343b50271775d7c.png"/>
+          <p:cNvPr id="9" name="Picture 8" descr="6343b50271775d7c.png"/>
           <p:cNvPicPr>
             <a:picLocks noChangeAspect="1"/>
           </p:cNvPicPr>
@@ -10873,7 +9733,7 @@
       </p:pic>
       <p:sp>
         <p:nvSpPr>
-          <p:cNvPr id="11" name="TextBox 10"/>
+          <p:cNvPr id="10" name="TextBox 9"/>
           <p:cNvSpPr txBox="1"/>
           <p:nvPr/>
         </p:nvSpPr>
@@ -10908,7 +9768,7 @@
       </p:sp>
       <p:pic>
         <p:nvPicPr>
-          <p:cNvPr id="12" name="Picture 11" descr="c3e8fbaa365da3f4.png"/>
+          <p:cNvPr id="11" name="Picture 10" descr="c3e8fbaa365da3f4.png"/>
           <p:cNvPicPr>
             <a:picLocks noChangeAspect="1"/>
           </p:cNvPicPr>
@@ -10932,7 +9792,7 @@
       </p:pic>
       <p:sp>
         <p:nvSpPr>
-          <p:cNvPr id="13" name="TextBox 12"/>
+          <p:cNvPr id="12" name="TextBox 11"/>
           <p:cNvSpPr txBox="1"/>
           <p:nvPr/>
         </p:nvSpPr>
@@ -10967,7 +9827,7 @@
       </p:sp>
       <p:sp>
         <p:nvSpPr>
-          <p:cNvPr id="14" name="TextBox 13"/>
+          <p:cNvPr id="13" name="TextBox 12"/>
           <p:cNvSpPr txBox="1"/>
           <p:nvPr/>
         </p:nvSpPr>
@@ -11011,7 +9871,7 @@
       </p:sp>
       <p:sp>
         <p:nvSpPr>
-          <p:cNvPr id="15" name="TextBox 14"/>
+          <p:cNvPr id="14" name="TextBox 13"/>
           <p:cNvSpPr txBox="1"/>
           <p:nvPr/>
         </p:nvSpPr>
@@ -11055,7 +9915,7 @@
       </p:sp>
       <p:sp>
         <p:nvSpPr>
-          <p:cNvPr id="16" name="TextBox 15"/>
+          <p:cNvPr id="15" name="TextBox 14"/>
           <p:cNvSpPr txBox="1"/>
           <p:nvPr/>
         </p:nvSpPr>
@@ -11099,7 +9959,7 @@
       </p:sp>
       <p:sp>
         <p:nvSpPr>
-          <p:cNvPr id="17" name="TextBox 16"/>
+          <p:cNvPr id="16" name="TextBox 15"/>
           <p:cNvSpPr txBox="1"/>
           <p:nvPr/>
         </p:nvSpPr>
@@ -11143,7 +10003,7 @@
       </p:sp>
       <p:sp>
         <p:nvSpPr>
-          <p:cNvPr id="18" name="TextBox 17"/>
+          <p:cNvPr id="17" name="TextBox 16"/>
           <p:cNvSpPr txBox="1"/>
           <p:nvPr/>
         </p:nvSpPr>
@@ -11299,44 +10159,9 @@
           </a:fontRef>
         </p:style>
       </p:cxnSp>
-      <p:sp>
-        <p:nvSpPr>
-          <p:cNvPr id="5" name="TextBox 4"/>
-          <p:cNvSpPr txBox="1"/>
-          <p:nvPr/>
-        </p:nvSpPr>
-        <p:spPr>
-          <a:xfrm>
-            <a:off x="777240" y="1261872"/>
-            <a:ext cx="10607040" cy="310896"/>
-          </a:xfrm>
-          <a:prstGeom prst="rect">
-            <a:avLst/>
-          </a:prstGeom>
-          <a:noFill/>
-        </p:spPr>
-        <p:txBody>
-          <a:bodyPr wrap="square" lIns="45720" rIns="45720" tIns="18288" bIns="18288" anchor="t">
-            <a:spAutoFit/>
-          </a:bodyPr>
-          <a:lstStyle/>
-          <a:p>
-            <a:pPr algn="l"/>
-            <a:r>
-              <a:rPr sz="1700" b="0" i="1">
-                <a:solidFill>
-                  <a:srgbClr val="6B6B6B"/>
-                </a:solidFill>
-                <a:latin typeface="Century Schoolbook"/>
-              </a:rPr>
-              <a:t>Answer.</a:t>
-            </a:r>
-          </a:p>
-        </p:txBody>
-      </p:sp>
       <p:cxnSp>
         <p:nvCxnSpPr>
-          <p:cNvPr id="6" name="Connector 5"/>
+          <p:cNvPr id="5" name="Connector 4"/>
           <p:cNvCxnSpPr/>
           <p:nvPr/>
         </p:nvCxnSpPr>
@@ -11371,7 +10196,7 @@
       </p:cxnSp>
       <p:sp>
         <p:nvSpPr>
-          <p:cNvPr id="7" name="TextBox 6"/>
+          <p:cNvPr id="6" name="TextBox 5"/>
           <p:cNvSpPr txBox="1"/>
           <p:nvPr/>
         </p:nvSpPr>
@@ -11406,7 +10231,7 @@
       </p:sp>
       <p:sp>
         <p:nvSpPr>
-          <p:cNvPr id="8" name="TextBox 7"/>
+          <p:cNvPr id="7" name="TextBox 6"/>
           <p:cNvSpPr txBox="1"/>
           <p:nvPr/>
         </p:nvSpPr>
@@ -11441,7 +10266,7 @@
       </p:sp>
       <p:sp>
         <p:nvSpPr>
-          <p:cNvPr id="9" name="TextBox 8"/>
+          <p:cNvPr id="8" name="TextBox 7"/>
           <p:cNvSpPr txBox="1"/>
           <p:nvPr/>
         </p:nvSpPr>
@@ -11476,7 +10301,7 @@
       </p:sp>
       <p:pic>
         <p:nvPicPr>
-          <p:cNvPr id="10" name="Picture 9" descr="e98b31f32f5b097f.png"/>
+          <p:cNvPr id="9" name="Picture 8" descr="e98b31f32f5b097f.png"/>
           <p:cNvPicPr>
             <a:picLocks noChangeAspect="1"/>
           </p:cNvPicPr>
@@ -11500,7 +10325,7 @@
       </p:pic>
       <p:sp>
         <p:nvSpPr>
-          <p:cNvPr id="11" name="TextBox 10"/>
+          <p:cNvPr id="10" name="TextBox 9"/>
           <p:cNvSpPr txBox="1"/>
           <p:nvPr/>
         </p:nvSpPr>
@@ -11535,7 +10360,7 @@
       </p:sp>
       <p:pic>
         <p:nvPicPr>
-          <p:cNvPr id="12" name="Picture 11" descr="ccaef7e81c68392e.png"/>
+          <p:cNvPr id="11" name="Picture 10" descr="ccaef7e81c68392e.png"/>
           <p:cNvPicPr>
             <a:picLocks noChangeAspect="1"/>
           </p:cNvPicPr>
@@ -11559,7 +10384,7 @@
       </p:pic>
       <p:sp>
         <p:nvSpPr>
-          <p:cNvPr id="13" name="TextBox 12"/>
+          <p:cNvPr id="12" name="TextBox 11"/>
           <p:cNvSpPr txBox="1"/>
           <p:nvPr/>
         </p:nvSpPr>
@@ -11594,7 +10419,7 @@
       </p:sp>
       <p:sp>
         <p:nvSpPr>
-          <p:cNvPr id="14" name="TextBox 13"/>
+          <p:cNvPr id="13" name="TextBox 12"/>
           <p:cNvSpPr txBox="1"/>
           <p:nvPr/>
         </p:nvSpPr>
@@ -11638,7 +10463,7 @@
       </p:sp>
       <p:sp>
         <p:nvSpPr>
-          <p:cNvPr id="15" name="TextBox 14"/>
+          <p:cNvPr id="14" name="TextBox 13"/>
           <p:cNvSpPr txBox="1"/>
           <p:nvPr/>
         </p:nvSpPr>
@@ -11682,7 +10507,7 @@
       </p:sp>
       <p:sp>
         <p:nvSpPr>
-          <p:cNvPr id="16" name="TextBox 15"/>
+          <p:cNvPr id="15" name="TextBox 14"/>
           <p:cNvSpPr txBox="1"/>
           <p:nvPr/>
         </p:nvSpPr>
@@ -11726,7 +10551,7 @@
       </p:sp>
       <p:sp>
         <p:nvSpPr>
-          <p:cNvPr id="17" name="TextBox 16"/>
+          <p:cNvPr id="16" name="TextBox 15"/>
           <p:cNvSpPr txBox="1"/>
           <p:nvPr/>
         </p:nvSpPr>
@@ -11770,7 +10595,7 @@
       </p:sp>
       <p:sp>
         <p:nvSpPr>
-          <p:cNvPr id="18" name="TextBox 17"/>
+          <p:cNvPr id="17" name="TextBox 16"/>
           <p:cNvSpPr txBox="1"/>
           <p:nvPr/>
         </p:nvSpPr>
@@ -11926,44 +10751,9 @@
           </a:fontRef>
         </p:style>
       </p:cxnSp>
-      <p:sp>
-        <p:nvSpPr>
-          <p:cNvPr id="5" name="TextBox 4"/>
-          <p:cNvSpPr txBox="1"/>
-          <p:nvPr/>
-        </p:nvSpPr>
-        <p:spPr>
-          <a:xfrm>
-            <a:off x="777240" y="1261872"/>
-            <a:ext cx="10607040" cy="310896"/>
-          </a:xfrm>
-          <a:prstGeom prst="rect">
-            <a:avLst/>
-          </a:prstGeom>
-          <a:noFill/>
-        </p:spPr>
-        <p:txBody>
-          <a:bodyPr wrap="square" lIns="45720" rIns="45720" tIns="18288" bIns="18288" anchor="t">
-            <a:spAutoFit/>
-          </a:bodyPr>
-          <a:lstStyle/>
-          <a:p>
-            <a:pPr algn="l"/>
-            <a:r>
-              <a:rPr sz="1700" b="0" i="1">
-                <a:solidFill>
-                  <a:srgbClr val="6B6B6B"/>
-                </a:solidFill>
-                <a:latin typeface="Century Schoolbook"/>
-              </a:rPr>
-              <a:t>Boards up on three.</a:t>
-            </a:r>
-          </a:p>
-        </p:txBody>
-      </p:sp>
       <p:cxnSp>
         <p:nvCxnSpPr>
-          <p:cNvPr id="6" name="Connector 5"/>
+          <p:cNvPr id="5" name="Connector 4"/>
           <p:cNvCxnSpPr/>
           <p:nvPr/>
         </p:nvCxnSpPr>
@@ -11998,7 +10788,7 @@
       </p:cxnSp>
       <p:sp>
         <p:nvSpPr>
-          <p:cNvPr id="7" name="TextBox 6"/>
+          <p:cNvPr id="6" name="TextBox 5"/>
           <p:cNvSpPr txBox="1"/>
           <p:nvPr/>
         </p:nvSpPr>
@@ -12033,7 +10823,7 @@
       </p:sp>
       <p:sp>
         <p:nvSpPr>
-          <p:cNvPr id="8" name="TextBox 7"/>
+          <p:cNvPr id="7" name="TextBox 6"/>
           <p:cNvSpPr txBox="1"/>
           <p:nvPr/>
         </p:nvSpPr>
@@ -12068,7 +10858,7 @@
       </p:sp>
       <p:sp>
         <p:nvSpPr>
-          <p:cNvPr id="9" name="TextBox 8"/>
+          <p:cNvPr id="8" name="TextBox 7"/>
           <p:cNvSpPr txBox="1"/>
           <p:nvPr/>
         </p:nvSpPr>
@@ -12103,7 +10893,7 @@
       </p:sp>
       <p:pic>
         <p:nvPicPr>
-          <p:cNvPr id="10" name="Picture 9" descr="746391bb3aa38924.png"/>
+          <p:cNvPr id="9" name="Picture 8" descr="746391bb3aa38924.png"/>
           <p:cNvPicPr>
             <a:picLocks noChangeAspect="1"/>
           </p:cNvPicPr>
@@ -12127,7 +10917,7 @@
       </p:pic>
       <p:sp>
         <p:nvSpPr>
-          <p:cNvPr id="11" name="TextBox 10"/>
+          <p:cNvPr id="10" name="TextBox 9"/>
           <p:cNvSpPr txBox="1"/>
           <p:nvPr/>
         </p:nvSpPr>
@@ -12162,7 +10952,7 @@
       </p:sp>
       <p:pic>
         <p:nvPicPr>
-          <p:cNvPr id="12" name="Picture 11" descr="9027aa45f8c131e6.png"/>
+          <p:cNvPr id="11" name="Picture 10" descr="9027aa45f8c131e6.png"/>
           <p:cNvPicPr>
             <a:picLocks noChangeAspect="1"/>
           </p:cNvPicPr>
@@ -12186,7 +10976,7 @@
       </p:pic>
       <p:sp>
         <p:nvSpPr>
-          <p:cNvPr id="13" name="TextBox 12"/>
+          <p:cNvPr id="12" name="TextBox 11"/>
           <p:cNvSpPr txBox="1"/>
           <p:nvPr/>
         </p:nvSpPr>
@@ -12221,7 +11011,7 @@
       </p:sp>
       <p:sp>
         <p:nvSpPr>
-          <p:cNvPr id="14" name="TextBox 13"/>
+          <p:cNvPr id="13" name="TextBox 12"/>
           <p:cNvSpPr txBox="1"/>
           <p:nvPr/>
         </p:nvSpPr>
@@ -12250,41 +11040,6 @@
                 <a:latin typeface="Century Schoolbook"/>
               </a:rPr>
               <a:t>Answer it.</a:t>
-            </a:r>
-          </a:p>
-        </p:txBody>
-      </p:sp>
-      <p:sp>
-        <p:nvSpPr>
-          <p:cNvPr id="15" name="TextBox 14"/>
-          <p:cNvSpPr txBox="1"/>
-          <p:nvPr/>
-        </p:nvSpPr>
-        <p:spPr>
-          <a:xfrm>
-            <a:off x="777240" y="4828032"/>
-            <a:ext cx="10607040" cy="365760"/>
-          </a:xfrm>
-          <a:prstGeom prst="rect">
-            <a:avLst/>
-          </a:prstGeom>
-          <a:noFill/>
-        </p:spPr>
-        <p:txBody>
-          <a:bodyPr wrap="square" lIns="45720" rIns="45720" tIns="18288" bIns="18288" anchor="t">
-            <a:spAutoFit/>
-          </a:bodyPr>
-          <a:lstStyle/>
-          <a:p>
-            <a:pPr algn="ctr"/>
-            <a:r>
-              <a:rPr sz="1900" b="0" i="1">
-                <a:solidFill>
-                  <a:srgbClr val="6B6B6B"/>
-                </a:solidFill>
-                <a:latin typeface="Century Schoolbook"/>
-              </a:rPr>
-              <a:t>Compare the exponents first.</a:t>
             </a:r>
           </a:p>
         </p:txBody>
@@ -12412,44 +11167,9 @@
           </a:fontRef>
         </p:style>
       </p:cxnSp>
-      <p:sp>
-        <p:nvSpPr>
-          <p:cNvPr id="5" name="TextBox 4"/>
-          <p:cNvSpPr txBox="1"/>
-          <p:nvPr/>
-        </p:nvSpPr>
-        <p:spPr>
-          <a:xfrm>
-            <a:off x="777240" y="1261872"/>
-            <a:ext cx="10607040" cy="310896"/>
-          </a:xfrm>
-          <a:prstGeom prst="rect">
-            <a:avLst/>
-          </a:prstGeom>
-          <a:noFill/>
-        </p:spPr>
-        <p:txBody>
-          <a:bodyPr wrap="square" lIns="45720" rIns="45720" tIns="18288" bIns="18288" anchor="t">
-            <a:spAutoFit/>
-          </a:bodyPr>
-          <a:lstStyle/>
-          <a:p>
-            <a:pPr algn="l"/>
-            <a:r>
-              <a:rPr sz="1700" b="0" i="1">
-                <a:solidFill>
-                  <a:srgbClr val="6B6B6B"/>
-                </a:solidFill>
-                <a:latin typeface="Century Schoolbook"/>
-              </a:rPr>
-              <a:t>Answer.</a:t>
-            </a:r>
-          </a:p>
-        </p:txBody>
-      </p:sp>
       <p:cxnSp>
         <p:nvCxnSpPr>
-          <p:cNvPr id="6" name="Connector 5"/>
+          <p:cNvPr id="5" name="Connector 4"/>
           <p:cNvCxnSpPr/>
           <p:nvPr/>
         </p:nvCxnSpPr>
@@ -12484,7 +11204,7 @@
       </p:cxnSp>
       <p:sp>
         <p:nvSpPr>
-          <p:cNvPr id="7" name="TextBox 6"/>
+          <p:cNvPr id="6" name="TextBox 5"/>
           <p:cNvSpPr txBox="1"/>
           <p:nvPr/>
         </p:nvSpPr>
@@ -12519,7 +11239,7 @@
       </p:sp>
       <p:sp>
         <p:nvSpPr>
-          <p:cNvPr id="8" name="TextBox 7"/>
+          <p:cNvPr id="7" name="TextBox 6"/>
           <p:cNvSpPr txBox="1"/>
           <p:nvPr/>
         </p:nvSpPr>
@@ -12554,7 +11274,7 @@
       </p:sp>
       <p:sp>
         <p:nvSpPr>
-          <p:cNvPr id="9" name="TextBox 8"/>
+          <p:cNvPr id="8" name="TextBox 7"/>
           <p:cNvSpPr txBox="1"/>
           <p:nvPr/>
         </p:nvSpPr>
@@ -12589,7 +11309,7 @@
       </p:sp>
       <p:pic>
         <p:nvPicPr>
-          <p:cNvPr id="10" name="Picture 9" descr="df917c83e179d439.png"/>
+          <p:cNvPr id="9" name="Picture 8" descr="df917c83e179d439.png"/>
           <p:cNvPicPr>
             <a:picLocks noChangeAspect="1"/>
           </p:cNvPicPr>
@@ -12613,7 +11333,7 @@
       </p:pic>
       <p:sp>
         <p:nvSpPr>
-          <p:cNvPr id="11" name="TextBox 10"/>
+          <p:cNvPr id="10" name="TextBox 9"/>
           <p:cNvSpPr txBox="1"/>
           <p:nvPr/>
         </p:nvSpPr>
@@ -12648,7 +11368,7 @@
       </p:sp>
       <p:pic>
         <p:nvPicPr>
-          <p:cNvPr id="12" name="Picture 11" descr="1a294302f9ade9e4.png"/>
+          <p:cNvPr id="11" name="Picture 10" descr="1a294302f9ade9e4.png"/>
           <p:cNvPicPr>
             <a:picLocks noChangeAspect="1"/>
           </p:cNvPicPr>
@@ -12672,7 +11392,7 @@
       </p:pic>
       <p:sp>
         <p:nvSpPr>
-          <p:cNvPr id="13" name="TextBox 12"/>
+          <p:cNvPr id="12" name="TextBox 11"/>
           <p:cNvSpPr txBox="1"/>
           <p:nvPr/>
         </p:nvSpPr>
@@ -12707,60 +11427,7 @@
       </p:sp>
       <p:sp>
         <p:nvSpPr>
-          <p:cNvPr id="14" name="TextBox 13"/>
-          <p:cNvSpPr txBox="1"/>
-          <p:nvPr/>
-        </p:nvSpPr>
-        <p:spPr>
-          <a:xfrm>
-            <a:off x="1828800" y="2834639"/>
-            <a:ext cx="8503920" cy="548640"/>
-          </a:xfrm>
-          <a:prstGeom prst="rect">
-            <a:avLst/>
-          </a:prstGeom>
-          <a:noFill/>
-        </p:spPr>
-        <p:txBody>
-          <a:bodyPr wrap="square" lIns="45720" rIns="45720" tIns="18288" bIns="18288" anchor="t">
-            <a:spAutoFit/>
-          </a:bodyPr>
-          <a:lstStyle/>
-          <a:p>
-            <a:pPr algn="ctr"/>
-            <a:r>
-              <a:rPr sz="2400" b="0" i="0">
-                <a:solidFill>
-                  <a:srgbClr val="6B6B6B"/>
-                </a:solidFill>
-                <a:latin typeface="Century Schoolbook"/>
-              </a:rPr>
-              <a:t>−5 &gt; −8, so 10</a:t>
-            </a:r>
-            <a:r>
-              <a:rPr sz="2400" b="0" i="0" baseline="30000">
-                <a:solidFill>
-                  <a:srgbClr val="6B6B6B"/>
-                </a:solidFill>
-                <a:latin typeface="Century Schoolbook"/>
-              </a:rPr>
-              <a:t>-5</a:t>
-            </a:r>
-            <a:r>
-              <a:rPr sz="2400" b="0" i="0">
-                <a:solidFill>
-                  <a:srgbClr val="6B6B6B"/>
-                </a:solidFill>
-                <a:latin typeface="Century Schoolbook"/>
-              </a:rPr>
-              <a:t> is the larger power</a:t>
-            </a:r>
-          </a:p>
-        </p:txBody>
-      </p:sp>
-      <p:sp>
-        <p:nvSpPr>
-          <p:cNvPr id="15" name="TextBox 14"/>
+          <p:cNvPr id="13" name="TextBox 12"/>
           <p:cNvSpPr txBox="1"/>
           <p:nvPr/>
         </p:nvSpPr>
@@ -12925,44 +11592,9 @@
           </a:fontRef>
         </p:style>
       </p:cxnSp>
-      <p:sp>
-        <p:nvSpPr>
-          <p:cNvPr id="5" name="TextBox 4"/>
-          <p:cNvSpPr txBox="1"/>
-          <p:nvPr/>
-        </p:nvSpPr>
-        <p:spPr>
-          <a:xfrm>
-            <a:off x="777240" y="1261872"/>
-            <a:ext cx="10607040" cy="310896"/>
-          </a:xfrm>
-          <a:prstGeom prst="rect">
-            <a:avLst/>
-          </a:prstGeom>
-          <a:noFill/>
-        </p:spPr>
-        <p:txBody>
-          <a:bodyPr wrap="square" lIns="45720" rIns="45720" tIns="18288" bIns="18288" anchor="t">
-            <a:spAutoFit/>
-          </a:bodyPr>
-          <a:lstStyle/>
-          <a:p>
-            <a:pPr algn="l"/>
-            <a:r>
-              <a:rPr sz="1700" b="0" i="1">
-                <a:solidFill>
-                  <a:srgbClr val="6B6B6B"/>
-                </a:solidFill>
-                <a:latin typeface="Century Schoolbook"/>
-              </a:rPr>
-              <a:t>Boards up on three.</a:t>
-            </a:r>
-          </a:p>
-        </p:txBody>
-      </p:sp>
       <p:cxnSp>
         <p:nvCxnSpPr>
-          <p:cNvPr id="6" name="Connector 5"/>
+          <p:cNvPr id="5" name="Connector 4"/>
           <p:cNvCxnSpPr/>
           <p:nvPr/>
         </p:nvCxnSpPr>
@@ -12997,7 +11629,7 @@
       </p:cxnSp>
       <p:sp>
         <p:nvSpPr>
-          <p:cNvPr id="7" name="TextBox 6"/>
+          <p:cNvPr id="6" name="TextBox 5"/>
           <p:cNvSpPr txBox="1"/>
           <p:nvPr/>
         </p:nvSpPr>
@@ -13032,7 +11664,7 @@
       </p:sp>
       <p:sp>
         <p:nvSpPr>
-          <p:cNvPr id="8" name="TextBox 7"/>
+          <p:cNvPr id="7" name="TextBox 6"/>
           <p:cNvSpPr txBox="1"/>
           <p:nvPr/>
         </p:nvSpPr>
@@ -13067,7 +11699,7 @@
       </p:sp>
       <p:sp>
         <p:nvSpPr>
-          <p:cNvPr id="9" name="TextBox 8"/>
+          <p:cNvPr id="8" name="TextBox 7"/>
           <p:cNvSpPr txBox="1"/>
           <p:nvPr/>
         </p:nvSpPr>
@@ -13102,7 +11734,7 @@
       </p:sp>
       <p:sp>
         <p:nvSpPr>
-          <p:cNvPr id="10" name="TextBox 9"/>
+          <p:cNvPr id="9" name="TextBox 8"/>
           <p:cNvSpPr txBox="1"/>
           <p:nvPr/>
         </p:nvSpPr>
@@ -13137,7 +11769,7 @@
       </p:sp>
       <p:sp>
         <p:nvSpPr>
-          <p:cNvPr id="11" name="TextBox 10"/>
+          <p:cNvPr id="10" name="TextBox 9"/>
           <p:cNvSpPr txBox="1"/>
           <p:nvPr/>
         </p:nvSpPr>
@@ -13166,59 +11798,6 @@
                 <a:latin typeface="Century Schoolbook"/>
               </a:rPr>
               <a:t>Answer it.</a:t>
-            </a:r>
-          </a:p>
-        </p:txBody>
-      </p:sp>
-      <p:sp>
-        <p:nvSpPr>
-          <p:cNvPr id="12" name="TextBox 11"/>
-          <p:cNvSpPr txBox="1"/>
-          <p:nvPr/>
-        </p:nvSpPr>
-        <p:spPr>
-          <a:xfrm>
-            <a:off x="777240" y="4828032"/>
-            <a:ext cx="10607040" cy="365760"/>
-          </a:xfrm>
-          <a:prstGeom prst="rect">
-            <a:avLst/>
-          </a:prstGeom>
-          <a:noFill/>
-        </p:spPr>
-        <p:txBody>
-          <a:bodyPr wrap="square" lIns="45720" rIns="45720" tIns="18288" bIns="18288" anchor="t">
-            <a:spAutoFit/>
-          </a:bodyPr>
-          <a:lstStyle/>
-          <a:p>
-            <a:pPr algn="ctr"/>
-            <a:r>
-              <a:rPr sz="1900" b="0" i="1">
-                <a:solidFill>
-                  <a:srgbClr val="6B6B6B"/>
-                </a:solidFill>
-                <a:latin typeface="Century Schoolbook"/>
-              </a:rPr>
-              <a:t>E−6 means × 10</a:t>
-            </a:r>
-            <a:r>
-              <a:rPr sz="1900" b="0" i="1" baseline="30000">
-                <a:solidFill>
-                  <a:srgbClr val="6B6B6B"/>
-                </a:solidFill>
-                <a:latin typeface="Century Schoolbook"/>
-              </a:rPr>
-              <a:t>-6</a:t>
-            </a:r>
-            <a:r>
-              <a:rPr sz="1900" b="0" i="1">
-                <a:solidFill>
-                  <a:srgbClr val="6B6B6B"/>
-                </a:solidFill>
-                <a:latin typeface="Century Schoolbook"/>
-              </a:rPr>
-              <a:t>.</a:t>
             </a:r>
           </a:p>
         </p:txBody>
@@ -13346,44 +11925,9 @@
           </a:fontRef>
         </p:style>
       </p:cxnSp>
-      <p:sp>
-        <p:nvSpPr>
-          <p:cNvPr id="5" name="TextBox 4"/>
-          <p:cNvSpPr txBox="1"/>
-          <p:nvPr/>
-        </p:nvSpPr>
-        <p:spPr>
-          <a:xfrm>
-            <a:off x="777240" y="1261872"/>
-            <a:ext cx="10607040" cy="310896"/>
-          </a:xfrm>
-          <a:prstGeom prst="rect">
-            <a:avLst/>
-          </a:prstGeom>
-          <a:noFill/>
-        </p:spPr>
-        <p:txBody>
-          <a:bodyPr wrap="square" lIns="45720" rIns="45720" tIns="18288" bIns="18288" anchor="t">
-            <a:spAutoFit/>
-          </a:bodyPr>
-          <a:lstStyle/>
-          <a:p>
-            <a:pPr algn="l"/>
-            <a:r>
-              <a:rPr sz="1700" b="0" i="1">
-                <a:solidFill>
-                  <a:srgbClr val="6B6B6B"/>
-                </a:solidFill>
-                <a:latin typeface="Century Schoolbook"/>
-              </a:rPr>
-              <a:t>Answers.</a:t>
-            </a:r>
-          </a:p>
-        </p:txBody>
-      </p:sp>
       <p:cxnSp>
         <p:nvCxnSpPr>
-          <p:cNvPr id="6" name="Connector 5"/>
+          <p:cNvPr id="5" name="Connector 4"/>
           <p:cNvCxnSpPr/>
           <p:nvPr/>
         </p:nvCxnSpPr>
@@ -13418,7 +11962,7 @@
       </p:cxnSp>
       <p:sp>
         <p:nvSpPr>
-          <p:cNvPr id="7" name="TextBox 6"/>
+          <p:cNvPr id="6" name="TextBox 5"/>
           <p:cNvSpPr txBox="1"/>
           <p:nvPr/>
         </p:nvSpPr>
@@ -13453,7 +11997,7 @@
       </p:sp>
       <p:sp>
         <p:nvSpPr>
-          <p:cNvPr id="8" name="TextBox 7"/>
+          <p:cNvPr id="7" name="TextBox 6"/>
           <p:cNvSpPr txBox="1"/>
           <p:nvPr/>
         </p:nvSpPr>
@@ -13488,13 +12032,13 @@
       </p:sp>
       <p:sp>
         <p:nvSpPr>
-          <p:cNvPr id="9" name="TextBox 8"/>
-          <p:cNvSpPr txBox="1"/>
-          <p:nvPr/>
-        </p:nvSpPr>
-        <p:spPr>
-          <a:xfrm>
-            <a:off x="1874519" y="1760220"/>
+          <p:cNvPr id="8" name="TextBox 7"/>
+          <p:cNvSpPr txBox="1"/>
+          <p:nvPr/>
+        </p:nvSpPr>
+        <p:spPr>
+          <a:xfrm>
+            <a:off x="1874519" y="1440180"/>
             <a:ext cx="6249754" cy="457200"/>
           </a:xfrm>
           <a:prstGeom prst="rect">
@@ -13523,13 +12067,13 @@
       </p:sp>
       <p:sp>
         <p:nvSpPr>
-          <p:cNvPr id="10" name="TextBox 9"/>
-          <p:cNvSpPr txBox="1"/>
-          <p:nvPr/>
-        </p:nvSpPr>
-        <p:spPr>
-          <a:xfrm>
-            <a:off x="8535754" y="1760220"/>
+          <p:cNvPr id="9" name="TextBox 8"/>
+          <p:cNvSpPr txBox="1"/>
+          <p:nvPr/>
+        </p:nvSpPr>
+        <p:spPr>
+          <a:xfrm>
+            <a:off x="8535754" y="1440180"/>
             <a:ext cx="1459438" cy="457200"/>
           </a:xfrm>
           <a:prstGeom prst="rect">
@@ -13567,13 +12111,13 @@
       </p:sp>
       <p:sp>
         <p:nvSpPr>
-          <p:cNvPr id="11" name="TextBox 10"/>
-          <p:cNvSpPr txBox="1"/>
-          <p:nvPr/>
-        </p:nvSpPr>
-        <p:spPr>
-          <a:xfrm>
-            <a:off x="1874519" y="2372868"/>
+          <p:cNvPr id="10" name="TextBox 9"/>
+          <p:cNvSpPr txBox="1"/>
+          <p:nvPr/>
+        </p:nvSpPr>
+        <p:spPr>
+          <a:xfrm>
+            <a:off x="1874519" y="2052828"/>
             <a:ext cx="1700544" cy="457200"/>
           </a:xfrm>
           <a:prstGeom prst="rect">
@@ -13602,7 +12146,7 @@
       </p:sp>
       <p:pic>
         <p:nvPicPr>
-          <p:cNvPr id="12" name="Picture 11" descr="fc19434018fde666.png"/>
+          <p:cNvPr id="11" name="Picture 10" descr="fc19434018fde666.png"/>
           <p:cNvPicPr>
             <a:picLocks noChangeAspect="1"/>
           </p:cNvPicPr>
@@ -13616,7 +12160,7 @@
         </p:blipFill>
         <p:spPr>
           <a:xfrm>
-            <a:off x="3437904" y="2461260"/>
+            <a:off x="3437904" y="2141220"/>
             <a:ext cx="557784" cy="280416"/>
           </a:xfrm>
           <a:prstGeom prst="rect">
@@ -13626,13 +12170,13 @@
       </p:pic>
       <p:sp>
         <p:nvSpPr>
-          <p:cNvPr id="13" name="TextBox 12"/>
-          <p:cNvSpPr txBox="1"/>
-          <p:nvPr/>
-        </p:nvSpPr>
-        <p:spPr>
-          <a:xfrm>
-            <a:off x="3995688" y="2372868"/>
+          <p:cNvPr id="12" name="TextBox 11"/>
+          <p:cNvSpPr txBox="1"/>
+          <p:nvPr/>
+        </p:nvSpPr>
+        <p:spPr>
+          <a:xfrm>
+            <a:off x="3995688" y="2052828"/>
             <a:ext cx="2239077" cy="457200"/>
           </a:xfrm>
           <a:prstGeom prst="rect">
@@ -13661,7 +12205,7 @@
       </p:sp>
       <p:pic>
         <p:nvPicPr>
-          <p:cNvPr id="14" name="Picture 13" descr="357ee64ca77eb39d.png"/>
+          <p:cNvPr id="13" name="Picture 12" descr="357ee64ca77eb39d.png"/>
           <p:cNvPicPr>
             <a:picLocks noChangeAspect="1"/>
           </p:cNvPicPr>
@@ -13675,7 +12219,7 @@
         </p:blipFill>
         <p:spPr>
           <a:xfrm>
-            <a:off x="6646246" y="2395728"/>
+            <a:off x="6646246" y="2075688"/>
             <a:ext cx="746760" cy="600456"/>
           </a:xfrm>
           <a:prstGeom prst="rect">
@@ -13685,13 +12229,13 @@
       </p:pic>
       <p:sp>
         <p:nvSpPr>
-          <p:cNvPr id="15" name="TextBox 14"/>
-          <p:cNvSpPr txBox="1"/>
-          <p:nvPr/>
-        </p:nvSpPr>
-        <p:spPr>
-          <a:xfrm>
-            <a:off x="1874519" y="2985516"/>
+          <p:cNvPr id="14" name="TextBox 13"/>
+          <p:cNvSpPr txBox="1"/>
+          <p:nvPr/>
+        </p:nvSpPr>
+        <p:spPr>
+          <a:xfrm>
+            <a:off x="1874519" y="2665476"/>
             <a:ext cx="726811" cy="457200"/>
           </a:xfrm>
           <a:prstGeom prst="rect">
@@ -13720,7 +12264,7 @@
       </p:sp>
       <p:pic>
         <p:nvPicPr>
-          <p:cNvPr id="16" name="Picture 15" descr="c7ed55c1b2138954.png"/>
+          <p:cNvPr id="15" name="Picture 14" descr="c7ed55c1b2138954.png"/>
           <p:cNvPicPr>
             <a:picLocks noChangeAspect="1"/>
           </p:cNvPicPr>
@@ -13734,7 +12278,7 @@
         </p:blipFill>
         <p:spPr>
           <a:xfrm>
-            <a:off x="2464171" y="3009900"/>
+            <a:off x="2464171" y="2689860"/>
             <a:ext cx="688848" cy="408432"/>
           </a:xfrm>
           <a:prstGeom prst="rect">
@@ -13744,13 +12288,13 @@
       </p:pic>
       <p:sp>
         <p:nvSpPr>
-          <p:cNvPr id="17" name="TextBox 16"/>
-          <p:cNvSpPr txBox="1"/>
-          <p:nvPr/>
-        </p:nvSpPr>
-        <p:spPr>
-          <a:xfrm>
-            <a:off x="3153019" y="2985516"/>
+          <p:cNvPr id="16" name="TextBox 15"/>
+          <p:cNvSpPr txBox="1"/>
+          <p:nvPr/>
+        </p:nvSpPr>
+        <p:spPr>
+          <a:xfrm>
+            <a:off x="3153019" y="2665476"/>
             <a:ext cx="5819653" cy="457200"/>
           </a:xfrm>
           <a:prstGeom prst="rect">
@@ -13779,13 +12323,13 @@
       </p:sp>
       <p:sp>
         <p:nvSpPr>
-          <p:cNvPr id="18" name="TextBox 17"/>
-          <p:cNvSpPr txBox="1"/>
-          <p:nvPr/>
-        </p:nvSpPr>
-        <p:spPr>
-          <a:xfrm>
-            <a:off x="9384153" y="2985516"/>
+          <p:cNvPr id="17" name="TextBox 16"/>
+          <p:cNvSpPr txBox="1"/>
+          <p:nvPr/>
+        </p:nvSpPr>
+        <p:spPr>
+          <a:xfrm>
+            <a:off x="9384153" y="2665476"/>
             <a:ext cx="1529062" cy="457200"/>
           </a:xfrm>
           <a:prstGeom prst="rect">
@@ -13814,13 +12358,13 @@
       </p:sp>
       <p:sp>
         <p:nvSpPr>
-          <p:cNvPr id="19" name="TextBox 18"/>
-          <p:cNvSpPr txBox="1"/>
-          <p:nvPr/>
-        </p:nvSpPr>
-        <p:spPr>
-          <a:xfrm>
-            <a:off x="1874519" y="3598164"/>
+          <p:cNvPr id="18" name="TextBox 17"/>
+          <p:cNvSpPr txBox="1"/>
+          <p:nvPr/>
+        </p:nvSpPr>
+        <p:spPr>
+          <a:xfrm>
+            <a:off x="1874519" y="3278124"/>
             <a:ext cx="4504058" cy="457200"/>
           </a:xfrm>
           <a:prstGeom prst="rect">
@@ -13849,7 +12393,7 @@
       </p:sp>
       <p:pic>
         <p:nvPicPr>
-          <p:cNvPr id="20" name="Picture 19" descr="0d671d8905812bd4.png"/>
+          <p:cNvPr id="19" name="Picture 18" descr="0d671d8905812bd4.png"/>
           <p:cNvPicPr>
             <a:picLocks noChangeAspect="1"/>
           </p:cNvPicPr>
@@ -13863,7 +12407,7 @@
         </p:blipFill>
         <p:spPr>
           <a:xfrm>
-            <a:off x="6790058" y="3621024"/>
+            <a:off x="6790058" y="3300984"/>
             <a:ext cx="746760" cy="597408"/>
           </a:xfrm>
           <a:prstGeom prst="rect">
@@ -13994,44 +12538,9 @@
           </a:fontRef>
         </p:style>
       </p:cxnSp>
-      <p:sp>
-        <p:nvSpPr>
-          <p:cNvPr id="5" name="TextBox 4"/>
-          <p:cNvSpPr txBox="1"/>
-          <p:nvPr/>
-        </p:nvSpPr>
-        <p:spPr>
-          <a:xfrm>
-            <a:off x="777240" y="1261872"/>
-            <a:ext cx="10607040" cy="310896"/>
-          </a:xfrm>
-          <a:prstGeom prst="rect">
-            <a:avLst/>
-          </a:prstGeom>
-          <a:noFill/>
-        </p:spPr>
-        <p:txBody>
-          <a:bodyPr wrap="square" lIns="45720" rIns="45720" tIns="18288" bIns="18288" anchor="t">
-            <a:spAutoFit/>
-          </a:bodyPr>
-          <a:lstStyle/>
-          <a:p>
-            <a:pPr algn="l"/>
-            <a:r>
-              <a:rPr sz="1700" b="0" i="1">
-                <a:solidFill>
-                  <a:srgbClr val="6B6B6B"/>
-                </a:solidFill>
-                <a:latin typeface="Century Schoolbook"/>
-              </a:rPr>
-              <a:t>Answer.</a:t>
-            </a:r>
-          </a:p>
-        </p:txBody>
-      </p:sp>
       <p:cxnSp>
         <p:nvCxnSpPr>
-          <p:cNvPr id="6" name="Connector 5"/>
+          <p:cNvPr id="5" name="Connector 4"/>
           <p:cNvCxnSpPr/>
           <p:nvPr/>
         </p:nvCxnSpPr>
@@ -14066,7 +12575,7 @@
       </p:cxnSp>
       <p:sp>
         <p:nvSpPr>
-          <p:cNvPr id="7" name="TextBox 6"/>
+          <p:cNvPr id="6" name="TextBox 5"/>
           <p:cNvSpPr txBox="1"/>
           <p:nvPr/>
         </p:nvSpPr>
@@ -14101,7 +12610,7 @@
       </p:sp>
       <p:sp>
         <p:nvSpPr>
-          <p:cNvPr id="8" name="TextBox 7"/>
+          <p:cNvPr id="7" name="TextBox 6"/>
           <p:cNvSpPr txBox="1"/>
           <p:nvPr/>
         </p:nvSpPr>
@@ -14136,7 +12645,7 @@
       </p:sp>
       <p:sp>
         <p:nvSpPr>
-          <p:cNvPr id="9" name="TextBox 8"/>
+          <p:cNvPr id="8" name="TextBox 7"/>
           <p:cNvSpPr txBox="1"/>
           <p:nvPr/>
         </p:nvSpPr>
@@ -14171,7 +12680,7 @@
       </p:sp>
       <p:sp>
         <p:nvSpPr>
-          <p:cNvPr id="10" name="TextBox 9"/>
+          <p:cNvPr id="9" name="TextBox 8"/>
           <p:cNvSpPr txBox="1"/>
           <p:nvPr/>
         </p:nvSpPr>
@@ -14206,51 +12715,7 @@
       </p:sp>
       <p:sp>
         <p:nvSpPr>
-          <p:cNvPr id="11" name="TextBox 10"/>
-          <p:cNvSpPr txBox="1"/>
-          <p:nvPr/>
-        </p:nvSpPr>
-        <p:spPr>
-          <a:xfrm>
-            <a:off x="1828800" y="3298598"/>
-            <a:ext cx="8503920" cy="548640"/>
-          </a:xfrm>
-          <a:prstGeom prst="rect">
-            <a:avLst/>
-          </a:prstGeom>
-          <a:noFill/>
-        </p:spPr>
-        <p:txBody>
-          <a:bodyPr wrap="square" lIns="45720" rIns="45720" tIns="18288" bIns="18288" anchor="t">
-            <a:spAutoFit/>
-          </a:bodyPr>
-          <a:lstStyle/>
-          <a:p>
-            <a:pPr algn="ctr"/>
-            <a:r>
-              <a:rPr sz="2400" b="0" i="0">
-                <a:solidFill>
-                  <a:srgbClr val="6B6B6B"/>
-                </a:solidFill>
-                <a:latin typeface="Century Schoolbook"/>
-              </a:rPr>
-              <a:t>4.2 × 10</a:t>
-            </a:r>
-            <a:r>
-              <a:rPr sz="2400" b="0" i="0" baseline="30000">
-                <a:solidFill>
-                  <a:srgbClr val="6B6B6B"/>
-                </a:solidFill>
-                <a:latin typeface="Century Schoolbook"/>
-              </a:rPr>
-              <a:t>-6</a:t>
-            </a:r>
-          </a:p>
-        </p:txBody>
-      </p:sp>
-      <p:sp>
-        <p:nvSpPr>
-          <p:cNvPr id="12" name="TextBox 11"/>
+          <p:cNvPr id="10" name="TextBox 9"/>
           <p:cNvSpPr txBox="1"/>
           <p:nvPr/>
         </p:nvSpPr>
@@ -14406,44 +12871,9 @@
           </a:fontRef>
         </p:style>
       </p:cxnSp>
-      <p:sp>
-        <p:nvSpPr>
-          <p:cNvPr id="5" name="TextBox 4"/>
-          <p:cNvSpPr txBox="1"/>
-          <p:nvPr/>
-        </p:nvSpPr>
-        <p:spPr>
-          <a:xfrm>
-            <a:off x="777240" y="1261872"/>
-            <a:ext cx="10607040" cy="310896"/>
-          </a:xfrm>
-          <a:prstGeom prst="rect">
-            <a:avLst/>
-          </a:prstGeom>
-          <a:noFill/>
-        </p:spPr>
-        <p:txBody>
-          <a:bodyPr wrap="square" lIns="45720" rIns="45720" tIns="18288" bIns="18288" anchor="t">
-            <a:spAutoFit/>
-          </a:bodyPr>
-          <a:lstStyle/>
-          <a:p>
-            <a:pPr algn="l"/>
-            <a:r>
-              <a:rPr sz="1700" b="0" i="1">
-                <a:solidFill>
-                  <a:srgbClr val="6B6B6B"/>
-                </a:solidFill>
-                <a:latin typeface="Century Schoolbook"/>
-              </a:rPr>
-              <a:t>Take your time. Boards up when you have written it.</a:t>
-            </a:r>
-          </a:p>
-        </p:txBody>
-      </p:sp>
       <p:cxnSp>
         <p:nvCxnSpPr>
-          <p:cNvPr id="6" name="Connector 5"/>
+          <p:cNvPr id="5" name="Connector 4"/>
           <p:cNvCxnSpPr/>
           <p:nvPr/>
         </p:nvCxnSpPr>
@@ -14478,7 +12908,7 @@
       </p:cxnSp>
       <p:sp>
         <p:nvSpPr>
-          <p:cNvPr id="7" name="TextBox 6"/>
+          <p:cNvPr id="6" name="TextBox 5"/>
           <p:cNvSpPr txBox="1"/>
           <p:nvPr/>
         </p:nvSpPr>
@@ -14513,7 +12943,7 @@
       </p:sp>
       <p:sp>
         <p:nvSpPr>
-          <p:cNvPr id="8" name="TextBox 7"/>
+          <p:cNvPr id="7" name="TextBox 6"/>
           <p:cNvSpPr txBox="1"/>
           <p:nvPr/>
         </p:nvSpPr>
@@ -14548,7 +12978,7 @@
       </p:sp>
       <p:sp>
         <p:nvSpPr>
-          <p:cNvPr id="9" name="TextBox 8"/>
+          <p:cNvPr id="8" name="TextBox 7"/>
           <p:cNvSpPr txBox="1"/>
           <p:nvPr/>
         </p:nvSpPr>
@@ -14583,7 +13013,7 @@
       </p:sp>
       <p:pic>
         <p:nvPicPr>
-          <p:cNvPr id="10" name="Picture 9" descr="24f5c2a7f64db6c9.png"/>
+          <p:cNvPr id="9" name="Picture 8" descr="24f5c2a7f64db6c9.png"/>
           <p:cNvPicPr>
             <a:picLocks noChangeAspect="1"/>
           </p:cNvPicPr>
@@ -14607,7 +13037,7 @@
       </p:pic>
       <p:sp>
         <p:nvSpPr>
-          <p:cNvPr id="11" name="TextBox 10"/>
+          <p:cNvPr id="10" name="TextBox 9"/>
           <p:cNvSpPr txBox="1"/>
           <p:nvPr/>
         </p:nvSpPr>
@@ -14642,7 +13072,7 @@
       </p:sp>
       <p:sp>
         <p:nvSpPr>
-          <p:cNvPr id="12" name="TextBox 11"/>
+          <p:cNvPr id="11" name="TextBox 10"/>
           <p:cNvSpPr txBox="1"/>
           <p:nvPr/>
         </p:nvSpPr>
@@ -14677,7 +13107,7 @@
       </p:sp>
       <p:pic>
         <p:nvPicPr>
-          <p:cNvPr id="13" name="Picture 12" descr="66c17032647eb85b.png"/>
+          <p:cNvPr id="12" name="Picture 11" descr="66c17032647eb85b.png"/>
           <p:cNvPicPr>
             <a:picLocks noChangeAspect="1"/>
           </p:cNvPicPr>
@@ -14701,7 +13131,7 @@
       </p:pic>
       <p:sp>
         <p:nvSpPr>
-          <p:cNvPr id="14" name="TextBox 13"/>
+          <p:cNvPr id="13" name="TextBox 12"/>
           <p:cNvSpPr txBox="1"/>
           <p:nvPr/>
         </p:nvSpPr>
@@ -14736,7 +13166,7 @@
       </p:sp>
       <p:sp>
         <p:nvSpPr>
-          <p:cNvPr id="15" name="TextBox 14"/>
+          <p:cNvPr id="14" name="TextBox 13"/>
           <p:cNvSpPr txBox="1"/>
           <p:nvPr/>
         </p:nvSpPr>
@@ -14771,7 +13201,7 @@
       </p:sp>
       <p:sp>
         <p:nvSpPr>
-          <p:cNvPr id="16" name="TextBox 15"/>
+          <p:cNvPr id="15" name="TextBox 14"/>
           <p:cNvSpPr txBox="1"/>
           <p:nvPr/>
         </p:nvSpPr>
@@ -14800,41 +13230,6 @@
                 <a:latin typeface="Century Schoolbook"/>
               </a:rPr>
               <a:t>Write your answer in sentences.</a:t>
-            </a:r>
-          </a:p>
-        </p:txBody>
-      </p:sp>
-      <p:sp>
-        <p:nvSpPr>
-          <p:cNvPr id="17" name="TextBox 16"/>
-          <p:cNvSpPr txBox="1"/>
-          <p:nvPr/>
-        </p:nvSpPr>
-        <p:spPr>
-          <a:xfrm>
-            <a:off x="777240" y="4828032"/>
-            <a:ext cx="10607040" cy="365760"/>
-          </a:xfrm>
-          <a:prstGeom prst="rect">
-            <a:avLst/>
-          </a:prstGeom>
-          <a:noFill/>
-        </p:spPr>
-        <p:txBody>
-          <a:bodyPr wrap="square" lIns="45720" rIns="45720" tIns="18288" bIns="18288" anchor="t">
-            <a:spAutoFit/>
-          </a:bodyPr>
-          <a:lstStyle/>
-          <a:p>
-            <a:pPr algn="ctr"/>
-            <a:r>
-              <a:rPr sz="1900" b="0" i="1">
-                <a:solidFill>
-                  <a:srgbClr val="6B6B6B"/>
-                </a:solidFill>
-                <a:latin typeface="Century Schoolbook"/>
-              </a:rPr>
-              <a:t>Same power of 10 — compare the coefficients.</a:t>
             </a:r>
           </a:p>
         </p:txBody>
@@ -14962,44 +13357,9 @@
           </a:fontRef>
         </p:style>
       </p:cxnSp>
-      <p:sp>
-        <p:nvSpPr>
-          <p:cNvPr id="5" name="TextBox 4"/>
-          <p:cNvSpPr txBox="1"/>
-          <p:nvPr/>
-        </p:nvSpPr>
-        <p:spPr>
-          <a:xfrm>
-            <a:off x="777240" y="1261872"/>
-            <a:ext cx="10607040" cy="310896"/>
-          </a:xfrm>
-          <a:prstGeom prst="rect">
-            <a:avLst/>
-          </a:prstGeom>
-          <a:noFill/>
-        </p:spPr>
-        <p:txBody>
-          <a:bodyPr wrap="square" lIns="45720" rIns="45720" tIns="18288" bIns="18288" anchor="t">
-            <a:spAutoFit/>
-          </a:bodyPr>
-          <a:lstStyle/>
-          <a:p>
-            <a:pPr algn="l"/>
-            <a:r>
-              <a:rPr sz="1700" b="0" i="1">
-                <a:solidFill>
-                  <a:srgbClr val="6B6B6B"/>
-                </a:solidFill>
-                <a:latin typeface="Century Schoolbook"/>
-              </a:rPr>
-              <a:t>Answer.</a:t>
-            </a:r>
-          </a:p>
-        </p:txBody>
-      </p:sp>
       <p:cxnSp>
         <p:nvCxnSpPr>
-          <p:cNvPr id="6" name="Connector 5"/>
+          <p:cNvPr id="5" name="Connector 4"/>
           <p:cNvCxnSpPr/>
           <p:nvPr/>
         </p:nvCxnSpPr>
@@ -15034,7 +13394,7 @@
       </p:cxnSp>
       <p:sp>
         <p:nvSpPr>
-          <p:cNvPr id="7" name="TextBox 6"/>
+          <p:cNvPr id="6" name="TextBox 5"/>
           <p:cNvSpPr txBox="1"/>
           <p:nvPr/>
         </p:nvSpPr>
@@ -15069,7 +13429,7 @@
       </p:sp>
       <p:sp>
         <p:nvSpPr>
-          <p:cNvPr id="8" name="TextBox 7"/>
+          <p:cNvPr id="7" name="TextBox 6"/>
           <p:cNvSpPr txBox="1"/>
           <p:nvPr/>
         </p:nvSpPr>
@@ -15104,7 +13464,7 @@
       </p:sp>
       <p:sp>
         <p:nvSpPr>
-          <p:cNvPr id="9" name="TextBox 8"/>
+          <p:cNvPr id="8" name="TextBox 7"/>
           <p:cNvSpPr txBox="1"/>
           <p:nvPr/>
         </p:nvSpPr>
@@ -15139,7 +13499,7 @@
       </p:sp>
       <p:pic>
         <p:nvPicPr>
-          <p:cNvPr id="10" name="Picture 9" descr="77a4d57c92c152c2.png"/>
+          <p:cNvPr id="9" name="Picture 8" descr="77a4d57c92c152c2.png"/>
           <p:cNvPicPr>
             <a:picLocks noChangeAspect="1"/>
           </p:cNvPicPr>
@@ -15163,7 +13523,7 @@
       </p:pic>
       <p:sp>
         <p:nvSpPr>
-          <p:cNvPr id="11" name="TextBox 10"/>
+          <p:cNvPr id="10" name="TextBox 9"/>
           <p:cNvSpPr txBox="1"/>
           <p:nvPr/>
         </p:nvSpPr>
@@ -15198,7 +13558,7 @@
       </p:sp>
       <p:sp>
         <p:nvSpPr>
-          <p:cNvPr id="12" name="TextBox 11"/>
+          <p:cNvPr id="11" name="TextBox 10"/>
           <p:cNvSpPr txBox="1"/>
           <p:nvPr/>
         </p:nvSpPr>
@@ -15233,7 +13593,7 @@
       </p:sp>
       <p:pic>
         <p:nvPicPr>
-          <p:cNvPr id="13" name="Picture 12" descr="ecebfbd77cf00b59.png"/>
+          <p:cNvPr id="12" name="Picture 11" descr="ecebfbd77cf00b59.png"/>
           <p:cNvPicPr>
             <a:picLocks noChangeAspect="1"/>
           </p:cNvPicPr>
@@ -15257,7 +13617,7 @@
       </p:pic>
       <p:sp>
         <p:nvSpPr>
-          <p:cNvPr id="14" name="TextBox 13"/>
+          <p:cNvPr id="13" name="TextBox 12"/>
           <p:cNvSpPr txBox="1"/>
           <p:nvPr/>
         </p:nvSpPr>
@@ -15292,7 +13652,7 @@
       </p:sp>
       <p:sp>
         <p:nvSpPr>
-          <p:cNvPr id="15" name="TextBox 14"/>
+          <p:cNvPr id="14" name="TextBox 13"/>
           <p:cNvSpPr txBox="1"/>
           <p:nvPr/>
         </p:nvSpPr>
@@ -15327,48 +13687,13 @@
       </p:sp>
       <p:sp>
         <p:nvSpPr>
-          <p:cNvPr id="16" name="TextBox 15"/>
-          <p:cNvSpPr txBox="1"/>
-          <p:nvPr/>
-        </p:nvSpPr>
-        <p:spPr>
-          <a:xfrm>
-            <a:off x="1828800" y="4041648"/>
-            <a:ext cx="8503920" cy="548640"/>
-          </a:xfrm>
-          <a:prstGeom prst="rect">
-            <a:avLst/>
-          </a:prstGeom>
-          <a:noFill/>
-        </p:spPr>
-        <p:txBody>
-          <a:bodyPr wrap="square" lIns="45720" rIns="45720" tIns="18288" bIns="18288" anchor="t">
-            <a:spAutoFit/>
-          </a:bodyPr>
-          <a:lstStyle/>
-          <a:p>
-            <a:pPr algn="ctr"/>
-            <a:r>
-              <a:rPr sz="2400" b="0" i="0">
-                <a:solidFill>
-                  <a:srgbClr val="6B6B6B"/>
-                </a:solidFill>
-                <a:latin typeface="Century Schoolbook"/>
-              </a:rPr>
-              <a:t>0.02 in and 0.06 in</a:t>
-            </a:r>
-          </a:p>
-        </p:txBody>
-      </p:sp>
-      <p:sp>
-        <p:nvSpPr>
-          <p:cNvPr id="17" name="TextBox 16"/>
-          <p:cNvSpPr txBox="1"/>
-          <p:nvPr/>
-        </p:nvSpPr>
-        <p:spPr>
-          <a:xfrm>
-            <a:off x="777240" y="4773168"/>
+          <p:cNvPr id="15" name="TextBox 14"/>
+          <p:cNvSpPr txBox="1"/>
+          <p:nvPr/>
+        </p:nvSpPr>
+        <p:spPr>
+          <a:xfrm>
+            <a:off x="777240" y="4663440"/>
             <a:ext cx="10607040" cy="548640"/>
           </a:xfrm>
           <a:prstGeom prst="rect">
@@ -15536,44 +13861,9 @@
           </a:fontRef>
         </p:style>
       </p:cxnSp>
-      <p:sp>
-        <p:nvSpPr>
-          <p:cNvPr id="5" name="TextBox 4"/>
-          <p:cNvSpPr txBox="1"/>
-          <p:nvPr/>
-        </p:nvSpPr>
-        <p:spPr>
-          <a:xfrm>
-            <a:off x="777240" y="1261872"/>
-            <a:ext cx="10607040" cy="310896"/>
-          </a:xfrm>
-          <a:prstGeom prst="rect">
-            <a:avLst/>
-          </a:prstGeom>
-          <a:noFill/>
-        </p:spPr>
-        <p:txBody>
-          <a:bodyPr wrap="square" lIns="45720" rIns="45720" tIns="18288" bIns="18288" anchor="t">
-            <a:spAutoFit/>
-          </a:bodyPr>
-          <a:lstStyle/>
-          <a:p>
-            <a:pPr algn="l"/>
-            <a:r>
-              <a:rPr sz="1700" b="0" i="1">
-                <a:solidFill>
-                  <a:srgbClr val="6B6B6B"/>
-                </a:solidFill>
-                <a:latin typeface="Century Schoolbook"/>
-              </a:rPr>
-              <a:t>Six questions. On your own, in silence.</a:t>
-            </a:r>
-          </a:p>
-        </p:txBody>
-      </p:sp>
       <p:cxnSp>
         <p:nvCxnSpPr>
-          <p:cNvPr id="6" name="Connector 5"/>
+          <p:cNvPr id="5" name="Connector 4"/>
           <p:cNvCxnSpPr/>
           <p:nvPr/>
         </p:nvCxnSpPr>
@@ -15608,7 +13898,7 @@
       </p:cxnSp>
       <p:sp>
         <p:nvSpPr>
-          <p:cNvPr id="7" name="TextBox 6"/>
+          <p:cNvPr id="6" name="TextBox 5"/>
           <p:cNvSpPr txBox="1"/>
           <p:nvPr/>
         </p:nvSpPr>
@@ -15643,7 +13933,7 @@
       </p:sp>
       <p:sp>
         <p:nvSpPr>
-          <p:cNvPr id="8" name="TextBox 7"/>
+          <p:cNvPr id="7" name="TextBox 6"/>
           <p:cNvSpPr txBox="1"/>
           <p:nvPr/>
         </p:nvSpPr>
@@ -15678,7 +13968,7 @@
       </p:sp>
       <p:sp>
         <p:nvSpPr>
-          <p:cNvPr id="9" name="TextBox 8"/>
+          <p:cNvPr id="8" name="TextBox 7"/>
           <p:cNvSpPr txBox="1"/>
           <p:nvPr/>
         </p:nvSpPr>
@@ -15713,7 +14003,7 @@
       </p:sp>
       <p:sp>
         <p:nvSpPr>
-          <p:cNvPr id="10" name="TextBox 9"/>
+          <p:cNvPr id="9" name="TextBox 8"/>
           <p:cNvSpPr txBox="1"/>
           <p:nvPr/>
         </p:nvSpPr>
@@ -15748,7 +14038,7 @@
       </p:sp>
       <p:sp>
         <p:nvSpPr>
-          <p:cNvPr id="11" name="TextBox 10"/>
+          <p:cNvPr id="10" name="TextBox 9"/>
           <p:cNvSpPr txBox="1"/>
           <p:nvPr/>
         </p:nvSpPr>
@@ -15783,7 +14073,7 @@
       </p:sp>
       <p:sp>
         <p:nvSpPr>
-          <p:cNvPr id="12" name="TextBox 11"/>
+          <p:cNvPr id="11" name="TextBox 10"/>
           <p:cNvSpPr txBox="1"/>
           <p:nvPr/>
         </p:nvSpPr>
@@ -15818,7 +14108,7 @@
       </p:sp>
       <p:sp>
         <p:nvSpPr>
-          <p:cNvPr id="13" name="TextBox 12"/>
+          <p:cNvPr id="12" name="TextBox 11"/>
           <p:cNvSpPr txBox="1"/>
           <p:nvPr/>
         </p:nvSpPr>
@@ -15853,7 +14143,7 @@
       </p:sp>
       <p:sp>
         <p:nvSpPr>
-          <p:cNvPr id="14" name="TextBox 13"/>
+          <p:cNvPr id="13" name="TextBox 12"/>
           <p:cNvSpPr txBox="1"/>
           <p:nvPr/>
         </p:nvSpPr>
@@ -16009,44 +14299,9 @@
           </a:fontRef>
         </p:style>
       </p:cxnSp>
-      <p:sp>
-        <p:nvSpPr>
-          <p:cNvPr id="5" name="TextBox 4"/>
-          <p:cNvSpPr txBox="1"/>
-          <p:nvPr/>
-        </p:nvSpPr>
-        <p:spPr>
-          <a:xfrm>
-            <a:off x="777240" y="1261872"/>
-            <a:ext cx="10607040" cy="310896"/>
-          </a:xfrm>
-          <a:prstGeom prst="rect">
-            <a:avLst/>
-          </a:prstGeom>
-          <a:noFill/>
-        </p:spPr>
-        <p:txBody>
-          <a:bodyPr wrap="square" lIns="45720" rIns="45720" tIns="18288" bIns="18288" anchor="t">
-            <a:spAutoFit/>
-          </a:bodyPr>
-          <a:lstStyle/>
-          <a:p>
-            <a:pPr algn="l"/>
-            <a:r>
-              <a:rPr sz="1700" b="0" i="1">
-                <a:solidFill>
-                  <a:srgbClr val="6B6B6B"/>
-                </a:solidFill>
-                <a:latin typeface="Century Schoolbook"/>
-              </a:rPr>
-              <a:t>Last five minutes.</a:t>
-            </a:r>
-          </a:p>
-        </p:txBody>
-      </p:sp>
       <p:cxnSp>
         <p:nvCxnSpPr>
-          <p:cNvPr id="6" name="Connector 5"/>
+          <p:cNvPr id="5" name="Connector 4"/>
           <p:cNvCxnSpPr/>
           <p:nvPr/>
         </p:nvCxnSpPr>
@@ -16081,7 +14336,7 @@
       </p:cxnSp>
       <p:sp>
         <p:nvSpPr>
-          <p:cNvPr id="7" name="TextBox 6"/>
+          <p:cNvPr id="6" name="TextBox 5"/>
           <p:cNvSpPr txBox="1"/>
           <p:nvPr/>
         </p:nvSpPr>
@@ -16116,7 +14371,7 @@
       </p:sp>
       <p:sp>
         <p:nvSpPr>
-          <p:cNvPr id="8" name="TextBox 7"/>
+          <p:cNvPr id="7" name="TextBox 6"/>
           <p:cNvSpPr txBox="1"/>
           <p:nvPr/>
         </p:nvSpPr>
@@ -16151,7 +14406,7 @@
       </p:sp>
       <p:sp>
         <p:nvSpPr>
-          <p:cNvPr id="9" name="TextBox 8"/>
+          <p:cNvPr id="8" name="TextBox 7"/>
           <p:cNvSpPr txBox="1"/>
           <p:nvPr/>
         </p:nvSpPr>
@@ -16186,7 +14441,7 @@
       </p:sp>
       <p:sp>
         <p:nvSpPr>
-          <p:cNvPr id="10" name="TextBox 9"/>
+          <p:cNvPr id="9" name="TextBox 8"/>
           <p:cNvSpPr txBox="1"/>
           <p:nvPr/>
         </p:nvSpPr>
@@ -16221,7 +14476,7 @@
       </p:sp>
       <p:sp>
         <p:nvSpPr>
-          <p:cNvPr id="11" name="TextBox 10"/>
+          <p:cNvPr id="10" name="TextBox 9"/>
           <p:cNvSpPr txBox="1"/>
           <p:nvPr/>
         </p:nvSpPr>
@@ -16256,7 +14511,7 @@
       </p:sp>
       <p:sp>
         <p:nvSpPr>
-          <p:cNvPr id="12" name="TextBox 11"/>
+          <p:cNvPr id="11" name="TextBox 10"/>
           <p:cNvSpPr txBox="1"/>
           <p:nvPr/>
         </p:nvSpPr>
@@ -16291,7 +14546,7 @@
       </p:sp>
       <p:sp>
         <p:nvSpPr>
-          <p:cNvPr id="13" name="TextBox 12"/>
+          <p:cNvPr id="12" name="TextBox 11"/>
           <p:cNvSpPr txBox="1"/>
           <p:nvPr/>
         </p:nvSpPr>
@@ -16326,7 +14581,7 @@
       </p:sp>
       <p:sp>
         <p:nvSpPr>
-          <p:cNvPr id="14" name="TextBox 13"/>
+          <p:cNvPr id="13" name="TextBox 12"/>
           <p:cNvSpPr txBox="1"/>
           <p:nvPr/>
         </p:nvSpPr>
@@ -16361,7 +14616,7 @@
       </p:sp>
       <p:sp>
         <p:nvSpPr>
-          <p:cNvPr id="15" name="TextBox 14"/>
+          <p:cNvPr id="14" name="TextBox 13"/>
           <p:cNvSpPr txBox="1"/>
           <p:nvPr/>
         </p:nvSpPr>
@@ -16396,7 +14651,7 @@
       </p:sp>
       <p:sp>
         <p:nvSpPr>
-          <p:cNvPr id="16" name="TextBox 15"/>
+          <p:cNvPr id="15" name="TextBox 14"/>
           <p:cNvSpPr txBox="1"/>
           <p:nvPr/>
         </p:nvSpPr>
@@ -16431,7 +14686,7 @@
       </p:sp>
       <p:sp>
         <p:nvSpPr>
-          <p:cNvPr id="17" name="TextBox 16"/>
+          <p:cNvPr id="16" name="TextBox 15"/>
           <p:cNvSpPr txBox="1"/>
           <p:nvPr/>
         </p:nvSpPr>
@@ -16466,7 +14721,7 @@
       </p:sp>
       <p:sp>
         <p:nvSpPr>
-          <p:cNvPr id="18" name="TextBox 17"/>
+          <p:cNvPr id="17" name="TextBox 16"/>
           <p:cNvSpPr txBox="1"/>
           <p:nvPr/>
         </p:nvSpPr>
@@ -16622,44 +14877,9 @@
           </a:fontRef>
         </p:style>
       </p:cxnSp>
-      <p:sp>
-        <p:nvSpPr>
-          <p:cNvPr id="5" name="TextBox 4"/>
-          <p:cNvSpPr txBox="1"/>
-          <p:nvPr/>
-        </p:nvSpPr>
-        <p:spPr>
-          <a:xfrm>
-            <a:off x="777240" y="1261872"/>
-            <a:ext cx="10607040" cy="310896"/>
-          </a:xfrm>
-          <a:prstGeom prst="rect">
-            <a:avLst/>
-          </a:prstGeom>
-          <a:noFill/>
-        </p:spPr>
-        <p:txBody>
-          <a:bodyPr wrap="square" lIns="45720" rIns="45720" tIns="18288" bIns="18288" anchor="t">
-            <a:spAutoFit/>
-          </a:bodyPr>
-          <a:lstStyle/>
-          <a:p>
-            <a:pPr algn="l"/>
-            <a:r>
-              <a:rPr sz="1700" b="0" i="1">
-                <a:solidFill>
-                  <a:srgbClr val="6B6B6B"/>
-                </a:solidFill>
-                <a:latin typeface="Century Schoolbook"/>
-              </a:rPr>
-              <a:t>Copy the table.</a:t>
-            </a:r>
-          </a:p>
-        </p:txBody>
-      </p:sp>
       <p:cxnSp>
         <p:nvCxnSpPr>
-          <p:cNvPr id="6" name="Connector 5"/>
+          <p:cNvPr id="5" name="Connector 4"/>
           <p:cNvCxnSpPr/>
           <p:nvPr/>
         </p:nvCxnSpPr>
@@ -16694,7 +14914,7 @@
       </p:cxnSp>
       <p:sp>
         <p:nvSpPr>
-          <p:cNvPr id="7" name="TextBox 6"/>
+          <p:cNvPr id="6" name="TextBox 5"/>
           <p:cNvSpPr txBox="1"/>
           <p:nvPr/>
         </p:nvSpPr>
@@ -16729,7 +14949,7 @@
       </p:sp>
       <p:sp>
         <p:nvSpPr>
-          <p:cNvPr id="8" name="TextBox 7"/>
+          <p:cNvPr id="7" name="TextBox 6"/>
           <p:cNvSpPr txBox="1"/>
           <p:nvPr/>
         </p:nvSpPr>
@@ -16764,13 +14984,13 @@
       </p:sp>
       <p:sp>
         <p:nvSpPr>
-          <p:cNvPr id="9" name="TextBox 8"/>
-          <p:cNvSpPr txBox="1"/>
-          <p:nvPr/>
-        </p:nvSpPr>
-        <p:spPr>
-          <a:xfrm>
-            <a:off x="777240" y="1737360"/>
+          <p:cNvPr id="8" name="TextBox 7"/>
+          <p:cNvSpPr txBox="1"/>
+          <p:nvPr/>
+        </p:nvSpPr>
+        <p:spPr>
+          <a:xfrm>
+            <a:off x="777240" y="1389888"/>
             <a:ext cx="10607040" cy="402336"/>
           </a:xfrm>
           <a:prstGeom prst="rect">
@@ -16799,13 +15019,13 @@
       </p:sp>
       <p:cxnSp>
         <p:nvCxnSpPr>
-          <p:cNvPr id="10" name="Connector 9"/>
+          <p:cNvPr id="9" name="Connector 8"/>
           <p:cNvCxnSpPr/>
           <p:nvPr/>
         </p:nvCxnSpPr>
         <p:spPr>
           <a:xfrm>
-            <a:off x="777240" y="2176272"/>
+            <a:off x="777240" y="1828800"/>
             <a:ext cx="10607040" cy="0"/>
           </a:xfrm>
           <a:prstGeom prst="line">
@@ -16834,14 +15054,14 @@
       </p:cxnSp>
       <p:graphicFrame>
         <p:nvGraphicFramePr>
-          <p:cNvPr id="11" name="Table 10"/>
+          <p:cNvPr id="10" name="Table 9"/>
           <p:cNvGraphicFramePr>
             <a:graphicFrameLocks noGrp="1"/>
           </p:cNvGraphicFramePr>
           <p:nvPr/>
         </p:nvGraphicFramePr>
         <p:xfrm>
-          <a:off x="1142999" y="2340864"/>
+          <a:off x="1142999" y="1993392"/>
           <a:ext cx="9875520" cy="768096"/>
         </p:xfrm>
         <a:graphic>
@@ -17486,7 +15706,7 @@
       </p:graphicFrame>
       <p:pic>
         <p:nvPicPr>
-          <p:cNvPr id="12" name="Picture 11" descr="87b97c2695b4b35d.png"/>
+          <p:cNvPr id="11" name="Picture 10" descr="87b97c2695b4b35d.png"/>
           <p:cNvPicPr>
             <a:picLocks noChangeAspect="1"/>
           </p:cNvPicPr>
@@ -17500,7 +15720,7 @@
         </p:blipFill>
         <p:spPr>
           <a:xfrm>
-            <a:off x="3034020" y="3364991"/>
+            <a:off x="3034020" y="3017520"/>
             <a:ext cx="1691640" cy="679704"/>
           </a:xfrm>
           <a:prstGeom prst="rect">
@@ -17510,13 +15730,13 @@
       </p:pic>
       <p:sp>
         <p:nvSpPr>
-          <p:cNvPr id="13" name="TextBox 12"/>
-          <p:cNvSpPr txBox="1"/>
-          <p:nvPr/>
-        </p:nvSpPr>
-        <p:spPr>
-          <a:xfrm>
-            <a:off x="4725660" y="3476244"/>
+          <p:cNvPr id="12" name="TextBox 11"/>
+          <p:cNvSpPr txBox="1"/>
+          <p:nvPr/>
+        </p:nvSpPr>
+        <p:spPr>
+          <a:xfrm>
+            <a:off x="4725660" y="3128772"/>
             <a:ext cx="1183151" cy="457200"/>
           </a:xfrm>
           <a:prstGeom prst="rect">
@@ -17545,7 +15765,7 @@
       </p:sp>
       <p:pic>
         <p:nvPicPr>
-          <p:cNvPr id="14" name="Picture 13" descr="9756d439c25d70ac.png"/>
+          <p:cNvPr id="13" name="Picture 12" descr="9756d439c25d70ac.png"/>
           <p:cNvPicPr>
             <a:picLocks noChangeAspect="1"/>
           </p:cNvPicPr>
@@ -17559,7 +15779,7 @@
         </p:blipFill>
         <p:spPr>
           <a:xfrm>
-            <a:off x="5771651" y="3337560"/>
+            <a:off x="5771651" y="2990088"/>
             <a:ext cx="3355848" cy="734568"/>
           </a:xfrm>
           <a:prstGeom prst="rect">
@@ -17569,13 +15789,13 @@
       </p:pic>
       <p:sp>
         <p:nvSpPr>
-          <p:cNvPr id="15" name="TextBox 14"/>
-          <p:cNvSpPr txBox="1"/>
-          <p:nvPr/>
-        </p:nvSpPr>
-        <p:spPr>
-          <a:xfrm>
-            <a:off x="987552" y="4410456"/>
+          <p:cNvPr id="14" name="TextBox 13"/>
+          <p:cNvSpPr txBox="1"/>
+          <p:nvPr/>
+        </p:nvSpPr>
+        <p:spPr>
+          <a:xfrm>
+            <a:off x="987552" y="4062984"/>
             <a:ext cx="10131551" cy="950976"/>
           </a:xfrm>
           <a:prstGeom prst="rect">
@@ -17856,7 +16076,7 @@
         </p:nvSpPr>
         <p:spPr>
           <a:xfrm>
-            <a:off x="777240" y="1737360"/>
+            <a:off x="777240" y="1389888"/>
             <a:ext cx="10607040" cy="402336"/>
           </a:xfrm>
           <a:prstGeom prst="rect">
@@ -17891,7 +16111,7 @@
         </p:nvCxnSpPr>
         <p:spPr>
           <a:xfrm>
-            <a:off x="777240" y="2176272"/>
+            <a:off x="777240" y="1828800"/>
             <a:ext cx="10607040" cy="0"/>
           </a:xfrm>
           <a:prstGeom prst="line">
@@ -17934,7 +16154,7 @@
         </p:blipFill>
         <p:spPr>
           <a:xfrm>
-            <a:off x="1971792" y="2369820"/>
+            <a:off x="1971792" y="2022348"/>
             <a:ext cx="3233928" cy="353568"/>
           </a:xfrm>
           <a:prstGeom prst="rect">
@@ -17950,7 +16170,7 @@
         </p:nvSpPr>
         <p:spPr>
           <a:xfrm>
-            <a:off x="5205720" y="2318004"/>
+            <a:off x="5205720" y="1970532"/>
             <a:ext cx="1183151" cy="457200"/>
           </a:xfrm>
           <a:prstGeom prst="rect">
@@ -17993,7 +16213,7 @@
         </p:blipFill>
         <p:spPr>
           <a:xfrm>
-            <a:off x="6251711" y="2369820"/>
+            <a:off x="6251711" y="2022348"/>
             <a:ext cx="3938016" cy="353568"/>
           </a:xfrm>
           <a:prstGeom prst="rect">
@@ -18017,7 +16237,7 @@
         </p:blipFill>
         <p:spPr>
           <a:xfrm>
-            <a:off x="3898391" y="3058668"/>
+            <a:off x="3898391" y="2711196"/>
             <a:ext cx="4364736" cy="347472"/>
           </a:xfrm>
           <a:prstGeom prst="rect">
@@ -18033,7 +16253,7 @@
         </p:nvSpPr>
         <p:spPr>
           <a:xfrm>
-            <a:off x="987552" y="3776472"/>
+            <a:off x="987552" y="3429000"/>
             <a:ext cx="10131551" cy="950976"/>
           </a:xfrm>
           <a:prstGeom prst="rect">
@@ -18068,7 +16288,7 @@
         </p:nvSpPr>
         <p:spPr>
           <a:xfrm>
-            <a:off x="987552" y="4983480"/>
+            <a:off x="987552" y="4636008"/>
             <a:ext cx="10131551" cy="950976"/>
           </a:xfrm>
           <a:prstGeom prst="rect">
@@ -18349,7 +16569,7 @@
         </p:nvSpPr>
         <p:spPr>
           <a:xfrm>
-            <a:off x="777240" y="1737360"/>
+            <a:off x="777240" y="1389888"/>
             <a:ext cx="10607040" cy="402336"/>
           </a:xfrm>
           <a:prstGeom prst="rect">
@@ -18384,7 +16604,7 @@
         </p:nvCxnSpPr>
         <p:spPr>
           <a:xfrm>
-            <a:off x="777240" y="2176272"/>
+            <a:off x="777240" y="1828800"/>
             <a:ext cx="10607040" cy="0"/>
           </a:xfrm>
           <a:prstGeom prst="line">
@@ -18427,7 +16647,7 @@
         </p:blipFill>
         <p:spPr>
           <a:xfrm>
-            <a:off x="2034276" y="2340864"/>
+            <a:off x="2034276" y="1993392"/>
             <a:ext cx="4556760" cy="822960"/>
           </a:xfrm>
           <a:prstGeom prst="rect">
@@ -18443,7 +16663,7 @@
         </p:nvSpPr>
         <p:spPr>
           <a:xfrm>
-            <a:off x="6591036" y="2523744"/>
+            <a:off x="6591036" y="2176272"/>
             <a:ext cx="1183151" cy="457200"/>
           </a:xfrm>
           <a:prstGeom prst="rect">
@@ -18486,7 +16706,7 @@
         </p:blipFill>
         <p:spPr>
           <a:xfrm>
-            <a:off x="7637027" y="2340864"/>
+            <a:off x="7637027" y="1993392"/>
             <a:ext cx="2490216" cy="822960"/>
           </a:xfrm>
           <a:prstGeom prst="rect">
@@ -18502,7 +16722,7 @@
         </p:nvSpPr>
         <p:spPr>
           <a:xfrm>
-            <a:off x="987552" y="3502151"/>
+            <a:off x="987552" y="3154679"/>
             <a:ext cx="10131551" cy="950976"/>
           </a:xfrm>
           <a:prstGeom prst="rect">
@@ -18537,7 +16757,7 @@
         </p:nvSpPr>
         <p:spPr>
           <a:xfrm>
-            <a:off x="987552" y="4709160"/>
+            <a:off x="987552" y="4361688"/>
             <a:ext cx="10131551" cy="950976"/>
           </a:xfrm>
           <a:prstGeom prst="rect">
@@ -18741,44 +16961,9 @@
           </a:fontRef>
         </p:style>
       </p:cxnSp>
-      <p:sp>
-        <p:nvSpPr>
-          <p:cNvPr id="5" name="TextBox 4"/>
-          <p:cNvSpPr txBox="1"/>
-          <p:nvPr/>
-        </p:nvSpPr>
-        <p:spPr>
-          <a:xfrm>
-            <a:off x="777240" y="1261872"/>
-            <a:ext cx="10607040" cy="310896"/>
-          </a:xfrm>
-          <a:prstGeom prst="rect">
-            <a:avLst/>
-          </a:prstGeom>
-          <a:noFill/>
-        </p:spPr>
-        <p:txBody>
-          <a:bodyPr wrap="square" lIns="45720" rIns="45720" tIns="18288" bIns="18288" anchor="t">
-            <a:spAutoFit/>
-          </a:bodyPr>
-          <a:lstStyle/>
-          <a:p>
-            <a:pPr algn="l"/>
-            <a:r>
-              <a:rPr sz="1700" b="0" i="1">
-                <a:solidFill>
-                  <a:srgbClr val="6B6B6B"/>
-                </a:solidFill>
-                <a:latin typeface="Century Schoolbook"/>
-              </a:rPr>
-              <a:t>A quantity in words, to scientific notation.</a:t>
-            </a:r>
-          </a:p>
-        </p:txBody>
-      </p:sp>
       <p:cxnSp>
         <p:nvCxnSpPr>
-          <p:cNvPr id="6" name="Connector 5"/>
+          <p:cNvPr id="5" name="Connector 4"/>
           <p:cNvCxnSpPr/>
           <p:nvPr/>
         </p:nvCxnSpPr>
@@ -18813,7 +16998,7 @@
       </p:cxnSp>
       <p:sp>
         <p:nvSpPr>
-          <p:cNvPr id="7" name="TextBox 6"/>
+          <p:cNvPr id="6" name="TextBox 5"/>
           <p:cNvSpPr txBox="1"/>
           <p:nvPr/>
         </p:nvSpPr>
@@ -18848,7 +17033,7 @@
       </p:sp>
       <p:sp>
         <p:nvSpPr>
-          <p:cNvPr id="8" name="TextBox 7"/>
+          <p:cNvPr id="7" name="TextBox 6"/>
           <p:cNvSpPr txBox="1"/>
           <p:nvPr/>
         </p:nvSpPr>
@@ -18883,48 +17068,48 @@
       </p:sp>
       <p:sp>
         <p:nvSpPr>
+          <p:cNvPr id="8" name="TextBox 7"/>
+          <p:cNvSpPr txBox="1"/>
+          <p:nvPr/>
+        </p:nvSpPr>
+        <p:spPr>
+          <a:xfrm>
+            <a:off x="777240" y="1737360"/>
+            <a:ext cx="10607040" cy="858740"/>
+          </a:xfrm>
+          <a:prstGeom prst="rect">
+            <a:avLst/>
+          </a:prstGeom>
+          <a:noFill/>
+        </p:spPr>
+        <p:txBody>
+          <a:bodyPr wrap="square" lIns="45720" rIns="45720" tIns="18288" bIns="18288" anchor="t">
+            <a:spAutoFit/>
+          </a:bodyPr>
+          <a:lstStyle/>
+          <a:p>
+            <a:pPr algn="ctr"/>
+            <a:r>
+              <a:rPr sz="2400" b="0" i="0">
+                <a:solidFill>
+                  <a:srgbClr val="1A1A1A"/>
+                </a:solidFill>
+                <a:latin typeface="Century Schoolbook"/>
+              </a:rPr>
+              <a:t>The density of oxygen is 1,332 millionths of a gram per cubic centimeter.</a:t>
+            </a:r>
+          </a:p>
+        </p:txBody>
+      </p:sp>
+      <p:sp>
+        <p:nvSpPr>
           <p:cNvPr id="9" name="TextBox 8"/>
           <p:cNvSpPr txBox="1"/>
           <p:nvPr/>
         </p:nvSpPr>
         <p:spPr>
           <a:xfrm>
-            <a:off x="777240" y="2103120"/>
-            <a:ext cx="10607040" cy="858740"/>
-          </a:xfrm>
-          <a:prstGeom prst="rect">
-            <a:avLst/>
-          </a:prstGeom>
-          <a:noFill/>
-        </p:spPr>
-        <p:txBody>
-          <a:bodyPr wrap="square" lIns="45720" rIns="45720" tIns="18288" bIns="18288" anchor="t">
-            <a:spAutoFit/>
-          </a:bodyPr>
-          <a:lstStyle/>
-          <a:p>
-            <a:pPr algn="ctr"/>
-            <a:r>
-              <a:rPr sz="2400" b="0" i="0">
-                <a:solidFill>
-                  <a:srgbClr val="1A1A1A"/>
-                </a:solidFill>
-                <a:latin typeface="Century Schoolbook"/>
-              </a:rPr>
-              <a:t>The density of oxygen is 1,332 millionths of a gram per cubic centimeter.</a:t>
-            </a:r>
-          </a:p>
-        </p:txBody>
-      </p:sp>
-      <p:sp>
-        <p:nvSpPr>
-          <p:cNvPr id="10" name="TextBox 9"/>
-          <p:cNvSpPr txBox="1"/>
-          <p:nvPr/>
-        </p:nvSpPr>
-        <p:spPr>
-          <a:xfrm>
-            <a:off x="777240" y="3071588"/>
+            <a:off x="777240" y="2705828"/>
             <a:ext cx="10607040" cy="429370"/>
           </a:xfrm>
           <a:prstGeom prst="rect">
@@ -19074,44 +17259,9 @@
           </a:fontRef>
         </p:style>
       </p:cxnSp>
-      <p:sp>
-        <p:nvSpPr>
-          <p:cNvPr id="5" name="TextBox 4"/>
-          <p:cNvSpPr txBox="1"/>
-          <p:nvPr/>
-        </p:nvSpPr>
-        <p:spPr>
-          <a:xfrm>
-            <a:off x="777240" y="1261872"/>
-            <a:ext cx="10607040" cy="310896"/>
-          </a:xfrm>
-          <a:prstGeom prst="rect">
-            <a:avLst/>
-          </a:prstGeom>
-          <a:noFill/>
-        </p:spPr>
-        <p:txBody>
-          <a:bodyPr wrap="square" lIns="45720" rIns="45720" tIns="18288" bIns="18288" anchor="t">
-            <a:spAutoFit/>
-          </a:bodyPr>
-          <a:lstStyle/>
-          <a:p>
-            <a:pPr algn="l"/>
-            <a:r>
-              <a:rPr sz="1700" b="0" i="1">
-                <a:solidFill>
-                  <a:srgbClr val="6B6B6B"/>
-                </a:solidFill>
-                <a:latin typeface="Century Schoolbook"/>
-              </a:rPr>
-              <a:t>Worked.</a:t>
-            </a:r>
-          </a:p>
-        </p:txBody>
-      </p:sp>
       <p:cxnSp>
         <p:nvCxnSpPr>
-          <p:cNvPr id="6" name="Connector 5"/>
+          <p:cNvPr id="5" name="Connector 4"/>
           <p:cNvCxnSpPr/>
           <p:nvPr/>
         </p:nvCxnSpPr>
@@ -19146,7 +17296,7 @@
       </p:cxnSp>
       <p:sp>
         <p:nvSpPr>
-          <p:cNvPr id="7" name="TextBox 6"/>
+          <p:cNvPr id="6" name="TextBox 5"/>
           <p:cNvSpPr txBox="1"/>
           <p:nvPr/>
         </p:nvSpPr>
@@ -19181,7 +17331,7 @@
       </p:sp>
       <p:sp>
         <p:nvSpPr>
-          <p:cNvPr id="8" name="TextBox 7"/>
+          <p:cNvPr id="7" name="TextBox 6"/>
           <p:cNvSpPr txBox="1"/>
           <p:nvPr/>
         </p:nvSpPr>
@@ -19216,7 +17366,7 @@
       </p:sp>
       <p:pic>
         <p:nvPicPr>
-          <p:cNvPr id="9" name="Picture 8" descr="3795759730f8e373.png"/>
+          <p:cNvPr id="8" name="Picture 7" descr="3795759730f8e373.png"/>
           <p:cNvPicPr>
             <a:picLocks noChangeAspect="1"/>
           </p:cNvPicPr>
@@ -19238,44 +17388,9 @@
           </a:prstGeom>
         </p:spPr>
       </p:pic>
-      <p:sp>
-        <p:nvSpPr>
-          <p:cNvPr id="10" name="TextBox 9"/>
-          <p:cNvSpPr txBox="1"/>
-          <p:nvPr/>
-        </p:nvSpPr>
-        <p:spPr>
-          <a:xfrm>
-            <a:off x="5876544" y="2087880"/>
-            <a:ext cx="5507735" cy="502920"/>
-          </a:xfrm>
-          <a:prstGeom prst="rect">
-            <a:avLst/>
-          </a:prstGeom>
-          <a:noFill/>
-        </p:spPr>
-        <p:txBody>
-          <a:bodyPr wrap="square" lIns="45720" rIns="45720" tIns="18288" bIns="18288" anchor="ctr">
-            <a:spAutoFit/>
-          </a:bodyPr>
-          <a:lstStyle/>
-          <a:p>
-            <a:pPr algn="l"/>
-            <a:r>
-              <a:rPr sz="2100" b="0" i="1">
-                <a:solidFill>
-                  <a:srgbClr val="6B6B6B"/>
-                </a:solidFill>
-                <a:latin typeface="Century Schoolbook"/>
-              </a:rPr>
-              <a:t>1,332 millionths, as a decimal</a:t>
-            </a:r>
-          </a:p>
-        </p:txBody>
-      </p:sp>
       <p:pic>
         <p:nvPicPr>
-          <p:cNvPr id="11" name="Picture 10" descr="e86600eaee99cccb.png"/>
+          <p:cNvPr id="9" name="Picture 8" descr="e86600eaee99cccb.png"/>
           <p:cNvPicPr>
             <a:picLocks noChangeAspect="1"/>
           </p:cNvPicPr>
@@ -19299,42 +17414,7 @@
       </p:pic>
       <p:sp>
         <p:nvSpPr>
-          <p:cNvPr id="12" name="TextBox 11"/>
-          <p:cNvSpPr txBox="1"/>
-          <p:nvPr/>
-        </p:nvSpPr>
-        <p:spPr>
-          <a:xfrm>
-            <a:off x="6224016" y="2933700"/>
-            <a:ext cx="5160263" cy="502920"/>
-          </a:xfrm>
-          <a:prstGeom prst="rect">
-            <a:avLst/>
-          </a:prstGeom>
-          <a:noFill/>
-        </p:spPr>
-        <p:txBody>
-          <a:bodyPr wrap="square" lIns="45720" rIns="45720" tIns="18288" bIns="18288" anchor="ctr">
-            <a:spAutoFit/>
-          </a:bodyPr>
-          <a:lstStyle/>
-          <a:p>
-            <a:pPr algn="l"/>
-            <a:r>
-              <a:rPr sz="2100" b="0" i="1">
-                <a:solidFill>
-                  <a:srgbClr val="6B6B6B"/>
-                </a:solidFill>
-                <a:latin typeface="Century Schoolbook"/>
-              </a:rPr>
-              <a:t>the 1 is in the thousandths place</a:t>
-            </a:r>
-          </a:p>
-        </p:txBody>
-      </p:sp>
-      <p:sp>
-        <p:nvSpPr>
-          <p:cNvPr id="13" name="TextBox 12"/>
+          <p:cNvPr id="10" name="TextBox 9"/>
           <p:cNvSpPr txBox="1"/>
           <p:nvPr/>
         </p:nvSpPr>
@@ -19499,44 +17579,9 @@
           </a:fontRef>
         </p:style>
       </p:cxnSp>
-      <p:sp>
-        <p:nvSpPr>
-          <p:cNvPr id="5" name="TextBox 4"/>
-          <p:cNvSpPr txBox="1"/>
-          <p:nvPr/>
-        </p:nvSpPr>
-        <p:spPr>
-          <a:xfrm>
-            <a:off x="777240" y="1261872"/>
-            <a:ext cx="10607040" cy="310896"/>
-          </a:xfrm>
-          <a:prstGeom prst="rect">
-            <a:avLst/>
-          </a:prstGeom>
-          <a:noFill/>
-        </p:spPr>
-        <p:txBody>
-          <a:bodyPr wrap="square" lIns="45720" rIns="45720" tIns="18288" bIns="18288" anchor="t">
-            <a:spAutoFit/>
-          </a:bodyPr>
-          <a:lstStyle/>
-          <a:p>
-            <a:pPr algn="l"/>
-            <a:r>
-              <a:rPr sz="1700" b="0" i="1">
-                <a:solidFill>
-                  <a:srgbClr val="6B6B6B"/>
-                </a:solidFill>
-                <a:latin typeface="Century Schoolbook"/>
-              </a:rPr>
-              <a:t>Same steps, your numbers. Boards up when done.</a:t>
-            </a:r>
-          </a:p>
-        </p:txBody>
-      </p:sp>
       <p:cxnSp>
         <p:nvCxnSpPr>
-          <p:cNvPr id="6" name="Connector 5"/>
+          <p:cNvPr id="5" name="Connector 4"/>
           <p:cNvCxnSpPr/>
           <p:nvPr/>
         </p:nvCxnSpPr>
@@ -19571,7 +17616,7 @@
       </p:cxnSp>
       <p:sp>
         <p:nvSpPr>
-          <p:cNvPr id="7" name="TextBox 6"/>
+          <p:cNvPr id="6" name="TextBox 5"/>
           <p:cNvSpPr txBox="1"/>
           <p:nvPr/>
         </p:nvSpPr>
@@ -19606,7 +17651,7 @@
       </p:sp>
       <p:sp>
         <p:nvSpPr>
-          <p:cNvPr id="8" name="TextBox 7"/>
+          <p:cNvPr id="7" name="TextBox 6"/>
           <p:cNvSpPr txBox="1"/>
           <p:nvPr/>
         </p:nvSpPr>
@@ -19641,7 +17686,7 @@
       </p:sp>
       <p:sp>
         <p:nvSpPr>
-          <p:cNvPr id="9" name="TextBox 8"/>
+          <p:cNvPr id="8" name="TextBox 7"/>
           <p:cNvSpPr txBox="1"/>
           <p:nvPr/>
         </p:nvSpPr>
@@ -19676,7 +17721,7 @@
       </p:sp>
       <p:sp>
         <p:nvSpPr>
-          <p:cNvPr id="10" name="TextBox 9"/>
+          <p:cNvPr id="9" name="TextBox 8"/>
           <p:cNvSpPr txBox="1"/>
           <p:nvPr/>
         </p:nvSpPr>

--- a/a7/packages/A7 Unit 3 - Exponents and Scientific Notation/Lessons/3.09/A7 3.09 Writing Small Numbers in Scientific Notation - Slides.pptx
+++ b/a7/packages/A7 Unit 3 - Exponents and Scientific Notation/Lessons/3.09/A7 3.09 Writing Small Numbers in Scientific Notation - Slides.pptx
@@ -13974,23 +13974,23 @@
         </p:nvSpPr>
         <p:spPr>
           <a:xfrm>
-            <a:off x="960120" y="2011680"/>
-            <a:ext cx="548640" cy="356616"/>
-          </a:xfrm>
-          <a:prstGeom prst="rect">
-            <a:avLst/>
-          </a:prstGeom>
-          <a:noFill/>
-        </p:spPr>
-        <p:txBody>
-          <a:bodyPr wrap="square" lIns="45720" rIns="45720" tIns="18288" bIns="18288" anchor="t">
+            <a:off x="960120" y="1495043"/>
+            <a:ext cx="548640" cy="457200"/>
+          </a:xfrm>
+          <a:prstGeom prst="rect">
+            <a:avLst/>
+          </a:prstGeom>
+          <a:noFill/>
+        </p:spPr>
+        <p:txBody>
+          <a:bodyPr wrap="square" lIns="45720" rIns="45720" tIns="18288" bIns="18288" anchor="ctr">
             <a:spAutoFit/>
           </a:bodyPr>
           <a:lstStyle/>
           <a:p>
             <a:pPr algn="l"/>
             <a:r>
-              <a:rPr sz="2100" b="1" i="0">
+              <a:rPr sz="2300" b="1" i="0">
                 <a:solidFill>
                   <a:srgbClr val="0B5394"/>
                 </a:solidFill>
@@ -14009,29 +14009,29 @@
         </p:nvSpPr>
         <p:spPr>
           <a:xfrm>
-            <a:off x="1554480" y="2011680"/>
-            <a:ext cx="9829800" cy="411480"/>
-          </a:xfrm>
-          <a:prstGeom prst="rect">
-            <a:avLst/>
-          </a:prstGeom>
-          <a:noFill/>
-        </p:spPr>
-        <p:txBody>
-          <a:bodyPr wrap="square" lIns="45720" rIns="45720" tIns="18288" bIns="18288" anchor="t">
-            <a:spAutoFit/>
+            <a:off x="1554480" y="1495044"/>
+            <a:ext cx="5481210" cy="457200"/>
+          </a:xfrm>
+          <a:prstGeom prst="rect">
+            <a:avLst/>
+          </a:prstGeom>
+          <a:noFill/>
+        </p:spPr>
+        <p:txBody>
+          <a:bodyPr wrap="none" lIns="45720" rIns="45720" tIns="18288" bIns="18288" anchor="ctr">
+            <a:noAutofit/>
           </a:bodyPr>
           <a:lstStyle/>
           <a:p>
             <a:pPr algn="l"/>
             <a:r>
-              <a:rPr sz="2100" b="0" i="0">
+              <a:rPr sz="2300" b="0" i="0">
                 <a:solidFill>
                   <a:srgbClr val="1A1A1A"/>
                 </a:solidFill>
                 <a:latin typeface="Century Schoolbook"/>
               </a:rPr>
-              <a:t>Six questions. Work down the page.</a:t>
+              <a:t>Write  0.00047  in scientific notation.</a:t>
             </a:r>
           </a:p>
         </p:txBody>
@@ -14044,23 +14044,23 @@
         </p:nvSpPr>
         <p:spPr>
           <a:xfrm>
-            <a:off x="960120" y="2551176"/>
-            <a:ext cx="548640" cy="356616"/>
-          </a:xfrm>
-          <a:prstGeom prst="rect">
-            <a:avLst/>
-          </a:prstGeom>
-          <a:noFill/>
-        </p:spPr>
-        <p:txBody>
-          <a:bodyPr wrap="square" lIns="45720" rIns="45720" tIns="18288" bIns="18288" anchor="t">
+            <a:off x="960120" y="2089403"/>
+            <a:ext cx="548640" cy="457200"/>
+          </a:xfrm>
+          <a:prstGeom prst="rect">
+            <a:avLst/>
+          </a:prstGeom>
+          <a:noFill/>
+        </p:spPr>
+        <p:txBody>
+          <a:bodyPr wrap="square" lIns="45720" rIns="45720" tIns="18288" bIns="18288" anchor="ctr">
             <a:spAutoFit/>
           </a:bodyPr>
           <a:lstStyle/>
           <a:p>
             <a:pPr algn="l"/>
             <a:r>
-              <a:rPr sz="2100" b="1" i="0">
+              <a:rPr sz="2300" b="1" i="0">
                 <a:solidFill>
                   <a:srgbClr val="0B5394"/>
                 </a:solidFill>
@@ -14079,58 +14079,117 @@
         </p:nvSpPr>
         <p:spPr>
           <a:xfrm>
-            <a:off x="1554480" y="2551176"/>
-            <a:ext cx="9829800" cy="411480"/>
-          </a:xfrm>
-          <a:prstGeom prst="rect">
-            <a:avLst/>
-          </a:prstGeom>
-          <a:noFill/>
-        </p:spPr>
-        <p:txBody>
-          <a:bodyPr wrap="square" lIns="45720" rIns="45720" tIns="18288" bIns="18288" anchor="t">
-            <a:spAutoFit/>
+            <a:off x="1554480" y="2089403"/>
+            <a:ext cx="1184045" cy="457200"/>
+          </a:xfrm>
+          <a:prstGeom prst="rect">
+            <a:avLst/>
+          </a:prstGeom>
+          <a:noFill/>
+        </p:spPr>
+        <p:txBody>
+          <a:bodyPr wrap="none" lIns="45720" rIns="45720" tIns="18288" bIns="18288" anchor="ctr">
+            <a:noAutofit/>
           </a:bodyPr>
           <a:lstStyle/>
           <a:p>
             <a:pPr algn="l"/>
             <a:r>
-              <a:rPr sz="2100" b="0" i="0">
+              <a:rPr sz="2300" b="0" i="0">
                 <a:solidFill>
                   <a:srgbClr val="1A1A1A"/>
                 </a:solidFill>
                 <a:latin typeface="Century Schoolbook"/>
               </a:rPr>
-              <a:t>Show the step that does the work, not just the answer.</a:t>
-            </a:r>
-          </a:p>
-        </p:txBody>
-      </p:sp>
-      <p:sp>
-        <p:nvSpPr>
-          <p:cNvPr id="12" name="TextBox 11"/>
-          <p:cNvSpPr txBox="1"/>
-          <p:nvPr/>
-        </p:nvSpPr>
-        <p:spPr>
-          <a:xfrm>
-            <a:off x="960120" y="3090672"/>
-            <a:ext cx="548640" cy="356616"/>
-          </a:xfrm>
-          <a:prstGeom prst="rect">
-            <a:avLst/>
-          </a:prstGeom>
-          <a:noFill/>
-        </p:spPr>
-        <p:txBody>
-          <a:bodyPr wrap="square" lIns="45720" rIns="45720" tIns="18288" bIns="18288" anchor="t">
-            <a:spAutoFit/>
+              <a:t>Write  </a:t>
+            </a:r>
+          </a:p>
+        </p:txBody>
+      </p:sp>
+      <p:pic>
+        <p:nvPicPr>
+          <p:cNvPr id="12" name="Picture 11" descr="c482772bd1edacf8.png"/>
+          <p:cNvPicPr>
+            <a:picLocks noChangeAspect="1"/>
+          </p:cNvPicPr>
+          <p:nvPr/>
+        </p:nvPicPr>
+        <p:blipFill>
+          <a:blip r:embed="rId2"/>
+          <a:stretch>
+            <a:fillRect/>
+          </a:stretch>
+        </p:blipFill>
+        <p:spPr>
+          <a:xfrm>
+            <a:off x="2601365" y="2176271"/>
+            <a:ext cx="1304544" cy="283464"/>
+          </a:xfrm>
+          <a:prstGeom prst="rect">
+            <a:avLst/>
+          </a:prstGeom>
+        </p:spPr>
+      </p:pic>
+      <p:sp>
+        <p:nvSpPr>
+          <p:cNvPr id="13" name="TextBox 12"/>
+          <p:cNvSpPr txBox="1"/>
+          <p:nvPr/>
+        </p:nvSpPr>
+        <p:spPr>
+          <a:xfrm>
+            <a:off x="3905909" y="2089403"/>
+            <a:ext cx="2885253" cy="457200"/>
+          </a:xfrm>
+          <a:prstGeom prst="rect">
+            <a:avLst/>
+          </a:prstGeom>
+          <a:noFill/>
+        </p:spPr>
+        <p:txBody>
+          <a:bodyPr wrap="none" lIns="45720" rIns="45720" tIns="18288" bIns="18288" anchor="ctr">
+            <a:noAutofit/>
           </a:bodyPr>
           <a:lstStyle/>
           <a:p>
             <a:pPr algn="l"/>
             <a:r>
-              <a:rPr sz="2100" b="1" i="0">
+              <a:rPr sz="2300" b="0" i="0">
+                <a:solidFill>
+                  <a:srgbClr val="1A1A1A"/>
+                </a:solidFill>
+                <a:latin typeface="Century Schoolbook"/>
+              </a:rPr>
+              <a:t>  in standard form.</a:t>
+            </a:r>
+          </a:p>
+        </p:txBody>
+      </p:sp>
+      <p:sp>
+        <p:nvSpPr>
+          <p:cNvPr id="14" name="TextBox 13"/>
+          <p:cNvSpPr txBox="1"/>
+          <p:nvPr/>
+        </p:nvSpPr>
+        <p:spPr>
+          <a:xfrm>
+            <a:off x="960120" y="2683763"/>
+            <a:ext cx="548640" cy="457200"/>
+          </a:xfrm>
+          <a:prstGeom prst="rect">
+            <a:avLst/>
+          </a:prstGeom>
+          <a:noFill/>
+        </p:spPr>
+        <p:txBody>
+          <a:bodyPr wrap="square" lIns="45720" rIns="45720" tIns="18288" bIns="18288" anchor="ctr">
+            <a:spAutoFit/>
+          </a:bodyPr>
+          <a:lstStyle/>
+          <a:p>
+            <a:pPr algn="l"/>
+            <a:r>
+              <a:rPr sz="2300" b="1" i="0">
                 <a:solidFill>
                   <a:srgbClr val="0B5394"/>
                 </a:solidFill>
@@ -14143,35 +14202,516 @@
       </p:sp>
       <p:sp>
         <p:nvSpPr>
-          <p:cNvPr id="13" name="TextBox 12"/>
-          <p:cNvSpPr txBox="1"/>
-          <p:nvPr/>
-        </p:nvSpPr>
-        <p:spPr>
-          <a:xfrm>
-            <a:off x="1554480" y="3090672"/>
-            <a:ext cx="9829800" cy="411480"/>
-          </a:xfrm>
-          <a:prstGeom prst="rect">
-            <a:avLst/>
-          </a:prstGeom>
-          <a:noFill/>
-        </p:spPr>
-        <p:txBody>
-          <a:bodyPr wrap="square" lIns="45720" rIns="45720" tIns="18288" bIns="18288" anchor="t">
-            <a:spAutoFit/>
+          <p:cNvPr id="15" name="TextBox 14"/>
+          <p:cNvSpPr txBox="1"/>
+          <p:nvPr/>
+        </p:nvSpPr>
+        <p:spPr>
+          <a:xfrm>
+            <a:off x="1554480" y="2683763"/>
+            <a:ext cx="5825543" cy="457200"/>
+          </a:xfrm>
+          <a:prstGeom prst="rect">
+            <a:avLst/>
+          </a:prstGeom>
+          <a:noFill/>
+        </p:spPr>
+        <p:txBody>
+          <a:bodyPr wrap="none" lIns="45720" rIns="45720" tIns="18288" bIns="18288" anchor="ctr">
+            <a:noAutofit/>
           </a:bodyPr>
           <a:lstStyle/>
           <a:p>
             <a:pPr algn="l"/>
             <a:r>
-              <a:rPr sz="2100" b="0" i="0">
+              <a:rPr sz="2300" b="0" i="0">
                 <a:solidFill>
                   <a:srgbClr val="1A1A1A"/>
                 </a:solidFill>
                 <a:latin typeface="Century Schoolbook"/>
               </a:rPr>
-              <a:t>Silence until the six minutes are up.</a:t>
+              <a:t>Write  0.0000061  in scientific notation.</a:t>
+            </a:r>
+          </a:p>
+        </p:txBody>
+      </p:sp>
+      <p:sp>
+        <p:nvSpPr>
+          <p:cNvPr id="16" name="TextBox 15"/>
+          <p:cNvSpPr txBox="1"/>
+          <p:nvPr/>
+        </p:nvSpPr>
+        <p:spPr>
+          <a:xfrm>
+            <a:off x="960120" y="3278123"/>
+            <a:ext cx="548640" cy="457200"/>
+          </a:xfrm>
+          <a:prstGeom prst="rect">
+            <a:avLst/>
+          </a:prstGeom>
+          <a:noFill/>
+        </p:spPr>
+        <p:txBody>
+          <a:bodyPr wrap="square" lIns="45720" rIns="45720" tIns="18288" bIns="18288" anchor="ctr">
+            <a:spAutoFit/>
+          </a:bodyPr>
+          <a:lstStyle/>
+          <a:p>
+            <a:pPr algn="l"/>
+            <a:r>
+              <a:rPr sz="2300" b="1" i="0">
+                <a:solidFill>
+                  <a:srgbClr val="0B5394"/>
+                </a:solidFill>
+                <a:latin typeface="Century Schoolbook"/>
+              </a:rPr>
+              <a:t>4.</a:t>
+            </a:r>
+          </a:p>
+        </p:txBody>
+      </p:sp>
+      <p:sp>
+        <p:nvSpPr>
+          <p:cNvPr id="17" name="TextBox 16"/>
+          <p:cNvSpPr txBox="1"/>
+          <p:nvPr/>
+        </p:nvSpPr>
+        <p:spPr>
+          <a:xfrm>
+            <a:off x="1554480" y="3278123"/>
+            <a:ext cx="2825147" cy="457200"/>
+          </a:xfrm>
+          <a:prstGeom prst="rect">
+            <a:avLst/>
+          </a:prstGeom>
+          <a:noFill/>
+        </p:spPr>
+        <p:txBody>
+          <a:bodyPr wrap="none" lIns="45720" rIns="45720" tIns="18288" bIns="18288" anchor="ctr">
+            <a:noAutofit/>
+          </a:bodyPr>
+          <a:lstStyle/>
+          <a:p>
+            <a:pPr algn="l"/>
+            <a:r>
+              <a:rPr sz="2300" b="0" i="0">
+                <a:solidFill>
+                  <a:srgbClr val="1A1A1A"/>
+                </a:solidFill>
+                <a:latin typeface="Century Schoolbook"/>
+              </a:rPr>
+              <a:t>Which is greater,  </a:t>
+            </a:r>
+          </a:p>
+        </p:txBody>
+      </p:sp>
+      <p:pic>
+        <p:nvPicPr>
+          <p:cNvPr id="18" name="Picture 17" descr="c4c2da5961006a48.png"/>
+          <p:cNvPicPr>
+            <a:picLocks noChangeAspect="1"/>
+          </p:cNvPicPr>
+          <p:nvPr/>
+        </p:nvPicPr>
+        <p:blipFill>
+          <a:blip r:embed="rId3"/>
+          <a:stretch>
+            <a:fillRect/>
+          </a:stretch>
+        </p:blipFill>
+        <p:spPr>
+          <a:xfrm>
+            <a:off x="4242467" y="3364991"/>
+            <a:ext cx="1313688" cy="283464"/>
+          </a:xfrm>
+          <a:prstGeom prst="rect">
+            <a:avLst/>
+          </a:prstGeom>
+        </p:spPr>
+      </p:pic>
+      <p:sp>
+        <p:nvSpPr>
+          <p:cNvPr id="19" name="TextBox 18"/>
+          <p:cNvSpPr txBox="1"/>
+          <p:nvPr/>
+        </p:nvSpPr>
+        <p:spPr>
+          <a:xfrm>
+            <a:off x="5556155" y="3278123"/>
+            <a:ext cx="846917" cy="457200"/>
+          </a:xfrm>
+          <a:prstGeom prst="rect">
+            <a:avLst/>
+          </a:prstGeom>
+          <a:noFill/>
+        </p:spPr>
+        <p:txBody>
+          <a:bodyPr wrap="none" lIns="45720" rIns="45720" tIns="18288" bIns="18288" anchor="ctr">
+            <a:noAutofit/>
+          </a:bodyPr>
+          <a:lstStyle/>
+          <a:p>
+            <a:pPr algn="l"/>
+            <a:r>
+              <a:rPr sz="2300" b="0" i="0">
+                <a:solidFill>
+                  <a:srgbClr val="1A1A1A"/>
+                </a:solidFill>
+                <a:latin typeface="Century Schoolbook"/>
+              </a:rPr>
+              <a:t>  or  </a:t>
+            </a:r>
+          </a:p>
+        </p:txBody>
+      </p:sp>
+      <p:pic>
+        <p:nvPicPr>
+          <p:cNvPr id="20" name="Picture 19" descr="da742c0cc1626346.png"/>
+          <p:cNvPicPr>
+            <a:picLocks noChangeAspect="1"/>
+          </p:cNvPicPr>
+          <p:nvPr/>
+        </p:nvPicPr>
+        <p:blipFill>
+          <a:blip r:embed="rId4"/>
+          <a:stretch>
+            <a:fillRect/>
+          </a:stretch>
+        </p:blipFill>
+        <p:spPr>
+          <a:xfrm>
+            <a:off x="6265913" y="3363467"/>
+            <a:ext cx="1301496" cy="286512"/>
+          </a:xfrm>
+          <a:prstGeom prst="rect">
+            <a:avLst/>
+          </a:prstGeom>
+        </p:spPr>
+      </p:pic>
+      <p:sp>
+        <p:nvSpPr>
+          <p:cNvPr id="21" name="TextBox 20"/>
+          <p:cNvSpPr txBox="1"/>
+          <p:nvPr/>
+        </p:nvSpPr>
+        <p:spPr>
+          <a:xfrm>
+            <a:off x="7567409" y="3278123"/>
+            <a:ext cx="433854" cy="457200"/>
+          </a:xfrm>
+          <a:prstGeom prst="rect">
+            <a:avLst/>
+          </a:prstGeom>
+          <a:noFill/>
+        </p:spPr>
+        <p:txBody>
+          <a:bodyPr wrap="none" lIns="45720" rIns="45720" tIns="18288" bIns="18288" anchor="ctr">
+            <a:noAutofit/>
+          </a:bodyPr>
+          <a:lstStyle/>
+          <a:p>
+            <a:pPr algn="l"/>
+            <a:r>
+              <a:rPr sz="2300" b="0" i="0">
+                <a:solidFill>
+                  <a:srgbClr val="1A1A1A"/>
+                </a:solidFill>
+                <a:latin typeface="Century Schoolbook"/>
+              </a:rPr>
+              <a:t> ?</a:t>
+            </a:r>
+          </a:p>
+        </p:txBody>
+      </p:sp>
+      <p:sp>
+        <p:nvSpPr>
+          <p:cNvPr id="22" name="TextBox 21"/>
+          <p:cNvSpPr txBox="1"/>
+          <p:nvPr/>
+        </p:nvSpPr>
+        <p:spPr>
+          <a:xfrm>
+            <a:off x="960120" y="3872483"/>
+            <a:ext cx="548640" cy="457200"/>
+          </a:xfrm>
+          <a:prstGeom prst="rect">
+            <a:avLst/>
+          </a:prstGeom>
+          <a:noFill/>
+        </p:spPr>
+        <p:txBody>
+          <a:bodyPr wrap="square" lIns="45720" rIns="45720" tIns="18288" bIns="18288" anchor="ctr">
+            <a:spAutoFit/>
+          </a:bodyPr>
+          <a:lstStyle/>
+          <a:p>
+            <a:pPr algn="l"/>
+            <a:r>
+              <a:rPr sz="2300" b="1" i="0">
+                <a:solidFill>
+                  <a:srgbClr val="0B5394"/>
+                </a:solidFill>
+                <a:latin typeface="Century Schoolbook"/>
+              </a:rPr>
+              <a:t>5.</a:t>
+            </a:r>
+          </a:p>
+        </p:txBody>
+      </p:sp>
+      <p:sp>
+        <p:nvSpPr>
+          <p:cNvPr id="23" name="TextBox 22"/>
+          <p:cNvSpPr txBox="1"/>
+          <p:nvPr/>
+        </p:nvSpPr>
+        <p:spPr>
+          <a:xfrm>
+            <a:off x="1554480" y="3872483"/>
+            <a:ext cx="4056605" cy="457200"/>
+          </a:xfrm>
+          <a:prstGeom prst="rect">
+            <a:avLst/>
+          </a:prstGeom>
+          <a:noFill/>
+        </p:spPr>
+        <p:txBody>
+          <a:bodyPr wrap="none" lIns="45720" rIns="45720" tIns="18288" bIns="18288" anchor="ctr">
+            <a:noAutofit/>
+          </a:bodyPr>
+          <a:lstStyle/>
+          <a:p>
+            <a:pPr algn="l"/>
+            <a:r>
+              <a:rPr sz="2300" b="0" i="0">
+                <a:solidFill>
+                  <a:srgbClr val="1A1A1A"/>
+                </a:solidFill>
+                <a:latin typeface="Century Schoolbook"/>
+              </a:rPr>
+              <a:t>How many times larger is  </a:t>
+            </a:r>
+          </a:p>
+        </p:txBody>
+      </p:sp>
+      <p:pic>
+        <p:nvPicPr>
+          <p:cNvPr id="24" name="Picture 23" descr="71f394ba76b8be08.png"/>
+          <p:cNvPicPr>
+            <a:picLocks noChangeAspect="1"/>
+          </p:cNvPicPr>
+          <p:nvPr/>
+        </p:nvPicPr>
+        <p:blipFill>
+          <a:blip r:embed="rId5"/>
+          <a:stretch>
+            <a:fillRect/>
+          </a:stretch>
+        </p:blipFill>
+        <p:spPr>
+          <a:xfrm>
+            <a:off x="5473925" y="3959352"/>
+            <a:ext cx="1054608" cy="283464"/>
+          </a:xfrm>
+          <a:prstGeom prst="rect">
+            <a:avLst/>
+          </a:prstGeom>
+        </p:spPr>
+      </p:pic>
+      <p:sp>
+        <p:nvSpPr>
+          <p:cNvPr id="25" name="TextBox 24"/>
+          <p:cNvSpPr txBox="1"/>
+          <p:nvPr/>
+        </p:nvSpPr>
+        <p:spPr>
+          <a:xfrm>
+            <a:off x="6528533" y="3872483"/>
+            <a:ext cx="1224116" cy="457200"/>
+          </a:xfrm>
+          <a:prstGeom prst="rect">
+            <a:avLst/>
+          </a:prstGeom>
+          <a:noFill/>
+        </p:spPr>
+        <p:txBody>
+          <a:bodyPr wrap="none" lIns="45720" rIns="45720" tIns="18288" bIns="18288" anchor="ctr">
+            <a:noAutofit/>
+          </a:bodyPr>
+          <a:lstStyle/>
+          <a:p>
+            <a:pPr algn="l"/>
+            <a:r>
+              <a:rPr sz="2300" b="0" i="0">
+                <a:solidFill>
+                  <a:srgbClr val="1A1A1A"/>
+                </a:solidFill>
+                <a:latin typeface="Century Schoolbook"/>
+              </a:rPr>
+              <a:t>  than  </a:t>
+            </a:r>
+          </a:p>
+        </p:txBody>
+      </p:sp>
+      <p:pic>
+        <p:nvPicPr>
+          <p:cNvPr id="26" name="Picture 25" descr="5f3e69e0f33afe1e.png"/>
+          <p:cNvPicPr>
+            <a:picLocks noChangeAspect="1"/>
+          </p:cNvPicPr>
+          <p:nvPr/>
+        </p:nvPicPr>
+        <p:blipFill>
+          <a:blip r:embed="rId6"/>
+          <a:stretch>
+            <a:fillRect/>
+          </a:stretch>
+        </p:blipFill>
+        <p:spPr>
+          <a:xfrm>
+            <a:off x="7615489" y="3959352"/>
+            <a:ext cx="1063752" cy="283464"/>
+          </a:xfrm>
+          <a:prstGeom prst="rect">
+            <a:avLst/>
+          </a:prstGeom>
+        </p:spPr>
+      </p:pic>
+      <p:sp>
+        <p:nvSpPr>
+          <p:cNvPr id="27" name="TextBox 26"/>
+          <p:cNvSpPr txBox="1"/>
+          <p:nvPr/>
+        </p:nvSpPr>
+        <p:spPr>
+          <a:xfrm>
+            <a:off x="8679241" y="3872483"/>
+            <a:ext cx="433854" cy="457200"/>
+          </a:xfrm>
+          <a:prstGeom prst="rect">
+            <a:avLst/>
+          </a:prstGeom>
+          <a:noFill/>
+        </p:spPr>
+        <p:txBody>
+          <a:bodyPr wrap="none" lIns="45720" rIns="45720" tIns="18288" bIns="18288" anchor="ctr">
+            <a:noAutofit/>
+          </a:bodyPr>
+          <a:lstStyle/>
+          <a:p>
+            <a:pPr algn="l"/>
+            <a:r>
+              <a:rPr sz="2300" b="0" i="0">
+                <a:solidFill>
+                  <a:srgbClr val="1A1A1A"/>
+                </a:solidFill>
+                <a:latin typeface="Century Schoolbook"/>
+              </a:rPr>
+              <a:t> ?</a:t>
+            </a:r>
+          </a:p>
+        </p:txBody>
+      </p:sp>
+      <p:sp>
+        <p:nvSpPr>
+          <p:cNvPr id="28" name="TextBox 27"/>
+          <p:cNvSpPr txBox="1"/>
+          <p:nvPr/>
+        </p:nvSpPr>
+        <p:spPr>
+          <a:xfrm>
+            <a:off x="960120" y="4466844"/>
+            <a:ext cx="548640" cy="457200"/>
+          </a:xfrm>
+          <a:prstGeom prst="rect">
+            <a:avLst/>
+          </a:prstGeom>
+          <a:noFill/>
+        </p:spPr>
+        <p:txBody>
+          <a:bodyPr wrap="square" lIns="45720" rIns="45720" tIns="18288" bIns="18288" anchor="ctr">
+            <a:spAutoFit/>
+          </a:bodyPr>
+          <a:lstStyle/>
+          <a:p>
+            <a:pPr algn="l"/>
+            <a:r>
+              <a:rPr sz="2300" b="1" i="0">
+                <a:solidFill>
+                  <a:srgbClr val="0B5394"/>
+                </a:solidFill>
+                <a:latin typeface="Century Schoolbook"/>
+              </a:rPr>
+              <a:t>6.</a:t>
+            </a:r>
+          </a:p>
+        </p:txBody>
+      </p:sp>
+      <p:sp>
+        <p:nvSpPr>
+          <p:cNvPr id="29" name="TextBox 28"/>
+          <p:cNvSpPr txBox="1"/>
+          <p:nvPr/>
+        </p:nvSpPr>
+        <p:spPr>
+          <a:xfrm>
+            <a:off x="1554480" y="4466844"/>
+            <a:ext cx="9351535" cy="457200"/>
+          </a:xfrm>
+          <a:prstGeom prst="rect">
+            <a:avLst/>
+          </a:prstGeom>
+          <a:noFill/>
+        </p:spPr>
+        <p:txBody>
+          <a:bodyPr wrap="none" lIns="45720" rIns="45720" tIns="18288" bIns="18288" anchor="ctr">
+            <a:noAutofit/>
+          </a:bodyPr>
+          <a:lstStyle/>
+          <a:p>
+            <a:pPr algn="l"/>
+            <a:r>
+              <a:rPr sz="2300" b="0" i="0">
+                <a:solidFill>
+                  <a:srgbClr val="1A1A1A"/>
+                </a:solidFill>
+                <a:latin typeface="Century Schoolbook"/>
+              </a:rPr>
+              <a:t>A computer displays a number as  3.7E−5.  Write it in standard </a:t>
+            </a:r>
+          </a:p>
+        </p:txBody>
+      </p:sp>
+      <p:sp>
+        <p:nvSpPr>
+          <p:cNvPr id="30" name="TextBox 29"/>
+          <p:cNvSpPr txBox="1"/>
+          <p:nvPr/>
+        </p:nvSpPr>
+        <p:spPr>
+          <a:xfrm>
+            <a:off x="1554480" y="4905756"/>
+            <a:ext cx="967023" cy="457200"/>
+          </a:xfrm>
+          <a:prstGeom prst="rect">
+            <a:avLst/>
+          </a:prstGeom>
+          <a:noFill/>
+        </p:spPr>
+        <p:txBody>
+          <a:bodyPr wrap="none" lIns="45720" rIns="45720" tIns="18288" bIns="18288" anchor="ctr">
+            <a:noAutofit/>
+          </a:bodyPr>
+          <a:lstStyle/>
+          <a:p>
+            <a:pPr algn="l"/>
+            <a:r>
+              <a:rPr sz="2300" b="0" i="0">
+                <a:solidFill>
+                  <a:srgbClr val="1A1A1A"/>
+                </a:solidFill>
+                <a:latin typeface="Century Schoolbook"/>
+              </a:rPr>
+              <a:t>form.</a:t>
             </a:r>
           </a:p>
         </p:txBody>

--- a/a7/packages/A7 Unit 3 - Exponents and Scientific Notation/Lessons/3.09/A7 3.09 Writing Small Numbers in Scientific Notation - Slides.pptx
+++ b/a7/packages/A7 Unit 3 - Exponents and Scientific Notation/Lessons/3.09/A7 3.09 Writing Small Numbers in Scientific Notation - Slides.pptx
@@ -3145,11 +3145,11 @@
           <a:p>
             <a:pPr algn="ctr"/>
             <a:r>
-              <a:rPr sz="1500" b="0" i="0">
+              <a:rPr sz="1420" b="0" i="0">
                 <a:solidFill>
                   <a:srgbClr val="6B6B6B"/>
                 </a:solidFill>
-                <a:latin typeface="Century Schoolbook"/>
+                <a:latin typeface="Lexend"/>
               </a:rPr>
               <a:t>GRADE 7 ACCELERATED  ·  UNIT 3  ·  LESSON 9</a:t>
             </a:r>
@@ -3180,11 +3180,11 @@
           <a:p>
             <a:pPr algn="ctr"/>
             <a:r>
-              <a:rPr sz="3400" b="1" i="0">
+              <a:rPr sz="3229" b="1" i="0">
                 <a:solidFill>
                   <a:srgbClr val="1A1A1A"/>
                 </a:solidFill>
-                <a:latin typeface="Century Schoolbook"/>
+                <a:latin typeface="Lexend"/>
               </a:rPr>
               <a:t>Writing Small Numbers in Scientific Notation</a:t>
             </a:r>
@@ -3285,11 +3285,11 @@
           <a:p>
             <a:pPr algn="ctr"/>
             <a:r>
-              <a:rPr sz="1600" b="1" i="0">
+              <a:rPr sz="1520" b="1" i="0">
                 <a:solidFill>
                   <a:srgbClr val="1A1A1A"/>
                 </a:solidFill>
-                <a:latin typeface="Century Schoolbook"/>
+                <a:latin typeface="Lexend"/>
               </a:rPr>
               <a:t>MA.8.NSO.1.4</a:t>
             </a:r>
@@ -3320,11 +3320,11 @@
           <a:p>
             <a:pPr algn="ctr"/>
             <a:r>
-              <a:rPr sz="1900" b="0" i="1">
+              <a:rPr sz="1810" b="0" i="0">
                 <a:solidFill>
                   <a:srgbClr val="1A1A1A"/>
                 </a:solidFill>
-                <a:latin typeface="Century Schoolbook"/>
+                <a:latin typeface="Lexend"/>
               </a:rPr>
               <a:t>I can write very small numbers in scientific notation, read them back, and find how many times larger or smaller one number is than another.</a:t>
             </a:r>
@@ -3390,11 +3390,11 @@
           <a:p>
             <a:pPr algn="l"/>
             <a:r>
-              <a:rPr sz="1100" b="0" i="1">
+              <a:rPr sz="1040" b="0" i="0">
                 <a:solidFill>
                   <a:srgbClr val="6B6B6B"/>
                 </a:solidFill>
-                <a:latin typeface="Century Schoolbook"/>
+                <a:latin typeface="Lexend"/>
               </a:rPr>
               <a:t>Grade 7 Accelerated · Unit 3 · Lesson 9 — Writing Small Numbers in Scientific Notation</a:t>
             </a:r>
@@ -3425,11 +3425,11 @@
           <a:p>
             <a:pPr algn="r"/>
             <a:r>
-              <a:rPr sz="1100" b="0" i="0">
+              <a:rPr sz="1040" b="0" i="0">
                 <a:solidFill>
                   <a:srgbClr val="6B6B6B"/>
                 </a:solidFill>
-                <a:latin typeface="Century Schoolbook"/>
+                <a:latin typeface="Lexend"/>
               </a:rPr>
               <a:t>1</a:t>
             </a:r>
@@ -3478,11 +3478,11 @@
           <a:p>
             <a:pPr algn="l"/>
             <a:r>
-              <a:rPr sz="3600" b="1" i="0">
+              <a:rPr sz="3420" b="1" i="0">
                 <a:solidFill>
                   <a:srgbClr val="1A1A1A"/>
                 </a:solidFill>
-                <a:latin typeface="Century Schoolbook"/>
+                <a:latin typeface="Lexend"/>
               </a:rPr>
               <a:t>Your Turn</a:t>
             </a:r>
@@ -3618,11 +3618,11 @@
           <a:p>
             <a:pPr algn="l"/>
             <a:r>
-              <a:rPr sz="1100" b="0" i="1">
+              <a:rPr sz="1040" b="0" i="0">
                 <a:solidFill>
                   <a:srgbClr val="6B6B6B"/>
                 </a:solidFill>
-                <a:latin typeface="Century Schoolbook"/>
+                <a:latin typeface="Lexend"/>
               </a:rPr>
               <a:t>Grade 7 Accelerated · Unit 3 · Lesson 9 — Writing Small Numbers in Scientific Notation</a:t>
             </a:r>
@@ -3653,11 +3653,11 @@
           <a:p>
             <a:pPr algn="r"/>
             <a:r>
-              <a:rPr sz="1100" b="0" i="0">
+              <a:rPr sz="1040" b="0" i="0">
                 <a:solidFill>
                   <a:srgbClr val="6B6B6B"/>
                 </a:solidFill>
-                <a:latin typeface="Century Schoolbook"/>
+                <a:latin typeface="Lexend"/>
               </a:rPr>
               <a:t>10</a:t>
             </a:r>
@@ -3672,7 +3672,7 @@
         </p:nvSpPr>
         <p:spPr>
           <a:xfrm>
-            <a:off x="777240" y="2194560"/>
+            <a:off x="777240" y="1600200"/>
             <a:ext cx="10607040" cy="429370"/>
           </a:xfrm>
           <a:prstGeom prst="rect">
@@ -3688,11 +3688,11 @@
           <a:p>
             <a:pPr algn="ctr"/>
             <a:r>
-              <a:rPr sz="2400" b="0" i="0">
+              <a:rPr sz="2280" b="0" i="0">
                 <a:solidFill>
                   <a:srgbClr val="1A1A1A"/>
                 </a:solidFill>
-                <a:latin typeface="Century Schoolbook"/>
+                <a:latin typeface="Lexend"/>
               </a:rPr>
               <a:t>A human hair is about 67 hundred-thousandths of an inch thick.</a:t>
             </a:r>
@@ -3707,7 +3707,7 @@
         </p:nvSpPr>
         <p:spPr>
           <a:xfrm>
-            <a:off x="777240" y="2733658"/>
+            <a:off x="777240" y="2139298"/>
             <a:ext cx="10607040" cy="429370"/>
           </a:xfrm>
           <a:prstGeom prst="rect">
@@ -3723,11 +3723,11 @@
           <a:p>
             <a:pPr algn="ctr"/>
             <a:r>
-              <a:rPr sz="2400" b="0" i="0">
+              <a:rPr sz="2280" b="0" i="0">
                 <a:solidFill>
                   <a:srgbClr val="1A1A1A"/>
                 </a:solidFill>
-                <a:latin typeface="Century Schoolbook"/>
+                <a:latin typeface="Lexend"/>
               </a:rPr>
               <a:t>Write this value in scientific notation.</a:t>
             </a:r>
@@ -3737,6 +3737,100 @@
       <p:sp>
         <p:nvSpPr>
           <p:cNvPr id="10" name="TextBox 9"/>
+          <p:cNvSpPr txBox="1"/>
+          <p:nvPr/>
+        </p:nvSpPr>
+        <p:spPr>
+          <a:xfrm>
+            <a:off x="3430777" y="2728688"/>
+            <a:ext cx="5437125" cy="457200"/>
+          </a:xfrm>
+          <a:prstGeom prst="rect">
+            <a:avLst/>
+          </a:prstGeom>
+          <a:noFill/>
+        </p:spPr>
+        <p:txBody>
+          <a:bodyPr wrap="none" lIns="45720" rIns="45720" tIns="18288" bIns="18288" anchor="ctr">
+            <a:noAutofit/>
+          </a:bodyPr>
+          <a:lstStyle/>
+          <a:p>
+            <a:pPr algn="l"/>
+            <a:r>
+              <a:rPr sz="2330" b="0" i="0">
+                <a:solidFill>
+                  <a:srgbClr val="1A1A1A"/>
+                </a:solidFill>
+                <a:latin typeface="Lexend"/>
+              </a:rPr>
+              <a:t>67 hundred-thousandths = 0.00067</a:t>
+            </a:r>
+          </a:p>
+        </p:txBody>
+      </p:sp>
+      <p:sp>
+        <p:nvSpPr>
+          <p:cNvPr id="11" name="TextBox 10"/>
+          <p:cNvSpPr txBox="1"/>
+          <p:nvPr/>
+        </p:nvSpPr>
+        <p:spPr>
+          <a:xfrm>
+            <a:off x="3430777" y="3231608"/>
+            <a:ext cx="5293999" cy="457200"/>
+          </a:xfrm>
+          <a:prstGeom prst="rect">
+            <a:avLst/>
+          </a:prstGeom>
+          <a:noFill/>
+        </p:spPr>
+        <p:txBody>
+          <a:bodyPr wrap="none" lIns="45720" rIns="45720" tIns="18288" bIns="18288" anchor="ctr">
+            <a:noAutofit/>
+          </a:bodyPr>
+          <a:lstStyle/>
+          <a:p>
+            <a:pPr algn="l"/>
+            <a:r>
+              <a:rPr sz="2330" b="0" i="0">
+                <a:solidFill>
+                  <a:srgbClr val="1A1A1A"/>
+                </a:solidFill>
+                <a:latin typeface="Lexend"/>
+              </a:rPr>
+              <a:t>Move the point 4 places right:  6.7</a:t>
+            </a:r>
+          </a:p>
+        </p:txBody>
+      </p:sp>
+      <p:pic>
+        <p:nvPicPr>
+          <p:cNvPr id="12" name="Picture 11" descr="6b2179ecfff78d07.png"/>
+          <p:cNvPicPr>
+            <a:picLocks noChangeAspect="1"/>
+          </p:cNvPicPr>
+          <p:nvPr/>
+        </p:nvPicPr>
+        <p:blipFill>
+          <a:blip r:embed="rId2"/>
+          <a:stretch>
+            <a:fillRect/>
+          </a:stretch>
+        </p:blipFill>
+        <p:spPr>
+          <a:xfrm>
+            <a:off x="3485641" y="3835112"/>
+            <a:ext cx="2599944" cy="256032"/>
+          </a:xfrm>
+          <a:prstGeom prst="rect">
+            <a:avLst/>
+          </a:prstGeom>
+        </p:spPr>
+      </p:pic>
+      <p:sp>
+        <p:nvSpPr>
+          <p:cNvPr id="13" name="TextBox 12"/>
           <p:cNvSpPr txBox="1"/>
           <p:nvPr/>
         </p:nvSpPr>
@@ -3758,20 +3852,20 @@
           <a:p>
             <a:pPr algn="ctr"/>
             <a:r>
-              <a:rPr sz="3200" b="1" i="0">
+              <a:rPr sz="3040" b="1" i="0">
                 <a:solidFill>
                   <a:srgbClr val="9E1B32"/>
                 </a:solidFill>
-                <a:latin typeface="Century Schoolbook"/>
+                <a:latin typeface="Lexend"/>
               </a:rPr>
               <a:t>Answer:   6.7 × 10</a:t>
             </a:r>
             <a:r>
-              <a:rPr sz="3200" b="1" i="0" baseline="30000">
+              <a:rPr sz="3040" b="1" i="0" baseline="30000">
                 <a:solidFill>
                   <a:srgbClr val="9E1B32"/>
                 </a:solidFill>
-                <a:latin typeface="Century Schoolbook"/>
+                <a:latin typeface="Lexend"/>
               </a:rPr>
               <a:t>-4</a:t>
             </a:r>
@@ -3820,11 +3914,11 @@
           <a:p>
             <a:pPr algn="l"/>
             <a:r>
-              <a:rPr sz="3600" b="1" i="0">
+              <a:rPr sz="3420" b="1" i="0">
                 <a:solidFill>
                   <a:srgbClr val="1A1A1A"/>
                 </a:solidFill>
-                <a:latin typeface="Century Schoolbook"/>
+                <a:latin typeface="Lexend"/>
               </a:rPr>
               <a:t>Example 2</a:t>
             </a:r>
@@ -3960,11 +4054,11 @@
           <a:p>
             <a:pPr algn="l"/>
             <a:r>
-              <a:rPr sz="1100" b="0" i="1">
+              <a:rPr sz="1040" b="0" i="0">
                 <a:solidFill>
                   <a:srgbClr val="6B6B6B"/>
                 </a:solidFill>
-                <a:latin typeface="Century Schoolbook"/>
+                <a:latin typeface="Lexend"/>
               </a:rPr>
               <a:t>Grade 7 Accelerated · Unit 3 · Lesson 9 — Writing Small Numbers in Scientific Notation</a:t>
             </a:r>
@@ -3995,11 +4089,11 @@
           <a:p>
             <a:pPr algn="r"/>
             <a:r>
-              <a:rPr sz="1100" b="0" i="0">
+              <a:rPr sz="1040" b="0" i="0">
                 <a:solidFill>
                   <a:srgbClr val="6B6B6B"/>
                 </a:solidFill>
-                <a:latin typeface="Century Schoolbook"/>
+                <a:latin typeface="Lexend"/>
               </a:rPr>
               <a:t>11</a:t>
             </a:r>
@@ -4014,8 +4108,8 @@
         </p:nvSpPr>
         <p:spPr>
           <a:xfrm>
-            <a:off x="1499191" y="2080260"/>
-            <a:ext cx="4558064" cy="457200"/>
+            <a:off x="1605094" y="2080260"/>
+            <a:ext cx="4488298" cy="457200"/>
           </a:xfrm>
           <a:prstGeom prst="rect">
             <a:avLst/>
@@ -4030,11 +4124,11 @@
           <a:p>
             <a:pPr algn="l"/>
             <a:r>
-              <a:rPr sz="2600" b="0" i="0">
+              <a:rPr sz="2470" b="0" i="0">
                 <a:solidFill>
                   <a:srgbClr val="1A1A1A"/>
                 </a:solidFill>
-                <a:latin typeface="Century Schoolbook"/>
+                <a:latin typeface="Lexend"/>
               </a:rPr>
               <a:t>How many times larger is  </a:t>
             </a:r>
@@ -4043,7 +4137,7 @@
       </p:sp>
       <p:pic>
         <p:nvPicPr>
-          <p:cNvPr id="9" name="Picture 8" descr="ee4e609945ec82be.png"/>
+          <p:cNvPr id="9" name="Picture 8" descr="b4e84117b325ad45.png"/>
           <p:cNvPicPr>
             <a:picLocks noChangeAspect="1"/>
           </p:cNvPicPr>
@@ -4057,8 +4151,8 @@
         </p:blipFill>
         <p:spPr>
           <a:xfrm>
-            <a:off x="5920096" y="2133599"/>
-            <a:ext cx="1621536" cy="350520"/>
+            <a:off x="5956233" y="2141219"/>
+            <a:ext cx="1560576" cy="335280"/>
           </a:xfrm>
           <a:prstGeom prst="rect">
             <a:avLst/>
@@ -4073,8 +4167,8 @@
         </p:nvSpPr>
         <p:spPr>
           <a:xfrm>
-            <a:off x="7541632" y="2080260"/>
-            <a:ext cx="1356212" cy="457200"/>
+            <a:off x="7516809" y="2080260"/>
+            <a:ext cx="1316601" cy="457200"/>
           </a:xfrm>
           <a:prstGeom prst="rect">
             <a:avLst/>
@@ -4089,11 +4183,11 @@
           <a:p>
             <a:pPr algn="l"/>
             <a:r>
-              <a:rPr sz="2600" b="0" i="0">
+              <a:rPr sz="2470" b="0" i="0">
                 <a:solidFill>
                   <a:srgbClr val="1A1A1A"/>
                 </a:solidFill>
-                <a:latin typeface="Century Schoolbook"/>
+                <a:latin typeface="Lexend"/>
               </a:rPr>
               <a:t>  than  </a:t>
             </a:r>
@@ -4102,7 +4196,7 @@
       </p:sp>
       <p:pic>
         <p:nvPicPr>
-          <p:cNvPr id="11" name="Picture 10" descr="dee1eef8fb06ad76.png"/>
+          <p:cNvPr id="11" name="Picture 10" descr="23867d22f72f6894.png"/>
           <p:cNvPicPr>
             <a:picLocks noChangeAspect="1"/>
           </p:cNvPicPr>
@@ -4116,8 +4210,8 @@
         </p:blipFill>
         <p:spPr>
           <a:xfrm>
-            <a:off x="8760684" y="2136648"/>
-            <a:ext cx="1575816" cy="344424"/>
+            <a:off x="8696251" y="2139696"/>
+            <a:ext cx="1524000" cy="338328"/>
           </a:xfrm>
           <a:prstGeom prst="rect">
             <a:avLst/>
@@ -4132,8 +4226,8 @@
         </p:nvSpPr>
         <p:spPr>
           <a:xfrm>
-            <a:off x="10336500" y="2080260"/>
-            <a:ext cx="462987" cy="457200"/>
+            <a:off x="10220251" y="2080260"/>
+            <a:ext cx="473333" cy="457200"/>
           </a:xfrm>
           <a:prstGeom prst="rect">
             <a:avLst/>
@@ -4148,11 +4242,11 @@
           <a:p>
             <a:pPr algn="l"/>
             <a:r>
-              <a:rPr sz="2600" b="0" i="0">
+              <a:rPr sz="2470" b="0" i="0">
                 <a:solidFill>
                   <a:srgbClr val="1A1A1A"/>
                 </a:solidFill>
-                <a:latin typeface="Century Schoolbook"/>
+                <a:latin typeface="Lexend"/>
               </a:rPr>
               <a:t> ?</a:t>
             </a:r>
@@ -4201,11 +4295,11 @@
           <a:p>
             <a:pPr algn="l"/>
             <a:r>
-              <a:rPr sz="3600" b="1" i="0">
+              <a:rPr sz="3420" b="1" i="0">
                 <a:solidFill>
                   <a:srgbClr val="1A1A1A"/>
                 </a:solidFill>
-                <a:latin typeface="Century Schoolbook"/>
+                <a:latin typeface="Lexend"/>
               </a:rPr>
               <a:t>Example 2</a:t>
             </a:r>
@@ -4341,11 +4435,11 @@
           <a:p>
             <a:pPr algn="l"/>
             <a:r>
-              <a:rPr sz="1100" b="0" i="1">
+              <a:rPr sz="1040" b="0" i="0">
                 <a:solidFill>
                   <a:srgbClr val="6B6B6B"/>
                 </a:solidFill>
-                <a:latin typeface="Century Schoolbook"/>
+                <a:latin typeface="Lexend"/>
               </a:rPr>
               <a:t>Grade 7 Accelerated · Unit 3 · Lesson 9 — Writing Small Numbers in Scientific Notation</a:t>
             </a:r>
@@ -4376,11 +4470,11 @@
           <a:p>
             <a:pPr algn="r"/>
             <a:r>
-              <a:rPr sz="1100" b="0" i="0">
+              <a:rPr sz="1040" b="0" i="0">
                 <a:solidFill>
                   <a:srgbClr val="6B6B6B"/>
                 </a:solidFill>
-                <a:latin typeface="Century Schoolbook"/>
+                <a:latin typeface="Lexend"/>
               </a:rPr>
               <a:t>12</a:t>
             </a:r>
@@ -4389,7 +4483,7 @@
       </p:sp>
       <p:pic>
         <p:nvPicPr>
-          <p:cNvPr id="8" name="Picture 7" descr="59c7818cbaac33bd.png"/>
+          <p:cNvPr id="8" name="Picture 7" descr="8663d5441fef8d47.png"/>
           <p:cNvPicPr>
             <a:picLocks noChangeAspect="1"/>
           </p:cNvPicPr>
@@ -4404,7 +4498,7 @@
         <p:spPr>
           <a:xfrm>
             <a:off x="1828800" y="1920240"/>
-            <a:ext cx="1152144" cy="685800"/>
+            <a:ext cx="1146048" cy="676656"/>
           </a:xfrm>
           <a:prstGeom prst="rect">
             <a:avLst/>
@@ -4413,7 +4507,7 @@
       </p:pic>
       <p:pic>
         <p:nvPicPr>
-          <p:cNvPr id="9" name="Picture 8" descr="6b497f46afc4e7f7.png"/>
+          <p:cNvPr id="9" name="Picture 8" descr="101a9ffba773bd42.png"/>
           <p:cNvPicPr>
             <a:picLocks noChangeAspect="1"/>
           </p:cNvPicPr>
@@ -4427,8 +4521,8 @@
         </p:blipFill>
         <p:spPr>
           <a:xfrm>
-            <a:off x="1828800" y="2880360"/>
-            <a:ext cx="3721608" cy="810768"/>
+            <a:off x="1828800" y="2871215"/>
+            <a:ext cx="3624072" cy="795528"/>
           </a:xfrm>
           <a:prstGeom prst="rect">
             <a:avLst/>
@@ -4437,7 +4531,7 @@
       </p:pic>
       <p:pic>
         <p:nvPicPr>
-          <p:cNvPr id="10" name="Picture 9" descr="60571d6036a338ff.png"/>
+          <p:cNvPr id="10" name="Picture 9" descr="8b5cad9d15904316.png"/>
           <p:cNvPicPr>
             <a:picLocks noChangeAspect="1"/>
           </p:cNvPicPr>
@@ -4451,8 +4545,8 @@
         </p:blipFill>
         <p:spPr>
           <a:xfrm>
-            <a:off x="1828800" y="3965448"/>
-            <a:ext cx="2450592" cy="399288"/>
+            <a:off x="1828800" y="3941063"/>
+            <a:ext cx="2532888" cy="405384"/>
           </a:xfrm>
           <a:prstGeom prst="rect">
             <a:avLst/>
@@ -4467,7 +4561,7 @@
         </p:nvSpPr>
         <p:spPr>
           <a:xfrm>
-            <a:off x="777240" y="4821936"/>
+            <a:off x="777240" y="4803648"/>
             <a:ext cx="10607040" cy="548640"/>
           </a:xfrm>
           <a:prstGeom prst="rect">
@@ -4483,11 +4577,11 @@
           <a:p>
             <a:pPr algn="ctr"/>
             <a:r>
-              <a:rPr sz="3200" b="1" i="0">
+              <a:rPr sz="3040" b="1" i="0">
                 <a:solidFill>
                   <a:srgbClr val="9E1B32"/>
                 </a:solidFill>
-                <a:latin typeface="Century Schoolbook"/>
+                <a:latin typeface="Lexend"/>
               </a:rPr>
               <a:t>Answer:   4,000 times larger</a:t>
             </a:r>
@@ -4536,11 +4630,11 @@
           <a:p>
             <a:pPr algn="l"/>
             <a:r>
-              <a:rPr sz="3600" b="1" i="0">
+              <a:rPr sz="3420" b="1" i="0">
                 <a:solidFill>
                   <a:srgbClr val="1A1A1A"/>
                 </a:solidFill>
-                <a:latin typeface="Century Schoolbook"/>
+                <a:latin typeface="Lexend"/>
               </a:rPr>
               <a:t>Your Turn</a:t>
             </a:r>
@@ -4676,11 +4770,11 @@
           <a:p>
             <a:pPr algn="l"/>
             <a:r>
-              <a:rPr sz="1100" b="0" i="1">
+              <a:rPr sz="1040" b="0" i="0">
                 <a:solidFill>
                   <a:srgbClr val="6B6B6B"/>
                 </a:solidFill>
-                <a:latin typeface="Century Schoolbook"/>
+                <a:latin typeface="Lexend"/>
               </a:rPr>
               <a:t>Grade 7 Accelerated · Unit 3 · Lesson 9 — Writing Small Numbers in Scientific Notation</a:t>
             </a:r>
@@ -4711,11 +4805,11 @@
           <a:p>
             <a:pPr algn="r"/>
             <a:r>
-              <a:rPr sz="1100" b="0" i="0">
+              <a:rPr sz="1040" b="0" i="0">
                 <a:solidFill>
                   <a:srgbClr val="6B6B6B"/>
                 </a:solidFill>
-                <a:latin typeface="Century Schoolbook"/>
+                <a:latin typeface="Lexend"/>
               </a:rPr>
               <a:t>13</a:t>
             </a:r>
@@ -4730,8 +4824,8 @@
         </p:nvSpPr>
         <p:spPr>
           <a:xfrm>
-            <a:off x="1089235" y="2185415"/>
-            <a:ext cx="4558064" cy="457200"/>
+            <a:off x="1204282" y="1583436"/>
+            <a:ext cx="4488298" cy="457200"/>
           </a:xfrm>
           <a:prstGeom prst="rect">
             <a:avLst/>
@@ -4746,11 +4840,11 @@
           <a:p>
             <a:pPr algn="l"/>
             <a:r>
-              <a:rPr sz="2600" b="0" i="0">
+              <a:rPr sz="2470" b="0" i="0">
                 <a:solidFill>
                   <a:srgbClr val="1A1A1A"/>
                 </a:solidFill>
-                <a:latin typeface="Century Schoolbook"/>
+                <a:latin typeface="Lexend"/>
               </a:rPr>
               <a:t>How many times larger is  </a:t>
             </a:r>
@@ -4759,7 +4853,7 @@
       </p:sp>
       <p:pic>
         <p:nvPicPr>
-          <p:cNvPr id="9" name="Picture 8" descr="496ffc9a205d258d.png"/>
+          <p:cNvPr id="9" name="Picture 8" descr="9c7a204f2876535d.png"/>
           <p:cNvPicPr>
             <a:picLocks noChangeAspect="1"/>
           </p:cNvPicPr>
@@ -4773,8 +4867,8 @@
         </p:blipFill>
         <p:spPr>
           <a:xfrm>
-            <a:off x="5510140" y="2196083"/>
-            <a:ext cx="2005584" cy="435864"/>
+            <a:off x="5555421" y="1601724"/>
+            <a:ext cx="1941576" cy="420624"/>
           </a:xfrm>
           <a:prstGeom prst="rect">
             <a:avLst/>
@@ -4789,8 +4883,8 @@
         </p:nvSpPr>
         <p:spPr>
           <a:xfrm>
-            <a:off x="7515724" y="2185415"/>
-            <a:ext cx="1356212" cy="457200"/>
+            <a:off x="7496997" y="1583436"/>
+            <a:ext cx="1316601" cy="457200"/>
           </a:xfrm>
           <a:prstGeom prst="rect">
             <a:avLst/>
@@ -4805,11 +4899,11 @@
           <a:p>
             <a:pPr algn="l"/>
             <a:r>
-              <a:rPr sz="2600" b="0" i="0">
+              <a:rPr sz="2470" b="0" i="0">
                 <a:solidFill>
                   <a:srgbClr val="1A1A1A"/>
                 </a:solidFill>
-                <a:latin typeface="Century Schoolbook"/>
+                <a:latin typeface="Lexend"/>
               </a:rPr>
               <a:t>  than  </a:t>
             </a:r>
@@ -4818,7 +4912,7 @@
       </p:sp>
       <p:pic>
         <p:nvPicPr>
-          <p:cNvPr id="11" name="Picture 10" descr="a82e6bba98260e6a.png"/>
+          <p:cNvPr id="11" name="Picture 10" descr="873100442e093fb1.png"/>
           <p:cNvPicPr>
             <a:picLocks noChangeAspect="1"/>
           </p:cNvPicPr>
@@ -4832,8 +4926,8 @@
         </p:blipFill>
         <p:spPr>
           <a:xfrm>
-            <a:off x="8734776" y="2194560"/>
-            <a:ext cx="2011680" cy="438912"/>
+            <a:off x="8676439" y="1600200"/>
+            <a:ext cx="1944623" cy="423672"/>
           </a:xfrm>
           <a:prstGeom prst="rect">
             <a:avLst/>
@@ -4848,8 +4942,8 @@
         </p:nvSpPr>
         <p:spPr>
           <a:xfrm>
-            <a:off x="10746456" y="2185415"/>
-            <a:ext cx="462987" cy="457200"/>
+            <a:off x="10621063" y="1583436"/>
+            <a:ext cx="473333" cy="457200"/>
           </a:xfrm>
           <a:prstGeom prst="rect">
             <a:avLst/>
@@ -4864,11 +4958,11 @@
           <a:p>
             <a:pPr algn="l"/>
             <a:r>
-              <a:rPr sz="2600" b="0" i="0">
+              <a:rPr sz="2470" b="0" i="0">
                 <a:solidFill>
                   <a:srgbClr val="1A1A1A"/>
                 </a:solidFill>
-                <a:latin typeface="Century Schoolbook"/>
+                <a:latin typeface="Lexend"/>
               </a:rPr>
               <a:t> ?</a:t>
             </a:r>
@@ -4917,11 +5011,11 @@
           <a:p>
             <a:pPr algn="l"/>
             <a:r>
-              <a:rPr sz="3600" b="1" i="0">
+              <a:rPr sz="3420" b="1" i="0">
                 <a:solidFill>
                   <a:srgbClr val="1A1A1A"/>
                 </a:solidFill>
-                <a:latin typeface="Century Schoolbook"/>
+                <a:latin typeface="Lexend"/>
               </a:rPr>
               <a:t>Your Turn</a:t>
             </a:r>
@@ -5057,11 +5151,11 @@
           <a:p>
             <a:pPr algn="l"/>
             <a:r>
-              <a:rPr sz="1100" b="0" i="1">
+              <a:rPr sz="1040" b="0" i="0">
                 <a:solidFill>
                   <a:srgbClr val="6B6B6B"/>
                 </a:solidFill>
-                <a:latin typeface="Century Schoolbook"/>
+                <a:latin typeface="Lexend"/>
               </a:rPr>
               <a:t>Grade 7 Accelerated · Unit 3 · Lesson 9 — Writing Small Numbers in Scientific Notation</a:t>
             </a:r>
@@ -5092,11 +5186,11 @@
           <a:p>
             <a:pPr algn="r"/>
             <a:r>
-              <a:rPr sz="1100" b="0" i="0">
+              <a:rPr sz="1040" b="0" i="0">
                 <a:solidFill>
                   <a:srgbClr val="6B6B6B"/>
                 </a:solidFill>
-                <a:latin typeface="Century Schoolbook"/>
+                <a:latin typeface="Lexend"/>
               </a:rPr>
               <a:t>14</a:t>
             </a:r>
@@ -5111,8 +5205,8 @@
         </p:nvSpPr>
         <p:spPr>
           <a:xfrm>
-            <a:off x="1087711" y="2183892"/>
-            <a:ext cx="4558064" cy="457200"/>
+            <a:off x="1201234" y="1583436"/>
+            <a:ext cx="4488298" cy="457200"/>
           </a:xfrm>
           <a:prstGeom prst="rect">
             <a:avLst/>
@@ -5127,11 +5221,11 @@
           <a:p>
             <a:pPr algn="l"/>
             <a:r>
-              <a:rPr sz="2600" b="0" i="0">
+              <a:rPr sz="2470" b="0" i="0">
                 <a:solidFill>
                   <a:srgbClr val="1A1A1A"/>
                 </a:solidFill>
-                <a:latin typeface="Century Schoolbook"/>
+                <a:latin typeface="Lexend"/>
               </a:rPr>
               <a:t>How many times larger is  </a:t>
             </a:r>
@@ -5140,7 +5234,7 @@
       </p:sp>
       <p:pic>
         <p:nvPicPr>
-          <p:cNvPr id="9" name="Picture 8" descr="2496b86a47380327.png"/>
+          <p:cNvPr id="9" name="Picture 8" descr="edd08f0868705af5.png"/>
           <p:cNvPicPr>
             <a:picLocks noChangeAspect="1"/>
           </p:cNvPicPr>
@@ -5154,8 +5248,8 @@
         </p:blipFill>
         <p:spPr>
           <a:xfrm>
-            <a:off x="5508616" y="2194560"/>
-            <a:ext cx="2008632" cy="435864"/>
+            <a:off x="5552373" y="1601724"/>
+            <a:ext cx="1944623" cy="420624"/>
           </a:xfrm>
           <a:prstGeom prst="rect">
             <a:avLst/>
@@ -5170,8 +5264,8 @@
         </p:nvSpPr>
         <p:spPr>
           <a:xfrm>
-            <a:off x="7517248" y="2183892"/>
-            <a:ext cx="1356212" cy="457200"/>
+            <a:off x="7496997" y="1583436"/>
+            <a:ext cx="1316601" cy="457200"/>
           </a:xfrm>
           <a:prstGeom prst="rect">
             <a:avLst/>
@@ -5186,11 +5280,11 @@
           <a:p>
             <a:pPr algn="l"/>
             <a:r>
-              <a:rPr sz="2600" b="0" i="0">
+              <a:rPr sz="2470" b="0" i="0">
                 <a:solidFill>
                   <a:srgbClr val="1A1A1A"/>
                 </a:solidFill>
-                <a:latin typeface="Century Schoolbook"/>
+                <a:latin typeface="Lexend"/>
               </a:rPr>
               <a:t>  than  </a:t>
             </a:r>
@@ -5199,7 +5293,7 @@
       </p:sp>
       <p:pic>
         <p:nvPicPr>
-          <p:cNvPr id="11" name="Picture 10" descr="8ceadc8177621752.png"/>
+          <p:cNvPr id="11" name="Picture 10" descr="c12161b97b98d81a.png"/>
           <p:cNvPicPr>
             <a:picLocks noChangeAspect="1"/>
           </p:cNvPicPr>
@@ -5213,8 +5307,8 @@
         </p:blipFill>
         <p:spPr>
           <a:xfrm>
-            <a:off x="8736300" y="2194560"/>
-            <a:ext cx="2011680" cy="435864"/>
+            <a:off x="8676439" y="1600200"/>
+            <a:ext cx="1947672" cy="423672"/>
           </a:xfrm>
           <a:prstGeom prst="rect">
             <a:avLst/>
@@ -5229,8 +5323,8 @@
         </p:nvSpPr>
         <p:spPr>
           <a:xfrm>
-            <a:off x="10747980" y="2183892"/>
-            <a:ext cx="462987" cy="457200"/>
+            <a:off x="10624111" y="1583436"/>
+            <a:ext cx="473333" cy="457200"/>
           </a:xfrm>
           <a:prstGeom prst="rect">
             <a:avLst/>
@@ -5245,11 +5339,11 @@
           <a:p>
             <a:pPr algn="l"/>
             <a:r>
-              <a:rPr sz="2600" b="0" i="0">
+              <a:rPr sz="2470" b="0" i="0">
                 <a:solidFill>
                   <a:srgbClr val="1A1A1A"/>
                 </a:solidFill>
-                <a:latin typeface="Century Schoolbook"/>
+                <a:latin typeface="Lexend"/>
               </a:rPr>
               <a:t> ?</a:t>
             </a:r>
@@ -5259,6 +5353,148 @@
       <p:sp>
         <p:nvSpPr>
           <p:cNvPr id="13" name="TextBox 12"/>
+          <p:cNvSpPr txBox="1"/>
+          <p:nvPr/>
+        </p:nvSpPr>
+        <p:spPr>
+          <a:xfrm>
+            <a:off x="2783688" y="2394204"/>
+            <a:ext cx="3415280" cy="457200"/>
+          </a:xfrm>
+          <a:prstGeom prst="rect">
+            <a:avLst/>
+          </a:prstGeom>
+          <a:noFill/>
+        </p:spPr>
+        <p:txBody>
+          <a:bodyPr wrap="none" lIns="45720" rIns="45720" tIns="18288" bIns="18288" anchor="ctr">
+            <a:noAutofit/>
+          </a:bodyPr>
+          <a:lstStyle/>
+          <a:p>
+            <a:pPr algn="l"/>
+            <a:r>
+              <a:rPr sz="2330" b="0" i="0">
+                <a:solidFill>
+                  <a:srgbClr val="1A1A1A"/>
+                </a:solidFill>
+                <a:latin typeface="Lexend"/>
+              </a:rPr>
+              <a:t>Divide the numbers:  </a:t>
+            </a:r>
+          </a:p>
+        </p:txBody>
+      </p:sp>
+      <p:pic>
+        <p:nvPicPr>
+          <p:cNvPr id="14" name="Picture 13" descr="ff9a26e5845eab59.png"/>
+          <p:cNvPicPr>
+            <a:picLocks noChangeAspect="1"/>
+          </p:cNvPicPr>
+          <p:nvPr/>
+        </p:nvPicPr>
+        <p:blipFill>
+          <a:blip r:embed="rId4"/>
+          <a:stretch>
+            <a:fillRect/>
+          </a:stretch>
+        </p:blipFill>
+        <p:spPr>
+          <a:xfrm>
+            <a:off x="6061808" y="2516124"/>
+            <a:ext cx="1496568" cy="213360"/>
+          </a:xfrm>
+          <a:prstGeom prst="rect">
+            <a:avLst/>
+          </a:prstGeom>
+        </p:spPr>
+      </p:pic>
+      <p:sp>
+        <p:nvSpPr>
+          <p:cNvPr id="15" name="TextBox 14"/>
+          <p:cNvSpPr txBox="1"/>
+          <p:nvPr/>
+        </p:nvSpPr>
+        <p:spPr>
+          <a:xfrm>
+            <a:off x="2783688" y="2897124"/>
+            <a:ext cx="3183431" cy="457200"/>
+          </a:xfrm>
+          <a:prstGeom prst="rect">
+            <a:avLst/>
+          </a:prstGeom>
+          <a:noFill/>
+        </p:spPr>
+        <p:txBody>
+          <a:bodyPr wrap="none" lIns="45720" rIns="45720" tIns="18288" bIns="18288" anchor="ctr">
+            <a:noAutofit/>
+          </a:bodyPr>
+          <a:lstStyle/>
+          <a:p>
+            <a:pPr algn="l"/>
+            <a:r>
+              <a:rPr sz="2330" b="0" i="0">
+                <a:solidFill>
+                  <a:srgbClr val="1A1A1A"/>
+                </a:solidFill>
+                <a:latin typeface="Lexend"/>
+              </a:rPr>
+              <a:t>Divide the powers:  </a:t>
+            </a:r>
+          </a:p>
+        </p:txBody>
+      </p:sp>
+      <p:pic>
+        <p:nvPicPr>
+          <p:cNvPr id="16" name="Picture 15" descr="e0fb676db25f9eda.png"/>
+          <p:cNvPicPr>
+            <a:picLocks noChangeAspect="1"/>
+          </p:cNvPicPr>
+          <p:nvPr/>
+        </p:nvPicPr>
+        <p:blipFill>
+          <a:blip r:embed="rId5"/>
+          <a:stretch>
+            <a:fillRect/>
+          </a:stretch>
+        </p:blipFill>
+        <p:spPr>
+          <a:xfrm>
+            <a:off x="5829959" y="2996184"/>
+            <a:ext cx="3550920" cy="259080"/>
+          </a:xfrm>
+          <a:prstGeom prst="rect">
+            <a:avLst/>
+          </a:prstGeom>
+        </p:spPr>
+      </p:pic>
+      <p:pic>
+        <p:nvPicPr>
+          <p:cNvPr id="17" name="Picture 16" descr="2847951d0162e9c1.png"/>
+          <p:cNvPicPr>
+            <a:picLocks noChangeAspect="1"/>
+          </p:cNvPicPr>
+          <p:nvPr/>
+        </p:nvPicPr>
+        <p:blipFill>
+          <a:blip r:embed="rId6"/>
+          <a:stretch>
+            <a:fillRect/>
+          </a:stretch>
+        </p:blipFill>
+        <p:spPr>
+          <a:xfrm>
+            <a:off x="2838552" y="3473196"/>
+            <a:ext cx="2258568" cy="310896"/>
+          </a:xfrm>
+          <a:prstGeom prst="rect">
+            <a:avLst/>
+          </a:prstGeom>
+        </p:spPr>
+      </p:pic>
+      <p:sp>
+        <p:nvSpPr>
+          <p:cNvPr id="18" name="TextBox 17"/>
           <p:cNvSpPr txBox="1"/>
           <p:nvPr/>
         </p:nvSpPr>
@@ -5280,11 +5516,11 @@
           <a:p>
             <a:pPr algn="ctr"/>
             <a:r>
-              <a:rPr sz="3200" b="1" i="0">
+              <a:rPr sz="3040" b="1" i="0">
                 <a:solidFill>
                   <a:srgbClr val="9E1B32"/>
                 </a:solidFill>
-                <a:latin typeface="Century Schoolbook"/>
+                <a:latin typeface="Lexend"/>
               </a:rPr>
               <a:t>Answer:   200,000 times larger</a:t>
             </a:r>
@@ -5333,11 +5569,11 @@
           <a:p>
             <a:pPr algn="l"/>
             <a:r>
-              <a:rPr sz="3400" b="1" i="0">
+              <a:rPr sz="3229" b="1" i="0">
                 <a:solidFill>
                   <a:srgbClr val="1A1A1A"/>
                 </a:solidFill>
-                <a:latin typeface="Century Schoolbook"/>
+                <a:latin typeface="Lexend"/>
               </a:rPr>
               <a:t>Whiteboards   ·   Question 1 of 9</a:t>
             </a:r>
@@ -5473,11 +5709,11 @@
           <a:p>
             <a:pPr algn="l"/>
             <a:r>
-              <a:rPr sz="1100" b="0" i="1">
+              <a:rPr sz="1040" b="0" i="0">
                 <a:solidFill>
                   <a:srgbClr val="6B6B6B"/>
                 </a:solidFill>
-                <a:latin typeface="Century Schoolbook"/>
+                <a:latin typeface="Lexend"/>
               </a:rPr>
               <a:t>Grade 7 Accelerated · Unit 3 · Lesson 9 — Writing Small Numbers in Scientific Notation</a:t>
             </a:r>
@@ -5508,11 +5744,11 @@
           <a:p>
             <a:pPr algn="r"/>
             <a:r>
-              <a:rPr sz="1100" b="0" i="0">
+              <a:rPr sz="1040" b="0" i="0">
                 <a:solidFill>
                   <a:srgbClr val="6B6B6B"/>
                 </a:solidFill>
-                <a:latin typeface="Century Schoolbook"/>
+                <a:latin typeface="Lexend"/>
               </a:rPr>
               <a:t>15</a:t>
             </a:r>
@@ -5521,7 +5757,7 @@
       </p:sp>
       <p:pic>
         <p:nvPicPr>
-          <p:cNvPr id="8" name="Picture 7" descr="1f36aa11b2dfcf42.png"/>
+          <p:cNvPr id="8" name="Picture 7" descr="1c75e9d33d93ce53.png"/>
           <p:cNvPicPr>
             <a:picLocks noChangeAspect="1"/>
           </p:cNvPicPr>
@@ -5535,8 +5771,8 @@
         </p:blipFill>
         <p:spPr>
           <a:xfrm>
-            <a:off x="5643371" y="2194560"/>
-            <a:ext cx="874776" cy="432816"/>
+            <a:off x="5635752" y="2194560"/>
+            <a:ext cx="890016" cy="420624"/>
           </a:xfrm>
           <a:prstGeom prst="rect">
             <a:avLst/>
@@ -5567,11 +5803,11 @@
           <a:p>
             <a:pPr algn="ctr"/>
             <a:r>
-              <a:rPr sz="2600" b="1" i="0">
+              <a:rPr sz="2470" b="1" i="0">
                 <a:solidFill>
                   <a:srgbClr val="1A1A1A"/>
                 </a:solidFill>
-                <a:latin typeface="Century Schoolbook"/>
+                <a:latin typeface="Lexend"/>
               </a:rPr>
               <a:t>Answer it.</a:t>
             </a:r>
@@ -5620,11 +5856,11 @@
           <a:p>
             <a:pPr algn="l"/>
             <a:r>
-              <a:rPr sz="3400" b="1" i="0">
+              <a:rPr sz="3229" b="1" i="0">
                 <a:solidFill>
                   <a:srgbClr val="1A1A1A"/>
                 </a:solidFill>
-                <a:latin typeface="Century Schoolbook"/>
+                <a:latin typeface="Lexend"/>
               </a:rPr>
               <a:t>Whiteboards   ·   Question 1 of 9</a:t>
             </a:r>
@@ -5760,11 +5996,11 @@
           <a:p>
             <a:pPr algn="l"/>
             <a:r>
-              <a:rPr sz="1100" b="0" i="1">
+              <a:rPr sz="1040" b="0" i="0">
                 <a:solidFill>
                   <a:srgbClr val="6B6B6B"/>
                 </a:solidFill>
-                <a:latin typeface="Century Schoolbook"/>
+                <a:latin typeface="Lexend"/>
               </a:rPr>
               <a:t>Grade 7 Accelerated · Unit 3 · Lesson 9 — Writing Small Numbers in Scientific Notation</a:t>
             </a:r>
@@ -5795,11 +6031,11 @@
           <a:p>
             <a:pPr algn="r"/>
             <a:r>
-              <a:rPr sz="1100" b="0" i="0">
+              <a:rPr sz="1040" b="0" i="0">
                 <a:solidFill>
                   <a:srgbClr val="6B6B6B"/>
                 </a:solidFill>
-                <a:latin typeface="Century Schoolbook"/>
+                <a:latin typeface="Lexend"/>
               </a:rPr>
               <a:t>16</a:t>
             </a:r>
@@ -5808,7 +6044,7 @@
       </p:sp>
       <p:pic>
         <p:nvPicPr>
-          <p:cNvPr id="8" name="Picture 7" descr="043ff5c9055650f5.png"/>
+          <p:cNvPr id="8" name="Picture 7" descr="641b1ae2e3e6954c.png"/>
           <p:cNvPicPr>
             <a:picLocks noChangeAspect="1"/>
           </p:cNvPicPr>
@@ -5822,17 +6058,41 @@
         </p:blipFill>
         <p:spPr>
           <a:xfrm>
-            <a:off x="5643371" y="2103120"/>
-            <a:ext cx="874776" cy="426720"/>
+            <a:off x="5637275" y="2103120"/>
+            <a:ext cx="886968" cy="420624"/>
           </a:xfrm>
           <a:prstGeom prst="rect">
             <a:avLst/>
           </a:prstGeom>
         </p:spPr>
       </p:pic>
-      <p:sp>
-        <p:nvSpPr>
-          <p:cNvPr id="9" name="TextBox 8"/>
+      <p:pic>
+        <p:nvPicPr>
+          <p:cNvPr id="9" name="Picture 8" descr="72478af1c7b01c29.png"/>
+          <p:cNvPicPr>
+            <a:picLocks noChangeAspect="1"/>
+          </p:cNvPicPr>
+          <p:nvPr/>
+        </p:nvPicPr>
+        <p:blipFill>
+          <a:blip r:embed="rId3"/>
+          <a:stretch>
+            <a:fillRect/>
+          </a:stretch>
+        </p:blipFill>
+        <p:spPr>
+          <a:xfrm>
+            <a:off x="3892295" y="2825496"/>
+            <a:ext cx="4486656" cy="670560"/>
+          </a:xfrm>
+          <a:prstGeom prst="rect">
+            <a:avLst/>
+          </a:prstGeom>
+        </p:spPr>
+      </p:pic>
+      <p:sp>
+        <p:nvSpPr>
+          <p:cNvPr id="10" name="TextBox 9"/>
           <p:cNvSpPr txBox="1"/>
           <p:nvPr/>
         </p:nvSpPr>
@@ -5854,11 +6114,11 @@
           <a:p>
             <a:pPr algn="ctr"/>
             <a:r>
-              <a:rPr sz="3200" b="1" i="0">
+              <a:rPr sz="3040" b="1" i="0">
                 <a:solidFill>
                   <a:srgbClr val="9E1B32"/>
                 </a:solidFill>
-                <a:latin typeface="Century Schoolbook"/>
+                <a:latin typeface="Lexend"/>
               </a:rPr>
               <a:t>Answer:   0.0001</a:t>
             </a:r>
@@ -5907,11 +6167,11 @@
           <a:p>
             <a:pPr algn="l"/>
             <a:r>
-              <a:rPr sz="3400" b="1" i="0">
+              <a:rPr sz="3229" b="1" i="0">
                 <a:solidFill>
                   <a:srgbClr val="1A1A1A"/>
                 </a:solidFill>
-                <a:latin typeface="Century Schoolbook"/>
+                <a:latin typeface="Lexend"/>
               </a:rPr>
               <a:t>Whiteboards   ·   Question 2 of 9</a:t>
             </a:r>
@@ -6047,11 +6307,11 @@
           <a:p>
             <a:pPr algn="l"/>
             <a:r>
-              <a:rPr sz="1100" b="0" i="1">
+              <a:rPr sz="1040" b="0" i="0">
                 <a:solidFill>
                   <a:srgbClr val="6B6B6B"/>
                 </a:solidFill>
-                <a:latin typeface="Century Schoolbook"/>
+                <a:latin typeface="Lexend"/>
               </a:rPr>
               <a:t>Grade 7 Accelerated · Unit 3 · Lesson 9 — Writing Small Numbers in Scientific Notation</a:t>
             </a:r>
@@ -6082,11 +6342,11 @@
           <a:p>
             <a:pPr algn="r"/>
             <a:r>
-              <a:rPr sz="1100" b="0" i="0">
+              <a:rPr sz="1040" b="0" i="0">
                 <a:solidFill>
                   <a:srgbClr val="6B6B6B"/>
                 </a:solidFill>
-                <a:latin typeface="Century Schoolbook"/>
+                <a:latin typeface="Lexend"/>
               </a:rPr>
               <a:t>17</a:t>
             </a:r>
@@ -6117,11 +6377,11 @@
           <a:p>
             <a:pPr algn="ctr"/>
             <a:r>
-              <a:rPr sz="2600" b="0" i="0">
+              <a:rPr sz="2470" b="0" i="0">
                 <a:solidFill>
                   <a:srgbClr val="1A1A1A"/>
                 </a:solidFill>
-                <a:latin typeface="Century Schoolbook"/>
+                <a:latin typeface="Lexend"/>
               </a:rPr>
               <a:t>Write  0.003  in scientific notation.</a:t>
             </a:r>
@@ -6152,11 +6412,11 @@
           <a:p>
             <a:pPr algn="ctr"/>
             <a:r>
-              <a:rPr sz="2600" b="1" i="0">
+              <a:rPr sz="2470" b="1" i="0">
                 <a:solidFill>
                   <a:srgbClr val="1A1A1A"/>
                 </a:solidFill>
-                <a:latin typeface="Century Schoolbook"/>
+                <a:latin typeface="Lexend"/>
               </a:rPr>
               <a:t>Answer it.</a:t>
             </a:r>
@@ -6205,11 +6465,11 @@
           <a:p>
             <a:pPr algn="l"/>
             <a:r>
-              <a:rPr sz="3400" b="1" i="0">
+              <a:rPr sz="3229" b="1" i="0">
                 <a:solidFill>
                   <a:srgbClr val="1A1A1A"/>
                 </a:solidFill>
-                <a:latin typeface="Century Schoolbook"/>
+                <a:latin typeface="Lexend"/>
               </a:rPr>
               <a:t>Whiteboards   ·   Question 2 of 9</a:t>
             </a:r>
@@ -6345,11 +6605,11 @@
           <a:p>
             <a:pPr algn="l"/>
             <a:r>
-              <a:rPr sz="1100" b="0" i="1">
+              <a:rPr sz="1040" b="0" i="0">
                 <a:solidFill>
                   <a:srgbClr val="6B6B6B"/>
                 </a:solidFill>
-                <a:latin typeface="Century Schoolbook"/>
+                <a:latin typeface="Lexend"/>
               </a:rPr>
               <a:t>Grade 7 Accelerated · Unit 3 · Lesson 9 — Writing Small Numbers in Scientific Notation</a:t>
             </a:r>
@@ -6380,11 +6640,11 @@
           <a:p>
             <a:pPr algn="r"/>
             <a:r>
-              <a:rPr sz="1100" b="0" i="0">
+              <a:rPr sz="1040" b="0" i="0">
                 <a:solidFill>
                   <a:srgbClr val="6B6B6B"/>
                 </a:solidFill>
-                <a:latin typeface="Century Schoolbook"/>
+                <a:latin typeface="Lexend"/>
               </a:rPr>
               <a:t>18</a:t>
             </a:r>
@@ -6415,11 +6675,11 @@
           <a:p>
             <a:pPr algn="ctr"/>
             <a:r>
-              <a:rPr sz="2600" b="0" i="0">
+              <a:rPr sz="2470" b="0" i="0">
                 <a:solidFill>
                   <a:srgbClr val="1A1A1A"/>
                 </a:solidFill>
-                <a:latin typeface="Century Schoolbook"/>
+                <a:latin typeface="Lexend"/>
               </a:rPr>
               <a:t>Write  0.003  in scientific notation.</a:t>
             </a:r>
@@ -6429,6 +6689,89 @@
       <p:sp>
         <p:nvSpPr>
           <p:cNvPr id="9" name="TextBox 8"/>
+          <p:cNvSpPr txBox="1"/>
+          <p:nvPr/>
+        </p:nvSpPr>
+        <p:spPr>
+          <a:xfrm>
+            <a:off x="2042785" y="2728291"/>
+            <a:ext cx="6356877" cy="457200"/>
+          </a:xfrm>
+          <a:prstGeom prst="rect">
+            <a:avLst/>
+          </a:prstGeom>
+          <a:noFill/>
+        </p:spPr>
+        <p:txBody>
+          <a:bodyPr wrap="none" lIns="45720" rIns="45720" tIns="18288" bIns="18288" anchor="ctr">
+            <a:noAutofit/>
+          </a:bodyPr>
+          <a:lstStyle/>
+          <a:p>
+            <a:pPr algn="l"/>
+            <a:r>
+              <a:rPr sz="2750" b="0" i="0">
+                <a:solidFill>
+                  <a:srgbClr val="1A1A1A"/>
+                </a:solidFill>
+                <a:latin typeface="Lexend"/>
+              </a:rPr>
+              <a:t>The 3 is in the thousandths place:  </a:t>
+            </a:r>
+          </a:p>
+        </p:txBody>
+      </p:sp>
+      <p:pic>
+        <p:nvPicPr>
+          <p:cNvPr id="10" name="Picture 9" descr="830231c5d5c0dba6.png"/>
+          <p:cNvPicPr>
+            <a:picLocks noChangeAspect="1"/>
+          </p:cNvPicPr>
+          <p:nvPr/>
+        </p:nvPicPr>
+        <p:blipFill>
+          <a:blip r:embed="rId2"/>
+          <a:stretch>
+            <a:fillRect/>
+          </a:stretch>
+        </p:blipFill>
+        <p:spPr>
+          <a:xfrm>
+            <a:off x="8262502" y="2804491"/>
+            <a:ext cx="1859280" cy="304800"/>
+          </a:xfrm>
+          <a:prstGeom prst="rect">
+            <a:avLst/>
+          </a:prstGeom>
+        </p:spPr>
+      </p:pic>
+      <p:pic>
+        <p:nvPicPr>
+          <p:cNvPr id="11" name="Picture 10" descr="33c20a97ceac52e6.png"/>
+          <p:cNvPicPr>
+            <a:picLocks noChangeAspect="1"/>
+          </p:cNvPicPr>
+          <p:nvPr/>
+        </p:nvPicPr>
+        <p:blipFill>
+          <a:blip r:embed="rId3"/>
+          <a:stretch>
+            <a:fillRect/>
+          </a:stretch>
+        </p:blipFill>
+        <p:spPr>
+          <a:xfrm>
+            <a:off x="2097649" y="3343987"/>
+            <a:ext cx="2365248" cy="304800"/>
+          </a:xfrm>
+          <a:prstGeom prst="rect">
+            <a:avLst/>
+          </a:prstGeom>
+        </p:spPr>
+      </p:pic>
+      <p:sp>
+        <p:nvSpPr>
+          <p:cNvPr id="12" name="TextBox 11"/>
           <p:cNvSpPr txBox="1"/>
           <p:nvPr/>
         </p:nvSpPr>
@@ -6450,20 +6793,20 @@
           <a:p>
             <a:pPr algn="ctr"/>
             <a:r>
-              <a:rPr sz="3200" b="1" i="0">
+              <a:rPr sz="3040" b="1" i="0">
                 <a:solidFill>
                   <a:srgbClr val="9E1B32"/>
                 </a:solidFill>
-                <a:latin typeface="Century Schoolbook"/>
+                <a:latin typeface="Lexend"/>
               </a:rPr>
               <a:t>Answer:   3 × 10</a:t>
             </a:r>
             <a:r>
-              <a:rPr sz="3200" b="1" i="0" baseline="30000">
+              <a:rPr sz="3040" b="1" i="0" baseline="30000">
                 <a:solidFill>
                   <a:srgbClr val="9E1B32"/>
                 </a:solidFill>
-                <a:latin typeface="Century Schoolbook"/>
+                <a:latin typeface="Lexend"/>
               </a:rPr>
               <a:t>-3</a:t>
             </a:r>
@@ -6512,11 +6855,11 @@
           <a:p>
             <a:pPr algn="l"/>
             <a:r>
-              <a:rPr sz="3400" b="1" i="0">
+              <a:rPr sz="3229" b="1" i="0">
                 <a:solidFill>
                   <a:srgbClr val="1A1A1A"/>
                 </a:solidFill>
-                <a:latin typeface="Century Schoolbook"/>
+                <a:latin typeface="Lexend"/>
               </a:rPr>
               <a:t>Whiteboards   ·   Question 3 of 9</a:t>
             </a:r>
@@ -6652,11 +6995,11 @@
           <a:p>
             <a:pPr algn="l"/>
             <a:r>
-              <a:rPr sz="1100" b="0" i="1">
+              <a:rPr sz="1040" b="0" i="0">
                 <a:solidFill>
                   <a:srgbClr val="6B6B6B"/>
                 </a:solidFill>
-                <a:latin typeface="Century Schoolbook"/>
+                <a:latin typeface="Lexend"/>
               </a:rPr>
               <a:t>Grade 7 Accelerated · Unit 3 · Lesson 9 — Writing Small Numbers in Scientific Notation</a:t>
             </a:r>
@@ -6687,11 +7030,11 @@
           <a:p>
             <a:pPr algn="r"/>
             <a:r>
-              <a:rPr sz="1100" b="0" i="0">
+              <a:rPr sz="1040" b="0" i="0">
                 <a:solidFill>
                   <a:srgbClr val="6B6B6B"/>
                 </a:solidFill>
-                <a:latin typeface="Century Schoolbook"/>
+                <a:latin typeface="Lexend"/>
               </a:rPr>
               <a:t>19</a:t>
             </a:r>
@@ -6706,8 +7049,8 @@
         </p:nvSpPr>
         <p:spPr>
           <a:xfrm>
-            <a:off x="3136153" y="2171700"/>
-            <a:ext cx="1311040" cy="457200"/>
+            <a:off x="3209545" y="2171700"/>
+            <a:ext cx="1273988" cy="457200"/>
           </a:xfrm>
           <a:prstGeom prst="rect">
             <a:avLst/>
@@ -6722,11 +7065,11 @@
           <a:p>
             <a:pPr algn="l"/>
             <a:r>
-              <a:rPr sz="2600" b="0" i="0">
+              <a:rPr sz="2470" b="0" i="0">
                 <a:solidFill>
                   <a:srgbClr val="1A1A1A"/>
                 </a:solidFill>
-                <a:latin typeface="Century Schoolbook"/>
+                <a:latin typeface="Lexend"/>
               </a:rPr>
               <a:t>Write  </a:t>
             </a:r>
@@ -6735,7 +7078,7 @@
       </p:sp>
       <p:pic>
         <p:nvPicPr>
-          <p:cNvPr id="9" name="Picture 8" descr="f7e39139daee107c.png"/>
+          <p:cNvPr id="9" name="Picture 8" descr="a7aaa5b3e98aece4.png"/>
           <p:cNvPicPr>
             <a:picLocks noChangeAspect="1"/>
           </p:cNvPicPr>
@@ -6749,8 +7092,8 @@
         </p:blipFill>
         <p:spPr>
           <a:xfrm>
-            <a:off x="4310034" y="2225040"/>
-            <a:ext cx="1618488" cy="350520"/>
+            <a:off x="4346373" y="2232660"/>
+            <a:ext cx="1572768" cy="335280"/>
           </a:xfrm>
           <a:prstGeom prst="rect">
             <a:avLst/>
@@ -6765,8 +7108,8 @@
         </p:nvSpPr>
         <p:spPr>
           <a:xfrm>
-            <a:off x="5928522" y="2171700"/>
-            <a:ext cx="3234003" cy="457200"/>
+            <a:off x="5919141" y="2171700"/>
+            <a:ext cx="3169993" cy="457200"/>
           </a:xfrm>
           <a:prstGeom prst="rect">
             <a:avLst/>
@@ -6781,11 +7124,11 @@
           <a:p>
             <a:pPr algn="l"/>
             <a:r>
-              <a:rPr sz="2600" b="0" i="0">
+              <a:rPr sz="2470" b="0" i="0">
                 <a:solidFill>
                   <a:srgbClr val="1A1A1A"/>
                 </a:solidFill>
-                <a:latin typeface="Century Schoolbook"/>
+                <a:latin typeface="Lexend"/>
               </a:rPr>
               <a:t>  in standard form.</a:t>
             </a:r>
@@ -6816,11 +7159,11 @@
           <a:p>
             <a:pPr algn="ctr"/>
             <a:r>
-              <a:rPr sz="2600" b="1" i="0">
+              <a:rPr sz="2470" b="1" i="0">
                 <a:solidFill>
                   <a:srgbClr val="1A1A1A"/>
                 </a:solidFill>
-                <a:latin typeface="Century Schoolbook"/>
+                <a:latin typeface="Lexend"/>
               </a:rPr>
               <a:t>Answer it.</a:t>
             </a:r>
@@ -6869,11 +7212,11 @@
           <a:p>
             <a:pPr algn="l"/>
             <a:r>
-              <a:rPr sz="3600" b="1" i="0">
+              <a:rPr sz="3420" b="1" i="0">
                 <a:solidFill>
                   <a:srgbClr val="1A1A1A"/>
                 </a:solidFill>
-                <a:latin typeface="Century Schoolbook"/>
+                <a:latin typeface="Lexend"/>
               </a:rPr>
               <a:t>Warm-Up</a:t>
             </a:r>
@@ -7009,11 +7352,11 @@
           <a:p>
             <a:pPr algn="l"/>
             <a:r>
-              <a:rPr sz="1100" b="0" i="1">
+              <a:rPr sz="1040" b="0" i="0">
                 <a:solidFill>
                   <a:srgbClr val="6B6B6B"/>
                 </a:solidFill>
-                <a:latin typeface="Century Schoolbook"/>
+                <a:latin typeface="Lexend"/>
               </a:rPr>
               <a:t>Grade 7 Accelerated · Unit 3 · Lesson 9 — Writing Small Numbers in Scientific Notation</a:t>
             </a:r>
@@ -7044,11 +7387,11 @@
           <a:p>
             <a:pPr algn="r"/>
             <a:r>
-              <a:rPr sz="1100" b="0" i="0">
+              <a:rPr sz="1040" b="0" i="0">
                 <a:solidFill>
                   <a:srgbClr val="6B6B6B"/>
                 </a:solidFill>
-                <a:latin typeface="Century Schoolbook"/>
+                <a:latin typeface="Lexend"/>
               </a:rPr>
               <a:t>2</a:t>
             </a:r>
@@ -7064,7 +7407,7 @@
         <p:spPr>
           <a:xfrm>
             <a:off x="1874519" y="1440180"/>
-            <a:ext cx="6249754" cy="457200"/>
+            <a:ext cx="6134719" cy="457200"/>
           </a:xfrm>
           <a:prstGeom prst="rect">
             <a:avLst/>
@@ -7079,11 +7422,11 @@
           <a:p>
             <a:pPr algn="l"/>
             <a:r>
-              <a:rPr sz="2300" b="0" i="0">
+              <a:rPr sz="2180" b="0" i="0">
                 <a:solidFill>
                   <a:srgbClr val="1A1A1A"/>
                 </a:solidFill>
-                <a:latin typeface="Century Schoolbook"/>
+                <a:latin typeface="Lexend"/>
               </a:rPr>
               <a:t>1.   Write  4,300,000  in scientific notation.</a:t>
             </a:r>
@@ -7099,7 +7442,7 @@
         <p:spPr>
           <a:xfrm>
             <a:off x="1874519" y="2052828"/>
-            <a:ext cx="1700544" cy="457200"/>
+            <a:ext cx="1626682" cy="457200"/>
           </a:xfrm>
           <a:prstGeom prst="rect">
             <a:avLst/>
@@ -7114,11 +7457,11 @@
           <a:p>
             <a:pPr algn="l"/>
             <a:r>
-              <a:rPr sz="2300" b="0" i="0">
+              <a:rPr sz="2180" b="0" i="0">
                 <a:solidFill>
                   <a:srgbClr val="1A1A1A"/>
                 </a:solidFill>
-                <a:latin typeface="Century Schoolbook"/>
+                <a:latin typeface="Lexend"/>
               </a:rPr>
               <a:t>2.   Write  </a:t>
             </a:r>
@@ -7127,7 +7470,7 @@
       </p:sp>
       <p:pic>
         <p:nvPicPr>
-          <p:cNvPr id="10" name="Picture 9" descr="fc19434018fde666.png"/>
+          <p:cNvPr id="10" name="Picture 9" descr="b44355ff61a1611b.png"/>
           <p:cNvPicPr>
             <a:picLocks noChangeAspect="1"/>
           </p:cNvPicPr>
@@ -7141,8 +7484,8 @@
         </p:blipFill>
         <p:spPr>
           <a:xfrm>
-            <a:off x="3437904" y="2141220"/>
-            <a:ext cx="557784" cy="280416"/>
+            <a:off x="3364042" y="2145792"/>
+            <a:ext cx="560832" cy="271272"/>
           </a:xfrm>
           <a:prstGeom prst="rect">
             <a:avLst/>
@@ -7157,8 +7500,8 @@
         </p:nvSpPr>
         <p:spPr>
           <a:xfrm>
-            <a:off x="3995688" y="2052828"/>
-            <a:ext cx="2239077" cy="457200"/>
+            <a:off x="3924874" y="2052828"/>
+            <a:ext cx="2241948" cy="457200"/>
           </a:xfrm>
           <a:prstGeom prst="rect">
             <a:avLst/>
@@ -7173,11 +7516,11 @@
           <a:p>
             <a:pPr algn="l"/>
             <a:r>
-              <a:rPr sz="2300" b="0" i="0">
+              <a:rPr sz="2180" b="0" i="0">
                 <a:solidFill>
                   <a:srgbClr val="1A1A1A"/>
                 </a:solidFill>
-                <a:latin typeface="Century Schoolbook"/>
+                <a:latin typeface="Lexend"/>
               </a:rPr>
               <a:t>  as a fraction.</a:t>
             </a:r>
@@ -7193,7 +7536,7 @@
         <p:spPr>
           <a:xfrm>
             <a:off x="1874519" y="2665476"/>
-            <a:ext cx="726811" cy="457200"/>
+            <a:ext cx="680104" cy="457200"/>
           </a:xfrm>
           <a:prstGeom prst="rect">
             <a:avLst/>
@@ -7208,11 +7551,11 @@
           <a:p>
             <a:pPr algn="l"/>
             <a:r>
-              <a:rPr sz="2300" b="0" i="0">
+              <a:rPr sz="2180" b="0" i="0">
                 <a:solidFill>
                   <a:srgbClr val="1A1A1A"/>
                 </a:solidFill>
-                <a:latin typeface="Century Schoolbook"/>
+                <a:latin typeface="Lexend"/>
               </a:rPr>
               <a:t>3.   </a:t>
             </a:r>
@@ -7221,7 +7564,7 @@
       </p:sp>
       <p:pic>
         <p:nvPicPr>
-          <p:cNvPr id="13" name="Picture 12" descr="c7ed55c1b2138954.png"/>
+          <p:cNvPr id="13" name="Picture 12" descr="703b0b7ef618e49e.png"/>
           <p:cNvPicPr>
             <a:picLocks noChangeAspect="1"/>
           </p:cNvPicPr>
@@ -7235,8 +7578,8 @@
         </p:blipFill>
         <p:spPr>
           <a:xfrm>
-            <a:off x="2464171" y="2689860"/>
-            <a:ext cx="688848" cy="408432"/>
+            <a:off x="2417464" y="2699004"/>
+            <a:ext cx="691896" cy="390144"/>
           </a:xfrm>
           <a:prstGeom prst="rect">
             <a:avLst/>
@@ -7251,8 +7594,8 @@
         </p:nvSpPr>
         <p:spPr>
           <a:xfrm>
-            <a:off x="3153019" y="2665476"/>
-            <a:ext cx="5819653" cy="457200"/>
+            <a:off x="3109360" y="2665476"/>
+            <a:ext cx="5805655" cy="457200"/>
           </a:xfrm>
           <a:prstGeom prst="rect">
             <a:avLst/>
@@ -7267,11 +7610,11 @@
           <a:p>
             <a:pPr algn="l"/>
             <a:r>
-              <a:rPr sz="2300" b="0" i="0">
+              <a:rPr sz="2180" b="0" i="0">
                 <a:solidFill>
                   <a:srgbClr val="1A1A1A"/>
                 </a:solidFill>
-                <a:latin typeface="Century Schoolbook"/>
+                <a:latin typeface="Lexend"/>
               </a:rPr>
               <a:t>  is between which two whole numbers?</a:t>
             </a:r>
@@ -7287,7 +7630,7 @@
         <p:spPr>
           <a:xfrm>
             <a:off x="1874519" y="3278124"/>
-            <a:ext cx="4504058" cy="457200"/>
+            <a:ext cx="4441589" cy="457200"/>
           </a:xfrm>
           <a:prstGeom prst="rect">
             <a:avLst/>
@@ -7302,11 +7645,11 @@
           <a:p>
             <a:pPr algn="l"/>
             <a:r>
-              <a:rPr sz="2300" b="0" i="0">
+              <a:rPr sz="2180" b="0" i="0">
                 <a:solidFill>
                   <a:srgbClr val="1A1A1A"/>
                 </a:solidFill>
-                <a:latin typeface="Century Schoolbook"/>
+                <a:latin typeface="Lexend"/>
               </a:rPr>
               <a:t>4.   Write  0.007  as a fraction.</a:t>
             </a:r>
@@ -7355,11 +7698,11 @@
           <a:p>
             <a:pPr algn="l"/>
             <a:r>
-              <a:rPr sz="3400" b="1" i="0">
+              <a:rPr sz="3229" b="1" i="0">
                 <a:solidFill>
                   <a:srgbClr val="1A1A1A"/>
                 </a:solidFill>
-                <a:latin typeface="Century Schoolbook"/>
+                <a:latin typeface="Lexend"/>
               </a:rPr>
               <a:t>Whiteboards   ·   Question 3 of 9</a:t>
             </a:r>
@@ -7495,11 +7838,11 @@
           <a:p>
             <a:pPr algn="l"/>
             <a:r>
-              <a:rPr sz="1100" b="0" i="1">
+              <a:rPr sz="1040" b="0" i="0">
                 <a:solidFill>
                   <a:srgbClr val="6B6B6B"/>
                 </a:solidFill>
-                <a:latin typeface="Century Schoolbook"/>
+                <a:latin typeface="Lexend"/>
               </a:rPr>
               <a:t>Grade 7 Accelerated · Unit 3 · Lesson 9 — Writing Small Numbers in Scientific Notation</a:t>
             </a:r>
@@ -7530,11 +7873,11 @@
           <a:p>
             <a:pPr algn="r"/>
             <a:r>
-              <a:rPr sz="1100" b="0" i="0">
+              <a:rPr sz="1040" b="0" i="0">
                 <a:solidFill>
                   <a:srgbClr val="6B6B6B"/>
                 </a:solidFill>
-                <a:latin typeface="Century Schoolbook"/>
+                <a:latin typeface="Lexend"/>
               </a:rPr>
               <a:t>20</a:t>
             </a:r>
@@ -7549,8 +7892,8 @@
         </p:nvSpPr>
         <p:spPr>
           <a:xfrm>
-            <a:off x="3136153" y="2080260"/>
-            <a:ext cx="1311040" cy="457200"/>
+            <a:off x="3206497" y="2080260"/>
+            <a:ext cx="1273988" cy="457200"/>
           </a:xfrm>
           <a:prstGeom prst="rect">
             <a:avLst/>
@@ -7565,11 +7908,11 @@
           <a:p>
             <a:pPr algn="l"/>
             <a:r>
-              <a:rPr sz="2600" b="0" i="0">
+              <a:rPr sz="2470" b="0" i="0">
                 <a:solidFill>
                   <a:srgbClr val="1A1A1A"/>
                 </a:solidFill>
-                <a:latin typeface="Century Schoolbook"/>
+                <a:latin typeface="Lexend"/>
               </a:rPr>
               <a:t>Write  </a:t>
             </a:r>
@@ -7578,7 +7921,7 @@
       </p:sp>
       <p:pic>
         <p:nvPicPr>
-          <p:cNvPr id="9" name="Picture 8" descr="533d0b83fdac28f7.png"/>
+          <p:cNvPr id="9" name="Picture 8" descr="1b45f78dcdf5221e.png"/>
           <p:cNvPicPr>
             <a:picLocks noChangeAspect="1"/>
           </p:cNvPicPr>
@@ -7592,8 +7935,8 @@
         </p:blipFill>
         <p:spPr>
           <a:xfrm>
-            <a:off x="4310034" y="2132076"/>
-            <a:ext cx="1618488" cy="353568"/>
+            <a:off x="4343325" y="2139696"/>
+            <a:ext cx="1578864" cy="338328"/>
           </a:xfrm>
           <a:prstGeom prst="rect">
             <a:avLst/>
@@ -7608,8 +7951,8 @@
         </p:nvSpPr>
         <p:spPr>
           <a:xfrm>
-            <a:off x="5928522" y="2080260"/>
-            <a:ext cx="3234003" cy="457200"/>
+            <a:off x="5922189" y="2080260"/>
+            <a:ext cx="3169993" cy="457200"/>
           </a:xfrm>
           <a:prstGeom prst="rect">
             <a:avLst/>
@@ -7624,20 +7967,68 @@
           <a:p>
             <a:pPr algn="l"/>
             <a:r>
-              <a:rPr sz="2600" b="0" i="0">
+              <a:rPr sz="2470" b="0" i="0">
                 <a:solidFill>
                   <a:srgbClr val="1A1A1A"/>
                 </a:solidFill>
-                <a:latin typeface="Century Schoolbook"/>
+                <a:latin typeface="Lexend"/>
               </a:rPr>
               <a:t>  in standard form.</a:t>
             </a:r>
           </a:p>
         </p:txBody>
       </p:sp>
-      <p:sp>
-        <p:nvSpPr>
-          <p:cNvPr id="11" name="TextBox 10"/>
+      <p:pic>
+        <p:nvPicPr>
+          <p:cNvPr id="11" name="Picture 10" descr="562f191cbb88b9f3.png"/>
+          <p:cNvPicPr>
+            <a:picLocks noChangeAspect="1"/>
+          </p:cNvPicPr>
+          <p:nvPr/>
+        </p:nvPicPr>
+        <p:blipFill>
+          <a:blip r:embed="rId3"/>
+          <a:stretch>
+            <a:fillRect/>
+          </a:stretch>
+        </p:blipFill>
+        <p:spPr>
+          <a:xfrm>
+            <a:off x="4393691" y="2915412"/>
+            <a:ext cx="2075688" cy="304800"/>
+          </a:xfrm>
+          <a:prstGeom prst="rect">
+            <a:avLst/>
+          </a:prstGeom>
+        </p:spPr>
+      </p:pic>
+      <p:pic>
+        <p:nvPicPr>
+          <p:cNvPr id="12" name="Picture 11" descr="6f8ea1aa564467f2.png"/>
+          <p:cNvPicPr>
+            <a:picLocks noChangeAspect="1"/>
+          </p:cNvPicPr>
+          <p:nvPr/>
+        </p:nvPicPr>
+        <p:blipFill>
+          <a:blip r:embed="rId4"/>
+          <a:stretch>
+            <a:fillRect/>
+          </a:stretch>
+        </p:blipFill>
+        <p:spPr>
+          <a:xfrm>
+            <a:off x="4393691" y="3480816"/>
+            <a:ext cx="3483864" cy="252984"/>
+          </a:xfrm>
+          <a:prstGeom prst="rect">
+            <a:avLst/>
+          </a:prstGeom>
+        </p:spPr>
+      </p:pic>
+      <p:sp>
+        <p:nvSpPr>
+          <p:cNvPr id="13" name="TextBox 12"/>
           <p:cNvSpPr txBox="1"/>
           <p:nvPr/>
         </p:nvSpPr>
@@ -7659,11 +8050,11 @@
           <a:p>
             <a:pPr algn="ctr"/>
             <a:r>
-              <a:rPr sz="3200" b="1" i="0">
+              <a:rPr sz="3040" b="1" i="0">
                 <a:solidFill>
                   <a:srgbClr val="9E1B32"/>
                 </a:solidFill>
-                <a:latin typeface="Century Schoolbook"/>
+                <a:latin typeface="Lexend"/>
               </a:rPr>
               <a:t>Answer:   0.00025</a:t>
             </a:r>
@@ -7712,11 +8103,11 @@
           <a:p>
             <a:pPr algn="l"/>
             <a:r>
-              <a:rPr sz="3400" b="1" i="0">
+              <a:rPr sz="3229" b="1" i="0">
                 <a:solidFill>
                   <a:srgbClr val="1A1A1A"/>
                 </a:solidFill>
-                <a:latin typeface="Century Schoolbook"/>
+                <a:latin typeface="Lexend"/>
               </a:rPr>
               <a:t>Whiteboards   ·   Question 4 of 9</a:t>
             </a:r>
@@ -7852,11 +8243,11 @@
           <a:p>
             <a:pPr algn="l"/>
             <a:r>
-              <a:rPr sz="1100" b="0" i="1">
+              <a:rPr sz="1040" b="0" i="0">
                 <a:solidFill>
                   <a:srgbClr val="6B6B6B"/>
                 </a:solidFill>
-                <a:latin typeface="Century Schoolbook"/>
+                <a:latin typeface="Lexend"/>
               </a:rPr>
               <a:t>Grade 7 Accelerated · Unit 3 · Lesson 9 — Writing Small Numbers in Scientific Notation</a:t>
             </a:r>
@@ -7887,11 +8278,11 @@
           <a:p>
             <a:pPr algn="r"/>
             <a:r>
-              <a:rPr sz="1100" b="0" i="0">
+              <a:rPr sz="1040" b="0" i="0">
                 <a:solidFill>
                   <a:srgbClr val="6B6B6B"/>
                 </a:solidFill>
-                <a:latin typeface="Century Schoolbook"/>
+                <a:latin typeface="Lexend"/>
               </a:rPr>
               <a:t>21</a:t>
             </a:r>
@@ -7922,11 +8313,11 @@
           <a:p>
             <a:pPr algn="l"/>
             <a:r>
-              <a:rPr sz="2400" b="0" i="0">
+              <a:rPr sz="2280" b="0" i="0">
                 <a:solidFill>
                   <a:srgbClr val="1A1A1A"/>
                 </a:solidFill>
-                <a:latin typeface="Century Schoolbook"/>
+                <a:latin typeface="Lexend"/>
               </a:rPr>
               <a:t>A machine's cutting tolerance is  0.0000988  inch.</a:t>
             </a:r>
@@ -7957,11 +8348,11 @@
           <a:p>
             <a:pPr algn="l"/>
             <a:r>
-              <a:rPr sz="2400" b="0" i="0">
+              <a:rPr sz="2280" b="0" i="0">
                 <a:solidFill>
                   <a:srgbClr val="1A1A1A"/>
                 </a:solidFill>
-                <a:latin typeface="Century Schoolbook"/>
+                <a:latin typeface="Lexend"/>
               </a:rPr>
               <a:t>The part it cuts is 4 inches long.</a:t>
             </a:r>
@@ -7992,11 +8383,11 @@
           <a:p>
             <a:pPr algn="l"/>
             <a:r>
-              <a:rPr sz="2400" b="1" i="0">
+              <a:rPr sz="2280" b="1" i="0">
                 <a:solidFill>
                   <a:srgbClr val="1A1A1A"/>
                 </a:solidFill>
-                <a:latin typeface="Century Schoolbook"/>
+                <a:latin typeface="Lexend"/>
               </a:rPr>
               <a:t>Write the tolerance in scientific notation.</a:t>
             </a:r>
@@ -8027,11 +8418,11 @@
           <a:p>
             <a:pPr algn="ctr"/>
             <a:r>
-              <a:rPr sz="2600" b="1" i="0">
+              <a:rPr sz="2470" b="1" i="0">
                 <a:solidFill>
                   <a:srgbClr val="1A1A1A"/>
                 </a:solidFill>
-                <a:latin typeface="Century Schoolbook"/>
+                <a:latin typeface="Lexend"/>
               </a:rPr>
               <a:t>Answer it.</a:t>
             </a:r>
@@ -8080,11 +8471,11 @@
           <a:p>
             <a:pPr algn="l"/>
             <a:r>
-              <a:rPr sz="3400" b="1" i="0">
+              <a:rPr sz="3229" b="1" i="0">
                 <a:solidFill>
                   <a:srgbClr val="1A1A1A"/>
                 </a:solidFill>
-                <a:latin typeface="Century Schoolbook"/>
+                <a:latin typeface="Lexend"/>
               </a:rPr>
               <a:t>Whiteboards   ·   Question 4 of 9</a:t>
             </a:r>
@@ -8220,11 +8611,11 @@
           <a:p>
             <a:pPr algn="l"/>
             <a:r>
-              <a:rPr sz="1100" b="0" i="1">
+              <a:rPr sz="1040" b="0" i="0">
                 <a:solidFill>
                   <a:srgbClr val="6B6B6B"/>
                 </a:solidFill>
-                <a:latin typeface="Century Schoolbook"/>
+                <a:latin typeface="Lexend"/>
               </a:rPr>
               <a:t>Grade 7 Accelerated · Unit 3 · Lesson 9 — Writing Small Numbers in Scientific Notation</a:t>
             </a:r>
@@ -8255,11 +8646,11 @@
           <a:p>
             <a:pPr algn="r"/>
             <a:r>
-              <a:rPr sz="1100" b="0" i="0">
+              <a:rPr sz="1040" b="0" i="0">
                 <a:solidFill>
                   <a:srgbClr val="6B6B6B"/>
                 </a:solidFill>
-                <a:latin typeface="Century Schoolbook"/>
+                <a:latin typeface="Lexend"/>
               </a:rPr>
               <a:t>22</a:t>
             </a:r>
@@ -8290,11 +8681,11 @@
           <a:p>
             <a:pPr algn="l"/>
             <a:r>
-              <a:rPr sz="2400" b="0" i="0">
+              <a:rPr sz="2280" b="0" i="0">
                 <a:solidFill>
                   <a:srgbClr val="1A1A1A"/>
                 </a:solidFill>
-                <a:latin typeface="Century Schoolbook"/>
+                <a:latin typeface="Lexend"/>
               </a:rPr>
               <a:t>A machine's cutting tolerance is  0.0000988  inch.</a:t>
             </a:r>
@@ -8325,11 +8716,11 @@
           <a:p>
             <a:pPr algn="l"/>
             <a:r>
-              <a:rPr sz="2400" b="0" i="0">
+              <a:rPr sz="2280" b="0" i="0">
                 <a:solidFill>
                   <a:srgbClr val="1A1A1A"/>
                 </a:solidFill>
-                <a:latin typeface="Century Schoolbook"/>
+                <a:latin typeface="Lexend"/>
               </a:rPr>
               <a:t>The part it cuts is 4 inches long.</a:t>
             </a:r>
@@ -8360,11 +8751,11 @@
           <a:p>
             <a:pPr algn="l"/>
             <a:r>
-              <a:rPr sz="2400" b="1" i="0">
+              <a:rPr sz="2280" b="1" i="0">
                 <a:solidFill>
                   <a:srgbClr val="1A1A1A"/>
                 </a:solidFill>
-                <a:latin typeface="Century Schoolbook"/>
+                <a:latin typeface="Lexend"/>
               </a:rPr>
               <a:t>Write the tolerance in scientific notation.</a:t>
             </a:r>
@@ -8379,7 +8770,66 @@
         </p:nvSpPr>
         <p:spPr>
           <a:xfrm>
-            <a:off x="777240" y="4663440"/>
+            <a:off x="2931910" y="3587827"/>
+            <a:ext cx="6434859" cy="457200"/>
+          </a:xfrm>
+          <a:prstGeom prst="rect">
+            <a:avLst/>
+          </a:prstGeom>
+          <a:noFill/>
+        </p:spPr>
+        <p:txBody>
+          <a:bodyPr wrap="none" lIns="45720" rIns="45720" tIns="18288" bIns="18288" anchor="ctr">
+            <a:noAutofit/>
+          </a:bodyPr>
+          <a:lstStyle/>
+          <a:p>
+            <a:pPr algn="l"/>
+            <a:r>
+              <a:rPr sz="2750" b="0" i="0">
+                <a:solidFill>
+                  <a:srgbClr val="1A1A1A"/>
+                </a:solidFill>
+                <a:latin typeface="Lexend"/>
+              </a:rPr>
+              <a:t>Move the point 5 places right:  9.88</a:t>
+            </a:r>
+          </a:p>
+        </p:txBody>
+      </p:sp>
+      <p:pic>
+        <p:nvPicPr>
+          <p:cNvPr id="12" name="Picture 11" descr="45f9f3462ccd01b0.png"/>
+          <p:cNvPicPr>
+            <a:picLocks noChangeAspect="1"/>
+          </p:cNvPicPr>
+          <p:nvPr/>
+        </p:nvPicPr>
+        <p:blipFill>
+          <a:blip r:embed="rId2"/>
+          <a:stretch>
+            <a:fillRect/>
+          </a:stretch>
+        </p:blipFill>
+        <p:spPr>
+          <a:xfrm>
+            <a:off x="2986774" y="4203523"/>
+            <a:ext cx="3694176" cy="304800"/>
+          </a:xfrm>
+          <a:prstGeom prst="rect">
+            <a:avLst/>
+          </a:prstGeom>
+        </p:spPr>
+      </p:pic>
+      <p:sp>
+        <p:nvSpPr>
+          <p:cNvPr id="13" name="TextBox 12"/>
+          <p:cNvSpPr txBox="1"/>
+          <p:nvPr/>
+        </p:nvSpPr>
+        <p:spPr>
+          <a:xfrm>
+            <a:off x="777240" y="4698823"/>
             <a:ext cx="10607040" cy="548640"/>
           </a:xfrm>
           <a:prstGeom prst="rect">
@@ -8395,20 +8845,20 @@
           <a:p>
             <a:pPr algn="ctr"/>
             <a:r>
-              <a:rPr sz="3200" b="1" i="0">
+              <a:rPr sz="3040" b="1" i="0">
                 <a:solidFill>
                   <a:srgbClr val="9E1B32"/>
                 </a:solidFill>
-                <a:latin typeface="Century Schoolbook"/>
+                <a:latin typeface="Lexend"/>
               </a:rPr>
               <a:t>Answer:   9.88 × 10</a:t>
             </a:r>
             <a:r>
-              <a:rPr sz="3200" b="1" i="0" baseline="30000">
+              <a:rPr sz="3040" b="1" i="0" baseline="30000">
                 <a:solidFill>
                   <a:srgbClr val="9E1B32"/>
                 </a:solidFill>
-                <a:latin typeface="Century Schoolbook"/>
+                <a:latin typeface="Lexend"/>
               </a:rPr>
               <a:t>-5</a:t>
             </a:r>
@@ -8457,11 +8907,11 @@
           <a:p>
             <a:pPr algn="l"/>
             <a:r>
-              <a:rPr sz="3400" b="1" i="0">
+              <a:rPr sz="3229" b="1" i="0">
                 <a:solidFill>
                   <a:srgbClr val="1A1A1A"/>
                 </a:solidFill>
-                <a:latin typeface="Century Schoolbook"/>
+                <a:latin typeface="Lexend"/>
               </a:rPr>
               <a:t>Whiteboards   ·   Question 5 of 9</a:t>
             </a:r>
@@ -8597,11 +9047,11 @@
           <a:p>
             <a:pPr algn="l"/>
             <a:r>
-              <a:rPr sz="1100" b="0" i="1">
+              <a:rPr sz="1040" b="0" i="0">
                 <a:solidFill>
                   <a:srgbClr val="6B6B6B"/>
                 </a:solidFill>
-                <a:latin typeface="Century Schoolbook"/>
+                <a:latin typeface="Lexend"/>
               </a:rPr>
               <a:t>Grade 7 Accelerated · Unit 3 · Lesson 9 — Writing Small Numbers in Scientific Notation</a:t>
             </a:r>
@@ -8632,11 +9082,11 @@
           <a:p>
             <a:pPr algn="r"/>
             <a:r>
-              <a:rPr sz="1100" b="0" i="0">
+              <a:rPr sz="1040" b="0" i="0">
                 <a:solidFill>
                   <a:srgbClr val="6B6B6B"/>
                 </a:solidFill>
-                <a:latin typeface="Century Schoolbook"/>
+                <a:latin typeface="Lexend"/>
               </a:rPr>
               <a:t>23</a:t>
             </a:r>
@@ -8667,11 +9117,11 @@
           <a:p>
             <a:pPr algn="ctr"/>
             <a:r>
-              <a:rPr sz="2600" b="0" i="0">
+              <a:rPr sz="2470" b="0" i="0">
                 <a:solidFill>
                   <a:srgbClr val="1A1A1A"/>
                 </a:solidFill>
-                <a:latin typeface="Century Schoolbook"/>
+                <a:latin typeface="Lexend"/>
               </a:rPr>
               <a:t>Which is  0.00081  written in scientific notation?</a:t>
             </a:r>
@@ -8702,29 +9152,29 @@
           <a:p>
             <a:pPr algn="l"/>
             <a:r>
-              <a:rPr sz="2400" b="1" i="0">
+              <a:rPr sz="2280" b="1" i="0">
                 <a:solidFill>
                   <a:srgbClr val="1A1A1A"/>
                 </a:solidFill>
-                <a:latin typeface="Century Schoolbook"/>
+                <a:latin typeface="Lexend"/>
               </a:rPr>
               <a:t>A.   </a:t>
             </a:r>
             <a:r>
-              <a:rPr sz="2400" b="0" i="0">
+              <a:rPr sz="2280" b="0" i="0">
                 <a:solidFill>
                   <a:srgbClr val="1A1A1A"/>
                 </a:solidFill>
-                <a:latin typeface="Century Schoolbook"/>
+                <a:latin typeface="Lexend"/>
               </a:rPr>
               <a:t>8.1 × 10</a:t>
             </a:r>
             <a:r>
-              <a:rPr sz="2400" b="0" i="0" baseline="30000">
+              <a:rPr sz="2280" b="0" i="0" baseline="30000">
                 <a:solidFill>
                   <a:srgbClr val="1A1A1A"/>
                 </a:solidFill>
-                <a:latin typeface="Century Schoolbook"/>
+                <a:latin typeface="Lexend"/>
               </a:rPr>
               <a:t>-3</a:t>
             </a:r>
@@ -8755,29 +9205,29 @@
           <a:p>
             <a:pPr algn="l"/>
             <a:r>
-              <a:rPr sz="2400" b="1" i="0">
+              <a:rPr sz="2280" b="1" i="0">
                 <a:solidFill>
                   <a:srgbClr val="1A1A1A"/>
                 </a:solidFill>
-                <a:latin typeface="Century Schoolbook"/>
+                <a:latin typeface="Lexend"/>
               </a:rPr>
               <a:t>B.   </a:t>
             </a:r>
             <a:r>
-              <a:rPr sz="2400" b="0" i="0">
+              <a:rPr sz="2280" b="0" i="0">
                 <a:solidFill>
                   <a:srgbClr val="1A1A1A"/>
                 </a:solidFill>
-                <a:latin typeface="Century Schoolbook"/>
+                <a:latin typeface="Lexend"/>
               </a:rPr>
               <a:t>8.1 × 10</a:t>
             </a:r>
             <a:r>
-              <a:rPr sz="2400" b="0" i="0" baseline="30000">
+              <a:rPr sz="2280" b="0" i="0" baseline="30000">
                 <a:solidFill>
                   <a:srgbClr val="1A1A1A"/>
                 </a:solidFill>
-                <a:latin typeface="Century Schoolbook"/>
+                <a:latin typeface="Lexend"/>
               </a:rPr>
               <a:t>4</a:t>
             </a:r>
@@ -8808,29 +9258,29 @@
           <a:p>
             <a:pPr algn="l"/>
             <a:r>
-              <a:rPr sz="2400" b="1" i="0">
+              <a:rPr sz="2280" b="1" i="0">
                 <a:solidFill>
                   <a:srgbClr val="1A1A1A"/>
                 </a:solidFill>
-                <a:latin typeface="Century Schoolbook"/>
+                <a:latin typeface="Lexend"/>
               </a:rPr>
               <a:t>C.   </a:t>
             </a:r>
             <a:r>
-              <a:rPr sz="2400" b="0" i="0">
+              <a:rPr sz="2280" b="0" i="0">
                 <a:solidFill>
                   <a:srgbClr val="1A1A1A"/>
                 </a:solidFill>
-                <a:latin typeface="Century Schoolbook"/>
+                <a:latin typeface="Lexend"/>
               </a:rPr>
               <a:t>81 × 10</a:t>
             </a:r>
             <a:r>
-              <a:rPr sz="2400" b="0" i="0" baseline="30000">
+              <a:rPr sz="2280" b="0" i="0" baseline="30000">
                 <a:solidFill>
                   <a:srgbClr val="1A1A1A"/>
                 </a:solidFill>
-                <a:latin typeface="Century Schoolbook"/>
+                <a:latin typeface="Lexend"/>
               </a:rPr>
               <a:t>-5</a:t>
             </a:r>
@@ -8861,29 +9311,29 @@
           <a:p>
             <a:pPr algn="l"/>
             <a:r>
-              <a:rPr sz="2400" b="1" i="0">
+              <a:rPr sz="2280" b="1" i="0">
                 <a:solidFill>
                   <a:srgbClr val="1A1A1A"/>
                 </a:solidFill>
-                <a:latin typeface="Century Schoolbook"/>
+                <a:latin typeface="Lexend"/>
               </a:rPr>
               <a:t>D.   </a:t>
             </a:r>
             <a:r>
-              <a:rPr sz="2400" b="0" i="0">
+              <a:rPr sz="2280" b="0" i="0">
                 <a:solidFill>
                   <a:srgbClr val="1A1A1A"/>
                 </a:solidFill>
-                <a:latin typeface="Century Schoolbook"/>
+                <a:latin typeface="Lexend"/>
               </a:rPr>
               <a:t>8.1 × 10</a:t>
             </a:r>
             <a:r>
-              <a:rPr sz="2400" b="0" i="0" baseline="30000">
+              <a:rPr sz="2280" b="0" i="0" baseline="30000">
                 <a:solidFill>
                   <a:srgbClr val="1A1A1A"/>
                 </a:solidFill>
-                <a:latin typeface="Century Schoolbook"/>
+                <a:latin typeface="Lexend"/>
               </a:rPr>
               <a:t>-4</a:t>
             </a:r>
@@ -8914,11 +9364,11 @@
           <a:p>
             <a:pPr algn="ctr"/>
             <a:r>
-              <a:rPr sz="2600" b="1" i="0">
+              <a:rPr sz="2470" b="1" i="0">
                 <a:solidFill>
                   <a:srgbClr val="1A1A1A"/>
                 </a:solidFill>
-                <a:latin typeface="Century Schoolbook"/>
+                <a:latin typeface="Lexend"/>
               </a:rPr>
               <a:t>Answer it.</a:t>
             </a:r>
@@ -8967,11 +9417,11 @@
           <a:p>
             <a:pPr algn="l"/>
             <a:r>
-              <a:rPr sz="3400" b="1" i="0">
+              <a:rPr sz="3229" b="1" i="0">
                 <a:solidFill>
                   <a:srgbClr val="1A1A1A"/>
                 </a:solidFill>
-                <a:latin typeface="Century Schoolbook"/>
+                <a:latin typeface="Lexend"/>
               </a:rPr>
               <a:t>Whiteboards   ·   Question 5 of 9</a:t>
             </a:r>
@@ -9107,11 +9557,11 @@
           <a:p>
             <a:pPr algn="l"/>
             <a:r>
-              <a:rPr sz="1100" b="0" i="1">
+              <a:rPr sz="1040" b="0" i="0">
                 <a:solidFill>
                   <a:srgbClr val="6B6B6B"/>
                 </a:solidFill>
-                <a:latin typeface="Century Schoolbook"/>
+                <a:latin typeface="Lexend"/>
               </a:rPr>
               <a:t>Grade 7 Accelerated · Unit 3 · Lesson 9 — Writing Small Numbers in Scientific Notation</a:t>
             </a:r>
@@ -9142,11 +9592,11 @@
           <a:p>
             <a:pPr algn="r"/>
             <a:r>
-              <a:rPr sz="1100" b="0" i="0">
+              <a:rPr sz="1040" b="0" i="0">
                 <a:solidFill>
                   <a:srgbClr val="6B6B6B"/>
                 </a:solidFill>
-                <a:latin typeface="Century Schoolbook"/>
+                <a:latin typeface="Lexend"/>
               </a:rPr>
               <a:t>24</a:t>
             </a:r>
@@ -9177,11 +9627,11 @@
           <a:p>
             <a:pPr algn="ctr"/>
             <a:r>
-              <a:rPr sz="2600" b="0" i="0">
+              <a:rPr sz="2470" b="0" i="0">
                 <a:solidFill>
                   <a:srgbClr val="1A1A1A"/>
                 </a:solidFill>
-                <a:latin typeface="Century Schoolbook"/>
+                <a:latin typeface="Lexend"/>
               </a:rPr>
               <a:t>Which is  0.00081  written in scientific notation?</a:t>
             </a:r>
@@ -9196,8 +9646,67 @@
         </p:nvSpPr>
         <p:spPr>
           <a:xfrm>
-            <a:off x="1874519" y="2769439"/>
-            <a:ext cx="4572000" cy="548640"/>
+            <a:off x="3039092" y="2728291"/>
+            <a:ext cx="6220495" cy="457200"/>
+          </a:xfrm>
+          <a:prstGeom prst="rect">
+            <a:avLst/>
+          </a:prstGeom>
+          <a:noFill/>
+        </p:spPr>
+        <p:txBody>
+          <a:bodyPr wrap="none" lIns="45720" rIns="45720" tIns="18288" bIns="18288" anchor="ctr">
+            <a:noAutofit/>
+          </a:bodyPr>
+          <a:lstStyle/>
+          <a:p>
+            <a:pPr algn="l"/>
+            <a:r>
+              <a:rPr sz="2750" b="0" i="0">
+                <a:solidFill>
+                  <a:srgbClr val="1A1A1A"/>
+                </a:solidFill>
+                <a:latin typeface="Lexend"/>
+              </a:rPr>
+              <a:t>Move the point 4 places right:  8.1</a:t>
+            </a:r>
+          </a:p>
+        </p:txBody>
+      </p:sp>
+      <p:pic>
+        <p:nvPicPr>
+          <p:cNvPr id="10" name="Picture 9" descr="2b19566df5af1fea.png"/>
+          <p:cNvPicPr>
+            <a:picLocks noChangeAspect="1"/>
+          </p:cNvPicPr>
+          <p:nvPr/>
+        </p:nvPicPr>
+        <p:blipFill>
+          <a:blip r:embed="rId2"/>
+          <a:stretch>
+            <a:fillRect/>
+          </a:stretch>
+        </p:blipFill>
+        <p:spPr>
+          <a:xfrm>
+            <a:off x="3093956" y="3343987"/>
+            <a:ext cx="3048000" cy="304800"/>
+          </a:xfrm>
+          <a:prstGeom prst="rect">
+            <a:avLst/>
+          </a:prstGeom>
+        </p:spPr>
+      </p:pic>
+      <p:sp>
+        <p:nvSpPr>
+          <p:cNvPr id="11" name="TextBox 10"/>
+          <p:cNvSpPr txBox="1"/>
+          <p:nvPr/>
+        </p:nvSpPr>
+        <p:spPr>
+          <a:xfrm>
+            <a:off x="777240" y="4663440"/>
+            <a:ext cx="10607040" cy="548640"/>
           </a:xfrm>
           <a:prstGeom prst="rect">
             <a:avLst/>
@@ -9210,234 +9719,22 @@
           </a:bodyPr>
           <a:lstStyle/>
           <a:p>
-            <a:pPr algn="l"/>
-            <a:r>
-              <a:rPr sz="2400" b="1" i="0">
-                <a:solidFill>
-                  <a:srgbClr val="1A1A1A"/>
-                </a:solidFill>
-                <a:latin typeface="Century Schoolbook"/>
-              </a:rPr>
-              <a:t>A.   </a:t>
-            </a:r>
-            <a:r>
-              <a:rPr sz="2400" b="0" i="0">
-                <a:solidFill>
-                  <a:srgbClr val="1A1A1A"/>
-                </a:solidFill>
-                <a:latin typeface="Century Schoolbook"/>
-              </a:rPr>
-              <a:t>8.1 × 10</a:t>
-            </a:r>
-            <a:r>
-              <a:rPr sz="2400" b="0" i="0" baseline="30000">
-                <a:solidFill>
-                  <a:srgbClr val="1A1A1A"/>
-                </a:solidFill>
-                <a:latin typeface="Century Schoolbook"/>
-              </a:rPr>
-              <a:t>-3</a:t>
-            </a:r>
-          </a:p>
-        </p:txBody>
-      </p:sp>
-      <p:sp>
-        <p:nvSpPr>
-          <p:cNvPr id="10" name="TextBox 9"/>
-          <p:cNvSpPr txBox="1"/>
-          <p:nvPr/>
-        </p:nvSpPr>
-        <p:spPr>
-          <a:xfrm>
-            <a:off x="6629400" y="2769439"/>
-            <a:ext cx="4572000" cy="548640"/>
-          </a:xfrm>
-          <a:prstGeom prst="rect">
-            <a:avLst/>
-          </a:prstGeom>
-          <a:noFill/>
-        </p:spPr>
-        <p:txBody>
-          <a:bodyPr wrap="square" lIns="45720" rIns="45720" tIns="18288" bIns="18288" anchor="t">
-            <a:spAutoFit/>
-          </a:bodyPr>
-          <a:lstStyle/>
-          <a:p>
-            <a:pPr algn="l"/>
-            <a:r>
-              <a:rPr sz="2400" b="1" i="0">
-                <a:solidFill>
-                  <a:srgbClr val="1A1A1A"/>
-                </a:solidFill>
-                <a:latin typeface="Century Schoolbook"/>
-              </a:rPr>
-              <a:t>B.   </a:t>
-            </a:r>
-            <a:r>
-              <a:rPr sz="2400" b="0" i="0">
-                <a:solidFill>
-                  <a:srgbClr val="1A1A1A"/>
-                </a:solidFill>
-                <a:latin typeface="Century Schoolbook"/>
-              </a:rPr>
-              <a:t>8.1 × 10</a:t>
-            </a:r>
-            <a:r>
-              <a:rPr sz="2400" b="0" i="0" baseline="30000">
-                <a:solidFill>
-                  <a:srgbClr val="1A1A1A"/>
-                </a:solidFill>
-                <a:latin typeface="Century Schoolbook"/>
-              </a:rPr>
-              <a:t>4</a:t>
-            </a:r>
-          </a:p>
-        </p:txBody>
-      </p:sp>
-      <p:sp>
-        <p:nvSpPr>
-          <p:cNvPr id="11" name="TextBox 10"/>
-          <p:cNvSpPr txBox="1"/>
-          <p:nvPr/>
-        </p:nvSpPr>
-        <p:spPr>
-          <a:xfrm>
-            <a:off x="1874519" y="3455239"/>
-            <a:ext cx="4572000" cy="548640"/>
-          </a:xfrm>
-          <a:prstGeom prst="rect">
-            <a:avLst/>
-          </a:prstGeom>
-          <a:noFill/>
-        </p:spPr>
-        <p:txBody>
-          <a:bodyPr wrap="square" lIns="45720" rIns="45720" tIns="18288" bIns="18288" anchor="t">
-            <a:spAutoFit/>
-          </a:bodyPr>
-          <a:lstStyle/>
-          <a:p>
-            <a:pPr algn="l"/>
-            <a:r>
-              <a:rPr sz="2400" b="1" i="0">
-                <a:solidFill>
-                  <a:srgbClr val="1A1A1A"/>
-                </a:solidFill>
-                <a:latin typeface="Century Schoolbook"/>
-              </a:rPr>
-              <a:t>C.   </a:t>
-            </a:r>
-            <a:r>
-              <a:rPr sz="2400" b="0" i="0">
-                <a:solidFill>
-                  <a:srgbClr val="1A1A1A"/>
-                </a:solidFill>
-                <a:latin typeface="Century Schoolbook"/>
-              </a:rPr>
-              <a:t>81 × 10</a:t>
-            </a:r>
-            <a:r>
-              <a:rPr sz="2400" b="0" i="0" baseline="30000">
-                <a:solidFill>
-                  <a:srgbClr val="1A1A1A"/>
-                </a:solidFill>
-                <a:latin typeface="Century Schoolbook"/>
-              </a:rPr>
-              <a:t>-5</a:t>
-            </a:r>
-          </a:p>
-        </p:txBody>
-      </p:sp>
-      <p:sp>
-        <p:nvSpPr>
-          <p:cNvPr id="12" name="TextBox 11"/>
-          <p:cNvSpPr txBox="1"/>
-          <p:nvPr/>
-        </p:nvSpPr>
-        <p:spPr>
-          <a:xfrm>
-            <a:off x="6629400" y="3455239"/>
-            <a:ext cx="4572000" cy="548640"/>
-          </a:xfrm>
-          <a:prstGeom prst="rect">
-            <a:avLst/>
-          </a:prstGeom>
-          <a:noFill/>
-        </p:spPr>
-        <p:txBody>
-          <a:bodyPr wrap="square" lIns="45720" rIns="45720" tIns="18288" bIns="18288" anchor="t">
-            <a:spAutoFit/>
-          </a:bodyPr>
-          <a:lstStyle/>
-          <a:p>
-            <a:pPr algn="l"/>
-            <a:r>
-              <a:rPr sz="2400" b="1" i="0">
+            <a:pPr algn="ctr"/>
+            <a:r>
+              <a:rPr sz="3040" b="1" i="0">
                 <a:solidFill>
                   <a:srgbClr val="9E1B32"/>
                 </a:solidFill>
-                <a:latin typeface="Century Schoolbook"/>
-              </a:rPr>
-              <a:t>D.   </a:t>
-            </a:r>
-            <a:r>
-              <a:rPr sz="2400" b="1" i="0">
+                <a:latin typeface="Lexend"/>
+              </a:rPr>
+              <a:t>Answer:   D — 8.1 × 10</a:t>
+            </a:r>
+            <a:r>
+              <a:rPr sz="3040" b="1" i="0" baseline="30000">
                 <a:solidFill>
                   <a:srgbClr val="9E1B32"/>
                 </a:solidFill>
-                <a:latin typeface="Century Schoolbook"/>
-              </a:rPr>
-              <a:t>8.1 × 10</a:t>
-            </a:r>
-            <a:r>
-              <a:rPr sz="2400" b="1" i="0" baseline="30000">
-                <a:solidFill>
-                  <a:srgbClr val="9E1B32"/>
-                </a:solidFill>
-                <a:latin typeface="Century Schoolbook"/>
-              </a:rPr>
-              <a:t>-4</a:t>
-            </a:r>
-          </a:p>
-        </p:txBody>
-      </p:sp>
-      <p:sp>
-        <p:nvSpPr>
-          <p:cNvPr id="13" name="TextBox 12"/>
-          <p:cNvSpPr txBox="1"/>
-          <p:nvPr/>
-        </p:nvSpPr>
-        <p:spPr>
-          <a:xfrm>
-            <a:off x="777240" y="4663440"/>
-            <a:ext cx="10607040" cy="548640"/>
-          </a:xfrm>
-          <a:prstGeom prst="rect">
-            <a:avLst/>
-          </a:prstGeom>
-          <a:noFill/>
-        </p:spPr>
-        <p:txBody>
-          <a:bodyPr wrap="square" lIns="45720" rIns="45720" tIns="18288" bIns="18288" anchor="t">
-            <a:spAutoFit/>
-          </a:bodyPr>
-          <a:lstStyle/>
-          <a:p>
-            <a:pPr algn="ctr"/>
-            <a:r>
-              <a:rPr sz="3200" b="1" i="0">
-                <a:solidFill>
-                  <a:srgbClr val="9E1B32"/>
-                </a:solidFill>
-                <a:latin typeface="Century Schoolbook"/>
-              </a:rPr>
-              <a:t>Answer:   D — 8.1 × 10</a:t>
-            </a:r>
-            <a:r>
-              <a:rPr sz="3200" b="1" i="0" baseline="30000">
-                <a:solidFill>
-                  <a:srgbClr val="9E1B32"/>
-                </a:solidFill>
-                <a:latin typeface="Century Schoolbook"/>
+                <a:latin typeface="Lexend"/>
               </a:rPr>
               <a:t>-4</a:t>
             </a:r>
@@ -9486,11 +9783,11 @@
           <a:p>
             <a:pPr algn="l"/>
             <a:r>
-              <a:rPr sz="3400" b="1" i="0">
+              <a:rPr sz="3229" b="1" i="0">
                 <a:solidFill>
                   <a:srgbClr val="1A1A1A"/>
                 </a:solidFill>
-                <a:latin typeface="Century Schoolbook"/>
+                <a:latin typeface="Lexend"/>
               </a:rPr>
               <a:t>Whiteboards   ·   Question 6 of 9</a:t>
             </a:r>
@@ -9626,11 +9923,11 @@
           <a:p>
             <a:pPr algn="l"/>
             <a:r>
-              <a:rPr sz="1100" b="0" i="1">
+              <a:rPr sz="1040" b="0" i="0">
                 <a:solidFill>
                   <a:srgbClr val="6B6B6B"/>
                 </a:solidFill>
-                <a:latin typeface="Century Schoolbook"/>
+                <a:latin typeface="Lexend"/>
               </a:rPr>
               <a:t>Grade 7 Accelerated · Unit 3 · Lesson 9 — Writing Small Numbers in Scientific Notation</a:t>
             </a:r>
@@ -9661,11 +9958,11 @@
           <a:p>
             <a:pPr algn="r"/>
             <a:r>
-              <a:rPr sz="1100" b="0" i="0">
+              <a:rPr sz="1040" b="0" i="0">
                 <a:solidFill>
                   <a:srgbClr val="6B6B6B"/>
                 </a:solidFill>
-                <a:latin typeface="Century Schoolbook"/>
+                <a:latin typeface="Lexend"/>
               </a:rPr>
               <a:t>25</a:t>
             </a:r>
@@ -9680,8 +9977,8 @@
         </p:nvSpPr>
         <p:spPr>
           <a:xfrm>
-            <a:off x="1797895" y="2171700"/>
-            <a:ext cx="4558064" cy="457200"/>
+            <a:off x="1899226" y="2171700"/>
+            <a:ext cx="4488298" cy="457200"/>
           </a:xfrm>
           <a:prstGeom prst="rect">
             <a:avLst/>
@@ -9696,11 +9993,11 @@
           <a:p>
             <a:pPr algn="l"/>
             <a:r>
-              <a:rPr sz="2600" b="0" i="0">
+              <a:rPr sz="2470" b="0" i="0">
                 <a:solidFill>
                   <a:srgbClr val="1A1A1A"/>
                 </a:solidFill>
-                <a:latin typeface="Century Schoolbook"/>
+                <a:latin typeface="Lexend"/>
               </a:rPr>
               <a:t>How many times larger is  </a:t>
             </a:r>
@@ -9709,7 +10006,7 @@
       </p:sp>
       <p:pic>
         <p:nvPicPr>
-          <p:cNvPr id="9" name="Picture 8" descr="6343b50271775d7c.png"/>
+          <p:cNvPr id="9" name="Picture 8" descr="5a2c3be760ccebbb.png"/>
           <p:cNvPicPr>
             <a:picLocks noChangeAspect="1"/>
           </p:cNvPicPr>
@@ -9723,8 +10020,8 @@
         </p:blipFill>
         <p:spPr>
           <a:xfrm>
-            <a:off x="6218800" y="2225040"/>
-            <a:ext cx="1298448" cy="350520"/>
+            <a:off x="6250365" y="2231136"/>
+            <a:ext cx="1249680" cy="338328"/>
           </a:xfrm>
           <a:prstGeom prst="rect">
             <a:avLst/>
@@ -9739,8 +10036,8 @@
         </p:nvSpPr>
         <p:spPr>
           <a:xfrm>
-            <a:off x="7517248" y="2171700"/>
-            <a:ext cx="1356212" cy="457200"/>
+            <a:off x="7500045" y="2171700"/>
+            <a:ext cx="1316601" cy="457200"/>
           </a:xfrm>
           <a:prstGeom prst="rect">
             <a:avLst/>
@@ -9755,11 +10052,11 @@
           <a:p>
             <a:pPr algn="l"/>
             <a:r>
-              <a:rPr sz="2600" b="0" i="0">
+              <a:rPr sz="2470" b="0" i="0">
                 <a:solidFill>
                   <a:srgbClr val="1A1A1A"/>
                 </a:solidFill>
-                <a:latin typeface="Century Schoolbook"/>
+                <a:latin typeface="Lexend"/>
               </a:rPr>
               <a:t>  than  </a:t>
             </a:r>
@@ -9768,7 +10065,7 @@
       </p:sp>
       <p:pic>
         <p:nvPicPr>
-          <p:cNvPr id="11" name="Picture 10" descr="c3e8fbaa365da3f4.png"/>
+          <p:cNvPr id="11" name="Picture 10" descr="9a8c04db501f05ec.png"/>
           <p:cNvPicPr>
             <a:picLocks noChangeAspect="1"/>
           </p:cNvPicPr>
@@ -9782,8 +10079,8 @@
         </p:blipFill>
         <p:spPr>
           <a:xfrm>
-            <a:off x="8736300" y="2223516"/>
-            <a:ext cx="1301496" cy="353568"/>
+            <a:off x="8679487" y="2232660"/>
+            <a:ext cx="1246632" cy="335280"/>
           </a:xfrm>
           <a:prstGeom prst="rect">
             <a:avLst/>
@@ -9798,8 +10095,8 @@
         </p:nvSpPr>
         <p:spPr>
           <a:xfrm>
-            <a:off x="10037796" y="2171700"/>
-            <a:ext cx="462987" cy="457200"/>
+            <a:off x="9926119" y="2171700"/>
+            <a:ext cx="473333" cy="457200"/>
           </a:xfrm>
           <a:prstGeom prst="rect">
             <a:avLst/>
@@ -9814,11 +10111,11 @@
           <a:p>
             <a:pPr algn="l"/>
             <a:r>
-              <a:rPr sz="2600" b="0" i="0">
+              <a:rPr sz="2470" b="0" i="0">
                 <a:solidFill>
                   <a:srgbClr val="1A1A1A"/>
                 </a:solidFill>
-                <a:latin typeface="Century Schoolbook"/>
+                <a:latin typeface="Lexend"/>
               </a:rPr>
               <a:t> ?</a:t>
             </a:r>
@@ -9849,20 +10146,20 @@
           <a:p>
             <a:pPr algn="l"/>
             <a:r>
-              <a:rPr sz="2400" b="1" i="0">
+              <a:rPr sz="2280" b="1" i="0">
                 <a:solidFill>
                   <a:srgbClr val="1A1A1A"/>
                 </a:solidFill>
-                <a:latin typeface="Century Schoolbook"/>
+                <a:latin typeface="Lexend"/>
               </a:rPr>
               <a:t>A.   </a:t>
             </a:r>
             <a:r>
-              <a:rPr sz="2400" b="0" i="0">
+              <a:rPr sz="2280" b="0" i="0">
                 <a:solidFill>
                   <a:srgbClr val="1A1A1A"/>
                 </a:solidFill>
-                <a:latin typeface="Century Schoolbook"/>
+                <a:latin typeface="Lexend"/>
               </a:rPr>
               <a:t>300</a:t>
             </a:r>
@@ -9893,20 +10190,20 @@
           <a:p>
             <a:pPr algn="l"/>
             <a:r>
-              <a:rPr sz="2400" b="1" i="0">
+              <a:rPr sz="2280" b="1" i="0">
                 <a:solidFill>
                   <a:srgbClr val="1A1A1A"/>
                 </a:solidFill>
-                <a:latin typeface="Century Schoolbook"/>
+                <a:latin typeface="Lexend"/>
               </a:rPr>
               <a:t>B.   </a:t>
             </a:r>
             <a:r>
-              <a:rPr sz="2400" b="0" i="0">
+              <a:rPr sz="2280" b="0" i="0">
                 <a:solidFill>
                   <a:srgbClr val="1A1A1A"/>
                 </a:solidFill>
-                <a:latin typeface="Century Schoolbook"/>
+                <a:latin typeface="Lexend"/>
               </a:rPr>
               <a:t>30</a:t>
             </a:r>
@@ -9937,20 +10234,20 @@
           <a:p>
             <a:pPr algn="l"/>
             <a:r>
-              <a:rPr sz="2400" b="1" i="0">
+              <a:rPr sz="2280" b="1" i="0">
                 <a:solidFill>
                   <a:srgbClr val="1A1A1A"/>
                 </a:solidFill>
-                <a:latin typeface="Century Schoolbook"/>
+                <a:latin typeface="Lexend"/>
               </a:rPr>
               <a:t>C.   </a:t>
             </a:r>
             <a:r>
-              <a:rPr sz="2400" b="0" i="0">
+              <a:rPr sz="2280" b="0" i="0">
                 <a:solidFill>
                   <a:srgbClr val="1A1A1A"/>
                 </a:solidFill>
-                <a:latin typeface="Century Schoolbook"/>
+                <a:latin typeface="Lexend"/>
               </a:rPr>
               <a:t>3</a:t>
             </a:r>
@@ -9981,20 +10278,20 @@
           <a:p>
             <a:pPr algn="l"/>
             <a:r>
-              <a:rPr sz="2400" b="1" i="0">
+              <a:rPr sz="2280" b="1" i="0">
                 <a:solidFill>
                   <a:srgbClr val="1A1A1A"/>
                 </a:solidFill>
-                <a:latin typeface="Century Schoolbook"/>
+                <a:latin typeface="Lexend"/>
               </a:rPr>
               <a:t>D.   </a:t>
             </a:r>
             <a:r>
-              <a:rPr sz="2400" b="0" i="0">
+              <a:rPr sz="2280" b="0" i="0">
                 <a:solidFill>
                   <a:srgbClr val="1A1A1A"/>
                 </a:solidFill>
-                <a:latin typeface="Century Schoolbook"/>
+                <a:latin typeface="Lexend"/>
               </a:rPr>
               <a:t>0.03</a:t>
             </a:r>
@@ -10025,11 +10322,11 @@
           <a:p>
             <a:pPr algn="ctr"/>
             <a:r>
-              <a:rPr sz="2600" b="1" i="0">
+              <a:rPr sz="2470" b="1" i="0">
                 <a:solidFill>
                   <a:srgbClr val="1A1A1A"/>
                 </a:solidFill>
-                <a:latin typeface="Century Schoolbook"/>
+                <a:latin typeface="Lexend"/>
               </a:rPr>
               <a:t>Answer it.</a:t>
             </a:r>
@@ -10078,11 +10375,11 @@
           <a:p>
             <a:pPr algn="l"/>
             <a:r>
-              <a:rPr sz="3400" b="1" i="0">
+              <a:rPr sz="3229" b="1" i="0">
                 <a:solidFill>
                   <a:srgbClr val="1A1A1A"/>
                 </a:solidFill>
-                <a:latin typeface="Century Schoolbook"/>
+                <a:latin typeface="Lexend"/>
               </a:rPr>
               <a:t>Whiteboards   ·   Question 6 of 9</a:t>
             </a:r>
@@ -10218,11 +10515,11 @@
           <a:p>
             <a:pPr algn="l"/>
             <a:r>
-              <a:rPr sz="1100" b="0" i="1">
+              <a:rPr sz="1040" b="0" i="0">
                 <a:solidFill>
                   <a:srgbClr val="6B6B6B"/>
                 </a:solidFill>
-                <a:latin typeface="Century Schoolbook"/>
+                <a:latin typeface="Lexend"/>
               </a:rPr>
               <a:t>Grade 7 Accelerated · Unit 3 · Lesson 9 — Writing Small Numbers in Scientific Notation</a:t>
             </a:r>
@@ -10253,11 +10550,11 @@
           <a:p>
             <a:pPr algn="r"/>
             <a:r>
-              <a:rPr sz="1100" b="0" i="0">
+              <a:rPr sz="1040" b="0" i="0">
                 <a:solidFill>
                   <a:srgbClr val="6B6B6B"/>
                 </a:solidFill>
-                <a:latin typeface="Century Schoolbook"/>
+                <a:latin typeface="Lexend"/>
               </a:rPr>
               <a:t>26</a:t>
             </a:r>
@@ -10272,8 +10569,8 @@
         </p:nvSpPr>
         <p:spPr>
           <a:xfrm>
-            <a:off x="1793323" y="2080260"/>
-            <a:ext cx="4558064" cy="457200"/>
+            <a:off x="1896178" y="2080260"/>
+            <a:ext cx="4488298" cy="457200"/>
           </a:xfrm>
           <a:prstGeom prst="rect">
             <a:avLst/>
@@ -10288,11 +10585,11 @@
           <a:p>
             <a:pPr algn="l"/>
             <a:r>
-              <a:rPr sz="2600" b="0" i="0">
+              <a:rPr sz="2470" b="0" i="0">
                 <a:solidFill>
                   <a:srgbClr val="1A1A1A"/>
                 </a:solidFill>
-                <a:latin typeface="Century Schoolbook"/>
+                <a:latin typeface="Lexend"/>
               </a:rPr>
               <a:t>How many times larger is  </a:t>
             </a:r>
@@ -10301,7 +10598,7 @@
       </p:sp>
       <p:pic>
         <p:nvPicPr>
-          <p:cNvPr id="9" name="Picture 8" descr="e98b31f32f5b097f.png"/>
+          <p:cNvPr id="9" name="Picture 8" descr="a75ced4ea1776b11.png"/>
           <p:cNvPicPr>
             <a:picLocks noChangeAspect="1"/>
           </p:cNvPicPr>
@@ -10315,8 +10612,8 @@
         </p:blipFill>
         <p:spPr>
           <a:xfrm>
-            <a:off x="6214228" y="2133599"/>
-            <a:ext cx="1304544" cy="350520"/>
+            <a:off x="6247317" y="2139696"/>
+            <a:ext cx="1252728" cy="338328"/>
           </a:xfrm>
           <a:prstGeom prst="rect">
             <a:avLst/>
@@ -10331,8 +10628,8 @@
         </p:nvSpPr>
         <p:spPr>
           <a:xfrm>
-            <a:off x="7518772" y="2080260"/>
-            <a:ext cx="1356212" cy="457200"/>
+            <a:off x="7500045" y="2080260"/>
+            <a:ext cx="1316601" cy="457200"/>
           </a:xfrm>
           <a:prstGeom prst="rect">
             <a:avLst/>
@@ -10347,11 +10644,11 @@
           <a:p>
             <a:pPr algn="l"/>
             <a:r>
-              <a:rPr sz="2600" b="0" i="0">
+              <a:rPr sz="2470" b="0" i="0">
                 <a:solidFill>
                   <a:srgbClr val="1A1A1A"/>
                 </a:solidFill>
-                <a:latin typeface="Century Schoolbook"/>
+                <a:latin typeface="Lexend"/>
               </a:rPr>
               <a:t>  than  </a:t>
             </a:r>
@@ -10360,7 +10657,7 @@
       </p:sp>
       <p:pic>
         <p:nvPicPr>
-          <p:cNvPr id="11" name="Picture 10" descr="ccaef7e81c68392e.png"/>
+          <p:cNvPr id="11" name="Picture 10" descr="aed887976cb4b8f5.png"/>
           <p:cNvPicPr>
             <a:picLocks noChangeAspect="1"/>
           </p:cNvPicPr>
@@ -10374,8 +10671,8 @@
         </p:blipFill>
         <p:spPr>
           <a:xfrm>
-            <a:off x="8737824" y="2132076"/>
-            <a:ext cx="1304544" cy="353568"/>
+            <a:off x="8679487" y="2141219"/>
+            <a:ext cx="1249680" cy="335280"/>
           </a:xfrm>
           <a:prstGeom prst="rect">
             <a:avLst/>
@@ -10390,8 +10687,8 @@
         </p:nvSpPr>
         <p:spPr>
           <a:xfrm>
-            <a:off x="10042368" y="2080260"/>
-            <a:ext cx="462987" cy="457200"/>
+            <a:off x="9929167" y="2080260"/>
+            <a:ext cx="473333" cy="457200"/>
           </a:xfrm>
           <a:prstGeom prst="rect">
             <a:avLst/>
@@ -10406,11 +10703,11 @@
           <a:p>
             <a:pPr algn="l"/>
             <a:r>
-              <a:rPr sz="2600" b="0" i="0">
+              <a:rPr sz="2470" b="0" i="0">
                 <a:solidFill>
                   <a:srgbClr val="1A1A1A"/>
                 </a:solidFill>
-                <a:latin typeface="Century Schoolbook"/>
+                <a:latin typeface="Lexend"/>
               </a:rPr>
               <a:t> ?</a:t>
             </a:r>
@@ -10425,8 +10722,150 @@
         </p:nvSpPr>
         <p:spPr>
           <a:xfrm>
-            <a:off x="1874519" y="2880360"/>
-            <a:ext cx="4572000" cy="548640"/>
+            <a:off x="2785212" y="2839212"/>
+            <a:ext cx="3415280" cy="457200"/>
+          </a:xfrm>
+          <a:prstGeom prst="rect">
+            <a:avLst/>
+          </a:prstGeom>
+          <a:noFill/>
+        </p:spPr>
+        <p:txBody>
+          <a:bodyPr wrap="none" lIns="45720" rIns="45720" tIns="18288" bIns="18288" anchor="ctr">
+            <a:noAutofit/>
+          </a:bodyPr>
+          <a:lstStyle/>
+          <a:p>
+            <a:pPr algn="l"/>
+            <a:r>
+              <a:rPr sz="2330" b="0" i="0">
+                <a:solidFill>
+                  <a:srgbClr val="1A1A1A"/>
+                </a:solidFill>
+                <a:latin typeface="Lexend"/>
+              </a:rPr>
+              <a:t>Divide the numbers:  </a:t>
+            </a:r>
+          </a:p>
+        </p:txBody>
+      </p:sp>
+      <p:pic>
+        <p:nvPicPr>
+          <p:cNvPr id="14" name="Picture 13" descr="38fe3a113732c67b.png"/>
+          <p:cNvPicPr>
+            <a:picLocks noChangeAspect="1"/>
+          </p:cNvPicPr>
+          <p:nvPr/>
+        </p:nvPicPr>
+        <p:blipFill>
+          <a:blip r:embed="rId4"/>
+          <a:stretch>
+            <a:fillRect/>
+          </a:stretch>
+        </p:blipFill>
+        <p:spPr>
+          <a:xfrm>
+            <a:off x="6063332" y="2961132"/>
+            <a:ext cx="1024128" cy="213360"/>
+          </a:xfrm>
+          <a:prstGeom prst="rect">
+            <a:avLst/>
+          </a:prstGeom>
+        </p:spPr>
+      </p:pic>
+      <p:sp>
+        <p:nvSpPr>
+          <p:cNvPr id="15" name="TextBox 14"/>
+          <p:cNvSpPr txBox="1"/>
+          <p:nvPr/>
+        </p:nvSpPr>
+        <p:spPr>
+          <a:xfrm>
+            <a:off x="2785212" y="3342132"/>
+            <a:ext cx="3183431" cy="457200"/>
+          </a:xfrm>
+          <a:prstGeom prst="rect">
+            <a:avLst/>
+          </a:prstGeom>
+          <a:noFill/>
+        </p:spPr>
+        <p:txBody>
+          <a:bodyPr wrap="none" lIns="45720" rIns="45720" tIns="18288" bIns="18288" anchor="ctr">
+            <a:noAutofit/>
+          </a:bodyPr>
+          <a:lstStyle/>
+          <a:p>
+            <a:pPr algn="l"/>
+            <a:r>
+              <a:rPr sz="2330" b="0" i="0">
+                <a:solidFill>
+                  <a:srgbClr val="1A1A1A"/>
+                </a:solidFill>
+                <a:latin typeface="Lexend"/>
+              </a:rPr>
+              <a:t>Divide the powers:  </a:t>
+            </a:r>
+          </a:p>
+        </p:txBody>
+      </p:sp>
+      <p:pic>
+        <p:nvPicPr>
+          <p:cNvPr id="16" name="Picture 15" descr="65ff84f4a4ec86a0.png"/>
+          <p:cNvPicPr>
+            <a:picLocks noChangeAspect="1"/>
+          </p:cNvPicPr>
+          <p:nvPr/>
+        </p:nvPicPr>
+        <p:blipFill>
+          <a:blip r:embed="rId5"/>
+          <a:stretch>
+            <a:fillRect/>
+          </a:stretch>
+        </p:blipFill>
+        <p:spPr>
+          <a:xfrm>
+            <a:off x="5831483" y="3439667"/>
+            <a:ext cx="3547872" cy="262128"/>
+          </a:xfrm>
+          <a:prstGeom prst="rect">
+            <a:avLst/>
+          </a:prstGeom>
+        </p:spPr>
+      </p:pic>
+      <p:pic>
+        <p:nvPicPr>
+          <p:cNvPr id="17" name="Picture 16" descr="9d511f57c8dac01a.png"/>
+          <p:cNvPicPr>
+            <a:picLocks noChangeAspect="1"/>
+          </p:cNvPicPr>
+          <p:nvPr/>
+        </p:nvPicPr>
+        <p:blipFill>
+          <a:blip r:embed="rId6"/>
+          <a:stretch>
+            <a:fillRect/>
+          </a:stretch>
+        </p:blipFill>
+        <p:spPr>
+          <a:xfrm>
+            <a:off x="2840076" y="3942588"/>
+            <a:ext cx="1630680" cy="262128"/>
+          </a:xfrm>
+          <a:prstGeom prst="rect">
+            <a:avLst/>
+          </a:prstGeom>
+        </p:spPr>
+      </p:pic>
+      <p:sp>
+        <p:nvSpPr>
+          <p:cNvPr id="18" name="TextBox 17"/>
+          <p:cNvSpPr txBox="1"/>
+          <p:nvPr/>
+        </p:nvSpPr>
+        <p:spPr>
+          <a:xfrm>
+            <a:off x="777240" y="4663440"/>
+            <a:ext cx="10607040" cy="548640"/>
           </a:xfrm>
           <a:prstGeom prst="rect">
             <a:avLst/>
@@ -10439,189 +10878,13 @@
           </a:bodyPr>
           <a:lstStyle/>
           <a:p>
-            <a:pPr algn="l"/>
-            <a:r>
-              <a:rPr sz="2400" b="1" i="0">
+            <a:pPr algn="ctr"/>
+            <a:r>
+              <a:rPr sz="3040" b="1" i="0">
                 <a:solidFill>
                   <a:srgbClr val="9E1B32"/>
                 </a:solidFill>
-                <a:latin typeface="Century Schoolbook"/>
-              </a:rPr>
-              <a:t>A.   </a:t>
-            </a:r>
-            <a:r>
-              <a:rPr sz="2400" b="1" i="0">
-                <a:solidFill>
-                  <a:srgbClr val="9E1B32"/>
-                </a:solidFill>
-                <a:latin typeface="Century Schoolbook"/>
-              </a:rPr>
-              <a:t>300</a:t>
-            </a:r>
-          </a:p>
-        </p:txBody>
-      </p:sp>
-      <p:sp>
-        <p:nvSpPr>
-          <p:cNvPr id="14" name="TextBox 13"/>
-          <p:cNvSpPr txBox="1"/>
-          <p:nvPr/>
-        </p:nvSpPr>
-        <p:spPr>
-          <a:xfrm>
-            <a:off x="6629400" y="2880360"/>
-            <a:ext cx="4572000" cy="548640"/>
-          </a:xfrm>
-          <a:prstGeom prst="rect">
-            <a:avLst/>
-          </a:prstGeom>
-          <a:noFill/>
-        </p:spPr>
-        <p:txBody>
-          <a:bodyPr wrap="square" lIns="45720" rIns="45720" tIns="18288" bIns="18288" anchor="t">
-            <a:spAutoFit/>
-          </a:bodyPr>
-          <a:lstStyle/>
-          <a:p>
-            <a:pPr algn="l"/>
-            <a:r>
-              <a:rPr sz="2400" b="1" i="0">
-                <a:solidFill>
-                  <a:srgbClr val="1A1A1A"/>
-                </a:solidFill>
-                <a:latin typeface="Century Schoolbook"/>
-              </a:rPr>
-              <a:t>B.   </a:t>
-            </a:r>
-            <a:r>
-              <a:rPr sz="2400" b="0" i="0">
-                <a:solidFill>
-                  <a:srgbClr val="1A1A1A"/>
-                </a:solidFill>
-                <a:latin typeface="Century Schoolbook"/>
-              </a:rPr>
-              <a:t>30</a:t>
-            </a:r>
-          </a:p>
-        </p:txBody>
-      </p:sp>
-      <p:sp>
-        <p:nvSpPr>
-          <p:cNvPr id="15" name="TextBox 14"/>
-          <p:cNvSpPr txBox="1"/>
-          <p:nvPr/>
-        </p:nvSpPr>
-        <p:spPr>
-          <a:xfrm>
-            <a:off x="1874519" y="3566160"/>
-            <a:ext cx="4572000" cy="548640"/>
-          </a:xfrm>
-          <a:prstGeom prst="rect">
-            <a:avLst/>
-          </a:prstGeom>
-          <a:noFill/>
-        </p:spPr>
-        <p:txBody>
-          <a:bodyPr wrap="square" lIns="45720" rIns="45720" tIns="18288" bIns="18288" anchor="t">
-            <a:spAutoFit/>
-          </a:bodyPr>
-          <a:lstStyle/>
-          <a:p>
-            <a:pPr algn="l"/>
-            <a:r>
-              <a:rPr sz="2400" b="1" i="0">
-                <a:solidFill>
-                  <a:srgbClr val="1A1A1A"/>
-                </a:solidFill>
-                <a:latin typeface="Century Schoolbook"/>
-              </a:rPr>
-              <a:t>C.   </a:t>
-            </a:r>
-            <a:r>
-              <a:rPr sz="2400" b="0" i="0">
-                <a:solidFill>
-                  <a:srgbClr val="1A1A1A"/>
-                </a:solidFill>
-                <a:latin typeface="Century Schoolbook"/>
-              </a:rPr>
-              <a:t>3</a:t>
-            </a:r>
-          </a:p>
-        </p:txBody>
-      </p:sp>
-      <p:sp>
-        <p:nvSpPr>
-          <p:cNvPr id="16" name="TextBox 15"/>
-          <p:cNvSpPr txBox="1"/>
-          <p:nvPr/>
-        </p:nvSpPr>
-        <p:spPr>
-          <a:xfrm>
-            <a:off x="6629400" y="3566160"/>
-            <a:ext cx="4572000" cy="548640"/>
-          </a:xfrm>
-          <a:prstGeom prst="rect">
-            <a:avLst/>
-          </a:prstGeom>
-          <a:noFill/>
-        </p:spPr>
-        <p:txBody>
-          <a:bodyPr wrap="square" lIns="45720" rIns="45720" tIns="18288" bIns="18288" anchor="t">
-            <a:spAutoFit/>
-          </a:bodyPr>
-          <a:lstStyle/>
-          <a:p>
-            <a:pPr algn="l"/>
-            <a:r>
-              <a:rPr sz="2400" b="1" i="0">
-                <a:solidFill>
-                  <a:srgbClr val="1A1A1A"/>
-                </a:solidFill>
-                <a:latin typeface="Century Schoolbook"/>
-              </a:rPr>
-              <a:t>D.   </a:t>
-            </a:r>
-            <a:r>
-              <a:rPr sz="2400" b="0" i="0">
-                <a:solidFill>
-                  <a:srgbClr val="1A1A1A"/>
-                </a:solidFill>
-                <a:latin typeface="Century Schoolbook"/>
-              </a:rPr>
-              <a:t>0.03</a:t>
-            </a:r>
-          </a:p>
-        </p:txBody>
-      </p:sp>
-      <p:sp>
-        <p:nvSpPr>
-          <p:cNvPr id="17" name="TextBox 16"/>
-          <p:cNvSpPr txBox="1"/>
-          <p:nvPr/>
-        </p:nvSpPr>
-        <p:spPr>
-          <a:xfrm>
-            <a:off x="777240" y="4663440"/>
-            <a:ext cx="10607040" cy="548640"/>
-          </a:xfrm>
-          <a:prstGeom prst="rect">
-            <a:avLst/>
-          </a:prstGeom>
-          <a:noFill/>
-        </p:spPr>
-        <p:txBody>
-          <a:bodyPr wrap="square" lIns="45720" rIns="45720" tIns="18288" bIns="18288" anchor="t">
-            <a:spAutoFit/>
-          </a:bodyPr>
-          <a:lstStyle/>
-          <a:p>
-            <a:pPr algn="ctr"/>
-            <a:r>
-              <a:rPr sz="3200" b="1" i="0">
-                <a:solidFill>
-                  <a:srgbClr val="9E1B32"/>
-                </a:solidFill>
-                <a:latin typeface="Century Schoolbook"/>
+                <a:latin typeface="Lexend"/>
               </a:rPr>
               <a:t>Answer:   A — 300</a:t>
             </a:r>
@@ -10670,11 +10933,11 @@
           <a:p>
             <a:pPr algn="l"/>
             <a:r>
-              <a:rPr sz="3400" b="1" i="0">
+              <a:rPr sz="3229" b="1" i="0">
                 <a:solidFill>
                   <a:srgbClr val="1A1A1A"/>
                 </a:solidFill>
-                <a:latin typeface="Century Schoolbook"/>
+                <a:latin typeface="Lexend"/>
               </a:rPr>
               <a:t>Whiteboards   ·   Question 7 of 9</a:t>
             </a:r>
@@ -10810,11 +11073,11 @@
           <a:p>
             <a:pPr algn="l"/>
             <a:r>
-              <a:rPr sz="1100" b="0" i="1">
+              <a:rPr sz="1040" b="0" i="0">
                 <a:solidFill>
                   <a:srgbClr val="6B6B6B"/>
                 </a:solidFill>
-                <a:latin typeface="Century Schoolbook"/>
+                <a:latin typeface="Lexend"/>
               </a:rPr>
               <a:t>Grade 7 Accelerated · Unit 3 · Lesson 9 — Writing Small Numbers in Scientific Notation</a:t>
             </a:r>
@@ -10845,11 +11108,11 @@
           <a:p>
             <a:pPr algn="r"/>
             <a:r>
-              <a:rPr sz="1100" b="0" i="0">
+              <a:rPr sz="1040" b="0" i="0">
                 <a:solidFill>
                   <a:srgbClr val="6B6B6B"/>
                 </a:solidFill>
-                <a:latin typeface="Century Schoolbook"/>
+                <a:latin typeface="Lexend"/>
               </a:rPr>
               <a:t>27</a:t>
             </a:r>
@@ -10864,8 +11127,8 @@
         </p:nvSpPr>
         <p:spPr>
           <a:xfrm>
-            <a:off x="2400756" y="2171700"/>
-            <a:ext cx="3166062" cy="457200"/>
+            <a:off x="2477233" y="2171700"/>
+            <a:ext cx="3099754" cy="457200"/>
           </a:xfrm>
           <a:prstGeom prst="rect">
             <a:avLst/>
@@ -10880,11 +11143,11 @@
           <a:p>
             <a:pPr algn="l"/>
             <a:r>
-              <a:rPr sz="2600" b="0" i="0">
+              <a:rPr sz="2470" b="0" i="0">
                 <a:solidFill>
                   <a:srgbClr val="1A1A1A"/>
                 </a:solidFill>
-                <a:latin typeface="Century Schoolbook"/>
+                <a:latin typeface="Lexend"/>
               </a:rPr>
               <a:t>Which is greater,  </a:t>
             </a:r>
@@ -10893,7 +11156,7 @@
       </p:sp>
       <p:pic>
         <p:nvPicPr>
-          <p:cNvPr id="9" name="Picture 8" descr="746391bb3aa38924.png"/>
+          <p:cNvPr id="9" name="Picture 8" descr="6b87d3400d9bb213.png"/>
           <p:cNvPicPr>
             <a:picLocks noChangeAspect="1"/>
           </p:cNvPicPr>
@@ -10907,8 +11170,8 @@
         </p:blipFill>
         <p:spPr>
           <a:xfrm>
-            <a:off x="5429658" y="2223516"/>
-            <a:ext cx="1600200" cy="353568"/>
+            <a:off x="5439827" y="2232660"/>
+            <a:ext cx="1551432" cy="335280"/>
           </a:xfrm>
           <a:prstGeom prst="rect">
             <a:avLst/>
@@ -10923,8 +11186,8 @@
         </p:nvSpPr>
         <p:spPr>
           <a:xfrm>
-            <a:off x="7029858" y="2171700"/>
-            <a:ext cx="929845" cy="457200"/>
+            <a:off x="6991259" y="2171700"/>
+            <a:ext cx="921244" cy="457200"/>
           </a:xfrm>
           <a:prstGeom prst="rect">
             <a:avLst/>
@@ -10939,11 +11202,11 @@
           <a:p>
             <a:pPr algn="l"/>
             <a:r>
-              <a:rPr sz="2600" b="0" i="0">
+              <a:rPr sz="2470" b="0" i="0">
                 <a:solidFill>
                   <a:srgbClr val="1A1A1A"/>
                 </a:solidFill>
-                <a:latin typeface="Century Schoolbook"/>
+                <a:latin typeface="Lexend"/>
               </a:rPr>
               <a:t>  or  </a:t>
             </a:r>
@@ -10952,7 +11215,7 @@
       </p:sp>
       <p:pic>
         <p:nvPicPr>
-          <p:cNvPr id="11" name="Picture 10" descr="9027aa45f8c131e6.png"/>
+          <p:cNvPr id="11" name="Picture 10" descr="1da1a250efe25861.png"/>
           <p:cNvPicPr>
             <a:picLocks noChangeAspect="1"/>
           </p:cNvPicPr>
@@ -10966,8 +11229,8 @@
         </p:blipFill>
         <p:spPr>
           <a:xfrm>
-            <a:off x="7822544" y="2225040"/>
-            <a:ext cx="1612392" cy="350520"/>
+            <a:off x="7775344" y="2231136"/>
+            <a:ext cx="1572768" cy="338328"/>
           </a:xfrm>
           <a:prstGeom prst="rect">
             <a:avLst/>
@@ -10982,8 +11245,8 @@
         </p:nvSpPr>
         <p:spPr>
           <a:xfrm>
-            <a:off x="9434936" y="2171700"/>
-            <a:ext cx="462987" cy="457200"/>
+            <a:off x="9348112" y="2171700"/>
+            <a:ext cx="473333" cy="457200"/>
           </a:xfrm>
           <a:prstGeom prst="rect">
             <a:avLst/>
@@ -10998,11 +11261,11 @@
           <a:p>
             <a:pPr algn="l"/>
             <a:r>
-              <a:rPr sz="2600" b="0" i="0">
+              <a:rPr sz="2470" b="0" i="0">
                 <a:solidFill>
                   <a:srgbClr val="1A1A1A"/>
                 </a:solidFill>
-                <a:latin typeface="Century Schoolbook"/>
+                <a:latin typeface="Lexend"/>
               </a:rPr>
               <a:t> ?</a:t>
             </a:r>
@@ -11033,11 +11296,11 @@
           <a:p>
             <a:pPr algn="ctr"/>
             <a:r>
-              <a:rPr sz="2600" b="1" i="0">
+              <a:rPr sz="2470" b="1" i="0">
                 <a:solidFill>
                   <a:srgbClr val="1A1A1A"/>
                 </a:solidFill>
-                <a:latin typeface="Century Schoolbook"/>
+                <a:latin typeface="Lexend"/>
               </a:rPr>
               <a:t>Answer it.</a:t>
             </a:r>
@@ -11086,11 +11349,11 @@
           <a:p>
             <a:pPr algn="l"/>
             <a:r>
-              <a:rPr sz="3400" b="1" i="0">
+              <a:rPr sz="3229" b="1" i="0">
                 <a:solidFill>
                   <a:srgbClr val="1A1A1A"/>
                 </a:solidFill>
-                <a:latin typeface="Century Schoolbook"/>
+                <a:latin typeface="Lexend"/>
               </a:rPr>
               <a:t>Whiteboards   ·   Question 7 of 9</a:t>
             </a:r>
@@ -11226,11 +11489,11 @@
           <a:p>
             <a:pPr algn="l"/>
             <a:r>
-              <a:rPr sz="1100" b="0" i="1">
+              <a:rPr sz="1040" b="0" i="0">
                 <a:solidFill>
                   <a:srgbClr val="6B6B6B"/>
                 </a:solidFill>
-                <a:latin typeface="Century Schoolbook"/>
+                <a:latin typeface="Lexend"/>
               </a:rPr>
               <a:t>Grade 7 Accelerated · Unit 3 · Lesson 9 — Writing Small Numbers in Scientific Notation</a:t>
             </a:r>
@@ -11261,11 +11524,11 @@
           <a:p>
             <a:pPr algn="r"/>
             <a:r>
-              <a:rPr sz="1100" b="0" i="0">
+              <a:rPr sz="1040" b="0" i="0">
                 <a:solidFill>
                   <a:srgbClr val="6B6B6B"/>
                 </a:solidFill>
-                <a:latin typeface="Century Schoolbook"/>
+                <a:latin typeface="Lexend"/>
               </a:rPr>
               <a:t>28</a:t>
             </a:r>
@@ -11280,8 +11543,8 @@
         </p:nvSpPr>
         <p:spPr>
           <a:xfrm>
-            <a:off x="2397708" y="2080260"/>
-            <a:ext cx="3166062" cy="457200"/>
+            <a:off x="2475709" y="2080260"/>
+            <a:ext cx="3099754" cy="457200"/>
           </a:xfrm>
           <a:prstGeom prst="rect">
             <a:avLst/>
@@ -11296,11 +11559,11 @@
           <a:p>
             <a:pPr algn="l"/>
             <a:r>
-              <a:rPr sz="2600" b="0" i="0">
+              <a:rPr sz="2470" b="0" i="0">
                 <a:solidFill>
                   <a:srgbClr val="1A1A1A"/>
                 </a:solidFill>
-                <a:latin typeface="Century Schoolbook"/>
+                <a:latin typeface="Lexend"/>
               </a:rPr>
               <a:t>Which is greater,  </a:t>
             </a:r>
@@ -11309,7 +11572,7 @@
       </p:sp>
       <p:pic>
         <p:nvPicPr>
-          <p:cNvPr id="9" name="Picture 8" descr="df917c83e179d439.png"/>
+          <p:cNvPr id="9" name="Picture 8" descr="81b1ad24407d186c.png"/>
           <p:cNvPicPr>
             <a:picLocks noChangeAspect="1"/>
           </p:cNvPicPr>
@@ -11323,8 +11586,8 @@
         </p:blipFill>
         <p:spPr>
           <a:xfrm>
-            <a:off x="5426610" y="2132076"/>
-            <a:ext cx="1606296" cy="353568"/>
+            <a:off x="5438303" y="2141219"/>
+            <a:ext cx="1554480" cy="335280"/>
           </a:xfrm>
           <a:prstGeom prst="rect">
             <a:avLst/>
@@ -11339,8 +11602,8 @@
         </p:nvSpPr>
         <p:spPr>
           <a:xfrm>
-            <a:off x="7032906" y="2080260"/>
-            <a:ext cx="929845" cy="457200"/>
+            <a:off x="6992783" y="2080260"/>
+            <a:ext cx="921244" cy="457200"/>
           </a:xfrm>
           <a:prstGeom prst="rect">
             <a:avLst/>
@@ -11355,11 +11618,11 @@
           <a:p>
             <a:pPr algn="l"/>
             <a:r>
-              <a:rPr sz="2600" b="0" i="0">
+              <a:rPr sz="2470" b="0" i="0">
                 <a:solidFill>
                   <a:srgbClr val="1A1A1A"/>
                 </a:solidFill>
-                <a:latin typeface="Century Schoolbook"/>
+                <a:latin typeface="Lexend"/>
               </a:rPr>
               <a:t>  or  </a:t>
             </a:r>
@@ -11368,7 +11631,7 @@
       </p:sp>
       <p:pic>
         <p:nvPicPr>
-          <p:cNvPr id="11" name="Picture 10" descr="1a294302f9ade9e4.png"/>
+          <p:cNvPr id="11" name="Picture 10" descr="2167ac4363e0709d.png"/>
           <p:cNvPicPr>
             <a:picLocks noChangeAspect="1"/>
           </p:cNvPicPr>
@@ -11382,8 +11645,8 @@
         </p:blipFill>
         <p:spPr>
           <a:xfrm>
-            <a:off x="7825592" y="2133599"/>
-            <a:ext cx="1612392" cy="350520"/>
+            <a:off x="7776868" y="2139696"/>
+            <a:ext cx="1572768" cy="338328"/>
           </a:xfrm>
           <a:prstGeom prst="rect">
             <a:avLst/>
@@ -11398,8 +11661,8 @@
         </p:nvSpPr>
         <p:spPr>
           <a:xfrm>
-            <a:off x="9437984" y="2080260"/>
-            <a:ext cx="462987" cy="457200"/>
+            <a:off x="9349636" y="2080260"/>
+            <a:ext cx="473333" cy="457200"/>
           </a:xfrm>
           <a:prstGeom prst="rect">
             <a:avLst/>
@@ -11414,20 +11677,68 @@
           <a:p>
             <a:pPr algn="l"/>
             <a:r>
-              <a:rPr sz="2600" b="0" i="0">
+              <a:rPr sz="2470" b="0" i="0">
                 <a:solidFill>
                   <a:srgbClr val="1A1A1A"/>
                 </a:solidFill>
-                <a:latin typeface="Century Schoolbook"/>
+                <a:latin typeface="Lexend"/>
               </a:rPr>
               <a:t> ?</a:t>
             </a:r>
           </a:p>
         </p:txBody>
       </p:sp>
-      <p:sp>
-        <p:nvSpPr>
-          <p:cNvPr id="13" name="TextBox 12"/>
+      <p:pic>
+        <p:nvPicPr>
+          <p:cNvPr id="13" name="Picture 12" descr="7da4b69f6a4a0e54.png"/>
+          <p:cNvPicPr>
+            <a:picLocks noChangeAspect="1"/>
+          </p:cNvPicPr>
+          <p:nvPr/>
+        </p:nvPicPr>
+        <p:blipFill>
+          <a:blip r:embed="rId4"/>
+          <a:stretch>
+            <a:fillRect/>
+          </a:stretch>
+        </p:blipFill>
+        <p:spPr>
+          <a:xfrm>
+            <a:off x="4162043" y="2915412"/>
+            <a:ext cx="3267456" cy="304800"/>
+          </a:xfrm>
+          <a:prstGeom prst="rect">
+            <a:avLst/>
+          </a:prstGeom>
+        </p:spPr>
+      </p:pic>
+      <p:pic>
+        <p:nvPicPr>
+          <p:cNvPr id="14" name="Picture 13" descr="adf9adaf96fc0f9c.png"/>
+          <p:cNvPicPr>
+            <a:picLocks noChangeAspect="1"/>
+          </p:cNvPicPr>
+          <p:nvPr/>
+        </p:nvPicPr>
+        <p:blipFill>
+          <a:blip r:embed="rId5"/>
+          <a:stretch>
+            <a:fillRect/>
+          </a:stretch>
+        </p:blipFill>
+        <p:spPr>
+          <a:xfrm>
+            <a:off x="4162043" y="3454908"/>
+            <a:ext cx="3947160" cy="304800"/>
+          </a:xfrm>
+          <a:prstGeom prst="rect">
+            <a:avLst/>
+          </a:prstGeom>
+        </p:spPr>
+      </p:pic>
+      <p:sp>
+        <p:nvSpPr>
+          <p:cNvPr id="15" name="TextBox 14"/>
           <p:cNvSpPr txBox="1"/>
           <p:nvPr/>
         </p:nvSpPr>
@@ -11449,20 +11760,20 @@
           <a:p>
             <a:pPr algn="ctr"/>
             <a:r>
-              <a:rPr sz="3200" b="1" i="0">
+              <a:rPr sz="3040" b="1" i="0">
                 <a:solidFill>
                   <a:srgbClr val="9E1B32"/>
                 </a:solidFill>
-                <a:latin typeface="Century Schoolbook"/>
+                <a:latin typeface="Lexend"/>
               </a:rPr>
               <a:t>Answer:   3.9 × 10</a:t>
             </a:r>
             <a:r>
-              <a:rPr sz="3200" b="1" i="0" baseline="30000">
+              <a:rPr sz="3040" b="1" i="0" baseline="30000">
                 <a:solidFill>
                   <a:srgbClr val="9E1B32"/>
                 </a:solidFill>
-                <a:latin typeface="Century Schoolbook"/>
+                <a:latin typeface="Lexend"/>
               </a:rPr>
               <a:t>-5</a:t>
             </a:r>
@@ -11511,11 +11822,11 @@
           <a:p>
             <a:pPr algn="l"/>
             <a:r>
-              <a:rPr sz="3400" b="1" i="0">
+              <a:rPr sz="3229" b="1" i="0">
                 <a:solidFill>
                   <a:srgbClr val="1A1A1A"/>
                 </a:solidFill>
-                <a:latin typeface="Century Schoolbook"/>
+                <a:latin typeface="Lexend"/>
               </a:rPr>
               <a:t>Whiteboards   ·   Question 8 of 9</a:t>
             </a:r>
@@ -11651,11 +11962,11 @@
           <a:p>
             <a:pPr algn="l"/>
             <a:r>
-              <a:rPr sz="1100" b="0" i="1">
+              <a:rPr sz="1040" b="0" i="0">
                 <a:solidFill>
                   <a:srgbClr val="6B6B6B"/>
                 </a:solidFill>
-                <a:latin typeface="Century Schoolbook"/>
+                <a:latin typeface="Lexend"/>
               </a:rPr>
               <a:t>Grade 7 Accelerated · Unit 3 · Lesson 9 — Writing Small Numbers in Scientific Notation</a:t>
             </a:r>
@@ -11686,11 +11997,11 @@
           <a:p>
             <a:pPr algn="r"/>
             <a:r>
-              <a:rPr sz="1100" b="0" i="0">
+              <a:rPr sz="1040" b="0" i="0">
                 <a:solidFill>
                   <a:srgbClr val="6B6B6B"/>
                 </a:solidFill>
-                <a:latin typeface="Century Schoolbook"/>
+                <a:latin typeface="Lexend"/>
               </a:rPr>
               <a:t>29</a:t>
             </a:r>
@@ -11721,11 +12032,11 @@
           <a:p>
             <a:pPr algn="ctr"/>
             <a:r>
-              <a:rPr sz="2600" b="0" i="0">
+              <a:rPr sz="2470" b="0" i="0">
                 <a:solidFill>
                   <a:srgbClr val="1A1A1A"/>
                 </a:solidFill>
-                <a:latin typeface="Century Schoolbook"/>
+                <a:latin typeface="Lexend"/>
               </a:rPr>
               <a:t>A computer displays a number as  4.2E−6.</a:t>
             </a:r>
@@ -11756,11 +12067,11 @@
           <a:p>
             <a:pPr algn="ctr"/>
             <a:r>
-              <a:rPr sz="2600" b="0" i="0">
+              <a:rPr sz="2470" b="0" i="0">
                 <a:solidFill>
                   <a:srgbClr val="1A1A1A"/>
                 </a:solidFill>
-                <a:latin typeface="Century Schoolbook"/>
+                <a:latin typeface="Lexend"/>
               </a:rPr>
               <a:t>Write the number in standard form.</a:t>
             </a:r>
@@ -11791,11 +12102,11 @@
           <a:p>
             <a:pPr algn="ctr"/>
             <a:r>
-              <a:rPr sz="2600" b="1" i="0">
+              <a:rPr sz="2470" b="1" i="0">
                 <a:solidFill>
                   <a:srgbClr val="1A1A1A"/>
                 </a:solidFill>
-                <a:latin typeface="Century Schoolbook"/>
+                <a:latin typeface="Lexend"/>
               </a:rPr>
               <a:t>Answer it.</a:t>
             </a:r>
@@ -11844,11 +12155,11 @@
           <a:p>
             <a:pPr algn="l"/>
             <a:r>
-              <a:rPr sz="3600" b="1" i="0">
+              <a:rPr sz="3420" b="1" i="0">
                 <a:solidFill>
                   <a:srgbClr val="1A1A1A"/>
                 </a:solidFill>
-                <a:latin typeface="Century Schoolbook"/>
+                <a:latin typeface="Lexend"/>
               </a:rPr>
               <a:t>Warm-Up</a:t>
             </a:r>
@@ -11984,11 +12295,11 @@
           <a:p>
             <a:pPr algn="l"/>
             <a:r>
-              <a:rPr sz="1100" b="0" i="1">
+              <a:rPr sz="1040" b="0" i="0">
                 <a:solidFill>
                   <a:srgbClr val="6B6B6B"/>
                 </a:solidFill>
-                <a:latin typeface="Century Schoolbook"/>
+                <a:latin typeface="Lexend"/>
               </a:rPr>
               <a:t>Grade 7 Accelerated · Unit 3 · Lesson 9 — Writing Small Numbers in Scientific Notation</a:t>
             </a:r>
@@ -12019,11 +12330,11 @@
           <a:p>
             <a:pPr algn="r"/>
             <a:r>
-              <a:rPr sz="1100" b="0" i="0">
+              <a:rPr sz="1040" b="0" i="0">
                 <a:solidFill>
                   <a:srgbClr val="6B6B6B"/>
                 </a:solidFill>
-                <a:latin typeface="Century Schoolbook"/>
+                <a:latin typeface="Lexend"/>
               </a:rPr>
               <a:t>3</a:t>
             </a:r>
@@ -12039,7 +12350,7 @@
         <p:spPr>
           <a:xfrm>
             <a:off x="1874519" y="1440180"/>
-            <a:ext cx="6249754" cy="457200"/>
+            <a:ext cx="6134719" cy="457200"/>
           </a:xfrm>
           <a:prstGeom prst="rect">
             <a:avLst/>
@@ -12054,11 +12365,11 @@
           <a:p>
             <a:pPr algn="l"/>
             <a:r>
-              <a:rPr sz="2300" b="0" i="0">
+              <a:rPr sz="2180" b="0" i="0">
                 <a:solidFill>
                   <a:srgbClr val="1A1A1A"/>
                 </a:solidFill>
-                <a:latin typeface="Century Schoolbook"/>
+                <a:latin typeface="Lexend"/>
               </a:rPr>
               <a:t>1.   Write  4,300,000  in scientific notation.</a:t>
             </a:r>
@@ -12073,8 +12384,8 @@
         </p:nvSpPr>
         <p:spPr>
           <a:xfrm>
-            <a:off x="8535754" y="1440180"/>
-            <a:ext cx="1459438" cy="457200"/>
+            <a:off x="8420719" y="1440180"/>
+            <a:ext cx="1473615" cy="457200"/>
           </a:xfrm>
           <a:prstGeom prst="rect">
             <a:avLst/>
@@ -12089,20 +12400,20 @@
           <a:p>
             <a:pPr algn="l"/>
             <a:r>
-              <a:rPr sz="2300" b="1" i="0">
+              <a:rPr sz="2180" b="1" i="0">
                 <a:solidFill>
                   <a:srgbClr val="9E1B32"/>
                 </a:solidFill>
-                <a:latin typeface="Century Schoolbook"/>
+                <a:latin typeface="Lexend"/>
               </a:rPr>
               <a:t>4.3 × 10</a:t>
             </a:r>
             <a:r>
-              <a:rPr sz="2300" b="1" i="0" baseline="30000">
+              <a:rPr sz="2180" b="1" i="0" baseline="30000">
                 <a:solidFill>
                   <a:srgbClr val="9E1B32"/>
                 </a:solidFill>
-                <a:latin typeface="Century Schoolbook"/>
+                <a:latin typeface="Lexend"/>
               </a:rPr>
               <a:t>6</a:t>
             </a:r>
@@ -12118,7 +12429,7 @@
         <p:spPr>
           <a:xfrm>
             <a:off x="1874519" y="2052828"/>
-            <a:ext cx="1700544" cy="457200"/>
+            <a:ext cx="1626682" cy="457200"/>
           </a:xfrm>
           <a:prstGeom prst="rect">
             <a:avLst/>
@@ -12133,11 +12444,11 @@
           <a:p>
             <a:pPr algn="l"/>
             <a:r>
-              <a:rPr sz="2300" b="0" i="0">
+              <a:rPr sz="2180" b="0" i="0">
                 <a:solidFill>
                   <a:srgbClr val="1A1A1A"/>
                 </a:solidFill>
-                <a:latin typeface="Century Schoolbook"/>
+                <a:latin typeface="Lexend"/>
               </a:rPr>
               <a:t>2.   Write  </a:t>
             </a:r>
@@ -12146,7 +12457,7 @@
       </p:sp>
       <p:pic>
         <p:nvPicPr>
-          <p:cNvPr id="11" name="Picture 10" descr="fc19434018fde666.png"/>
+          <p:cNvPr id="11" name="Picture 10" descr="b44355ff61a1611b.png"/>
           <p:cNvPicPr>
             <a:picLocks noChangeAspect="1"/>
           </p:cNvPicPr>
@@ -12160,8 +12471,8 @@
         </p:blipFill>
         <p:spPr>
           <a:xfrm>
-            <a:off x="3437904" y="2141220"/>
-            <a:ext cx="557784" cy="280416"/>
+            <a:off x="3364042" y="2145792"/>
+            <a:ext cx="560832" cy="271272"/>
           </a:xfrm>
           <a:prstGeom prst="rect">
             <a:avLst/>
@@ -12176,8 +12487,8 @@
         </p:nvSpPr>
         <p:spPr>
           <a:xfrm>
-            <a:off x="3995688" y="2052828"/>
-            <a:ext cx="2239077" cy="457200"/>
+            <a:off x="3924874" y="2052828"/>
+            <a:ext cx="2241948" cy="457200"/>
           </a:xfrm>
           <a:prstGeom prst="rect">
             <a:avLst/>
@@ -12192,11 +12503,11 @@
           <a:p>
             <a:pPr algn="l"/>
             <a:r>
-              <a:rPr sz="2300" b="0" i="0">
+              <a:rPr sz="2180" b="0" i="0">
                 <a:solidFill>
                   <a:srgbClr val="1A1A1A"/>
                 </a:solidFill>
-                <a:latin typeface="Century Schoolbook"/>
+                <a:latin typeface="Lexend"/>
               </a:rPr>
               <a:t>  as a fraction.</a:t>
             </a:r>
@@ -12205,7 +12516,7 @@
       </p:sp>
       <p:pic>
         <p:nvPicPr>
-          <p:cNvPr id="13" name="Picture 12" descr="357ee64ca77eb39d.png"/>
+          <p:cNvPr id="13" name="Picture 12" descr="2b698db5dc091f84.png"/>
           <p:cNvPicPr>
             <a:picLocks noChangeAspect="1"/>
           </p:cNvPicPr>
@@ -12219,8 +12530,8 @@
         </p:blipFill>
         <p:spPr>
           <a:xfrm>
-            <a:off x="6646246" y="2075688"/>
-            <a:ext cx="746760" cy="600456"/>
+            <a:off x="6578303" y="2075688"/>
+            <a:ext cx="816864" cy="600456"/>
           </a:xfrm>
           <a:prstGeom prst="rect">
             <a:avLst/>
@@ -12236,7 +12547,7 @@
         <p:spPr>
           <a:xfrm>
             <a:off x="1874519" y="2665476"/>
-            <a:ext cx="726811" cy="457200"/>
+            <a:ext cx="680104" cy="457200"/>
           </a:xfrm>
           <a:prstGeom prst="rect">
             <a:avLst/>
@@ -12251,11 +12562,11 @@
           <a:p>
             <a:pPr algn="l"/>
             <a:r>
-              <a:rPr sz="2300" b="0" i="0">
+              <a:rPr sz="2180" b="0" i="0">
                 <a:solidFill>
                   <a:srgbClr val="1A1A1A"/>
                 </a:solidFill>
-                <a:latin typeface="Century Schoolbook"/>
+                <a:latin typeface="Lexend"/>
               </a:rPr>
               <a:t>3.   </a:t>
             </a:r>
@@ -12264,7 +12575,7 @@
       </p:sp>
       <p:pic>
         <p:nvPicPr>
-          <p:cNvPr id="15" name="Picture 14" descr="c7ed55c1b2138954.png"/>
+          <p:cNvPr id="15" name="Picture 14" descr="703b0b7ef618e49e.png"/>
           <p:cNvPicPr>
             <a:picLocks noChangeAspect="1"/>
           </p:cNvPicPr>
@@ -12278,8 +12589,8 @@
         </p:blipFill>
         <p:spPr>
           <a:xfrm>
-            <a:off x="2464171" y="2689860"/>
-            <a:ext cx="688848" cy="408432"/>
+            <a:off x="2417464" y="2699004"/>
+            <a:ext cx="691896" cy="390144"/>
           </a:xfrm>
           <a:prstGeom prst="rect">
             <a:avLst/>
@@ -12294,8 +12605,8 @@
         </p:nvSpPr>
         <p:spPr>
           <a:xfrm>
-            <a:off x="3153019" y="2665476"/>
-            <a:ext cx="5819653" cy="457200"/>
+            <a:off x="3109360" y="2665476"/>
+            <a:ext cx="5805655" cy="457200"/>
           </a:xfrm>
           <a:prstGeom prst="rect">
             <a:avLst/>
@@ -12310,11 +12621,11 @@
           <a:p>
             <a:pPr algn="l"/>
             <a:r>
-              <a:rPr sz="2300" b="0" i="0">
+              <a:rPr sz="2180" b="0" i="0">
                 <a:solidFill>
                   <a:srgbClr val="1A1A1A"/>
                 </a:solidFill>
-                <a:latin typeface="Century Schoolbook"/>
+                <a:latin typeface="Lexend"/>
               </a:rPr>
               <a:t>  is between which two whole numbers?</a:t>
             </a:r>
@@ -12329,8 +12640,8 @@
         </p:nvSpPr>
         <p:spPr>
           <a:xfrm>
-            <a:off x="9384153" y="2665476"/>
-            <a:ext cx="1529062" cy="457200"/>
+            <a:off x="9326495" y="2665476"/>
+            <a:ext cx="1504788" cy="457200"/>
           </a:xfrm>
           <a:prstGeom prst="rect">
             <a:avLst/>
@@ -12345,11 +12656,11 @@
           <a:p>
             <a:pPr algn="l"/>
             <a:r>
-              <a:rPr sz="2300" b="1" i="0">
+              <a:rPr sz="2180" b="1" i="0">
                 <a:solidFill>
                   <a:srgbClr val="9E1B32"/>
                 </a:solidFill>
-                <a:latin typeface="Century Schoolbook"/>
+                <a:latin typeface="Lexend"/>
               </a:rPr>
               <a:t>9 and 10</a:t>
             </a:r>
@@ -12365,7 +12676,7 @@
         <p:spPr>
           <a:xfrm>
             <a:off x="1874519" y="3278124"/>
-            <a:ext cx="4504058" cy="457200"/>
+            <a:ext cx="4441589" cy="457200"/>
           </a:xfrm>
           <a:prstGeom prst="rect">
             <a:avLst/>
@@ -12380,11 +12691,11 @@
           <a:p>
             <a:pPr algn="l"/>
             <a:r>
-              <a:rPr sz="2300" b="0" i="0">
+              <a:rPr sz="2180" b="0" i="0">
                 <a:solidFill>
                   <a:srgbClr val="1A1A1A"/>
                 </a:solidFill>
-                <a:latin typeface="Century Schoolbook"/>
+                <a:latin typeface="Lexend"/>
               </a:rPr>
               <a:t>4.   Write  0.007  as a fraction.</a:t>
             </a:r>
@@ -12393,7 +12704,7 @@
       </p:sp>
       <p:pic>
         <p:nvPicPr>
-          <p:cNvPr id="19" name="Picture 18" descr="0d671d8905812bd4.png"/>
+          <p:cNvPr id="19" name="Picture 18" descr="24e3778fee0149cb.png"/>
           <p:cNvPicPr>
             <a:picLocks noChangeAspect="1"/>
           </p:cNvPicPr>
@@ -12407,8 +12718,8 @@
         </p:blipFill>
         <p:spPr>
           <a:xfrm>
-            <a:off x="6790058" y="3300984"/>
-            <a:ext cx="746760" cy="597408"/>
+            <a:off x="6727589" y="3300984"/>
+            <a:ext cx="816864" cy="597408"/>
           </a:xfrm>
           <a:prstGeom prst="rect">
             <a:avLst/>
@@ -12457,11 +12768,11 @@
           <a:p>
             <a:pPr algn="l"/>
             <a:r>
-              <a:rPr sz="3400" b="1" i="0">
+              <a:rPr sz="3229" b="1" i="0">
                 <a:solidFill>
                   <a:srgbClr val="1A1A1A"/>
                 </a:solidFill>
-                <a:latin typeface="Century Schoolbook"/>
+                <a:latin typeface="Lexend"/>
               </a:rPr>
               <a:t>Whiteboards   ·   Question 8 of 9</a:t>
             </a:r>
@@ -12597,11 +12908,11 @@
           <a:p>
             <a:pPr algn="l"/>
             <a:r>
-              <a:rPr sz="1100" b="0" i="1">
+              <a:rPr sz="1040" b="0" i="0">
                 <a:solidFill>
                   <a:srgbClr val="6B6B6B"/>
                 </a:solidFill>
-                <a:latin typeface="Century Schoolbook"/>
+                <a:latin typeface="Lexend"/>
               </a:rPr>
               <a:t>Grade 7 Accelerated · Unit 3 · Lesson 9 — Writing Small Numbers in Scientific Notation</a:t>
             </a:r>
@@ -12632,11 +12943,11 @@
           <a:p>
             <a:pPr algn="r"/>
             <a:r>
-              <a:rPr sz="1100" b="0" i="0">
+              <a:rPr sz="1040" b="0" i="0">
                 <a:solidFill>
                   <a:srgbClr val="6B6B6B"/>
                 </a:solidFill>
-                <a:latin typeface="Century Schoolbook"/>
+                <a:latin typeface="Lexend"/>
               </a:rPr>
               <a:t>30</a:t>
             </a:r>
@@ -12667,11 +12978,11 @@
           <a:p>
             <a:pPr algn="ctr"/>
             <a:r>
-              <a:rPr sz="2600" b="0" i="0">
+              <a:rPr sz="2470" b="0" i="0">
                 <a:solidFill>
                   <a:srgbClr val="1A1A1A"/>
                 </a:solidFill>
-                <a:latin typeface="Century Schoolbook"/>
+                <a:latin typeface="Lexend"/>
               </a:rPr>
               <a:t>A computer displays a number as  4.2E−6.</a:t>
             </a:r>
@@ -12702,11 +13013,11 @@
           <a:p>
             <a:pPr algn="ctr"/>
             <a:r>
-              <a:rPr sz="2600" b="0" i="0">
+              <a:rPr sz="2470" b="0" i="0">
                 <a:solidFill>
                   <a:srgbClr val="1A1A1A"/>
                 </a:solidFill>
-                <a:latin typeface="Century Schoolbook"/>
+                <a:latin typeface="Lexend"/>
               </a:rPr>
               <a:t>Write the number in standard form.</a:t>
             </a:r>
@@ -12716,6 +13027,89 @@
       <p:sp>
         <p:nvSpPr>
           <p:cNvPr id="10" name="TextBox 9"/>
+          <p:cNvSpPr txBox="1"/>
+          <p:nvPr/>
+        </p:nvSpPr>
+        <p:spPr>
+          <a:xfrm>
+            <a:off x="3991038" y="3303170"/>
+            <a:ext cx="2880994" cy="457200"/>
+          </a:xfrm>
+          <a:prstGeom prst="rect">
+            <a:avLst/>
+          </a:prstGeom>
+          <a:noFill/>
+        </p:spPr>
+        <p:txBody>
+          <a:bodyPr wrap="none" lIns="45720" rIns="45720" tIns="18288" bIns="18288" anchor="ctr">
+            <a:noAutofit/>
+          </a:bodyPr>
+          <a:lstStyle/>
+          <a:p>
+            <a:pPr algn="l"/>
+            <a:r>
+              <a:rPr sz="2750" b="0" i="0">
+                <a:solidFill>
+                  <a:srgbClr val="1A1A1A"/>
+                </a:solidFill>
+                <a:latin typeface="Lexend"/>
+              </a:rPr>
+              <a:t>4.2E−6 means  </a:t>
+            </a:r>
+          </a:p>
+        </p:txBody>
+      </p:sp>
+      <p:pic>
+        <p:nvPicPr>
+          <p:cNvPr id="11" name="Picture 10" descr="5a5877e7059393e6.png"/>
+          <p:cNvPicPr>
+            <a:picLocks noChangeAspect="1"/>
+          </p:cNvPicPr>
+          <p:nvPr/>
+        </p:nvPicPr>
+        <p:blipFill>
+          <a:blip r:embed="rId2"/>
+          <a:stretch>
+            <a:fillRect/>
+          </a:stretch>
+        </p:blipFill>
+        <p:spPr>
+          <a:xfrm>
+            <a:off x="6734873" y="3377846"/>
+            <a:ext cx="1438656" cy="307848"/>
+          </a:xfrm>
+          <a:prstGeom prst="rect">
+            <a:avLst/>
+          </a:prstGeom>
+        </p:spPr>
+      </p:pic>
+      <p:pic>
+        <p:nvPicPr>
+          <p:cNvPr id="12" name="Picture 11" descr="2ef28584177cdfa5.png"/>
+          <p:cNvPicPr>
+            <a:picLocks noChangeAspect="1"/>
+          </p:cNvPicPr>
+          <p:nvPr/>
+        </p:nvPicPr>
+        <p:blipFill>
+          <a:blip r:embed="rId3"/>
+          <a:stretch>
+            <a:fillRect/>
+          </a:stretch>
+        </p:blipFill>
+        <p:spPr>
+          <a:xfrm>
+            <a:off x="4045902" y="3917342"/>
+            <a:ext cx="3538728" cy="307848"/>
+          </a:xfrm>
+          <a:prstGeom prst="rect">
+            <a:avLst/>
+          </a:prstGeom>
+        </p:spPr>
+      </p:pic>
+      <p:sp>
+        <p:nvSpPr>
+          <p:cNvPr id="13" name="TextBox 12"/>
           <p:cNvSpPr txBox="1"/>
           <p:nvPr/>
         </p:nvSpPr>
@@ -12737,11 +13131,11 @@
           <a:p>
             <a:pPr algn="ctr"/>
             <a:r>
-              <a:rPr sz="3200" b="1" i="0">
+              <a:rPr sz="3040" b="1" i="0">
                 <a:solidFill>
                   <a:srgbClr val="9E1B32"/>
                 </a:solidFill>
-                <a:latin typeface="Century Schoolbook"/>
+                <a:latin typeface="Lexend"/>
               </a:rPr>
               <a:t>Answer:   0.0000042</a:t>
             </a:r>
@@ -12790,11 +13184,11 @@
           <a:p>
             <a:pPr algn="l"/>
             <a:r>
-              <a:rPr sz="3400" b="1" i="0">
+              <a:rPr sz="3229" b="1" i="0">
                 <a:solidFill>
                   <a:srgbClr val="1A1A1A"/>
                 </a:solidFill>
-                <a:latin typeface="Century Schoolbook"/>
+                <a:latin typeface="Lexend"/>
               </a:rPr>
               <a:t>Whiteboards   ·   Question 9 of 9</a:t>
             </a:r>
@@ -12930,11 +13324,11 @@
           <a:p>
             <a:pPr algn="l"/>
             <a:r>
-              <a:rPr sz="1100" b="0" i="1">
+              <a:rPr sz="1040" b="0" i="0">
                 <a:solidFill>
                   <a:srgbClr val="6B6B6B"/>
                 </a:solidFill>
-                <a:latin typeface="Century Schoolbook"/>
+                <a:latin typeface="Lexend"/>
               </a:rPr>
               <a:t>Grade 7 Accelerated · Unit 3 · Lesson 9 — Writing Small Numbers in Scientific Notation</a:t>
             </a:r>
@@ -12965,11 +13359,11 @@
           <a:p>
             <a:pPr algn="r"/>
             <a:r>
-              <a:rPr sz="1100" b="0" i="0">
+              <a:rPr sz="1040" b="0" i="0">
                 <a:solidFill>
                   <a:srgbClr val="6B6B6B"/>
                 </a:solidFill>
-                <a:latin typeface="Century Schoolbook"/>
+                <a:latin typeface="Lexend"/>
               </a:rPr>
               <a:t>31</a:t>
             </a:r>
@@ -12984,8 +13378,8 @@
         </p:nvSpPr>
         <p:spPr>
           <a:xfrm>
-            <a:off x="2977665" y="2171700"/>
-            <a:ext cx="3062993" cy="457200"/>
+            <a:off x="3142662" y="2171700"/>
+            <a:ext cx="2884640" cy="457200"/>
           </a:xfrm>
           <a:prstGeom prst="rect">
             <a:avLst/>
@@ -13000,11 +13394,11 @@
           <a:p>
             <a:pPr algn="l"/>
             <a:r>
-              <a:rPr sz="2600" b="0" i="0">
+              <a:rPr sz="2470" b="0" i="0">
                 <a:solidFill>
                   <a:srgbClr val="1A1A1A"/>
                 </a:solidFill>
-                <a:latin typeface="Century Schoolbook"/>
+                <a:latin typeface="Lexend"/>
               </a:rPr>
               <a:t>Fishing line A is  </a:t>
             </a:r>
@@ -13013,7 +13407,7 @@
       </p:sp>
       <p:pic>
         <p:nvPicPr>
-          <p:cNvPr id="9" name="Picture 8" descr="24f5c2a7f64db6c9.png"/>
+          <p:cNvPr id="9" name="Picture 8" descr="6f28bcb12f677aa4.png"/>
           <p:cNvPicPr>
             <a:picLocks noChangeAspect="1"/>
           </p:cNvPicPr>
@@ -13027,8 +13421,8 @@
         </p:blipFill>
         <p:spPr>
           <a:xfrm>
-            <a:off x="5903499" y="2226564"/>
-            <a:ext cx="1313688" cy="347472"/>
+            <a:off x="5890143" y="2229612"/>
+            <a:ext cx="1249680" cy="341376"/>
           </a:xfrm>
           <a:prstGeom prst="rect">
             <a:avLst/>
@@ -13043,8 +13437,8 @@
         </p:nvSpPr>
         <p:spPr>
           <a:xfrm>
-            <a:off x="7217187" y="2171700"/>
-            <a:ext cx="2103826" cy="457200"/>
+            <a:off x="7139823" y="2171700"/>
+            <a:ext cx="2016194" cy="457200"/>
           </a:xfrm>
           <a:prstGeom prst="rect">
             <a:avLst/>
@@ -13059,11 +13453,11 @@
           <a:p>
             <a:pPr algn="l"/>
             <a:r>
-              <a:rPr sz="2600" b="0" i="0">
+              <a:rPr sz="2470" b="0" i="0">
                 <a:solidFill>
                   <a:srgbClr val="1A1A1A"/>
                 </a:solidFill>
-                <a:latin typeface="Century Schoolbook"/>
+                <a:latin typeface="Lexend"/>
               </a:rPr>
               <a:t>  inch thick.</a:t>
             </a:r>
@@ -13078,8 +13472,8 @@
         </p:nvSpPr>
         <p:spPr>
           <a:xfrm>
-            <a:off x="2979189" y="2857500"/>
-            <a:ext cx="3062993" cy="457200"/>
+            <a:off x="3142761" y="2857500"/>
+            <a:ext cx="2878346" cy="457200"/>
           </a:xfrm>
           <a:prstGeom prst="rect">
             <a:avLst/>
@@ -13094,11 +13488,11 @@
           <a:p>
             <a:pPr algn="l"/>
             <a:r>
-              <a:rPr sz="2600" b="0" i="0">
+              <a:rPr sz="2470" b="0" i="0">
                 <a:solidFill>
                   <a:srgbClr val="1A1A1A"/>
                 </a:solidFill>
-                <a:latin typeface="Century Schoolbook"/>
+                <a:latin typeface="Lexend"/>
               </a:rPr>
               <a:t>Fishing line B is  </a:t>
             </a:r>
@@ -13107,7 +13501,7 @@
       </p:sp>
       <p:pic>
         <p:nvPicPr>
-          <p:cNvPr id="12" name="Picture 11" descr="66c17032647eb85b.png"/>
+          <p:cNvPr id="12" name="Picture 11" descr="d925408048692147.png"/>
           <p:cNvPicPr>
             <a:picLocks noChangeAspect="1"/>
           </p:cNvPicPr>
@@ -13121,8 +13515,8 @@
         </p:blipFill>
         <p:spPr>
           <a:xfrm>
-            <a:off x="5905023" y="2912364"/>
-            <a:ext cx="1310640" cy="347472"/>
+            <a:off x="5883947" y="2915412"/>
+            <a:ext cx="1255776" cy="341376"/>
           </a:xfrm>
           <a:prstGeom prst="rect">
             <a:avLst/>
@@ -13137,8 +13531,8 @@
         </p:nvSpPr>
         <p:spPr>
           <a:xfrm>
-            <a:off x="7215663" y="2857500"/>
-            <a:ext cx="2103826" cy="457200"/>
+            <a:off x="7139723" y="2857500"/>
+            <a:ext cx="2016194" cy="457200"/>
           </a:xfrm>
           <a:prstGeom prst="rect">
             <a:avLst/>
@@ -13153,11 +13547,11 @@
           <a:p>
             <a:pPr algn="l"/>
             <a:r>
-              <a:rPr sz="2600" b="0" i="0">
+              <a:rPr sz="2470" b="0" i="0">
                 <a:solidFill>
                   <a:srgbClr val="1A1A1A"/>
                 </a:solidFill>
-                <a:latin typeface="Century Schoolbook"/>
+                <a:latin typeface="Lexend"/>
               </a:rPr>
               <a:t>  inch thick.</a:t>
             </a:r>
@@ -13188,11 +13582,11 @@
           <a:p>
             <a:pPr algn="ctr"/>
             <a:r>
-              <a:rPr sz="2300" b="0" i="0">
+              <a:rPr sz="2180" b="0" i="0">
                 <a:solidFill>
                   <a:srgbClr val="1A1A1A"/>
                 </a:solidFill>
-                <a:latin typeface="Century Schoolbook"/>
+                <a:latin typeface="Lexend"/>
               </a:rPr>
               <a:t>Which is thicker, and how many times? Name a thickness between them.</a:t>
             </a:r>
@@ -13223,11 +13617,11 @@
           <a:p>
             <a:pPr algn="ctr"/>
             <a:r>
-              <a:rPr sz="2600" b="1" i="0">
+              <a:rPr sz="2470" b="1" i="0">
                 <a:solidFill>
                   <a:srgbClr val="1A1A1A"/>
                 </a:solidFill>
-                <a:latin typeface="Century Schoolbook"/>
+                <a:latin typeface="Lexend"/>
               </a:rPr>
               <a:t>Write your answer in sentences.</a:t>
             </a:r>
@@ -13276,11 +13670,11 @@
           <a:p>
             <a:pPr algn="l"/>
             <a:r>
-              <a:rPr sz="3400" b="1" i="0">
+              <a:rPr sz="3229" b="1" i="0">
                 <a:solidFill>
                   <a:srgbClr val="1A1A1A"/>
                 </a:solidFill>
-                <a:latin typeface="Century Schoolbook"/>
+                <a:latin typeface="Lexend"/>
               </a:rPr>
               <a:t>Whiteboards   ·   Question 9 of 9</a:t>
             </a:r>
@@ -13416,11 +13810,11 @@
           <a:p>
             <a:pPr algn="l"/>
             <a:r>
-              <a:rPr sz="1100" b="0" i="1">
+              <a:rPr sz="1040" b="0" i="0">
                 <a:solidFill>
                   <a:srgbClr val="6B6B6B"/>
                 </a:solidFill>
-                <a:latin typeface="Century Schoolbook"/>
+                <a:latin typeface="Lexend"/>
               </a:rPr>
               <a:t>Grade 7 Accelerated · Unit 3 · Lesson 9 — Writing Small Numbers in Scientific Notation</a:t>
             </a:r>
@@ -13451,11 +13845,11 @@
           <a:p>
             <a:pPr algn="r"/>
             <a:r>
-              <a:rPr sz="1100" b="0" i="0">
+              <a:rPr sz="1040" b="0" i="0">
                 <a:solidFill>
                   <a:srgbClr val="6B6B6B"/>
                 </a:solidFill>
-                <a:latin typeface="Century Schoolbook"/>
+                <a:latin typeface="Lexend"/>
               </a:rPr>
               <a:t>32</a:t>
             </a:r>
@@ -13470,8 +13864,8 @@
         </p:nvSpPr>
         <p:spPr>
           <a:xfrm>
-            <a:off x="2976141" y="2080260"/>
-            <a:ext cx="3062993" cy="457200"/>
+            <a:off x="3141138" y="2080260"/>
+            <a:ext cx="2884640" cy="457200"/>
           </a:xfrm>
           <a:prstGeom prst="rect">
             <a:avLst/>
@@ -13486,11 +13880,11 @@
           <a:p>
             <a:pPr algn="l"/>
             <a:r>
-              <a:rPr sz="2600" b="0" i="0">
+              <a:rPr sz="2470" b="0" i="0">
                 <a:solidFill>
                   <a:srgbClr val="1A1A1A"/>
                 </a:solidFill>
-                <a:latin typeface="Century Schoolbook"/>
+                <a:latin typeface="Lexend"/>
               </a:rPr>
               <a:t>Fishing line A is  </a:t>
             </a:r>
@@ -13499,7 +13893,7 @@
       </p:sp>
       <p:pic>
         <p:nvPicPr>
-          <p:cNvPr id="9" name="Picture 8" descr="77a4d57c92c152c2.png"/>
+          <p:cNvPr id="9" name="Picture 8" descr="846d6a6440d7a0ce.png"/>
           <p:cNvPicPr>
             <a:picLocks noChangeAspect="1"/>
           </p:cNvPicPr>
@@ -13513,8 +13907,8 @@
         </p:blipFill>
         <p:spPr>
           <a:xfrm>
-            <a:off x="5901975" y="2135124"/>
-            <a:ext cx="1316736" cy="347472"/>
+            <a:off x="5888619" y="2138171"/>
+            <a:ext cx="1252728" cy="341376"/>
           </a:xfrm>
           <a:prstGeom prst="rect">
             <a:avLst/>
@@ -13529,8 +13923,8 @@
         </p:nvSpPr>
         <p:spPr>
           <a:xfrm>
-            <a:off x="7218711" y="2080260"/>
-            <a:ext cx="2103826" cy="457200"/>
+            <a:off x="7141347" y="2080260"/>
+            <a:ext cx="2016194" cy="457200"/>
           </a:xfrm>
           <a:prstGeom prst="rect">
             <a:avLst/>
@@ -13545,11 +13939,11 @@
           <a:p>
             <a:pPr algn="l"/>
             <a:r>
-              <a:rPr sz="2600" b="0" i="0">
+              <a:rPr sz="2470" b="0" i="0">
                 <a:solidFill>
                   <a:srgbClr val="1A1A1A"/>
                 </a:solidFill>
-                <a:latin typeface="Century Schoolbook"/>
+                <a:latin typeface="Lexend"/>
               </a:rPr>
               <a:t>  inch thick.</a:t>
             </a:r>
@@ -13564,8 +13958,8 @@
         </p:nvSpPr>
         <p:spPr>
           <a:xfrm>
-            <a:off x="2976141" y="2766060"/>
-            <a:ext cx="3062993" cy="457200"/>
+            <a:off x="3141237" y="2766060"/>
+            <a:ext cx="2878346" cy="457200"/>
           </a:xfrm>
           <a:prstGeom prst="rect">
             <a:avLst/>
@@ -13580,11 +13974,11 @@
           <a:p>
             <a:pPr algn="l"/>
             <a:r>
-              <a:rPr sz="2600" b="0" i="0">
+              <a:rPr sz="2470" b="0" i="0">
                 <a:solidFill>
                   <a:srgbClr val="1A1A1A"/>
                 </a:solidFill>
-                <a:latin typeface="Century Schoolbook"/>
+                <a:latin typeface="Lexend"/>
               </a:rPr>
               <a:t>Fishing line B is  </a:t>
             </a:r>
@@ -13593,7 +13987,7 @@
       </p:sp>
       <p:pic>
         <p:nvPicPr>
-          <p:cNvPr id="12" name="Picture 11" descr="ecebfbd77cf00b59.png"/>
+          <p:cNvPr id="12" name="Picture 11" descr="9a59c78d08cd98b8.png"/>
           <p:cNvPicPr>
             <a:picLocks noChangeAspect="1"/>
           </p:cNvPicPr>
@@ -13607,8 +14001,8 @@
         </p:blipFill>
         <p:spPr>
           <a:xfrm>
-            <a:off x="5901975" y="2820924"/>
-            <a:ext cx="1316736" cy="347472"/>
+            <a:off x="5882423" y="2823971"/>
+            <a:ext cx="1258824" cy="341376"/>
           </a:xfrm>
           <a:prstGeom prst="rect">
             <a:avLst/>
@@ -13623,8 +14017,8 @@
         </p:nvSpPr>
         <p:spPr>
           <a:xfrm>
-            <a:off x="7218711" y="2766060"/>
-            <a:ext cx="2103826" cy="457200"/>
+            <a:off x="7141247" y="2766060"/>
+            <a:ext cx="2016194" cy="457200"/>
           </a:xfrm>
           <a:prstGeom prst="rect">
             <a:avLst/>
@@ -13639,11 +14033,11 @@
           <a:p>
             <a:pPr algn="l"/>
             <a:r>
-              <a:rPr sz="2600" b="0" i="0">
+              <a:rPr sz="2470" b="0" i="0">
                 <a:solidFill>
                   <a:srgbClr val="1A1A1A"/>
                 </a:solidFill>
-                <a:latin typeface="Century Schoolbook"/>
+                <a:latin typeface="Lexend"/>
               </a:rPr>
               <a:t>  inch thick.</a:t>
             </a:r>
@@ -13674,11 +14068,11 @@
           <a:p>
             <a:pPr algn="ctr"/>
             <a:r>
-              <a:rPr sz="2300" b="0" i="0">
+              <a:rPr sz="2180" b="0" i="0">
                 <a:solidFill>
                   <a:srgbClr val="1A1A1A"/>
                 </a:solidFill>
-                <a:latin typeface="Century Schoolbook"/>
+                <a:latin typeface="Lexend"/>
               </a:rPr>
               <a:t>Which is thicker, and how many times? Name a thickness between them.</a:t>
             </a:r>
@@ -13693,7 +14087,125 @@
         </p:nvSpPr>
         <p:spPr>
           <a:xfrm>
-            <a:off x="777240" y="4663440"/>
+            <a:off x="3074286" y="4046220"/>
+            <a:ext cx="6150106" cy="457200"/>
+          </a:xfrm>
+          <a:prstGeom prst="rect">
+            <a:avLst/>
+          </a:prstGeom>
+          <a:noFill/>
+        </p:spPr>
+        <p:txBody>
+          <a:bodyPr wrap="none" lIns="45720" rIns="45720" tIns="18288" bIns="18288" anchor="ctr">
+            <a:noAutofit/>
+          </a:bodyPr>
+          <a:lstStyle/>
+          <a:p>
+            <a:pPr algn="l"/>
+            <a:r>
+              <a:rPr sz="2330" b="0" i="0">
+                <a:solidFill>
+                  <a:srgbClr val="1A1A1A"/>
+                </a:solidFill>
+                <a:latin typeface="Lexend"/>
+              </a:rPr>
+              <a:t>Same power of 10, so compare 2 and 6.</a:t>
+            </a:r>
+          </a:p>
+        </p:txBody>
+      </p:sp>
+      <p:pic>
+        <p:nvPicPr>
+          <p:cNvPr id="16" name="Picture 15" descr="38fe3a113732c67b.png"/>
+          <p:cNvPicPr>
+            <a:picLocks noChangeAspect="1"/>
+          </p:cNvPicPr>
+          <p:nvPr/>
+        </p:nvPicPr>
+        <p:blipFill>
+          <a:blip r:embed="rId4"/>
+          <a:stretch>
+            <a:fillRect/>
+          </a:stretch>
+        </p:blipFill>
+        <p:spPr>
+          <a:xfrm>
+            <a:off x="3129150" y="4671060"/>
+            <a:ext cx="1024128" cy="213360"/>
+          </a:xfrm>
+          <a:prstGeom prst="rect">
+            <a:avLst/>
+          </a:prstGeom>
+        </p:spPr>
+      </p:pic>
+      <p:sp>
+        <p:nvSpPr>
+          <p:cNvPr id="17" name="TextBox 16"/>
+          <p:cNvSpPr txBox="1"/>
+          <p:nvPr/>
+        </p:nvSpPr>
+        <p:spPr>
+          <a:xfrm>
+            <a:off x="3074286" y="5052059"/>
+            <a:ext cx="2640402" cy="457200"/>
+          </a:xfrm>
+          <a:prstGeom prst="rect">
+            <a:avLst/>
+          </a:prstGeom>
+          <a:noFill/>
+        </p:spPr>
+        <p:txBody>
+          <a:bodyPr wrap="none" lIns="45720" rIns="45720" tIns="18288" bIns="18288" anchor="ctr">
+            <a:noAutofit/>
+          </a:bodyPr>
+          <a:lstStyle/>
+          <a:p>
+            <a:pPr algn="l"/>
+            <a:r>
+              <a:rPr sz="2330" b="0" i="0">
+                <a:solidFill>
+                  <a:srgbClr val="1A1A1A"/>
+                </a:solidFill>
+                <a:latin typeface="Lexend"/>
+              </a:rPr>
+              <a:t>Between them:  </a:t>
+            </a:r>
+          </a:p>
+        </p:txBody>
+      </p:sp>
+      <p:pic>
+        <p:nvPicPr>
+          <p:cNvPr id="18" name="Picture 17" descr="581fc6e4e685e849.png"/>
+          <p:cNvPicPr>
+            <a:picLocks noChangeAspect="1"/>
+          </p:cNvPicPr>
+          <p:nvPr/>
+        </p:nvPicPr>
+        <p:blipFill>
+          <a:blip r:embed="rId5"/>
+          <a:stretch>
+            <a:fillRect/>
+          </a:stretch>
+        </p:blipFill>
+        <p:spPr>
+          <a:xfrm>
+            <a:off x="5577529" y="5149596"/>
+            <a:ext cx="984504" cy="262128"/>
+          </a:xfrm>
+          <a:prstGeom prst="rect">
+            <a:avLst/>
+          </a:prstGeom>
+        </p:spPr>
+      </p:pic>
+      <p:sp>
+        <p:nvSpPr>
+          <p:cNvPr id="19" name="TextBox 18"/>
+          <p:cNvSpPr txBox="1"/>
+          <p:nvPr/>
+        </p:nvSpPr>
+        <p:spPr>
+          <a:xfrm>
+            <a:off x="777240" y="5623560"/>
             <a:ext cx="10607040" cy="548640"/>
           </a:xfrm>
           <a:prstGeom prst="rect">
@@ -13709,29 +14221,29 @@
           <a:p>
             <a:pPr algn="ctr"/>
             <a:r>
-              <a:rPr sz="3200" b="1" i="0">
+              <a:rPr sz="3040" b="1" i="0">
                 <a:solidFill>
                   <a:srgbClr val="9E1B32"/>
                 </a:solidFill>
-                <a:latin typeface="Century Schoolbook"/>
+                <a:latin typeface="Lexend"/>
               </a:rPr>
               <a:t>Answer:   B; 3 times; e.g. 4 × 10</a:t>
             </a:r>
             <a:r>
-              <a:rPr sz="3200" b="1" i="0" baseline="30000">
+              <a:rPr sz="3040" b="1" i="0" baseline="30000">
                 <a:solidFill>
                   <a:srgbClr val="9E1B32"/>
                 </a:solidFill>
-                <a:latin typeface="Century Schoolbook"/>
+                <a:latin typeface="Lexend"/>
               </a:rPr>
               <a:t>-2</a:t>
             </a:r>
             <a:r>
-              <a:rPr sz="3200" b="1" i="0">
+              <a:rPr sz="3040" b="1" i="0">
                 <a:solidFill>
                   <a:srgbClr val="9E1B32"/>
                 </a:solidFill>
-                <a:latin typeface="Century Schoolbook"/>
+                <a:latin typeface="Lexend"/>
               </a:rPr>
               <a:t> in.</a:t>
             </a:r>
@@ -13780,11 +14292,11 @@
           <a:p>
             <a:pPr algn="l"/>
             <a:r>
-              <a:rPr sz="3600" b="1" i="0">
+              <a:rPr sz="3420" b="1" i="0">
                 <a:solidFill>
                   <a:srgbClr val="1A1A1A"/>
                 </a:solidFill>
-                <a:latin typeface="Century Schoolbook"/>
+                <a:latin typeface="Lexend"/>
               </a:rPr>
               <a:t>Independent Set</a:t>
             </a:r>
@@ -13920,11 +14432,11 @@
           <a:p>
             <a:pPr algn="l"/>
             <a:r>
-              <a:rPr sz="1100" b="0" i="1">
+              <a:rPr sz="1040" b="0" i="0">
                 <a:solidFill>
                   <a:srgbClr val="6B6B6B"/>
                 </a:solidFill>
-                <a:latin typeface="Century Schoolbook"/>
+                <a:latin typeface="Lexend"/>
               </a:rPr>
               <a:t>Grade 7 Accelerated · Unit 3 · Lesson 9 — Writing Small Numbers in Scientific Notation</a:t>
             </a:r>
@@ -13955,11 +14467,11 @@
           <a:p>
             <a:pPr algn="r"/>
             <a:r>
-              <a:rPr sz="1100" b="0" i="0">
+              <a:rPr sz="1040" b="0" i="0">
                 <a:solidFill>
                   <a:srgbClr val="6B6B6B"/>
                 </a:solidFill>
-                <a:latin typeface="Century Schoolbook"/>
+                <a:latin typeface="Lexend"/>
               </a:rPr>
               <a:t>33</a:t>
             </a:r>
@@ -13990,11 +14502,11 @@
           <a:p>
             <a:pPr algn="l"/>
             <a:r>
-              <a:rPr sz="2300" b="1" i="0">
+              <a:rPr sz="2180" b="1" i="0">
                 <a:solidFill>
                   <a:srgbClr val="0B5394"/>
                 </a:solidFill>
-                <a:latin typeface="Century Schoolbook"/>
+                <a:latin typeface="Lexend"/>
               </a:rPr>
               <a:t>1.</a:t>
             </a:r>
@@ -14010,7 +14522,7 @@
         <p:spPr>
           <a:xfrm>
             <a:off x="1554480" y="1495044"/>
-            <a:ext cx="5481210" cy="457200"/>
+            <a:ext cx="5402805" cy="457200"/>
           </a:xfrm>
           <a:prstGeom prst="rect">
             <a:avLst/>
@@ -14025,11 +14537,11 @@
           <a:p>
             <a:pPr algn="l"/>
             <a:r>
-              <a:rPr sz="2300" b="0" i="0">
+              <a:rPr sz="2180" b="0" i="0">
                 <a:solidFill>
                   <a:srgbClr val="1A1A1A"/>
                 </a:solidFill>
-                <a:latin typeface="Century Schoolbook"/>
+                <a:latin typeface="Lexend"/>
               </a:rPr>
               <a:t>Write  0.00047  in scientific notation.</a:t>
             </a:r>
@@ -14060,11 +14572,11 @@
           <a:p>
             <a:pPr algn="l"/>
             <a:r>
-              <a:rPr sz="2300" b="1" i="0">
+              <a:rPr sz="2180" b="1" i="0">
                 <a:solidFill>
                   <a:srgbClr val="0B5394"/>
                 </a:solidFill>
-                <a:latin typeface="Century Schoolbook"/>
+                <a:latin typeface="Lexend"/>
               </a:rPr>
               <a:t>2.</a:t>
             </a:r>
@@ -14080,7 +14592,7 @@
         <p:spPr>
           <a:xfrm>
             <a:off x="1554480" y="2089403"/>
-            <a:ext cx="1184045" cy="457200"/>
+            <a:ext cx="1151295" cy="457200"/>
           </a:xfrm>
           <a:prstGeom prst="rect">
             <a:avLst/>
@@ -14095,11 +14607,11 @@
           <a:p>
             <a:pPr algn="l"/>
             <a:r>
-              <a:rPr sz="2300" b="0" i="0">
+              <a:rPr sz="2180" b="0" i="0">
                 <a:solidFill>
                   <a:srgbClr val="1A1A1A"/>
                 </a:solidFill>
-                <a:latin typeface="Century Schoolbook"/>
+                <a:latin typeface="Lexend"/>
               </a:rPr>
               <a:t>Write  </a:t>
             </a:r>
@@ -14108,7 +14620,7 @@
       </p:sp>
       <p:pic>
         <p:nvPicPr>
-          <p:cNvPr id="12" name="Picture 11" descr="c482772bd1edacf8.png"/>
+          <p:cNvPr id="12" name="Picture 11" descr="f029b45e0ecab7cc.png"/>
           <p:cNvPicPr>
             <a:picLocks noChangeAspect="1"/>
           </p:cNvPicPr>
@@ -14122,8 +14634,8 @@
         </p:blipFill>
         <p:spPr>
           <a:xfrm>
-            <a:off x="2601365" y="2176271"/>
-            <a:ext cx="1304544" cy="283464"/>
+            <a:off x="2568615" y="2182367"/>
+            <a:ext cx="1261872" cy="271272"/>
           </a:xfrm>
           <a:prstGeom prst="rect">
             <a:avLst/>
@@ -14138,8 +14650,8 @@
         </p:nvSpPr>
         <p:spPr>
           <a:xfrm>
-            <a:off x="3905909" y="2089403"/>
-            <a:ext cx="2885253" cy="457200"/>
+            <a:off x="3830487" y="2089403"/>
+            <a:ext cx="2828489" cy="457200"/>
           </a:xfrm>
           <a:prstGeom prst="rect">
             <a:avLst/>
@@ -14154,11 +14666,11 @@
           <a:p>
             <a:pPr algn="l"/>
             <a:r>
-              <a:rPr sz="2300" b="0" i="0">
+              <a:rPr sz="2180" b="0" i="0">
                 <a:solidFill>
                   <a:srgbClr val="1A1A1A"/>
                 </a:solidFill>
-                <a:latin typeface="Century Schoolbook"/>
+                <a:latin typeface="Lexend"/>
               </a:rPr>
               <a:t>  in standard form.</a:t>
             </a:r>
@@ -14189,11 +14701,11 @@
           <a:p>
             <a:pPr algn="l"/>
             <a:r>
-              <a:rPr sz="2300" b="1" i="0">
+              <a:rPr sz="2180" b="1" i="0">
                 <a:solidFill>
                   <a:srgbClr val="0B5394"/>
                 </a:solidFill>
-                <a:latin typeface="Century Schoolbook"/>
+                <a:latin typeface="Lexend"/>
               </a:rPr>
               <a:t>3.</a:t>
             </a:r>
@@ -14209,7 +14721,7 @@
         <p:spPr>
           <a:xfrm>
             <a:off x="1554480" y="2683763"/>
-            <a:ext cx="5825543" cy="457200"/>
+            <a:ext cx="5734916" cy="457200"/>
           </a:xfrm>
           <a:prstGeom prst="rect">
             <a:avLst/>
@@ -14224,11 +14736,11 @@
           <a:p>
             <a:pPr algn="l"/>
             <a:r>
-              <a:rPr sz="2300" b="0" i="0">
+              <a:rPr sz="2180" b="0" i="0">
                 <a:solidFill>
                   <a:srgbClr val="1A1A1A"/>
                 </a:solidFill>
-                <a:latin typeface="Century Schoolbook"/>
+                <a:latin typeface="Lexend"/>
               </a:rPr>
               <a:t>Write  0.0000061  in scientific notation.</a:t>
             </a:r>
@@ -14259,11 +14771,11 @@
           <a:p>
             <a:pPr algn="l"/>
             <a:r>
-              <a:rPr sz="2300" b="1" i="0">
+              <a:rPr sz="2180" b="1" i="0">
                 <a:solidFill>
                   <a:srgbClr val="0B5394"/>
                 </a:solidFill>
-                <a:latin typeface="Century Schoolbook"/>
+                <a:latin typeface="Lexend"/>
               </a:rPr>
               <a:t>4.</a:t>
             </a:r>
@@ -14279,7 +14791,7 @@
         <p:spPr>
           <a:xfrm>
             <a:off x="1554480" y="3278123"/>
-            <a:ext cx="2825147" cy="457200"/>
+            <a:ext cx="2766393" cy="457200"/>
           </a:xfrm>
           <a:prstGeom prst="rect">
             <a:avLst/>
@@ -14294,11 +14806,11 @@
           <a:p>
             <a:pPr algn="l"/>
             <a:r>
-              <a:rPr sz="2300" b="0" i="0">
+              <a:rPr sz="2180" b="0" i="0">
                 <a:solidFill>
                   <a:srgbClr val="1A1A1A"/>
                 </a:solidFill>
-                <a:latin typeface="Century Schoolbook"/>
+                <a:latin typeface="Lexend"/>
               </a:rPr>
               <a:t>Which is greater,  </a:t>
             </a:r>
@@ -14307,7 +14819,7 @@
       </p:sp>
       <p:pic>
         <p:nvPicPr>
-          <p:cNvPr id="18" name="Picture 17" descr="c4c2da5961006a48.png"/>
+          <p:cNvPr id="18" name="Picture 17" descr="2b6d28ce99c0e764.png"/>
           <p:cNvPicPr>
             <a:picLocks noChangeAspect="1"/>
           </p:cNvPicPr>
@@ -14321,8 +14833,8 @@
         </p:blipFill>
         <p:spPr>
           <a:xfrm>
-            <a:off x="4242467" y="3364991"/>
-            <a:ext cx="1313688" cy="283464"/>
+            <a:off x="4183713" y="3369563"/>
+            <a:ext cx="1280160" cy="274320"/>
           </a:xfrm>
           <a:prstGeom prst="rect">
             <a:avLst/>
@@ -14337,8 +14849,8 @@
         </p:nvSpPr>
         <p:spPr>
           <a:xfrm>
-            <a:off x="5556155" y="3278123"/>
-            <a:ext cx="846917" cy="457200"/>
+            <a:off x="5463873" y="3278123"/>
+            <a:ext cx="839266" cy="457200"/>
           </a:xfrm>
           <a:prstGeom prst="rect">
             <a:avLst/>
@@ -14353,11 +14865,11 @@
           <a:p>
             <a:pPr algn="l"/>
             <a:r>
-              <a:rPr sz="2300" b="0" i="0">
+              <a:rPr sz="2180" b="0" i="0">
                 <a:solidFill>
                   <a:srgbClr val="1A1A1A"/>
                 </a:solidFill>
-                <a:latin typeface="Century Schoolbook"/>
+                <a:latin typeface="Lexend"/>
               </a:rPr>
               <a:t>  or  </a:t>
             </a:r>
@@ -14366,7 +14878,7 @@
       </p:sp>
       <p:pic>
         <p:nvPicPr>
-          <p:cNvPr id="20" name="Picture 19" descr="da742c0cc1626346.png"/>
+          <p:cNvPr id="20" name="Picture 19" descr="4f77a3766b4748d4.png"/>
           <p:cNvPicPr>
             <a:picLocks noChangeAspect="1"/>
           </p:cNvPicPr>
@@ -14380,8 +14892,8 @@
         </p:blipFill>
         <p:spPr>
           <a:xfrm>
-            <a:off x="6265913" y="3363467"/>
-            <a:ext cx="1301496" cy="286512"/>
+            <a:off x="6165979" y="3368039"/>
+            <a:ext cx="1252728" cy="277368"/>
           </a:xfrm>
           <a:prstGeom prst="rect">
             <a:avLst/>
@@ -14396,8 +14908,8 @@
         </p:nvSpPr>
         <p:spPr>
           <a:xfrm>
-            <a:off x="7567409" y="3278123"/>
-            <a:ext cx="433854" cy="457200"/>
+            <a:off x="7418707" y="3278123"/>
+            <a:ext cx="443010" cy="457200"/>
           </a:xfrm>
           <a:prstGeom prst="rect">
             <a:avLst/>
@@ -14412,11 +14924,11 @@
           <a:p>
             <a:pPr algn="l"/>
             <a:r>
-              <a:rPr sz="2300" b="0" i="0">
+              <a:rPr sz="2180" b="0" i="0">
                 <a:solidFill>
                   <a:srgbClr val="1A1A1A"/>
                 </a:solidFill>
-                <a:latin typeface="Century Schoolbook"/>
+                <a:latin typeface="Lexend"/>
               </a:rPr>
               <a:t> ?</a:t>
             </a:r>
@@ -14447,11 +14959,11 @@
           <a:p>
             <a:pPr algn="l"/>
             <a:r>
-              <a:rPr sz="2300" b="1" i="0">
+              <a:rPr sz="2180" b="1" i="0">
                 <a:solidFill>
                   <a:srgbClr val="0B5394"/>
                 </a:solidFill>
-                <a:latin typeface="Century Schoolbook"/>
+                <a:latin typeface="Lexend"/>
               </a:rPr>
               <a:t>5.</a:t>
             </a:r>
@@ -14467,7 +14979,7 @@
         <p:spPr>
           <a:xfrm>
             <a:off x="1554480" y="3872483"/>
-            <a:ext cx="4056605" cy="457200"/>
+            <a:ext cx="3994827" cy="457200"/>
           </a:xfrm>
           <a:prstGeom prst="rect">
             <a:avLst/>
@@ -14482,11 +14994,11 @@
           <a:p>
             <a:pPr algn="l"/>
             <a:r>
-              <a:rPr sz="2300" b="0" i="0">
+              <a:rPr sz="2180" b="0" i="0">
                 <a:solidFill>
                   <a:srgbClr val="1A1A1A"/>
                 </a:solidFill>
-                <a:latin typeface="Century Schoolbook"/>
+                <a:latin typeface="Lexend"/>
               </a:rPr>
               <a:t>How many times larger is  </a:t>
             </a:r>
@@ -14495,7 +15007,7 @@
       </p:sp>
       <p:pic>
         <p:nvPicPr>
-          <p:cNvPr id="24" name="Picture 23" descr="71f394ba76b8be08.png"/>
+          <p:cNvPr id="24" name="Picture 23" descr="36f5a0412d8a35a8.png"/>
           <p:cNvPicPr>
             <a:picLocks noChangeAspect="1"/>
           </p:cNvPicPr>
@@ -14509,8 +15021,8 @@
         </p:blipFill>
         <p:spPr>
           <a:xfrm>
-            <a:off x="5473925" y="3959352"/>
-            <a:ext cx="1054608" cy="283464"/>
+            <a:off x="5412147" y="3962399"/>
+            <a:ext cx="1024128" cy="277368"/>
           </a:xfrm>
           <a:prstGeom prst="rect">
             <a:avLst/>
@@ -14525,8 +15037,8 @@
         </p:nvSpPr>
         <p:spPr>
           <a:xfrm>
-            <a:off x="6528533" y="3872483"/>
-            <a:ext cx="1224116" cy="457200"/>
+            <a:off x="6436275" y="3872483"/>
+            <a:ext cx="1188962" cy="457200"/>
           </a:xfrm>
           <a:prstGeom prst="rect">
             <a:avLst/>
@@ -14541,11 +15053,11 @@
           <a:p>
             <a:pPr algn="l"/>
             <a:r>
-              <a:rPr sz="2300" b="0" i="0">
+              <a:rPr sz="2180" b="0" i="0">
                 <a:solidFill>
                   <a:srgbClr val="1A1A1A"/>
                 </a:solidFill>
-                <a:latin typeface="Century Schoolbook"/>
+                <a:latin typeface="Lexend"/>
               </a:rPr>
               <a:t>  than  </a:t>
             </a:r>
@@ -14554,7 +15066,7 @@
       </p:sp>
       <p:pic>
         <p:nvPicPr>
-          <p:cNvPr id="26" name="Picture 25" descr="5f3e69e0f33afe1e.png"/>
+          <p:cNvPr id="26" name="Picture 25" descr="a131a25e21d7bac7.png"/>
           <p:cNvPicPr>
             <a:picLocks noChangeAspect="1"/>
           </p:cNvPicPr>
@@ -14568,8 +15080,8 @@
         </p:blipFill>
         <p:spPr>
           <a:xfrm>
-            <a:off x="7615489" y="3959352"/>
-            <a:ext cx="1063752" cy="283464"/>
+            <a:off x="7488077" y="3965447"/>
+            <a:ext cx="1042415" cy="271272"/>
           </a:xfrm>
           <a:prstGeom prst="rect">
             <a:avLst/>
@@ -14584,8 +15096,8 @@
         </p:nvSpPr>
         <p:spPr>
           <a:xfrm>
-            <a:off x="8679241" y="3872483"/>
-            <a:ext cx="433854" cy="457200"/>
+            <a:off x="8530493" y="3872483"/>
+            <a:ext cx="443010" cy="457200"/>
           </a:xfrm>
           <a:prstGeom prst="rect">
             <a:avLst/>
@@ -14600,11 +15112,11 @@
           <a:p>
             <a:pPr algn="l"/>
             <a:r>
-              <a:rPr sz="2300" b="0" i="0">
+              <a:rPr sz="2180" b="0" i="0">
                 <a:solidFill>
                   <a:srgbClr val="1A1A1A"/>
                 </a:solidFill>
-                <a:latin typeface="Century Schoolbook"/>
+                <a:latin typeface="Lexend"/>
               </a:rPr>
               <a:t> ?</a:t>
             </a:r>
@@ -14635,11 +15147,11 @@
           <a:p>
             <a:pPr algn="l"/>
             <a:r>
-              <a:rPr sz="2300" b="1" i="0">
+              <a:rPr sz="2180" b="1" i="0">
                 <a:solidFill>
                   <a:srgbClr val="0B5394"/>
                 </a:solidFill>
-                <a:latin typeface="Century Schoolbook"/>
+                <a:latin typeface="Lexend"/>
               </a:rPr>
               <a:t>6.</a:t>
             </a:r>
@@ -14655,7 +15167,7 @@
         <p:spPr>
           <a:xfrm>
             <a:off x="1554480" y="4466844"/>
-            <a:ext cx="9351535" cy="457200"/>
+            <a:ext cx="9859636" cy="457200"/>
           </a:xfrm>
           <a:prstGeom prst="rect">
             <a:avLst/>
@@ -14670,48 +15182,13 @@
           <a:p>
             <a:pPr algn="l"/>
             <a:r>
-              <a:rPr sz="2300" b="0" i="0">
+              <a:rPr sz="2180" b="0" i="0">
                 <a:solidFill>
                   <a:srgbClr val="1A1A1A"/>
                 </a:solidFill>
-                <a:latin typeface="Century Schoolbook"/>
-              </a:rPr>
-              <a:t>A computer displays a number as  3.7E−5.  Write it in standard </a:t>
-            </a:r>
-          </a:p>
-        </p:txBody>
-      </p:sp>
-      <p:sp>
-        <p:nvSpPr>
-          <p:cNvPr id="30" name="TextBox 29"/>
-          <p:cNvSpPr txBox="1"/>
-          <p:nvPr/>
-        </p:nvSpPr>
-        <p:spPr>
-          <a:xfrm>
-            <a:off x="1554480" y="4905756"/>
-            <a:ext cx="967023" cy="457200"/>
-          </a:xfrm>
-          <a:prstGeom prst="rect">
-            <a:avLst/>
-          </a:prstGeom>
-          <a:noFill/>
-        </p:spPr>
-        <p:txBody>
-          <a:bodyPr wrap="none" lIns="45720" rIns="45720" tIns="18288" bIns="18288" anchor="ctr">
-            <a:noAutofit/>
-          </a:bodyPr>
-          <a:lstStyle/>
-          <a:p>
-            <a:pPr algn="l"/>
-            <a:r>
-              <a:rPr sz="2300" b="0" i="0">
-                <a:solidFill>
-                  <a:srgbClr val="1A1A1A"/>
-                </a:solidFill>
-                <a:latin typeface="Century Schoolbook"/>
-              </a:rPr>
-              <a:t>form.</a:t>
+                <a:latin typeface="Lexend"/>
+              </a:rPr>
+              <a:t>A computer displays a number as  3.7E−5.  Write it in standard form.</a:t>
             </a:r>
           </a:p>
         </p:txBody>
@@ -14758,11 +15235,11 @@
           <a:p>
             <a:pPr algn="l"/>
             <a:r>
-              <a:rPr sz="3600" b="1" i="0">
+              <a:rPr sz="3420" b="1" i="0">
                 <a:solidFill>
                   <a:srgbClr val="1A1A1A"/>
                 </a:solidFill>
-                <a:latin typeface="Century Schoolbook"/>
+                <a:latin typeface="Lexend"/>
               </a:rPr>
               <a:t>IXL</a:t>
             </a:r>
@@ -14898,11 +15375,11 @@
           <a:p>
             <a:pPr algn="l"/>
             <a:r>
-              <a:rPr sz="1100" b="0" i="1">
+              <a:rPr sz="1040" b="0" i="0">
                 <a:solidFill>
                   <a:srgbClr val="6B6B6B"/>
                 </a:solidFill>
-                <a:latin typeface="Century Schoolbook"/>
+                <a:latin typeface="Lexend"/>
               </a:rPr>
               <a:t>Grade 7 Accelerated · Unit 3 · Lesson 9 — Writing Small Numbers in Scientific Notation</a:t>
             </a:r>
@@ -14933,11 +15410,11 @@
           <a:p>
             <a:pPr algn="r"/>
             <a:r>
-              <a:rPr sz="1100" b="0" i="0">
+              <a:rPr sz="1040" b="0" i="0">
                 <a:solidFill>
                   <a:srgbClr val="6B6B6B"/>
                 </a:solidFill>
-                <a:latin typeface="Century Schoolbook"/>
+                <a:latin typeface="Lexend"/>
               </a:rPr>
               <a:t>34</a:t>
             </a:r>
@@ -14968,11 +15445,11 @@
           <a:p>
             <a:pPr algn="l"/>
             <a:r>
-              <a:rPr sz="2100" b="1" i="0">
+              <a:rPr sz="1989" b="1" i="0">
                 <a:solidFill>
                   <a:srgbClr val="0B5394"/>
                 </a:solidFill>
-                <a:latin typeface="Century Schoolbook"/>
+                <a:latin typeface="Lexend"/>
               </a:rPr>
               <a:t>1.</a:t>
             </a:r>
@@ -15003,11 +15480,11 @@
           <a:p>
             <a:pPr algn="l"/>
             <a:r>
-              <a:rPr sz="2100" b="0" i="0">
+              <a:rPr sz="1989" b="0" i="0">
                 <a:solidFill>
                   <a:srgbClr val="1A1A1A"/>
                 </a:solidFill>
-                <a:latin typeface="Century Schoolbook"/>
+                <a:latin typeface="Lexend"/>
               </a:rPr>
               <a:t>Open IXL and start today's skills.</a:t>
             </a:r>
@@ -15038,11 +15515,11 @@
           <a:p>
             <a:pPr algn="l"/>
             <a:r>
-              <a:rPr sz="2100" b="1" i="0">
+              <a:rPr sz="1989" b="1" i="0">
                 <a:solidFill>
                   <a:srgbClr val="0B5394"/>
                 </a:solidFill>
-                <a:latin typeface="Century Schoolbook"/>
+                <a:latin typeface="Lexend"/>
               </a:rPr>
               <a:t>2.</a:t>
             </a:r>
@@ -15073,11 +15550,11 @@
           <a:p>
             <a:pPr algn="l"/>
             <a:r>
-              <a:rPr sz="2100" b="0" i="0">
+              <a:rPr sz="1989" b="0" i="0">
                 <a:solidFill>
                   <a:srgbClr val="1A1A1A"/>
                 </a:solidFill>
-                <a:latin typeface="Century Schoolbook"/>
+                <a:latin typeface="Lexend"/>
               </a:rPr>
               <a:t>Work on paper where the question needs work. The answer box does not show it.</a:t>
             </a:r>
@@ -15108,11 +15585,11 @@
           <a:p>
             <a:pPr algn="l"/>
             <a:r>
-              <a:rPr sz="2100" b="1" i="0">
+              <a:rPr sz="1989" b="1" i="0">
                 <a:solidFill>
                   <a:srgbClr val="0B5394"/>
                 </a:solidFill>
-                <a:latin typeface="Century Schoolbook"/>
+                <a:latin typeface="Lexend"/>
               </a:rPr>
               <a:t>3.</a:t>
             </a:r>
@@ -15143,11 +15620,11 @@
           <a:p>
             <a:pPr algn="l"/>
             <a:r>
-              <a:rPr sz="2100" b="0" i="0">
+              <a:rPr sz="1989" b="0" i="0">
                 <a:solidFill>
                   <a:srgbClr val="1A1A1A"/>
                 </a:solidFill>
-                <a:latin typeface="Century Schoolbook"/>
+                <a:latin typeface="Lexend"/>
               </a:rPr>
               <a:t>Every skill listed is required, to a SmartScore of 67. Due at the start of the next class.</a:t>
             </a:r>
@@ -15178,11 +15655,11 @@
           <a:p>
             <a:pPr algn="l"/>
             <a:r>
-              <a:rPr sz="2100" b="1" i="0">
+              <a:rPr sz="1989" b="1" i="0">
                 <a:solidFill>
                   <a:srgbClr val="1A1A1A"/>
                 </a:solidFill>
-                <a:latin typeface="Century Schoolbook"/>
+                <a:latin typeface="Lexend"/>
               </a:rPr>
               <a:t>Today's skills — all required</a:t>
             </a:r>
@@ -15213,11 +15690,11 @@
           <a:p>
             <a:pPr algn="l"/>
             <a:r>
-              <a:rPr sz="1900" b="0" i="0">
+              <a:rPr sz="1810" b="0" i="0">
                 <a:solidFill>
                   <a:srgbClr val="1A1A1A"/>
                 </a:solidFill>
-                <a:latin typeface="Century Schoolbook"/>
+                <a:latin typeface="Lexend"/>
               </a:rPr>
               <a:t>Convert between standard and scientific notation: small numbers — 85M</a:t>
             </a:r>
@@ -15248,11 +15725,11 @@
           <a:p>
             <a:pPr algn="l"/>
             <a:r>
-              <a:rPr sz="1900" b="0" i="0">
+              <a:rPr sz="1810" b="0" i="0">
                 <a:solidFill>
                   <a:srgbClr val="1A1A1A"/>
                 </a:solidFill>
-                <a:latin typeface="Century Schoolbook"/>
+                <a:latin typeface="Lexend"/>
               </a:rPr>
               <a:t>Compare small numbers — KDR</a:t>
             </a:r>
@@ -15283,11 +15760,11 @@
           <a:p>
             <a:pPr algn="l"/>
             <a:r>
-              <a:rPr sz="1900" b="0" i="0">
+              <a:rPr sz="1810" b="0" i="0">
                 <a:solidFill>
                   <a:srgbClr val="1A1A1A"/>
                 </a:solidFill>
-                <a:latin typeface="Century Schoolbook"/>
+                <a:latin typeface="Lexend"/>
               </a:rPr>
               <a:t>Powers of ten with negative exponents — SKD</a:t>
             </a:r>
@@ -15336,11 +15813,11 @@
           <a:p>
             <a:pPr algn="l"/>
             <a:r>
-              <a:rPr sz="3600" b="1" i="0">
+              <a:rPr sz="3420" b="1" i="0">
                 <a:solidFill>
                   <a:srgbClr val="1A1A1A"/>
                 </a:solidFill>
-                <a:latin typeface="Century Schoolbook"/>
+                <a:latin typeface="Lexend"/>
               </a:rPr>
               <a:t>Notes</a:t>
             </a:r>
@@ -15476,11 +15953,11 @@
           <a:p>
             <a:pPr algn="l"/>
             <a:r>
-              <a:rPr sz="1100" b="0" i="1">
+              <a:rPr sz="1040" b="0" i="0">
                 <a:solidFill>
                   <a:srgbClr val="6B6B6B"/>
                 </a:solidFill>
-                <a:latin typeface="Century Schoolbook"/>
+                <a:latin typeface="Lexend"/>
               </a:rPr>
               <a:t>Grade 7 Accelerated · Unit 3 · Lesson 9 — Writing Small Numbers in Scientific Notation</a:t>
             </a:r>
@@ -15511,11 +15988,11 @@
           <a:p>
             <a:pPr algn="r"/>
             <a:r>
-              <a:rPr sz="1100" b="0" i="0">
+              <a:rPr sz="1040" b="0" i="0">
                 <a:solidFill>
                   <a:srgbClr val="6B6B6B"/>
                 </a:solidFill>
-                <a:latin typeface="Century Schoolbook"/>
+                <a:latin typeface="Lexend"/>
               </a:rPr>
               <a:t>4</a:t>
             </a:r>
@@ -15546,11 +16023,11 @@
           <a:p>
             <a:pPr algn="l"/>
             <a:r>
-              <a:rPr sz="2500" b="1" i="0">
+              <a:rPr sz="2380" b="1" i="0">
                 <a:solidFill>
                   <a:srgbClr val="1A1A1A"/>
                 </a:solidFill>
-                <a:latin typeface="Century Schoolbook"/>
+                <a:latin typeface="Lexend"/>
               </a:rPr>
               <a:t>I.  Negative powers of ten name the decimal places</a:t>
             </a:r>
@@ -15626,20 +16103,20 @@
                     <a:p>
                       <a:pPr algn="ctr"/>
                       <a:r>
-                        <a:rPr sz="1800" b="1">
+                        <a:rPr sz="1710" b="1">
                           <a:solidFill>
                             <a:srgbClr val="1A1A1A"/>
                           </a:solidFill>
-                          <a:latin typeface="Century Schoolbook"/>
+                          <a:latin typeface="Lexend"/>
                         </a:rPr>
                         <a:t>10</a:t>
                       </a:r>
                       <a:r>
-                        <a:rPr sz="1800" b="1" baseline="30000">
+                        <a:rPr sz="1710" b="1" baseline="30000">
                           <a:solidFill>
                             <a:srgbClr val="1A1A1A"/>
                           </a:solidFill>
-                          <a:latin typeface="Century Schoolbook"/>
+                          <a:latin typeface="Lexend"/>
                         </a:rPr>
                         <a:t>0</a:t>
                       </a:r>
@@ -15682,20 +16159,20 @@
                     <a:p>
                       <a:pPr algn="ctr"/>
                       <a:r>
-                        <a:rPr sz="1800" b="1">
+                        <a:rPr sz="1710" b="1">
                           <a:solidFill>
                             <a:srgbClr val="1A1A1A"/>
                           </a:solidFill>
-                          <a:latin typeface="Century Schoolbook"/>
+                          <a:latin typeface="Lexend"/>
                         </a:rPr>
                         <a:t>10</a:t>
                       </a:r>
                       <a:r>
-                        <a:rPr sz="1800" b="1" baseline="30000">
+                        <a:rPr sz="1710" b="1" baseline="30000">
                           <a:solidFill>
                             <a:srgbClr val="1A1A1A"/>
                           </a:solidFill>
-                          <a:latin typeface="Century Schoolbook"/>
+                          <a:latin typeface="Lexend"/>
                         </a:rPr>
                         <a:t>-1</a:t>
                       </a:r>
@@ -15738,20 +16215,20 @@
                     <a:p>
                       <a:pPr algn="ctr"/>
                       <a:r>
-                        <a:rPr sz="1800" b="1">
+                        <a:rPr sz="1710" b="1">
                           <a:solidFill>
                             <a:srgbClr val="1A1A1A"/>
                           </a:solidFill>
-                          <a:latin typeface="Century Schoolbook"/>
+                          <a:latin typeface="Lexend"/>
                         </a:rPr>
                         <a:t>10</a:t>
                       </a:r>
                       <a:r>
-                        <a:rPr sz="1800" b="1" baseline="30000">
+                        <a:rPr sz="1710" b="1" baseline="30000">
                           <a:solidFill>
                             <a:srgbClr val="1A1A1A"/>
                           </a:solidFill>
-                          <a:latin typeface="Century Schoolbook"/>
+                          <a:latin typeface="Lexend"/>
                         </a:rPr>
                         <a:t>-2</a:t>
                       </a:r>
@@ -15794,20 +16271,20 @@
                     <a:p>
                       <a:pPr algn="ctr"/>
                       <a:r>
-                        <a:rPr sz="1800" b="1">
+                        <a:rPr sz="1710" b="1">
                           <a:solidFill>
                             <a:srgbClr val="1A1A1A"/>
                           </a:solidFill>
-                          <a:latin typeface="Century Schoolbook"/>
+                          <a:latin typeface="Lexend"/>
                         </a:rPr>
                         <a:t>10</a:t>
                       </a:r>
                       <a:r>
-                        <a:rPr sz="1800" b="1" baseline="30000">
+                        <a:rPr sz="1710" b="1" baseline="30000">
                           <a:solidFill>
                             <a:srgbClr val="1A1A1A"/>
                           </a:solidFill>
-                          <a:latin typeface="Century Schoolbook"/>
+                          <a:latin typeface="Lexend"/>
                         </a:rPr>
                         <a:t>-3</a:t>
                       </a:r>
@@ -15850,20 +16327,20 @@
                     <a:p>
                       <a:pPr algn="ctr"/>
                       <a:r>
-                        <a:rPr sz="1800" b="1">
+                        <a:rPr sz="1710" b="1">
                           <a:solidFill>
                             <a:srgbClr val="1A1A1A"/>
                           </a:solidFill>
-                          <a:latin typeface="Century Schoolbook"/>
+                          <a:latin typeface="Lexend"/>
                         </a:rPr>
                         <a:t>10</a:t>
                       </a:r>
                       <a:r>
-                        <a:rPr sz="1800" b="1" baseline="30000">
+                        <a:rPr sz="1710" b="1" baseline="30000">
                           <a:solidFill>
                             <a:srgbClr val="1A1A1A"/>
                           </a:solidFill>
-                          <a:latin typeface="Century Schoolbook"/>
+                          <a:latin typeface="Lexend"/>
                         </a:rPr>
                         <a:t>-4</a:t>
                       </a:r>
@@ -15906,20 +16383,20 @@
                     <a:p>
                       <a:pPr algn="ctr"/>
                       <a:r>
-                        <a:rPr sz="1800" b="1">
+                        <a:rPr sz="1710" b="1">
                           <a:solidFill>
                             <a:srgbClr val="1A1A1A"/>
                           </a:solidFill>
-                          <a:latin typeface="Century Schoolbook"/>
+                          <a:latin typeface="Lexend"/>
                         </a:rPr>
                         <a:t>10</a:t>
                       </a:r>
                       <a:r>
-                        <a:rPr sz="1800" b="1" baseline="30000">
+                        <a:rPr sz="1710" b="1" baseline="30000">
                           <a:solidFill>
                             <a:srgbClr val="1A1A1A"/>
                           </a:solidFill>
-                          <a:latin typeface="Century Schoolbook"/>
+                          <a:latin typeface="Lexend"/>
                         </a:rPr>
                         <a:t>-5</a:t>
                       </a:r>
@@ -15964,11 +16441,11 @@
                     <a:p>
                       <a:pPr algn="ctr"/>
                       <a:r>
-                        <a:rPr sz="1800" b="0">
+                        <a:rPr sz="1710" b="0">
                           <a:solidFill>
                             <a:srgbClr val="1A1A1A"/>
                           </a:solidFill>
-                          <a:latin typeface="Century Schoolbook"/>
+                          <a:latin typeface="Lexend"/>
                         </a:rPr>
                         <a:t>1</a:t>
                       </a:r>
@@ -16011,11 +16488,11 @@
                     <a:p>
                       <a:pPr algn="ctr"/>
                       <a:r>
-                        <a:rPr sz="1800" b="0">
+                        <a:rPr sz="1710" b="0">
                           <a:solidFill>
                             <a:srgbClr val="1A1A1A"/>
                           </a:solidFill>
-                          <a:latin typeface="Century Schoolbook"/>
+                          <a:latin typeface="Lexend"/>
                         </a:rPr>
                         <a:t>0.1</a:t>
                       </a:r>
@@ -16058,11 +16535,11 @@
                     <a:p>
                       <a:pPr algn="ctr"/>
                       <a:r>
-                        <a:rPr sz="1800" b="0">
+                        <a:rPr sz="1710" b="0">
                           <a:solidFill>
                             <a:srgbClr val="1A1A1A"/>
                           </a:solidFill>
-                          <a:latin typeface="Century Schoolbook"/>
+                          <a:latin typeface="Lexend"/>
                         </a:rPr>
                         <a:t>0.01</a:t>
                       </a:r>
@@ -16105,11 +16582,11 @@
                     <a:p>
                       <a:pPr algn="ctr"/>
                       <a:r>
-                        <a:rPr sz="1800" b="0">
+                        <a:rPr sz="1710" b="0">
                           <a:solidFill>
                             <a:srgbClr val="1A1A1A"/>
                           </a:solidFill>
-                          <a:latin typeface="Century Schoolbook"/>
+                          <a:latin typeface="Lexend"/>
                         </a:rPr>
                         <a:t>0.001</a:t>
                       </a:r>
@@ -16152,11 +16629,11 @@
                     <a:p>
                       <a:pPr algn="ctr"/>
                       <a:r>
-                        <a:rPr sz="1800" b="0">
+                        <a:rPr sz="1710" b="0">
                           <a:solidFill>
                             <a:srgbClr val="1A1A1A"/>
                           </a:solidFill>
-                          <a:latin typeface="Century Schoolbook"/>
+                          <a:latin typeface="Lexend"/>
                         </a:rPr>
                         <a:t>0.0001</a:t>
                       </a:r>
@@ -16199,11 +16676,11 @@
                     <a:p>
                       <a:pPr algn="ctr"/>
                       <a:r>
-                        <a:rPr sz="1800" b="0">
+                        <a:rPr sz="1710" b="0">
                           <a:solidFill>
                             <a:srgbClr val="1A1A1A"/>
                           </a:solidFill>
-                          <a:latin typeface="Century Schoolbook"/>
+                          <a:latin typeface="Lexend"/>
                         </a:rPr>
                         <a:t>0.00001</a:t>
                       </a:r>
@@ -16246,7 +16723,7 @@
       </p:graphicFrame>
       <p:pic>
         <p:nvPicPr>
-          <p:cNvPr id="11" name="Picture 10" descr="87b97c2695b4b35d.png"/>
+          <p:cNvPr id="11" name="Picture 10" descr="654e90524fa10158.png"/>
           <p:cNvPicPr>
             <a:picLocks noChangeAspect="1"/>
           </p:cNvPicPr>
@@ -16260,8 +16737,8 @@
         </p:blipFill>
         <p:spPr>
           <a:xfrm>
-            <a:off x="3034020" y="3017520"/>
-            <a:ext cx="1691640" cy="679704"/>
+            <a:off x="3016744" y="3017520"/>
+            <a:ext cx="1685544" cy="685800"/>
           </a:xfrm>
           <a:prstGeom prst="rect">
             <a:avLst/>
@@ -16276,8 +16753,8 @@
         </p:nvSpPr>
         <p:spPr>
           <a:xfrm>
-            <a:off x="4725660" y="3128772"/>
-            <a:ext cx="1183151" cy="457200"/>
+            <a:off x="4702288" y="3131820"/>
+            <a:ext cx="1141503" cy="457200"/>
           </a:xfrm>
           <a:prstGeom prst="rect">
             <a:avLst/>
@@ -16292,11 +16769,11 @@
           <a:p>
             <a:pPr algn="l"/>
             <a:r>
-              <a:rPr sz="2600" b="0" i="0">
+              <a:rPr sz="2470" b="0" i="0">
                 <a:solidFill>
                   <a:srgbClr val="1A1A1A"/>
                 </a:solidFill>
-                <a:latin typeface="Century Schoolbook"/>
+                <a:latin typeface="Lexend"/>
               </a:rPr>
               <a:t>          </a:t>
             </a:r>
@@ -16305,7 +16782,7 @@
       </p:sp>
       <p:pic>
         <p:nvPicPr>
-          <p:cNvPr id="13" name="Picture 12" descr="9756d439c25d70ac.png"/>
+          <p:cNvPr id="13" name="Picture 12" descr="4ca5845658b16cd4.png"/>
           <p:cNvPicPr>
             <a:picLocks noChangeAspect="1"/>
           </p:cNvPicPr>
@@ -16319,8 +16796,8 @@
         </p:blipFill>
         <p:spPr>
           <a:xfrm>
-            <a:off x="5771651" y="2990088"/>
-            <a:ext cx="3355848" cy="734568"/>
+            <a:off x="5706631" y="2990088"/>
+            <a:ext cx="3438144" cy="740664"/>
           </a:xfrm>
           <a:prstGeom prst="rect">
             <a:avLst/>
@@ -16335,7 +16812,7 @@
         </p:nvSpPr>
         <p:spPr>
           <a:xfrm>
-            <a:off x="987552" y="4062984"/>
+            <a:off x="987552" y="4069080"/>
             <a:ext cx="10131551" cy="950976"/>
           </a:xfrm>
           <a:prstGeom prst="rect">
@@ -16351,29 +16828,29 @@
           <a:p>
             <a:pPr algn="l"/>
             <a:r>
-              <a:rPr sz="2300" b="1" i="0">
+              <a:rPr sz="2180" b="1" i="0">
                 <a:solidFill>
                   <a:srgbClr val="1A1A1A"/>
                 </a:solidFill>
-                <a:latin typeface="Century Schoolbook"/>
+                <a:latin typeface="Lexend"/>
               </a:rPr>
               <a:t>A negative exponent puts the 1 in that decimal place: 10</a:t>
             </a:r>
             <a:r>
-              <a:rPr sz="2300" b="1" i="0" baseline="30000">
+              <a:rPr sz="2180" b="1" i="0" baseline="30000">
                 <a:solidFill>
                   <a:srgbClr val="1A1A1A"/>
                 </a:solidFill>
-                <a:latin typeface="Century Schoolbook"/>
+                <a:latin typeface="Lexend"/>
               </a:rPr>
               <a:t>-4</a:t>
             </a:r>
             <a:r>
-              <a:rPr sz="2300" b="1" i="0">
+              <a:rPr sz="2180" b="1" i="0">
                 <a:solidFill>
                   <a:srgbClr val="1A1A1A"/>
                 </a:solidFill>
-                <a:latin typeface="Century Schoolbook"/>
+                <a:latin typeface="Lexend"/>
               </a:rPr>
               <a:t> is a 1 in the fourth place.</a:t>
             </a:r>
@@ -16422,11 +16899,11 @@
           <a:p>
             <a:pPr algn="l"/>
             <a:r>
-              <a:rPr sz="3600" b="1" i="0">
+              <a:rPr sz="3420" b="1" i="0">
                 <a:solidFill>
                   <a:srgbClr val="1A1A1A"/>
                 </a:solidFill>
-                <a:latin typeface="Century Schoolbook"/>
+                <a:latin typeface="Lexend"/>
               </a:rPr>
               <a:t>Notes</a:t>
             </a:r>
@@ -16562,11 +17039,11 @@
           <a:p>
             <a:pPr algn="l"/>
             <a:r>
-              <a:rPr sz="1100" b="0" i="1">
+              <a:rPr sz="1040" b="0" i="0">
                 <a:solidFill>
                   <a:srgbClr val="6B6B6B"/>
                 </a:solidFill>
-                <a:latin typeface="Century Schoolbook"/>
+                <a:latin typeface="Lexend"/>
               </a:rPr>
               <a:t>Grade 7 Accelerated · Unit 3 · Lesson 9 — Writing Small Numbers in Scientific Notation</a:t>
             </a:r>
@@ -16597,11 +17074,11 @@
           <a:p>
             <a:pPr algn="r"/>
             <a:r>
-              <a:rPr sz="1100" b="0" i="0">
+              <a:rPr sz="1040" b="0" i="0">
                 <a:solidFill>
                   <a:srgbClr val="6B6B6B"/>
                 </a:solidFill>
-                <a:latin typeface="Century Schoolbook"/>
+                <a:latin typeface="Lexend"/>
               </a:rPr>
               <a:t>5</a:t>
             </a:r>
@@ -16632,11 +17109,11 @@
           <a:p>
             <a:pPr algn="l"/>
             <a:r>
-              <a:rPr sz="2500" b="1" i="0">
+              <a:rPr sz="2380" b="1" i="0">
                 <a:solidFill>
                   <a:srgbClr val="1A1A1A"/>
                 </a:solidFill>
-                <a:latin typeface="Century Schoolbook"/>
+                <a:latin typeface="Lexend"/>
               </a:rPr>
               <a:t>II.  Small numbers in scientific notation</a:t>
             </a:r>
@@ -16680,7 +17157,7 @@
       </p:cxnSp>
       <p:pic>
         <p:nvPicPr>
-          <p:cNvPr id="10" name="Picture 9" descr="7b164213b9232e38.png"/>
+          <p:cNvPr id="10" name="Picture 9" descr="37cf70d1664c7cc2.png"/>
           <p:cNvPicPr>
             <a:picLocks noChangeAspect="1"/>
           </p:cNvPicPr>
@@ -16694,8 +17171,8 @@
         </p:blipFill>
         <p:spPr>
           <a:xfrm>
-            <a:off x="1971792" y="2022348"/>
-            <a:ext cx="3233928" cy="353568"/>
+            <a:off x="1911844" y="2028444"/>
+            <a:ext cx="3316224" cy="341376"/>
           </a:xfrm>
           <a:prstGeom prst="rect">
             <a:avLst/>
@@ -16710,8 +17187,8 @@
         </p:nvSpPr>
         <p:spPr>
           <a:xfrm>
-            <a:off x="5205720" y="1970532"/>
-            <a:ext cx="1183151" cy="457200"/>
+            <a:off x="5228068" y="1970532"/>
+            <a:ext cx="1141503" cy="457200"/>
           </a:xfrm>
           <a:prstGeom prst="rect">
             <a:avLst/>
@@ -16726,11 +17203,11 @@
           <a:p>
             <a:pPr algn="l"/>
             <a:r>
-              <a:rPr sz="2600" b="0" i="0">
+              <a:rPr sz="2470" b="0" i="0">
                 <a:solidFill>
                   <a:srgbClr val="1A1A1A"/>
                 </a:solidFill>
-                <a:latin typeface="Century Schoolbook"/>
+                <a:latin typeface="Lexend"/>
               </a:rPr>
               <a:t>          </a:t>
             </a:r>
@@ -16739,7 +17216,7 @@
       </p:sp>
       <p:pic>
         <p:nvPicPr>
-          <p:cNvPr id="12" name="Picture 11" descr="a5d136b823d619f9.png"/>
+          <p:cNvPr id="12" name="Picture 11" descr="fa88e78fd38d3b82.png"/>
           <p:cNvPicPr>
             <a:picLocks noChangeAspect="1"/>
           </p:cNvPicPr>
@@ -16753,8 +17230,8 @@
         </p:blipFill>
         <p:spPr>
           <a:xfrm>
-            <a:off x="6251711" y="2022348"/>
-            <a:ext cx="3938016" cy="353568"/>
+            <a:off x="6232411" y="2031492"/>
+            <a:ext cx="4017264" cy="335280"/>
           </a:xfrm>
           <a:prstGeom prst="rect">
             <a:avLst/>
@@ -16763,7 +17240,7 @@
       </p:pic>
       <p:pic>
         <p:nvPicPr>
-          <p:cNvPr id="13" name="Picture 12" descr="40f6cd0eb0ebc885.png"/>
+          <p:cNvPr id="13" name="Picture 12" descr="fa690032944f268e.png"/>
           <p:cNvPicPr>
             <a:picLocks noChangeAspect="1"/>
           </p:cNvPicPr>
@@ -16777,8 +17254,8 @@
         </p:blipFill>
         <p:spPr>
           <a:xfrm>
-            <a:off x="3898391" y="2711196"/>
-            <a:ext cx="4364736" cy="347472"/>
+            <a:off x="3785615" y="2714244"/>
+            <a:ext cx="4590288" cy="341376"/>
           </a:xfrm>
           <a:prstGeom prst="rect">
             <a:avLst/>
@@ -16809,11 +17286,11 @@
           <a:p>
             <a:pPr algn="l"/>
             <a:r>
-              <a:rPr sz="2300" b="1" i="0">
+              <a:rPr sz="2180" b="1" i="0">
                 <a:solidFill>
                   <a:srgbClr val="1A1A1A"/>
                 </a:solidFill>
-                <a:latin typeface="Century Schoolbook"/>
+                <a:latin typeface="Lexend"/>
               </a:rPr>
               <a:t>The coefficient is still at least 1 and less than 10. The exponent is negative for a number less than 1.</a:t>
             </a:r>
@@ -16844,29 +17321,47 @@
           <a:p>
             <a:pPr algn="l"/>
             <a:r>
-              <a:rPr sz="2300" b="0" i="0">
+              <a:rPr sz="2180" b="0" i="0">
                 <a:solidFill>
                   <a:srgbClr val="1A1A1A"/>
                 </a:solidFill>
-                <a:latin typeface="Century Schoolbook"/>
-              </a:rPr>
-              <a:t>The exponent is how many places the point moves: 0.0000672 → 6.72 is five places right, so 10</a:t>
-            </a:r>
-            <a:r>
-              <a:rPr sz="2300" b="0" i="0" baseline="30000">
+                <a:latin typeface="Lexend"/>
+              </a:rPr>
+              <a:t>The exponent is how many places the point moves: 0.0000672 </a:t>
+            </a:r>
+            <a:r>
+              <a:rPr sz="2180" b="0" i="0">
                 <a:solidFill>
                   <a:srgbClr val="1A1A1A"/>
                 </a:solidFill>
-                <a:latin typeface="Century Schoolbook"/>
+                <a:latin typeface="DejaVu Sans"/>
+              </a:rPr>
+              <a:t>→</a:t>
+            </a:r>
+            <a:r>
+              <a:rPr sz="2180" b="0" i="0">
+                <a:solidFill>
+                  <a:srgbClr val="1A1A1A"/>
+                </a:solidFill>
+                <a:latin typeface="Lexend"/>
+              </a:rPr>
+              <a:t> 6.72 is five places right, so 10</a:t>
+            </a:r>
+            <a:r>
+              <a:rPr sz="2180" b="0" i="0" baseline="30000">
+                <a:solidFill>
+                  <a:srgbClr val="1A1A1A"/>
+                </a:solidFill>
+                <a:latin typeface="Lexend"/>
               </a:rPr>
               <a:t>-5</a:t>
             </a:r>
             <a:r>
-              <a:rPr sz="2300" b="0" i="0">
+              <a:rPr sz="2180" b="0" i="0">
                 <a:solidFill>
                   <a:srgbClr val="1A1A1A"/>
                 </a:solidFill>
-                <a:latin typeface="Century Schoolbook"/>
+                <a:latin typeface="Lexend"/>
               </a:rPr>
               <a:t>.</a:t>
             </a:r>
@@ -16915,11 +17410,11 @@
           <a:p>
             <a:pPr algn="l"/>
             <a:r>
-              <a:rPr sz="3600" b="1" i="0">
+              <a:rPr sz="3420" b="1" i="0">
                 <a:solidFill>
                   <a:srgbClr val="1A1A1A"/>
                 </a:solidFill>
-                <a:latin typeface="Century Schoolbook"/>
+                <a:latin typeface="Lexend"/>
               </a:rPr>
               <a:t>Notes</a:t>
             </a:r>
@@ -17055,11 +17550,11 @@
           <a:p>
             <a:pPr algn="l"/>
             <a:r>
-              <a:rPr sz="1100" b="0" i="1">
+              <a:rPr sz="1040" b="0" i="0">
                 <a:solidFill>
                   <a:srgbClr val="6B6B6B"/>
                 </a:solidFill>
-                <a:latin typeface="Century Schoolbook"/>
+                <a:latin typeface="Lexend"/>
               </a:rPr>
               <a:t>Grade 7 Accelerated · Unit 3 · Lesson 9 — Writing Small Numbers in Scientific Notation</a:t>
             </a:r>
@@ -17090,11 +17585,11 @@
           <a:p>
             <a:pPr algn="r"/>
             <a:r>
-              <a:rPr sz="1100" b="0" i="0">
+              <a:rPr sz="1040" b="0" i="0">
                 <a:solidFill>
                   <a:srgbClr val="6B6B6B"/>
                 </a:solidFill>
-                <a:latin typeface="Century Schoolbook"/>
+                <a:latin typeface="Lexend"/>
               </a:rPr>
               <a:t>6</a:t>
             </a:r>
@@ -17125,11 +17620,11 @@
           <a:p>
             <a:pPr algn="l"/>
             <a:r>
-              <a:rPr sz="2500" b="1" i="0">
+              <a:rPr sz="2380" b="1" i="0">
                 <a:solidFill>
                   <a:srgbClr val="1A1A1A"/>
                 </a:solidFill>
-                <a:latin typeface="Century Schoolbook"/>
+                <a:latin typeface="Lexend"/>
               </a:rPr>
               <a:t>III.  How many times larger — or smaller?</a:t>
             </a:r>
@@ -17173,7 +17668,7 @@
       </p:cxnSp>
       <p:pic>
         <p:nvPicPr>
-          <p:cNvPr id="10" name="Picture 9" descr="1960a542aafe9c29.png"/>
+          <p:cNvPr id="10" name="Picture 9" descr="96cc52bce800e0de.png"/>
           <p:cNvPicPr>
             <a:picLocks noChangeAspect="1"/>
           </p:cNvPicPr>
@@ -17187,8 +17682,8 @@
         </p:blipFill>
         <p:spPr>
           <a:xfrm>
-            <a:off x="2034276" y="1993392"/>
-            <a:ext cx="4556760" cy="822960"/>
+            <a:off x="2093200" y="1993392"/>
+            <a:ext cx="4556760" cy="795528"/>
           </a:xfrm>
           <a:prstGeom prst="rect">
             <a:avLst/>
@@ -17203,8 +17698,8 @@
         </p:nvSpPr>
         <p:spPr>
           <a:xfrm>
-            <a:off x="6591036" y="2176272"/>
-            <a:ext cx="1183151" cy="457200"/>
+            <a:off x="6649960" y="2162556"/>
+            <a:ext cx="1141503" cy="457200"/>
           </a:xfrm>
           <a:prstGeom prst="rect">
             <a:avLst/>
@@ -17219,11 +17714,11 @@
           <a:p>
             <a:pPr algn="l"/>
             <a:r>
-              <a:rPr sz="2600" b="0" i="0">
+              <a:rPr sz="2470" b="0" i="0">
                 <a:solidFill>
                   <a:srgbClr val="1A1A1A"/>
                 </a:solidFill>
-                <a:latin typeface="Century Schoolbook"/>
+                <a:latin typeface="Lexend"/>
               </a:rPr>
               <a:t>          </a:t>
             </a:r>
@@ -17232,7 +17727,7 @@
       </p:sp>
       <p:pic>
         <p:nvPicPr>
-          <p:cNvPr id="12" name="Picture 11" descr="a13ef6adfb19a516.png"/>
+          <p:cNvPr id="12" name="Picture 11" descr="f3a5416871ca108a.png"/>
           <p:cNvPicPr>
             <a:picLocks noChangeAspect="1"/>
           </p:cNvPicPr>
@@ -17246,8 +17741,8 @@
         </p:blipFill>
         <p:spPr>
           <a:xfrm>
-            <a:off x="7637027" y="1993392"/>
-            <a:ext cx="2490216" cy="822960"/>
+            <a:off x="7654303" y="1993392"/>
+            <a:ext cx="2414016" cy="795528"/>
           </a:xfrm>
           <a:prstGeom prst="rect">
             <a:avLst/>
@@ -17262,7 +17757,7 @@
         </p:nvSpPr>
         <p:spPr>
           <a:xfrm>
-            <a:off x="987552" y="3154679"/>
+            <a:off x="987552" y="3127248"/>
             <a:ext cx="10131551" cy="950976"/>
           </a:xfrm>
           <a:prstGeom prst="rect">
@@ -17278,11 +17773,11 @@
           <a:p>
             <a:pPr algn="l"/>
             <a:r>
-              <a:rPr sz="2300" b="1" i="0">
+              <a:rPr sz="2180" b="1" i="0">
                 <a:solidFill>
                   <a:srgbClr val="1A1A1A"/>
                 </a:solidFill>
-                <a:latin typeface="Century Schoolbook"/>
+                <a:latin typeface="Lexend"/>
               </a:rPr>
               <a:t>Divide the coefficients. Divide the powers of 10 — subtract the exponents. Multiply the results.</a:t>
             </a:r>
@@ -17297,7 +17792,7 @@
         </p:nvSpPr>
         <p:spPr>
           <a:xfrm>
-            <a:off x="987552" y="4361688"/>
+            <a:off x="987552" y="4334256"/>
             <a:ext cx="10131551" cy="950976"/>
           </a:xfrm>
           <a:prstGeom prst="rect">
@@ -17313,65 +17808,65 @@
           <a:p>
             <a:pPr algn="l"/>
             <a:r>
-              <a:rPr sz="2300" b="0" i="0">
+              <a:rPr sz="2180" b="0" i="0">
                 <a:solidFill>
                   <a:srgbClr val="1A1A1A"/>
                 </a:solidFill>
-                <a:latin typeface="Century Schoolbook"/>
+                <a:latin typeface="Lexend"/>
               </a:rPr>
               <a:t>Which is bigger, 10</a:t>
             </a:r>
             <a:r>
-              <a:rPr sz="2300" b="0" i="0" baseline="30000">
+              <a:rPr sz="2180" b="0" i="0" baseline="30000">
                 <a:solidFill>
                   <a:srgbClr val="1A1A1A"/>
                 </a:solidFill>
-                <a:latin typeface="Century Schoolbook"/>
+                <a:latin typeface="Lexend"/>
               </a:rPr>
               <a:t>-5</a:t>
             </a:r>
             <a:r>
-              <a:rPr sz="2300" b="0" i="0">
+              <a:rPr sz="2180" b="0" i="0">
                 <a:solidFill>
                   <a:srgbClr val="1A1A1A"/>
                 </a:solidFill>
-                <a:latin typeface="Century Schoolbook"/>
+                <a:latin typeface="Lexend"/>
               </a:rPr>
               <a:t> or 10</a:t>
             </a:r>
             <a:r>
-              <a:rPr sz="2300" b="0" i="0" baseline="30000">
+              <a:rPr sz="2180" b="0" i="0" baseline="30000">
                 <a:solidFill>
                   <a:srgbClr val="1A1A1A"/>
                 </a:solidFill>
-                <a:latin typeface="Century Schoolbook"/>
+                <a:latin typeface="Lexend"/>
               </a:rPr>
               <a:t>-8</a:t>
             </a:r>
             <a:r>
-              <a:rPr sz="2300" b="0" i="0">
+              <a:rPr sz="2180" b="0" i="0">
                 <a:solidFill>
                   <a:srgbClr val="1A1A1A"/>
                 </a:solidFill>
-                <a:latin typeface="Century Schoolbook"/>
+                <a:latin typeface="Lexend"/>
               </a:rPr>
               <a:t>? The one with the larger exponent: −5 &gt; −8, so 10</a:t>
             </a:r>
             <a:r>
-              <a:rPr sz="2300" b="0" i="0" baseline="30000">
+              <a:rPr sz="2180" b="0" i="0" baseline="30000">
                 <a:solidFill>
                   <a:srgbClr val="1A1A1A"/>
                 </a:solidFill>
-                <a:latin typeface="Century Schoolbook"/>
+                <a:latin typeface="Lexend"/>
               </a:rPr>
               <a:t>-5</a:t>
             </a:r>
             <a:r>
-              <a:rPr sz="2300" b="0" i="0">
+              <a:rPr sz="2180" b="0" i="0">
                 <a:solidFill>
                   <a:srgbClr val="1A1A1A"/>
                 </a:solidFill>
-                <a:latin typeface="Century Schoolbook"/>
+                <a:latin typeface="Lexend"/>
               </a:rPr>
               <a:t>.</a:t>
             </a:r>
@@ -17420,11 +17915,11 @@
           <a:p>
             <a:pPr algn="l"/>
             <a:r>
-              <a:rPr sz="3600" b="1" i="0">
+              <a:rPr sz="3420" b="1" i="0">
                 <a:solidFill>
                   <a:srgbClr val="1A1A1A"/>
                 </a:solidFill>
-                <a:latin typeface="Century Schoolbook"/>
+                <a:latin typeface="Lexend"/>
               </a:rPr>
               <a:t>Example 1</a:t>
             </a:r>
@@ -17560,11 +18055,11 @@
           <a:p>
             <a:pPr algn="l"/>
             <a:r>
-              <a:rPr sz="1100" b="0" i="1">
+              <a:rPr sz="1040" b="0" i="0">
                 <a:solidFill>
                   <a:srgbClr val="6B6B6B"/>
                 </a:solidFill>
-                <a:latin typeface="Century Schoolbook"/>
+                <a:latin typeface="Lexend"/>
               </a:rPr>
               <a:t>Grade 7 Accelerated · Unit 3 · Lesson 9 — Writing Small Numbers in Scientific Notation</a:t>
             </a:r>
@@ -17595,11 +18090,11 @@
           <a:p>
             <a:pPr algn="r"/>
             <a:r>
-              <a:rPr sz="1100" b="0" i="0">
+              <a:rPr sz="1040" b="0" i="0">
                 <a:solidFill>
                   <a:srgbClr val="6B6B6B"/>
                 </a:solidFill>
-                <a:latin typeface="Century Schoolbook"/>
+                <a:latin typeface="Lexend"/>
               </a:rPr>
               <a:t>7</a:t>
             </a:r>
@@ -17630,11 +18125,11 @@
           <a:p>
             <a:pPr algn="ctr"/>
             <a:r>
-              <a:rPr sz="2400" b="0" i="0">
+              <a:rPr sz="2280" b="0" i="0">
                 <a:solidFill>
                   <a:srgbClr val="1A1A1A"/>
                 </a:solidFill>
-                <a:latin typeface="Century Schoolbook"/>
+                <a:latin typeface="Lexend"/>
               </a:rPr>
               <a:t>The density of oxygen is 1,332 millionths of a gram per cubic centimeter.</a:t>
             </a:r>
@@ -17665,11 +18160,11 @@
           <a:p>
             <a:pPr algn="ctr"/>
             <a:r>
-              <a:rPr sz="2400" b="0" i="0">
+              <a:rPr sz="2280" b="0" i="0">
                 <a:solidFill>
                   <a:srgbClr val="1A1A1A"/>
                 </a:solidFill>
-                <a:latin typeface="Century Schoolbook"/>
+                <a:latin typeface="Lexend"/>
               </a:rPr>
               <a:t>Write this value as a decimal, then in scientific notation.</a:t>
             </a:r>
@@ -17718,11 +18213,11 @@
           <a:p>
             <a:pPr algn="l"/>
             <a:r>
-              <a:rPr sz="3600" b="1" i="0">
+              <a:rPr sz="3420" b="1" i="0">
                 <a:solidFill>
                   <a:srgbClr val="1A1A1A"/>
                 </a:solidFill>
-                <a:latin typeface="Century Schoolbook"/>
+                <a:latin typeface="Lexend"/>
               </a:rPr>
               <a:t>Example 1</a:t>
             </a:r>
@@ -17858,11 +18353,11 @@
           <a:p>
             <a:pPr algn="l"/>
             <a:r>
-              <a:rPr sz="1100" b="0" i="1">
+              <a:rPr sz="1040" b="0" i="0">
                 <a:solidFill>
                   <a:srgbClr val="6B6B6B"/>
                 </a:solidFill>
-                <a:latin typeface="Century Schoolbook"/>
+                <a:latin typeface="Lexend"/>
               </a:rPr>
               <a:t>Grade 7 Accelerated · Unit 3 · Lesson 9 — Writing Small Numbers in Scientific Notation</a:t>
             </a:r>
@@ -17893,11 +18388,11 @@
           <a:p>
             <a:pPr algn="r"/>
             <a:r>
-              <a:rPr sz="1100" b="0" i="0">
+              <a:rPr sz="1040" b="0" i="0">
                 <a:solidFill>
                   <a:srgbClr val="6B6B6B"/>
                 </a:solidFill>
-                <a:latin typeface="Century Schoolbook"/>
+                <a:latin typeface="Lexend"/>
               </a:rPr>
               <a:t>8</a:t>
             </a:r>
@@ -17906,7 +18401,7 @@
       </p:sp>
       <p:pic>
         <p:nvPicPr>
-          <p:cNvPr id="8" name="Picture 7" descr="3795759730f8e373.png"/>
+          <p:cNvPr id="8" name="Picture 7" descr="c6b0aa89dc254772.png"/>
           <p:cNvPicPr>
             <a:picLocks noChangeAspect="1"/>
           </p:cNvPicPr>
@@ -17921,7 +18416,7 @@
         <p:spPr>
           <a:xfrm>
             <a:off x="1828800" y="1920240"/>
-            <a:ext cx="3590544" cy="792480"/>
+            <a:ext cx="3806952" cy="810768"/>
           </a:xfrm>
           <a:prstGeom prst="rect">
             <a:avLst/>
@@ -17930,7 +18425,7 @@
       </p:pic>
       <p:pic>
         <p:nvPicPr>
-          <p:cNvPr id="9" name="Picture 8" descr="e86600eaee99cccb.png"/>
+          <p:cNvPr id="9" name="Picture 8" descr="b11101a855a1dd5a.png"/>
           <p:cNvPicPr>
             <a:picLocks noChangeAspect="1"/>
           </p:cNvPicPr>
@@ -17944,8 +18439,8 @@
         </p:blipFill>
         <p:spPr>
           <a:xfrm>
-            <a:off x="1828800" y="2987040"/>
-            <a:ext cx="3938016" cy="350520"/>
+            <a:off x="1828800" y="3005328"/>
+            <a:ext cx="3898392" cy="338328"/>
           </a:xfrm>
           <a:prstGeom prst="rect">
             <a:avLst/>
@@ -17976,20 +18471,20 @@
           <a:p>
             <a:pPr algn="ctr"/>
             <a:r>
-              <a:rPr sz="3200" b="1" i="0">
+              <a:rPr sz="3040" b="1" i="0">
                 <a:solidFill>
                   <a:srgbClr val="9E1B32"/>
                 </a:solidFill>
-                <a:latin typeface="Century Schoolbook"/>
+                <a:latin typeface="Lexend"/>
               </a:rPr>
               <a:t>Answer:   0.001332 = 1.332 × 10</a:t>
             </a:r>
             <a:r>
-              <a:rPr sz="3200" b="1" i="0" baseline="30000">
+              <a:rPr sz="3040" b="1" i="0" baseline="30000">
                 <a:solidFill>
                   <a:srgbClr val="9E1B32"/>
                 </a:solidFill>
-                <a:latin typeface="Century Schoolbook"/>
+                <a:latin typeface="Lexend"/>
               </a:rPr>
               <a:t>-3</a:t>
             </a:r>
@@ -18038,11 +18533,11 @@
           <a:p>
             <a:pPr algn="l"/>
             <a:r>
-              <a:rPr sz="3600" b="1" i="0">
+              <a:rPr sz="3420" b="1" i="0">
                 <a:solidFill>
                   <a:srgbClr val="1A1A1A"/>
                 </a:solidFill>
-                <a:latin typeface="Century Schoolbook"/>
+                <a:latin typeface="Lexend"/>
               </a:rPr>
               <a:t>Your Turn</a:t>
             </a:r>
@@ -18178,11 +18673,11 @@
           <a:p>
             <a:pPr algn="l"/>
             <a:r>
-              <a:rPr sz="1100" b="0" i="1">
+              <a:rPr sz="1040" b="0" i="0">
                 <a:solidFill>
                   <a:srgbClr val="6B6B6B"/>
                 </a:solidFill>
-                <a:latin typeface="Century Schoolbook"/>
+                <a:latin typeface="Lexend"/>
               </a:rPr>
               <a:t>Grade 7 Accelerated · Unit 3 · Lesson 9 — Writing Small Numbers in Scientific Notation</a:t>
             </a:r>
@@ -18213,11 +18708,11 @@
           <a:p>
             <a:pPr algn="r"/>
             <a:r>
-              <a:rPr sz="1100" b="0" i="0">
+              <a:rPr sz="1040" b="0" i="0">
                 <a:solidFill>
                   <a:srgbClr val="6B6B6B"/>
                 </a:solidFill>
-                <a:latin typeface="Century Schoolbook"/>
+                <a:latin typeface="Lexend"/>
               </a:rPr>
               <a:t>9</a:t>
             </a:r>
@@ -18232,7 +18727,7 @@
         </p:nvSpPr>
         <p:spPr>
           <a:xfrm>
-            <a:off x="777240" y="2194560"/>
+            <a:off x="777240" y="1600200"/>
             <a:ext cx="10607040" cy="429370"/>
           </a:xfrm>
           <a:prstGeom prst="rect">
@@ -18248,11 +18743,11 @@
           <a:p>
             <a:pPr algn="ctr"/>
             <a:r>
-              <a:rPr sz="2400" b="0" i="0">
+              <a:rPr sz="2280" b="0" i="0">
                 <a:solidFill>
                   <a:srgbClr val="1A1A1A"/>
                 </a:solidFill>
-                <a:latin typeface="Century Schoolbook"/>
+                <a:latin typeface="Lexend"/>
               </a:rPr>
               <a:t>A human hair is about 67 hundred-thousandths of an inch thick.</a:t>
             </a:r>
@@ -18267,7 +18762,7 @@
         </p:nvSpPr>
         <p:spPr>
           <a:xfrm>
-            <a:off x="777240" y="2733658"/>
+            <a:off x="777240" y="2139298"/>
             <a:ext cx="10607040" cy="429370"/>
           </a:xfrm>
           <a:prstGeom prst="rect">
@@ -18283,11 +18778,11 @@
           <a:p>
             <a:pPr algn="ctr"/>
             <a:r>
-              <a:rPr sz="2400" b="0" i="0">
+              <a:rPr sz="2280" b="0" i="0">
                 <a:solidFill>
                   <a:srgbClr val="1A1A1A"/>
                 </a:solidFill>
-                <a:latin typeface="Century Schoolbook"/>
+                <a:latin typeface="Lexend"/>
               </a:rPr>
               <a:t>Write this value in scientific notation.</a:t>
             </a:r>

--- a/a7/packages/A7 Unit 3 - Exponents and Scientific Notation/Lessons/3.09/A7 3.09 Writing Small Numbers in Scientific Notation - Slides.pptx
+++ b/a7/packages/A7 Unit 3 - Exponents and Scientific Notation/Lessons/3.09/A7 3.09 Writing Small Numbers in Scientific Notation - Slides.pptx
@@ -17334,7 +17334,7 @@
                 <a:solidFill>
                   <a:srgbClr val="1A1A1A"/>
                 </a:solidFill>
-                <a:latin typeface="DejaVu Sans"/>
+                <a:latin typeface="Arial"/>
               </a:rPr>
               <a:t>→</a:t>
             </a:r>

--- a/a7/packages/A7 Unit 3 - Exponents and Scientific Notation/Lessons/3.09/A7 3.09 Writing Small Numbers in Scientific Notation - Slides.pptx
+++ b/a7/packages/A7 Unit 3 - Exponents and Scientific Notation/Lessons/3.09/A7 3.09 Writing Small Numbers in Scientific Notation - Slides.pptx
@@ -17327,25 +17327,7 @@
                 </a:solidFill>
                 <a:latin typeface="Lexend"/>
               </a:rPr>
-              <a:t>The exponent is how many places the point moves: 0.0000672 </a:t>
-            </a:r>
-            <a:r>
-              <a:rPr sz="2180" b="0" i="0">
-                <a:solidFill>
-                  <a:srgbClr val="1A1A1A"/>
-                </a:solidFill>
-                <a:latin typeface="Arial"/>
-              </a:rPr>
-              <a:t>→</a:t>
-            </a:r>
-            <a:r>
-              <a:rPr sz="2180" b="0" i="0">
-                <a:solidFill>
-                  <a:srgbClr val="1A1A1A"/>
-                </a:solidFill>
-                <a:latin typeface="Lexend"/>
-              </a:rPr>
-              <a:t> 6.72 is five places right, so 10</a:t>
+              <a:t>The exponent is how many places the point moves: from 0.0000672 to 6.72 is five places right, so 10</a:t>
             </a:r>
             <a:r>
               <a:rPr sz="2180" b="0" i="0" baseline="30000">

--- a/a7/packages/A7 Unit 3 - Exponents and Scientific Notation/Lessons/3.09/A7 3.09 Writing Small Numbers in Scientific Notation - Slides.pptx
+++ b/a7/packages/A7 Unit 3 - Exponents and Scientific Notation/Lessons/3.09/A7 3.09 Writing Small Numbers in Scientific Notation - Slides.pptx
@@ -5757,7 +5757,7 @@
       </p:sp>
       <p:pic>
         <p:nvPicPr>
-          <p:cNvPr id="8" name="Picture 7" descr="1c75e9d33d93ce53.png"/>
+          <p:cNvPr id="8" name="Picture 7" descr="14c6e3c9e0240f4b.png"/>
           <p:cNvPicPr>
             <a:picLocks noChangeAspect="1"/>
           </p:cNvPicPr>
@@ -5771,8 +5771,8 @@
         </p:blipFill>
         <p:spPr>
           <a:xfrm>
-            <a:off x="5635752" y="2194560"/>
-            <a:ext cx="890016" cy="420624"/>
+            <a:off x="5646420" y="2194560"/>
+            <a:ext cx="868680" cy="420624"/>
           </a:xfrm>
           <a:prstGeom prst="rect">
             <a:avLst/>
@@ -6044,7 +6044,7 @@
       </p:sp>
       <p:pic>
         <p:nvPicPr>
-          <p:cNvPr id="8" name="Picture 7" descr="641b1ae2e3e6954c.png"/>
+          <p:cNvPr id="8" name="Picture 7" descr="df6df4192e8efd80.png"/>
           <p:cNvPicPr>
             <a:picLocks noChangeAspect="1"/>
           </p:cNvPicPr>
@@ -6058,8 +6058,8 @@
         </p:blipFill>
         <p:spPr>
           <a:xfrm>
-            <a:off x="5637275" y="2103120"/>
-            <a:ext cx="886968" cy="420624"/>
+            <a:off x="5646420" y="2103120"/>
+            <a:ext cx="868680" cy="420624"/>
           </a:xfrm>
           <a:prstGeom prst="rect">
             <a:avLst/>
@@ -6068,7 +6068,7 @@
       </p:pic>
       <p:pic>
         <p:nvPicPr>
-          <p:cNvPr id="9" name="Picture 8" descr="72478af1c7b01c29.png"/>
+          <p:cNvPr id="9" name="Picture 8" descr="bd3a4c29b92dda97.png"/>
           <p:cNvPicPr>
             <a:picLocks noChangeAspect="1"/>
           </p:cNvPicPr>
@@ -6082,8 +6082,8 @@
         </p:blipFill>
         <p:spPr>
           <a:xfrm>
-            <a:off x="3892295" y="2825496"/>
-            <a:ext cx="4486656" cy="670560"/>
+            <a:off x="3227832" y="2825496"/>
+            <a:ext cx="5815584" cy="670560"/>
           </a:xfrm>
           <a:prstGeom prst="rect">
             <a:avLst/>
@@ -6120,7 +6120,7 @@
                 </a:solidFill>
                 <a:latin typeface="Lexend"/>
               </a:rPr>
-              <a:t>Answer:   0.0001</a:t>
+              <a:t>Answer:   0.0000001</a:t>
             </a:r>
           </a:p>
         </p:txBody>
@@ -11127,7 +11127,7 @@
         </p:nvSpPr>
         <p:spPr>
           <a:xfrm>
-            <a:off x="2477233" y="2171700"/>
+            <a:off x="2471137" y="2171700"/>
             <a:ext cx="3099754" cy="457200"/>
           </a:xfrm>
           <a:prstGeom prst="rect">
@@ -11156,7 +11156,7 @@
       </p:sp>
       <p:pic>
         <p:nvPicPr>
-          <p:cNvPr id="9" name="Picture 8" descr="6b87d3400d9bb213.png"/>
+          <p:cNvPr id="9" name="Picture 8" descr="d2459244fa239e3b.png"/>
           <p:cNvPicPr>
             <a:picLocks noChangeAspect="1"/>
           </p:cNvPicPr>
@@ -11170,8 +11170,8 @@
         </p:blipFill>
         <p:spPr>
           <a:xfrm>
-            <a:off x="5439827" y="2232660"/>
-            <a:ext cx="1551432" cy="335280"/>
+            <a:off x="5433731" y="2232660"/>
+            <a:ext cx="1572768" cy="335280"/>
           </a:xfrm>
           <a:prstGeom prst="rect">
             <a:avLst/>
@@ -11186,7 +11186,7 @@
         </p:nvSpPr>
         <p:spPr>
           <a:xfrm>
-            <a:off x="6991259" y="2171700"/>
+            <a:off x="7006499" y="2171700"/>
             <a:ext cx="921244" cy="457200"/>
           </a:xfrm>
           <a:prstGeom prst="rect">
@@ -11215,7 +11215,7 @@
       </p:sp>
       <p:pic>
         <p:nvPicPr>
-          <p:cNvPr id="11" name="Picture 10" descr="1da1a250efe25861.png"/>
+          <p:cNvPr id="11" name="Picture 10" descr="864747ff02180459.png"/>
           <p:cNvPicPr>
             <a:picLocks noChangeAspect="1"/>
           </p:cNvPicPr>
@@ -11229,8 +11229,8 @@
         </p:blipFill>
         <p:spPr>
           <a:xfrm>
-            <a:off x="7775344" y="2231136"/>
-            <a:ext cx="1572768" cy="338328"/>
+            <a:off x="7790584" y="2231136"/>
+            <a:ext cx="1563624" cy="338328"/>
           </a:xfrm>
           <a:prstGeom prst="rect">
             <a:avLst/>
@@ -11245,7 +11245,7 @@
         </p:nvSpPr>
         <p:spPr>
           <a:xfrm>
-            <a:off x="9348112" y="2171700"/>
+            <a:off x="9354208" y="2171700"/>
             <a:ext cx="473333" cy="457200"/>
           </a:xfrm>
           <a:prstGeom prst="rect">
@@ -11543,7 +11543,7 @@
         </p:nvSpPr>
         <p:spPr>
           <a:xfrm>
-            <a:off x="2475709" y="2080260"/>
+            <a:off x="2471137" y="2080260"/>
             <a:ext cx="3099754" cy="457200"/>
           </a:xfrm>
           <a:prstGeom prst="rect">
@@ -11572,7 +11572,7 @@
       </p:sp>
       <p:pic>
         <p:nvPicPr>
-          <p:cNvPr id="9" name="Picture 8" descr="81b1ad24407d186c.png"/>
+          <p:cNvPr id="9" name="Picture 8" descr="43c7aae94098e988.png"/>
           <p:cNvPicPr>
             <a:picLocks noChangeAspect="1"/>
           </p:cNvPicPr>
@@ -11586,8 +11586,8 @@
         </p:blipFill>
         <p:spPr>
           <a:xfrm>
-            <a:off x="5438303" y="2141219"/>
-            <a:ext cx="1554480" cy="335280"/>
+            <a:off x="5433731" y="2139696"/>
+            <a:ext cx="1572768" cy="338328"/>
           </a:xfrm>
           <a:prstGeom prst="rect">
             <a:avLst/>
@@ -11602,7 +11602,7 @@
         </p:nvSpPr>
         <p:spPr>
           <a:xfrm>
-            <a:off x="6992783" y="2080260"/>
+            <a:off x="7006499" y="2080260"/>
             <a:ext cx="921244" cy="457200"/>
           </a:xfrm>
           <a:prstGeom prst="rect">
@@ -11631,7 +11631,7 @@
       </p:sp>
       <p:pic>
         <p:nvPicPr>
-          <p:cNvPr id="11" name="Picture 10" descr="2167ac4363e0709d.png"/>
+          <p:cNvPr id="11" name="Picture 10" descr="f23f4cda83ccbfbf.png"/>
           <p:cNvPicPr>
             <a:picLocks noChangeAspect="1"/>
           </p:cNvPicPr>
@@ -11645,8 +11645,8 @@
         </p:blipFill>
         <p:spPr>
           <a:xfrm>
-            <a:off x="7776868" y="2139696"/>
-            <a:ext cx="1572768" cy="338328"/>
+            <a:off x="7790584" y="2138171"/>
+            <a:ext cx="1563624" cy="341376"/>
           </a:xfrm>
           <a:prstGeom prst="rect">
             <a:avLst/>
@@ -11661,7 +11661,7 @@
         </p:nvSpPr>
         <p:spPr>
           <a:xfrm>
-            <a:off x="9349636" y="2080260"/>
+            <a:off x="9354208" y="2080260"/>
             <a:ext cx="473333" cy="457200"/>
           </a:xfrm>
           <a:prstGeom prst="rect">
@@ -11690,7 +11690,7 @@
       </p:sp>
       <p:pic>
         <p:nvPicPr>
-          <p:cNvPr id="13" name="Picture 12" descr="7da4b69f6a4a0e54.png"/>
+          <p:cNvPr id="13" name="Picture 12" descr="2ae882816ad8aeb4.png"/>
           <p:cNvPicPr>
             <a:picLocks noChangeAspect="1"/>
           </p:cNvPicPr>
@@ -11704,8 +11704,8 @@
         </p:blipFill>
         <p:spPr>
           <a:xfrm>
-            <a:off x="4162043" y="2915412"/>
-            <a:ext cx="3267456" cy="304800"/>
+            <a:off x="4387596" y="2915412"/>
+            <a:ext cx="3072384" cy="304800"/>
           </a:xfrm>
           <a:prstGeom prst="rect">
             <a:avLst/>
@@ -11714,7 +11714,7 @@
       </p:pic>
       <p:pic>
         <p:nvPicPr>
-          <p:cNvPr id="14" name="Picture 13" descr="adf9adaf96fc0f9c.png"/>
+          <p:cNvPr id="14" name="Picture 13" descr="d1a7b376b364cf58.png"/>
           <p:cNvPicPr>
             <a:picLocks noChangeAspect="1"/>
           </p:cNvPicPr>
@@ -11728,8 +11728,8 @@
         </p:blipFill>
         <p:spPr>
           <a:xfrm>
-            <a:off x="4162043" y="3454908"/>
-            <a:ext cx="3947160" cy="304800"/>
+            <a:off x="4387596" y="3453383"/>
+            <a:ext cx="3499104" cy="307848"/>
           </a:xfrm>
           <a:prstGeom prst="rect">
             <a:avLst/>
@@ -11766,7 +11766,7 @@
                 </a:solidFill>
                 <a:latin typeface="Lexend"/>
               </a:rPr>
-              <a:t>Answer:   3.9 × 10</a:t>
+              <a:t>Answer:   5.3 × 10</a:t>
             </a:r>
             <a:r>
               <a:rPr sz="3040" b="1" i="0" baseline="30000">
@@ -11775,7 +11775,7 @@
                 </a:solidFill>
                 <a:latin typeface="Lexend"/>
               </a:rPr>
-              <a:t>-5</a:t>
+              <a:t>-4</a:t>
             </a:r>
           </a:p>
         </p:txBody>
@@ -14620,7 +14620,7 @@
       </p:sp>
       <p:pic>
         <p:nvPicPr>
-          <p:cNvPr id="12" name="Picture 11" descr="f029b45e0ecab7cc.png"/>
+          <p:cNvPr id="12" name="Picture 11" descr="0784cf502c291e76.png"/>
           <p:cNvPicPr>
             <a:picLocks noChangeAspect="1"/>
           </p:cNvPicPr>
@@ -14635,7 +14635,7 @@
         <p:spPr>
           <a:xfrm>
             <a:off x="2568615" y="2182367"/>
-            <a:ext cx="1261872" cy="271272"/>
+            <a:ext cx="1283208" cy="271272"/>
           </a:xfrm>
           <a:prstGeom prst="rect">
             <a:avLst/>
@@ -14650,7 +14650,7 @@
         </p:nvSpPr>
         <p:spPr>
           <a:xfrm>
-            <a:off x="3830487" y="2089403"/>
+            <a:off x="3851823" y="2089403"/>
             <a:ext cx="2828489" cy="457200"/>
           </a:xfrm>
           <a:prstGeom prst="rect">
